--- a/指導講評_対話を通して学びをつなげる児童.pptx
+++ b/指導講評_対話を通して学びをつなげる児童.pptx
@@ -3196,7 +3196,7 @@
         <p:spPr>
           <a:xfrm>
             <a:off x="360000" y="827999"/>
-            <a:ext cx="11473200" cy="468000"/>
+            <a:ext cx="11473200" cy="432000"/>
           </a:xfrm>
           <a:prstGeom prst="rect">
             <a:avLst/>
@@ -3207,14 +3207,14 @@
           </a:ln>
         </p:spPr>
         <p:txBody>
-          <a:bodyPr wrap="square" lIns="72000" rIns="72000" tIns="36000" bIns="36000" anchor="t">
+          <a:bodyPr wrap="square" lIns="54000" rIns="54000" tIns="18000" bIns="18000" anchor="ctr">
             <a:spAutoFit/>
           </a:bodyPr>
           <a:lstStyle/>
           <a:p>
             <a:pPr algn="ctr"/>
             <a:r>
-              <a:rPr sz="2400" b="1">
+              <a:rPr sz="2200" b="1">
                 <a:solidFill>
                   <a:srgbClr val="1A1A1A"/>
                 </a:solidFill>
@@ -3234,7 +3234,7 @@
         </p:nvSpPr>
         <p:spPr>
           <a:xfrm>
-            <a:off x="360000" y="1368000"/>
+            <a:off x="360000" y="1332000"/>
             <a:ext cx="11473200" cy="360000"/>
           </a:xfrm>
           <a:prstGeom prst="rect">
@@ -3246,14 +3246,14 @@
           </a:ln>
         </p:spPr>
         <p:txBody>
-          <a:bodyPr wrap="square" lIns="72000" rIns="72000" tIns="36000" bIns="36000" anchor="t">
+          <a:bodyPr wrap="square" lIns="54000" rIns="54000" tIns="18000" bIns="18000" anchor="ctr">
             <a:spAutoFit/>
           </a:bodyPr>
           <a:lstStyle/>
           <a:p>
             <a:pPr algn="ctr"/>
             <a:r>
-              <a:rPr sz="2000" b="1">
+              <a:rPr sz="1800" b="1">
                 <a:solidFill>
                   <a:srgbClr val="1A1A1A"/>
                 </a:solidFill>
@@ -3273,7 +3273,7 @@
         </p:nvSpPr>
         <p:spPr>
           <a:xfrm>
-            <a:off x="720000" y="2160000"/>
+            <a:off x="720000" y="2088000"/>
             <a:ext cx="10753200" cy="54000"/>
           </a:xfrm>
           <a:prstGeom prst="rect">
@@ -3317,8 +3317,8 @@
         </p:nvSpPr>
         <p:spPr>
           <a:xfrm>
-            <a:off x="360000" y="2340000"/>
-            <a:ext cx="11473200" cy="720000"/>
+            <a:off x="360000" y="2268000"/>
+            <a:ext cx="11473200" cy="540000"/>
           </a:xfrm>
           <a:prstGeom prst="rect">
             <a:avLst/>
@@ -3329,14 +3329,14 @@
           </a:ln>
         </p:spPr>
         <p:txBody>
-          <a:bodyPr wrap="square" lIns="72000" rIns="72000" tIns="36000" bIns="36000" anchor="t">
+          <a:bodyPr wrap="square" lIns="54000" rIns="54000" tIns="18000" bIns="18000" anchor="ctr">
             <a:spAutoFit/>
           </a:bodyPr>
           <a:lstStyle/>
           <a:p>
             <a:pPr algn="ctr"/>
             <a:r>
-              <a:rPr sz="3200" b="1">
+              <a:rPr sz="2800" b="1">
                 <a:solidFill>
                   <a:srgbClr val="002060"/>
                 </a:solidFill>
@@ -3356,8 +3356,8 @@
         </p:nvSpPr>
         <p:spPr>
           <a:xfrm>
-            <a:off x="360000" y="3240000"/>
-            <a:ext cx="11473200" cy="1440000"/>
+            <a:off x="360000" y="3060000"/>
+            <a:ext cx="11473200" cy="1800000"/>
           </a:xfrm>
           <a:prstGeom prst="rect">
             <a:avLst/>
@@ -3368,14 +3368,14 @@
           </a:ln>
         </p:spPr>
         <p:txBody>
-          <a:bodyPr wrap="square" lIns="72000" rIns="72000" tIns="36000" bIns="36000" anchor="t">
+          <a:bodyPr wrap="square" lIns="54000" rIns="54000" tIns="18000" bIns="18000" anchor="ctr">
             <a:spAutoFit/>
           </a:bodyPr>
           <a:lstStyle/>
           <a:p>
             <a:pPr algn="ctr"/>
             <a:r>
-              <a:rPr sz="6000" b="1">
+              <a:rPr sz="5200" b="1">
                 <a:solidFill>
                   <a:srgbClr val="1A1A1A"/>
                 </a:solidFill>
@@ -3388,7 +3388,7 @@
           <a:p>
             <a:pPr algn="ctr"/>
             <a:r>
-              <a:rPr sz="6000" b="1">
+              <a:rPr sz="5200" b="1">
                 <a:solidFill>
                   <a:srgbClr val="1A1A1A"/>
                 </a:solidFill>
@@ -3464,14 +3464,14 @@
           </a:ln>
         </p:spPr>
         <p:txBody>
-          <a:bodyPr wrap="square" lIns="72000" rIns="72000" tIns="36000" bIns="36000" anchor="t">
+          <a:bodyPr wrap="square" lIns="54000" rIns="54000" tIns="18000" bIns="18000" anchor="ctr">
             <a:spAutoFit/>
           </a:bodyPr>
           <a:lstStyle/>
           <a:p>
             <a:pPr algn="ctr"/>
             <a:r>
-              <a:rPr sz="1800" b="1">
+              <a:rPr sz="1600" b="1">
                 <a:solidFill>
                   <a:srgbClr val="1A1A1A"/>
                 </a:solidFill>
@@ -3510,7 +3510,7 @@
         <p:spPr>
           <a:xfrm>
             <a:off x="288000" y="144000"/>
-            <a:ext cx="9000000" cy="792000"/>
+            <a:ext cx="8280000" cy="648000"/>
           </a:xfrm>
           <a:prstGeom prst="rect">
             <a:avLst/>
@@ -3521,14 +3521,14 @@
           </a:ln>
         </p:spPr>
         <p:txBody>
-          <a:bodyPr wrap="square" lIns="72000" rIns="72000" tIns="36000" bIns="36000" anchor="ctr">
+          <a:bodyPr wrap="square" lIns="54000" rIns="54000" tIns="18000" bIns="18000" anchor="ctr">
             <a:spAutoFit/>
           </a:bodyPr>
           <a:lstStyle/>
           <a:p>
             <a:pPr algn="l"/>
             <a:r>
-              <a:rPr sz="4000" b="1">
+              <a:rPr sz="3200" b="1">
                 <a:solidFill>
                   <a:srgbClr val="1A1A1A"/>
                 </a:solidFill>
@@ -3548,8 +3548,8 @@
         </p:nvSpPr>
         <p:spPr>
           <a:xfrm>
-            <a:off x="288000" y="900000"/>
-            <a:ext cx="11617200" cy="64800"/>
+            <a:off x="288000" y="827999"/>
+            <a:ext cx="11617200" cy="54000"/>
           </a:xfrm>
           <a:prstGeom prst="rect">
             <a:avLst/>
@@ -3592,8 +3592,8 @@
         </p:nvSpPr>
         <p:spPr>
           <a:xfrm>
-            <a:off x="7513200" y="144000"/>
-            <a:ext cx="4320000" cy="432000"/>
+            <a:off x="7513200" y="216000"/>
+            <a:ext cx="4320000" cy="503999"/>
           </a:xfrm>
           <a:prstGeom prst="rect">
             <a:avLst/>
@@ -3604,14 +3604,14 @@
           </a:ln>
         </p:spPr>
         <p:txBody>
-          <a:bodyPr wrap="square" lIns="72000" rIns="72000" tIns="36000" bIns="36000" anchor="ctr">
+          <a:bodyPr wrap="square" lIns="54000" rIns="54000" tIns="18000" bIns="18000" anchor="ctr">
             <a:spAutoFit/>
           </a:bodyPr>
           <a:lstStyle/>
           <a:p>
             <a:pPr algn="r"/>
             <a:r>
-              <a:rPr sz="1200" b="1">
+              <a:rPr sz="1100" b="1">
                 <a:solidFill>
                   <a:srgbClr val="666666"/>
                 </a:solidFill>
@@ -3631,7 +3631,7 @@
         </p:nvSpPr>
         <p:spPr>
           <a:xfrm>
-            <a:off x="540000" y="1224000"/>
+            <a:off x="540000" y="1152000"/>
             <a:ext cx="5580000" cy="468000"/>
           </a:xfrm>
           <a:prstGeom prst="rect">
@@ -3675,7 +3675,7 @@
         </p:nvSpPr>
         <p:spPr>
           <a:xfrm>
-            <a:off x="540000" y="1224000"/>
+            <a:off x="540000" y="1152000"/>
             <a:ext cx="5580000" cy="468000"/>
           </a:xfrm>
           <a:prstGeom prst="rect">
@@ -3687,14 +3687,14 @@
           </a:ln>
         </p:spPr>
         <p:txBody>
-          <a:bodyPr wrap="square" lIns="72000" rIns="72000" tIns="36000" bIns="36000" anchor="ctr">
+          <a:bodyPr wrap="square" lIns="54000" rIns="54000" tIns="18000" bIns="18000" anchor="ctr">
             <a:spAutoFit/>
           </a:bodyPr>
           <a:lstStyle/>
           <a:p>
             <a:pPr algn="ctr"/>
             <a:r>
-              <a:rPr sz="2000" b="1">
+              <a:rPr sz="1800" b="1">
                 <a:solidFill>
                   <a:srgbClr val="FFFFFF"/>
                 </a:solidFill>
@@ -3714,8 +3714,8 @@
         </p:nvSpPr>
         <p:spPr>
           <a:xfrm>
-            <a:off x="540000" y="1692000"/>
-            <a:ext cx="5580000" cy="4428000"/>
+            <a:off x="540000" y="1620000"/>
+            <a:ext cx="5580000" cy="4572000"/>
           </a:xfrm>
           <a:prstGeom prst="rect">
             <a:avLst/>
@@ -3772,28 +3772,28 @@
           </a:ln>
         </p:spPr>
         <p:txBody>
-          <a:bodyPr wrap="square" lIns="72000" rIns="72000" tIns="36000" bIns="36000" anchor="t">
+          <a:bodyPr wrap="square" lIns="54000" rIns="54000" tIns="18000" bIns="18000" anchor="t">
             <a:spAutoFit/>
           </a:bodyPr>
           <a:lstStyle/>
           <a:p>
             <a:pPr algn="l">
               <a:lnSpc>
-                <a:spcPct val="130000"/>
+                <a:spcPct val="135000"/>
               </a:lnSpc>
             </a:pPr>
             <a:r>
-              <a:rPr sz="2000" b="1">
+              <a:rPr sz="1700" b="1">
                 <a:solidFill>
                   <a:srgbClr val="002060"/>
                 </a:solidFill>
                 <a:latin typeface="メイリオ"/>
                 <a:ea typeface="メイリオ"/>
               </a:rPr>
-              <a:t>● </a:t>
-            </a:r>
-            <a:r>
-              <a:rPr sz="2000" b="1">
+              <a:t>●  </a:t>
+            </a:r>
+            <a:r>
+              <a:rPr sz="1700" b="1">
                 <a:solidFill>
                   <a:srgbClr val="FF0000"/>
                 </a:solidFill>
@@ -3801,138 +3801,145 @@
                 <a:ea typeface="メイリオ"/>
               </a:rPr>
               <a:t>主体的に学び、考え、行動する力</a:t>
-            </a:r>
-            <a:r>
-              <a:rPr sz="1800" b="0">
-                <a:solidFill>
-                  <a:srgbClr val="1A1A1A"/>
-                </a:solidFill>
-                <a:latin typeface="メイリオ"/>
-                <a:ea typeface="メイリオ"/>
-              </a:rPr>
-              <a:t>の育成</a:t>
             </a:r>
           </a:p>
           <a:p>
             <a:pPr algn="l">
               <a:lnSpc>
-                <a:spcPct val="130000"/>
+                <a:spcPct val="135000"/>
               </a:lnSpc>
             </a:pPr>
+            <a:r>
+              <a:rPr sz="1500" b="0">
+                <a:solidFill>
+                  <a:srgbClr val="1A1A1A"/>
+                </a:solidFill>
+                <a:latin typeface="メイリオ"/>
+                <a:ea typeface="メイリオ"/>
+              </a:rPr>
+              <a:t>     の育成</a:t>
+            </a:r>
           </a:p>
           <a:p>
             <a:pPr algn="l">
               <a:lnSpc>
-                <a:spcPct val="130000"/>
+                <a:spcPct val="135000"/>
               </a:lnSpc>
             </a:pPr>
-            <a:r>
-              <a:rPr sz="2000" b="1">
-                <a:solidFill>
-                  <a:srgbClr val="002060"/>
-                </a:solidFill>
-                <a:latin typeface="メイリオ"/>
-                <a:ea typeface="メイリオ"/>
-              </a:rPr>
-              <a:t>● 「</a:t>
-            </a:r>
-            <a:r>
-              <a:rPr sz="2000" b="1">
-                <a:solidFill>
-                  <a:srgbClr val="FF0000"/>
-                </a:solidFill>
-                <a:latin typeface="メイリオ"/>
-                <a:ea typeface="メイリオ"/>
-              </a:rPr>
-              <a:t>話す・聞く・読む・書く</a:t>
-            </a:r>
-            <a:r>
-              <a:rPr sz="1800" b="0">
-                <a:solidFill>
-                  <a:srgbClr val="1A1A1A"/>
-                </a:solidFill>
-                <a:latin typeface="メイリオ"/>
-                <a:ea typeface="メイリオ"/>
-              </a:rPr>
-              <a:t>」言語能力を</a:t>
-            </a:r>
           </a:p>
           <a:p>
             <a:pPr algn="l">
               <a:lnSpc>
-                <a:spcPct val="130000"/>
+                <a:spcPct val="135000"/>
               </a:lnSpc>
             </a:pPr>
             <a:r>
-              <a:rPr sz="1800" b="0">
+              <a:rPr sz="1700" b="1">
+                <a:solidFill>
+                  <a:srgbClr val="002060"/>
+                </a:solidFill>
+                <a:latin typeface="メイリオ"/>
+                <a:ea typeface="メイリオ"/>
+              </a:rPr>
+              <a:t>●  「</a:t>
+            </a:r>
+            <a:r>
+              <a:rPr sz="1700" b="1">
+                <a:solidFill>
+                  <a:srgbClr val="FF0000"/>
+                </a:solidFill>
+                <a:latin typeface="メイリオ"/>
+                <a:ea typeface="メイリオ"/>
+              </a:rPr>
+              <a:t>話す・聞く・読む・書く</a:t>
+            </a:r>
+            <a:r>
+              <a:rPr sz="1500" b="0">
                 <a:solidFill>
                   <a:srgbClr val="1A1A1A"/>
                 </a:solidFill>
                 <a:latin typeface="メイリオ"/>
                 <a:ea typeface="メイリオ"/>
               </a:rPr>
-              <a:t>    全教育活動で計画的に育成</a:t>
+              <a:t>」言語能力を</a:t>
             </a:r>
           </a:p>
           <a:p>
             <a:pPr algn="l">
               <a:lnSpc>
-                <a:spcPct val="130000"/>
+                <a:spcPct val="135000"/>
               </a:lnSpc>
             </a:pPr>
+            <a:r>
+              <a:rPr sz="1500" b="0">
+                <a:solidFill>
+                  <a:srgbClr val="1A1A1A"/>
+                </a:solidFill>
+                <a:latin typeface="メイリオ"/>
+                <a:ea typeface="メイリオ"/>
+              </a:rPr>
+              <a:t>     全教育活動で計画的に育成</a:t>
+            </a:r>
           </a:p>
           <a:p>
             <a:pPr algn="l">
               <a:lnSpc>
-                <a:spcPct val="130000"/>
+                <a:spcPct val="135000"/>
               </a:lnSpc>
             </a:pPr>
-            <a:r>
-              <a:rPr sz="2000" b="1">
-                <a:solidFill>
-                  <a:srgbClr val="002060"/>
-                </a:solidFill>
-                <a:latin typeface="メイリオ"/>
-                <a:ea typeface="メイリオ"/>
-              </a:rPr>
-              <a:t>● </a:t>
-            </a:r>
-            <a:r>
-              <a:rPr sz="2000" b="1">
-                <a:solidFill>
-                  <a:srgbClr val="FF0000"/>
-                </a:solidFill>
-                <a:latin typeface="メイリオ"/>
-                <a:ea typeface="メイリオ"/>
-              </a:rPr>
-              <a:t>思考力・判断力・表現力等</a:t>
-            </a:r>
-            <a:r>
-              <a:rPr sz="1800" b="0">
-                <a:solidFill>
-                  <a:srgbClr val="1A1A1A"/>
-                </a:solidFill>
-                <a:latin typeface="メイリオ"/>
-                <a:ea typeface="メイリオ"/>
-              </a:rPr>
-              <a:t>の基盤として</a:t>
-            </a:r>
           </a:p>
           <a:p>
             <a:pPr algn="l">
               <a:lnSpc>
-                <a:spcPct val="130000"/>
+                <a:spcPct val="135000"/>
               </a:lnSpc>
             </a:pPr>
             <a:r>
-              <a:rPr sz="1800" b="0">
+              <a:rPr sz="1700" b="1">
+                <a:solidFill>
+                  <a:srgbClr val="002060"/>
+                </a:solidFill>
+                <a:latin typeface="メイリオ"/>
+                <a:ea typeface="メイリオ"/>
+              </a:rPr>
+              <a:t>●  </a:t>
+            </a:r>
+            <a:r>
+              <a:rPr sz="1700" b="1">
+                <a:solidFill>
+                  <a:srgbClr val="FF0000"/>
+                </a:solidFill>
+                <a:latin typeface="メイリオ"/>
+                <a:ea typeface="メイリオ"/>
+              </a:rPr>
+              <a:t>思考力・判断力・表現力等</a:t>
+            </a:r>
+            <a:r>
+              <a:rPr sz="1500" b="0">
                 <a:solidFill>
                   <a:srgbClr val="1A1A1A"/>
                 </a:solidFill>
                 <a:latin typeface="メイリオ"/>
                 <a:ea typeface="メイリオ"/>
               </a:rPr>
-              <a:t>    言語能力を位置づける</a:t>
+              <a:t>の基盤として</a:t>
+            </a:r>
+          </a:p>
+          <a:p>
+            <a:pPr algn="l">
+              <a:lnSpc>
+                <a:spcPct val="135000"/>
+              </a:lnSpc>
+            </a:pPr>
+            <a:r>
+              <a:rPr sz="1500" b="0">
+                <a:solidFill>
+                  <a:srgbClr val="1A1A1A"/>
+                </a:solidFill>
+                <a:latin typeface="メイリオ"/>
+                <a:ea typeface="メイリオ"/>
+              </a:rPr>
+              <a:t>     言語能力を位置づける</a:t>
             </a:r>
           </a:p>
         </p:txBody>
@@ -3945,7 +3952,7 @@
         </p:nvSpPr>
         <p:spPr>
           <a:xfrm>
-            <a:off x="6300000" y="1224000"/>
+            <a:off x="6300000" y="1152000"/>
             <a:ext cx="5353200" cy="468000"/>
           </a:xfrm>
           <a:prstGeom prst="rect">
@@ -3989,7 +3996,7 @@
         </p:nvSpPr>
         <p:spPr>
           <a:xfrm>
-            <a:off x="6300000" y="1224000"/>
+            <a:off x="6300000" y="1152000"/>
             <a:ext cx="5353200" cy="468000"/>
           </a:xfrm>
           <a:prstGeom prst="rect">
@@ -4001,14 +4008,14 @@
           </a:ln>
         </p:spPr>
         <p:txBody>
-          <a:bodyPr wrap="square" lIns="72000" rIns="72000" tIns="36000" bIns="36000" anchor="ctr">
+          <a:bodyPr wrap="square" lIns="54000" rIns="54000" tIns="18000" bIns="18000" anchor="ctr">
             <a:spAutoFit/>
           </a:bodyPr>
           <a:lstStyle/>
           <a:p>
             <a:pPr algn="ctr"/>
             <a:r>
-              <a:rPr sz="1800" b="1">
+              <a:rPr sz="1600" b="1">
                 <a:solidFill>
                   <a:srgbClr val="FFFFFF"/>
                 </a:solidFill>
@@ -4028,8 +4035,8 @@
         </p:nvSpPr>
         <p:spPr>
           <a:xfrm>
-            <a:off x="6300000" y="1692000"/>
-            <a:ext cx="5353200" cy="4428000"/>
+            <a:off x="6300000" y="1620000"/>
+            <a:ext cx="5353200" cy="4572000"/>
           </a:xfrm>
           <a:prstGeom prst="rect">
             <a:avLst/>
@@ -4086,7 +4093,7 @@
           </a:ln>
         </p:spPr>
         <p:txBody>
-          <a:bodyPr wrap="square" lIns="72000" rIns="72000" tIns="36000" bIns="36000" anchor="t">
+          <a:bodyPr wrap="square" lIns="54000" rIns="54000" tIns="18000" bIns="18000" anchor="t">
             <a:spAutoFit/>
           </a:bodyPr>
           <a:lstStyle/>
@@ -4097,7 +4104,7 @@
               </a:lnSpc>
             </a:pPr>
             <a:r>
-              <a:rPr sz="1600" b="0">
+              <a:rPr sz="1400" b="0">
                 <a:solidFill>
                   <a:srgbClr val="1A1A1A"/>
                 </a:solidFill>
@@ -4121,7 +4128,7 @@
               </a:lnSpc>
             </a:pPr>
             <a:r>
-              <a:rPr sz="1800" b="1">
+              <a:rPr sz="1600" b="1">
                 <a:solidFill>
                   <a:srgbClr val="FF0000"/>
                 </a:solidFill>
@@ -4138,7 +4145,7 @@
               </a:lnSpc>
             </a:pPr>
             <a:r>
-              <a:rPr sz="1800" b="1">
+              <a:rPr sz="1600" b="1">
                 <a:solidFill>
                   <a:srgbClr val="FF0000"/>
                 </a:solidFill>
@@ -4162,14 +4169,14 @@
               </a:lnSpc>
             </a:pPr>
             <a:r>
-              <a:rPr sz="1600" b="0">
+              <a:rPr sz="1400" b="0">
                 <a:solidFill>
                   <a:srgbClr val="1A1A1A"/>
                 </a:solidFill>
                 <a:latin typeface="メイリオ"/>
                 <a:ea typeface="メイリオ"/>
               </a:rPr>
-              <a:t>は、都の言語能力育成の</a:t>
+              <a:t>は、都の言語能力</a:t>
             </a:r>
           </a:p>
           <a:p>
@@ -4179,34 +4186,14 @@
               </a:lnSpc>
             </a:pPr>
             <a:r>
-              <a:rPr sz="1600" b="0">
+              <a:rPr sz="1400" b="0">
                 <a:solidFill>
                   <a:srgbClr val="1A1A1A"/>
                 </a:solidFill>
                 <a:latin typeface="メイリオ"/>
                 <a:ea typeface="メイリオ"/>
               </a:rPr>
-              <a:t>方向と</a:t>
-            </a:r>
-            <a:r>
-              <a:rPr sz="1800" b="1">
-                <a:solidFill>
-                  <a:srgbClr val="FF0000"/>
-                </a:solidFill>
-                <a:latin typeface="メイリオ"/>
-                <a:ea typeface="メイリオ"/>
-              </a:rPr>
-              <a:t>完全に一致</a:t>
-            </a:r>
-            <a:r>
-              <a:rPr sz="1600" b="0">
-                <a:solidFill>
-                  <a:srgbClr val="1A1A1A"/>
-                </a:solidFill>
-                <a:latin typeface="メイリオ"/>
-                <a:ea typeface="メイリオ"/>
-              </a:rPr>
-              <a:t>。</a:t>
+              <a:t>育成の方向と</a:t>
             </a:r>
           </a:p>
           <a:p>
@@ -4215,6 +4202,26 @@
                 <a:spcPct val="130000"/>
               </a:lnSpc>
             </a:pPr>
+            <a:r>
+              <a:rPr sz="1600" b="1">
+                <a:solidFill>
+                  <a:srgbClr val="FF0000"/>
+                </a:solidFill>
+                <a:latin typeface="メイリオ"/>
+                <a:ea typeface="メイリオ"/>
+              </a:rPr>
+              <a:t>完全に一致</a:t>
+            </a:r>
+            <a:r>
+              <a:rPr sz="1400" b="0">
+                <a:solidFill>
+                  <a:srgbClr val="1A1A1A"/>
+                </a:solidFill>
+                <a:latin typeface="メイリオ"/>
+                <a:ea typeface="メイリオ"/>
+              </a:rPr>
+              <a:t>。</a:t>
+            </a:r>
           </a:p>
           <a:p>
             <a:pPr algn="l">
@@ -4222,16 +4229,6 @@
                 <a:spcPct val="130000"/>
               </a:lnSpc>
             </a:pPr>
-            <a:r>
-              <a:rPr sz="1600" b="0">
-                <a:solidFill>
-                  <a:srgbClr val="1A1A1A"/>
-                </a:solidFill>
-                <a:latin typeface="メイリオ"/>
-                <a:ea typeface="メイリオ"/>
-              </a:rPr>
-              <a:t>校内研究は、</a:t>
-            </a:r>
           </a:p>
           <a:p>
             <a:pPr algn="l">
@@ -4240,14 +4237,48 @@
               </a:lnSpc>
             </a:pPr>
             <a:r>
-              <a:rPr sz="1800" b="1">
+              <a:rPr sz="1400" b="0">
+                <a:solidFill>
+                  <a:srgbClr val="1A1A1A"/>
+                </a:solidFill>
+                <a:latin typeface="メイリオ"/>
+                <a:ea typeface="メイリオ"/>
+              </a:rPr>
+              <a:t>校内研究は、</a:t>
+            </a:r>
+          </a:p>
+          <a:p>
+            <a:pPr algn="l">
+              <a:lnSpc>
+                <a:spcPct val="130000"/>
+              </a:lnSpc>
+            </a:pPr>
+            <a:r>
+              <a:rPr sz="1600" b="1">
                 <a:solidFill>
                   <a:srgbClr val="002060"/>
                 </a:solidFill>
                 <a:latin typeface="メイリオ"/>
                 <a:ea typeface="メイリオ"/>
               </a:rPr>
-              <a:t>都の施策推進そのもの。</a:t>
+              <a:t>都の施策推進</a:t>
+            </a:r>
+          </a:p>
+          <a:p>
+            <a:pPr algn="l">
+              <a:lnSpc>
+                <a:spcPct val="130000"/>
+              </a:lnSpc>
+            </a:pPr>
+            <a:r>
+              <a:rPr sz="1600" b="1">
+                <a:solidFill>
+                  <a:srgbClr val="002060"/>
+                </a:solidFill>
+                <a:latin typeface="メイリオ"/>
+                <a:ea typeface="メイリオ"/>
+              </a:rPr>
+              <a:t>そのもの。</a:t>
             </a:r>
           </a:p>
         </p:txBody>
@@ -4272,14 +4303,14 @@
           </a:ln>
         </p:spPr>
         <p:txBody>
-          <a:bodyPr wrap="square" lIns="72000" rIns="72000" tIns="36000" bIns="36000" anchor="t">
+          <a:bodyPr wrap="square" lIns="54000" rIns="54000" tIns="18000" bIns="18000" anchor="t">
             <a:spAutoFit/>
           </a:bodyPr>
           <a:lstStyle/>
           <a:p>
             <a:pPr algn="l"/>
             <a:r>
-              <a:rPr sz="1000" b="0">
+              <a:rPr sz="900" b="0">
                 <a:solidFill>
                   <a:srgbClr val="666666"/>
                 </a:solidFill>
@@ -4311,14 +4342,14 @@
           </a:ln>
         </p:spPr>
         <p:txBody>
-          <a:bodyPr wrap="square" lIns="72000" rIns="72000" tIns="36000" bIns="36000" anchor="t">
+          <a:bodyPr wrap="square" lIns="54000" rIns="54000" tIns="18000" bIns="18000" anchor="t">
             <a:spAutoFit/>
           </a:bodyPr>
           <a:lstStyle/>
           <a:p>
             <a:pPr algn="r"/>
             <a:r>
-              <a:rPr sz="1000" b="0">
+              <a:rPr sz="900" b="0">
                 <a:solidFill>
                   <a:srgbClr val="666666"/>
                 </a:solidFill>
@@ -4357,7 +4388,7 @@
         <p:spPr>
           <a:xfrm>
             <a:off x="288000" y="144000"/>
-            <a:ext cx="9000000" cy="792000"/>
+            <a:ext cx="8280000" cy="648000"/>
           </a:xfrm>
           <a:prstGeom prst="rect">
             <a:avLst/>
@@ -4368,14 +4399,14 @@
           </a:ln>
         </p:spPr>
         <p:txBody>
-          <a:bodyPr wrap="square" lIns="72000" rIns="72000" tIns="36000" bIns="36000" anchor="ctr">
+          <a:bodyPr wrap="square" lIns="54000" rIns="54000" tIns="18000" bIns="18000" anchor="ctr">
             <a:spAutoFit/>
           </a:bodyPr>
           <a:lstStyle/>
           <a:p>
             <a:pPr algn="l"/>
             <a:r>
-              <a:rPr sz="4000" b="1">
+              <a:rPr sz="3200" b="1">
                 <a:solidFill>
                   <a:srgbClr val="1A1A1A"/>
                 </a:solidFill>
@@ -4395,8 +4426,8 @@
         </p:nvSpPr>
         <p:spPr>
           <a:xfrm>
-            <a:off x="288000" y="900000"/>
-            <a:ext cx="11617200" cy="64800"/>
+            <a:off x="288000" y="827999"/>
+            <a:ext cx="11617200" cy="54000"/>
           </a:xfrm>
           <a:prstGeom prst="rect">
             <a:avLst/>
@@ -4439,7 +4470,7 @@
         </p:nvSpPr>
         <p:spPr>
           <a:xfrm>
-            <a:off x="540000" y="1224000"/>
+            <a:off x="540000" y="1152000"/>
             <a:ext cx="11113200" cy="792000"/>
           </a:xfrm>
           <a:prstGeom prst="rect">
@@ -4485,7 +4516,7 @@
         </p:nvSpPr>
         <p:spPr>
           <a:xfrm>
-            <a:off x="720000" y="1296000"/>
+            <a:off x="720000" y="1224000"/>
             <a:ext cx="10753200" cy="648000"/>
           </a:xfrm>
           <a:prstGeom prst="rect">
@@ -4497,44 +4528,44 @@
           </a:ln>
         </p:spPr>
         <p:txBody>
-          <a:bodyPr wrap="square" lIns="72000" rIns="72000" tIns="36000" bIns="36000" anchor="ctr">
+          <a:bodyPr wrap="square" lIns="54000" rIns="54000" tIns="18000" bIns="18000" anchor="ctr">
             <a:spAutoFit/>
           </a:bodyPr>
           <a:lstStyle/>
           <a:p>
             <a:pPr algn="ctr"/>
             <a:r>
+              <a:rPr sz="1800" b="1">
+                <a:solidFill>
+                  <a:srgbClr val="1A1A1A"/>
+                </a:solidFill>
+                <a:latin typeface="メイリオ"/>
+                <a:ea typeface="メイリオ"/>
+              </a:rPr>
+              <a:t>📊  児童の意識調査より：「</a:t>
+            </a:r>
+            <a:r>
               <a:rPr sz="2000" b="1">
                 <a:solidFill>
+                  <a:srgbClr val="FF0000"/>
+                </a:solidFill>
+                <a:latin typeface="メイリオ"/>
+                <a:ea typeface="メイリオ"/>
+              </a:rPr>
+              <a:t>質問を考えながら聞く</a:t>
+            </a:r>
+            <a:r>
+              <a:rPr sz="1800" b="1">
+                <a:solidFill>
                   <a:srgbClr val="1A1A1A"/>
                 </a:solidFill>
                 <a:latin typeface="メイリオ"/>
                 <a:ea typeface="メイリオ"/>
               </a:rPr>
-              <a:t>📊  児童の意識調査より：「</a:t>
-            </a:r>
-            <a:r>
-              <a:rPr sz="2400" b="1">
-                <a:solidFill>
-                  <a:srgbClr val="FF0000"/>
-                </a:solidFill>
-                <a:latin typeface="メイリオ"/>
-                <a:ea typeface="メイリオ"/>
-              </a:rPr>
-              <a:t>質問を考えながら聞く</a:t>
-            </a:r>
-            <a:r>
-              <a:rPr sz="2000" b="1">
-                <a:solidFill>
-                  <a:srgbClr val="1A1A1A"/>
-                </a:solidFill>
-                <a:latin typeface="メイリオ"/>
-                <a:ea typeface="メイリオ"/>
-              </a:rPr>
               <a:t>」と答えた児童は ▶ </a:t>
             </a:r>
             <a:r>
-              <a:rPr sz="3200" b="1">
+              <a:rPr sz="2800" b="1">
                 <a:solidFill>
                   <a:srgbClr val="FF0000"/>
                 </a:solidFill>
@@ -4554,8 +4585,8 @@
         </p:nvSpPr>
         <p:spPr>
           <a:xfrm>
-            <a:off x="540000" y="2160000"/>
-            <a:ext cx="2880000" cy="468000"/>
+            <a:off x="540000" y="2088000"/>
+            <a:ext cx="3600000" cy="432000"/>
           </a:xfrm>
           <a:prstGeom prst="rect">
             <a:avLst/>
@@ -4598,8 +4629,8 @@
         </p:nvSpPr>
         <p:spPr>
           <a:xfrm>
-            <a:off x="540000" y="2160000"/>
-            <a:ext cx="2880000" cy="468000"/>
+            <a:off x="540000" y="2088000"/>
+            <a:ext cx="3600000" cy="432000"/>
           </a:xfrm>
           <a:prstGeom prst="rect">
             <a:avLst/>
@@ -4610,14 +4641,14 @@
           </a:ln>
         </p:spPr>
         <p:txBody>
-          <a:bodyPr wrap="square" lIns="72000" rIns="72000" tIns="36000" bIns="36000" anchor="ctr">
+          <a:bodyPr wrap="square" lIns="54000" rIns="54000" tIns="18000" bIns="18000" anchor="ctr">
             <a:spAutoFit/>
           </a:bodyPr>
           <a:lstStyle/>
           <a:p>
             <a:pPr algn="ctr"/>
             <a:r>
-              <a:rPr sz="1800" b="1">
+              <a:rPr sz="1500" b="1">
                 <a:solidFill>
                   <a:srgbClr val="FFFFFF"/>
                 </a:solidFill>
@@ -4637,8 +4668,8 @@
         </p:nvSpPr>
         <p:spPr>
           <a:xfrm>
-            <a:off x="540000" y="2628000"/>
-            <a:ext cx="11113200" cy="2520000"/>
+            <a:off x="540000" y="2520000"/>
+            <a:ext cx="11113200" cy="2880000"/>
           </a:xfrm>
           <a:prstGeom prst="rect">
             <a:avLst/>
@@ -4683,8 +4714,8 @@
         </p:nvSpPr>
         <p:spPr>
           <a:xfrm>
-            <a:off x="900000" y="2808000"/>
-            <a:ext cx="10393200" cy="1080000"/>
+            <a:off x="900000" y="2700000"/>
+            <a:ext cx="10393200" cy="1260000"/>
           </a:xfrm>
           <a:prstGeom prst="rect">
             <a:avLst/>
@@ -4695,18 +4726,18 @@
           </a:ln>
         </p:spPr>
         <p:txBody>
-          <a:bodyPr wrap="square" lIns="72000" rIns="72000" tIns="36000" bIns="36000" anchor="t">
+          <a:bodyPr wrap="square" lIns="54000" rIns="54000" tIns="18000" bIns="18000" anchor="t">
             <a:spAutoFit/>
           </a:bodyPr>
           <a:lstStyle/>
           <a:p>
             <a:pPr algn="l">
               <a:lnSpc>
-                <a:spcPct val="140000"/>
+                <a:spcPct val="150000"/>
               </a:lnSpc>
             </a:pPr>
             <a:r>
-              <a:rPr sz="2000" b="1">
+              <a:rPr sz="1800" b="1">
                 <a:solidFill>
                   <a:srgbClr val="1A1A1A"/>
                 </a:solidFill>
@@ -4716,7 +4747,7 @@
               <a:t>①  自分の学年・教科で、</a:t>
             </a:r>
             <a:r>
-              <a:rPr sz="2200" b="1">
+              <a:rPr sz="1900" b="1">
                 <a:solidFill>
                   <a:srgbClr val="FF0000"/>
                 </a:solidFill>
@@ -4726,7 +4757,7 @@
               <a:t>「質問の種類」</a:t>
             </a:r>
             <a:r>
-              <a:rPr sz="2000" b="1">
+              <a:rPr sz="1800" b="1">
                 <a:solidFill>
                   <a:srgbClr val="1A1A1A"/>
                 </a:solidFill>
@@ -4739,21 +4770,31 @@
           <a:p>
             <a:pPr algn="l">
               <a:lnSpc>
-                <a:spcPct val="140000"/>
+                <a:spcPct val="150000"/>
               </a:lnSpc>
             </a:pPr>
             <a:r>
-              <a:rPr sz="2200" b="1">
+              <a:rPr sz="1800" b="1">
+                <a:solidFill>
+                  <a:srgbClr val="1A1A1A"/>
+                </a:solidFill>
+                <a:latin typeface="メイリオ"/>
+                <a:ea typeface="メイリオ"/>
+              </a:rPr>
+              <a:t>     </a:t>
+            </a:r>
+            <a:r>
+              <a:rPr sz="1900" b="1">
                 <a:solidFill>
                   <a:srgbClr val="FF0000"/>
                 </a:solidFill>
                 <a:latin typeface="メイリオ"/>
                 <a:ea typeface="メイリオ"/>
               </a:rPr>
-              <a:t>       〝対話の足場〟</a:t>
-            </a:r>
-            <a:r>
-              <a:rPr sz="2000" b="1">
+              <a:t>〝対話の足場〟</a:t>
+            </a:r>
+            <a:r>
+              <a:rPr sz="1800" b="1">
                 <a:solidFill>
                   <a:srgbClr val="1A1A1A"/>
                 </a:solidFill>
@@ -4773,8 +4814,8 @@
         </p:nvSpPr>
         <p:spPr>
           <a:xfrm>
-            <a:off x="900000" y="3960000"/>
-            <a:ext cx="10393200" cy="1080000"/>
+            <a:off x="900000" y="4068000"/>
+            <a:ext cx="10393200" cy="1260000"/>
           </a:xfrm>
           <a:prstGeom prst="rect">
             <a:avLst/>
@@ -4785,18 +4826,18 @@
           </a:ln>
         </p:spPr>
         <p:txBody>
-          <a:bodyPr wrap="square" lIns="72000" rIns="72000" tIns="36000" bIns="36000" anchor="t">
+          <a:bodyPr wrap="square" lIns="54000" rIns="54000" tIns="18000" bIns="18000" anchor="t">
             <a:spAutoFit/>
           </a:bodyPr>
           <a:lstStyle/>
           <a:p>
             <a:pPr algn="l">
               <a:lnSpc>
-                <a:spcPct val="140000"/>
+                <a:spcPct val="150000"/>
               </a:lnSpc>
             </a:pPr>
             <a:r>
-              <a:rPr sz="2000" b="1">
+              <a:rPr sz="1800" b="1">
                 <a:solidFill>
                   <a:srgbClr val="1A1A1A"/>
                 </a:solidFill>
@@ -4806,7 +4847,7 @@
               <a:t>②  児童が</a:t>
             </a:r>
             <a:r>
-              <a:rPr sz="2200" b="1">
+              <a:rPr sz="1900" b="1">
                 <a:solidFill>
                   <a:srgbClr val="FF0000"/>
                 </a:solidFill>
@@ -4816,7 +4857,7 @@
               <a:t>〝伝えてよかった・聞けてよかった〟</a:t>
             </a:r>
             <a:r>
-              <a:rPr sz="2000" b="1">
+              <a:rPr sz="1800" b="1">
                 <a:solidFill>
                   <a:srgbClr val="1A1A1A"/>
                 </a:solidFill>
@@ -4829,21 +4870,21 @@
           <a:p>
             <a:pPr algn="l">
               <a:lnSpc>
-                <a:spcPct val="140000"/>
+                <a:spcPct val="150000"/>
               </a:lnSpc>
             </a:pPr>
             <a:r>
-              <a:rPr sz="2000" b="1">
+              <a:rPr sz="1800" b="1">
                 <a:solidFill>
                   <a:srgbClr val="1A1A1A"/>
                 </a:solidFill>
                 <a:latin typeface="メイリオ"/>
                 <a:ea typeface="メイリオ"/>
               </a:rPr>
-              <a:t>       実感する場面を、</a:t>
-            </a:r>
-            <a:r>
-              <a:rPr sz="2200" b="1">
+              <a:t>     実感する場面を、</a:t>
+            </a:r>
+            <a:r>
+              <a:rPr sz="1900" b="1">
                 <a:solidFill>
                   <a:srgbClr val="FF0000"/>
                 </a:solidFill>
@@ -4863,8 +4904,8 @@
         </p:nvSpPr>
         <p:spPr>
           <a:xfrm>
-            <a:off x="2880000" y="5508000"/>
-            <a:ext cx="6433200" cy="720000"/>
+            <a:off x="2880000" y="5652000"/>
+            <a:ext cx="6433200" cy="576000"/>
           </a:xfrm>
           <a:prstGeom prst="rect">
             <a:avLst/>
@@ -4907,8 +4948,8 @@
         </p:nvSpPr>
         <p:spPr>
           <a:xfrm>
-            <a:off x="2880000" y="5508000"/>
-            <a:ext cx="6433200" cy="720000"/>
+            <a:off x="2880000" y="5652000"/>
+            <a:ext cx="6433200" cy="576000"/>
           </a:xfrm>
           <a:prstGeom prst="rect">
             <a:avLst/>
@@ -4919,14 +4960,14 @@
           </a:ln>
         </p:spPr>
         <p:txBody>
-          <a:bodyPr wrap="square" lIns="72000" rIns="72000" tIns="36000" bIns="36000" anchor="ctr">
+          <a:bodyPr wrap="square" lIns="54000" rIns="54000" tIns="18000" bIns="18000" anchor="ctr">
             <a:spAutoFit/>
           </a:bodyPr>
           <a:lstStyle/>
           <a:p>
             <a:pPr algn="ctr"/>
             <a:r>
-              <a:rPr sz="2000" b="1">
+              <a:rPr sz="1800" b="1">
                 <a:solidFill>
                   <a:srgbClr val="FFFFFF"/>
                 </a:solidFill>
@@ -4958,14 +4999,14 @@
           </a:ln>
         </p:spPr>
         <p:txBody>
-          <a:bodyPr wrap="square" lIns="72000" rIns="72000" tIns="36000" bIns="36000" anchor="t">
+          <a:bodyPr wrap="square" lIns="54000" rIns="54000" tIns="18000" bIns="18000" anchor="t">
             <a:spAutoFit/>
           </a:bodyPr>
           <a:lstStyle/>
           <a:p>
             <a:pPr algn="l"/>
             <a:r>
-              <a:rPr sz="1000" b="0">
+              <a:rPr sz="900" b="0">
                 <a:solidFill>
                   <a:srgbClr val="666666"/>
                 </a:solidFill>
@@ -4997,14 +5038,14 @@
           </a:ln>
         </p:spPr>
         <p:txBody>
-          <a:bodyPr wrap="square" lIns="72000" rIns="72000" tIns="36000" bIns="36000" anchor="t">
+          <a:bodyPr wrap="square" lIns="54000" rIns="54000" tIns="18000" bIns="18000" anchor="t">
             <a:spAutoFit/>
           </a:bodyPr>
           <a:lstStyle/>
           <a:p>
             <a:pPr algn="r"/>
             <a:r>
-              <a:rPr sz="1000" b="0">
+              <a:rPr sz="900" b="0">
                 <a:solidFill>
                   <a:srgbClr val="666666"/>
                 </a:solidFill>
@@ -5043,7 +5084,7 @@
         <p:spPr>
           <a:xfrm>
             <a:off x="288000" y="144000"/>
-            <a:ext cx="9000000" cy="792000"/>
+            <a:ext cx="8280000" cy="648000"/>
           </a:xfrm>
           <a:prstGeom prst="rect">
             <a:avLst/>
@@ -5054,14 +5095,14 @@
           </a:ln>
         </p:spPr>
         <p:txBody>
-          <a:bodyPr wrap="square" lIns="72000" rIns="72000" tIns="36000" bIns="36000" anchor="ctr">
+          <a:bodyPr wrap="square" lIns="54000" rIns="54000" tIns="18000" bIns="18000" anchor="ctr">
             <a:spAutoFit/>
           </a:bodyPr>
           <a:lstStyle/>
           <a:p>
             <a:pPr algn="l"/>
             <a:r>
-              <a:rPr sz="4000" b="1">
+              <a:rPr sz="3200" b="1">
                 <a:solidFill>
                   <a:srgbClr val="1A1A1A"/>
                 </a:solidFill>
@@ -5081,8 +5122,8 @@
         </p:nvSpPr>
         <p:spPr>
           <a:xfrm>
-            <a:off x="288000" y="900000"/>
-            <a:ext cx="11617200" cy="64800"/>
+            <a:off x="288000" y="827999"/>
+            <a:ext cx="11617200" cy="54000"/>
           </a:xfrm>
           <a:prstGeom prst="rect">
             <a:avLst/>
@@ -5125,7 +5166,7 @@
         </p:nvSpPr>
         <p:spPr>
           <a:xfrm>
-            <a:off x="552600" y="1260000"/>
+            <a:off x="552600" y="1188000"/>
             <a:ext cx="3600000" cy="2340000"/>
           </a:xfrm>
           <a:prstGeom prst="rect">
@@ -5171,7 +5212,7 @@
         </p:nvSpPr>
         <p:spPr>
           <a:xfrm>
-            <a:off x="552600" y="1260000"/>
+            <a:off x="552600" y="1188000"/>
             <a:ext cx="3600000" cy="540000"/>
           </a:xfrm>
           <a:prstGeom prst="rect">
@@ -5215,7 +5256,7 @@
         </p:nvSpPr>
         <p:spPr>
           <a:xfrm>
-            <a:off x="660600" y="1314000"/>
+            <a:off x="660600" y="1242000"/>
             <a:ext cx="432000" cy="432000"/>
           </a:xfrm>
           <a:prstGeom prst="ellipse">
@@ -5258,7 +5299,7 @@
         </p:nvSpPr>
         <p:spPr>
           <a:xfrm>
-            <a:off x="660600" y="1314000"/>
+            <a:off x="660600" y="1242000"/>
             <a:ext cx="432000" cy="432000"/>
           </a:xfrm>
           <a:prstGeom prst="rect">
@@ -5270,14 +5311,14 @@
           </a:ln>
         </p:spPr>
         <p:txBody>
-          <a:bodyPr wrap="square" lIns="72000" rIns="72000" tIns="36000" bIns="36000" anchor="ctr">
+          <a:bodyPr wrap="square" lIns="54000" rIns="54000" tIns="18000" bIns="18000" anchor="ctr">
             <a:spAutoFit/>
           </a:bodyPr>
           <a:lstStyle/>
           <a:p>
             <a:pPr algn="ctr"/>
             <a:r>
-              <a:rPr sz="2000" b="1">
+              <a:rPr sz="1800" b="1">
                 <a:solidFill>
                   <a:srgbClr val="FFFFFF"/>
                 </a:solidFill>
@@ -5297,7 +5338,7 @@
         </p:nvSpPr>
         <p:spPr>
           <a:xfrm>
-            <a:off x="1164600" y="1260000"/>
+            <a:off x="1164600" y="1188000"/>
             <a:ext cx="2880000" cy="540000"/>
           </a:xfrm>
           <a:prstGeom prst="rect">
@@ -5309,14 +5350,14 @@
           </a:ln>
         </p:spPr>
         <p:txBody>
-          <a:bodyPr wrap="square" lIns="72000" rIns="72000" tIns="36000" bIns="36000" anchor="ctr">
+          <a:bodyPr wrap="square" lIns="54000" rIns="54000" tIns="18000" bIns="18000" anchor="ctr">
             <a:spAutoFit/>
           </a:bodyPr>
           <a:lstStyle/>
           <a:p>
             <a:pPr algn="l"/>
             <a:r>
-              <a:rPr sz="1800" b="1">
+              <a:rPr sz="1600" b="1">
                 <a:solidFill>
                   <a:srgbClr val="FFFFFF"/>
                 </a:solidFill>
@@ -5336,8 +5377,8 @@
         </p:nvSpPr>
         <p:spPr>
           <a:xfrm>
-            <a:off x="732600" y="1980000"/>
-            <a:ext cx="3240000" cy="1512001"/>
+            <a:off x="732600" y="1872000"/>
+            <a:ext cx="3240000" cy="1548000"/>
           </a:xfrm>
           <a:prstGeom prst="rect">
             <a:avLst/>
@@ -5348,7 +5389,7 @@
           </a:ln>
         </p:spPr>
         <p:txBody>
-          <a:bodyPr wrap="square" lIns="72000" rIns="72000" tIns="36000" bIns="36000" anchor="ctr">
+          <a:bodyPr wrap="square" lIns="54000" rIns="54000" tIns="18000" bIns="18000" anchor="ctr">
             <a:spAutoFit/>
           </a:bodyPr>
           <a:lstStyle/>
@@ -5359,7 +5400,7 @@
               </a:lnSpc>
             </a:pPr>
             <a:r>
-              <a:rPr sz="1400" b="0">
+              <a:rPr sz="1300" b="0">
                 <a:solidFill>
                   <a:srgbClr val="1A1A1A"/>
                 </a:solidFill>
@@ -5369,7 +5410,7 @@
               <a:t>児童が</a:t>
             </a:r>
             <a:r>
-              <a:rPr sz="1600" b="1">
+              <a:rPr sz="1500" b="1">
                 <a:solidFill>
                   <a:srgbClr val="FF0000"/>
                 </a:solidFill>
@@ -5386,7 +5427,7 @@
               </a:lnSpc>
             </a:pPr>
             <a:r>
-              <a:rPr sz="1400" b="0">
+              <a:rPr sz="1300" b="0">
                 <a:solidFill>
                   <a:srgbClr val="1A1A1A"/>
                 </a:solidFill>
@@ -5403,7 +5444,7 @@
               </a:lnSpc>
             </a:pPr>
             <a:r>
-              <a:rPr sz="1400" b="0">
+              <a:rPr sz="1300" b="0">
                 <a:solidFill>
                   <a:srgbClr val="1A1A1A"/>
                 </a:solidFill>
@@ -5423,7 +5464,7 @@
         </p:nvSpPr>
         <p:spPr>
           <a:xfrm>
-            <a:off x="4296600" y="1260000"/>
+            <a:off x="4296600" y="1188000"/>
             <a:ext cx="3600000" cy="2340000"/>
           </a:xfrm>
           <a:prstGeom prst="rect">
@@ -5469,7 +5510,7 @@
         </p:nvSpPr>
         <p:spPr>
           <a:xfrm>
-            <a:off x="4296600" y="1260000"/>
+            <a:off x="4296600" y="1188000"/>
             <a:ext cx="3600000" cy="540000"/>
           </a:xfrm>
           <a:prstGeom prst="rect">
@@ -5513,7 +5554,7 @@
         </p:nvSpPr>
         <p:spPr>
           <a:xfrm>
-            <a:off x="4404600" y="1314000"/>
+            <a:off x="4404600" y="1242000"/>
             <a:ext cx="432000" cy="432000"/>
           </a:xfrm>
           <a:prstGeom prst="ellipse">
@@ -5556,7 +5597,7 @@
         </p:nvSpPr>
         <p:spPr>
           <a:xfrm>
-            <a:off x="4404600" y="1314000"/>
+            <a:off x="4404600" y="1242000"/>
             <a:ext cx="432000" cy="432000"/>
           </a:xfrm>
           <a:prstGeom prst="rect">
@@ -5568,14 +5609,14 @@
           </a:ln>
         </p:spPr>
         <p:txBody>
-          <a:bodyPr wrap="square" lIns="72000" rIns="72000" tIns="36000" bIns="36000" anchor="ctr">
+          <a:bodyPr wrap="square" lIns="54000" rIns="54000" tIns="18000" bIns="18000" anchor="ctr">
             <a:spAutoFit/>
           </a:bodyPr>
           <a:lstStyle/>
           <a:p>
             <a:pPr algn="ctr"/>
             <a:r>
-              <a:rPr sz="2000" b="1">
+              <a:rPr sz="1800" b="1">
                 <a:solidFill>
                   <a:srgbClr val="FFFFFF"/>
                 </a:solidFill>
@@ -5595,7 +5636,7 @@
         </p:nvSpPr>
         <p:spPr>
           <a:xfrm>
-            <a:off x="4908600" y="1260000"/>
+            <a:off x="4908600" y="1188000"/>
             <a:ext cx="2880000" cy="540000"/>
           </a:xfrm>
           <a:prstGeom prst="rect">
@@ -5607,14 +5648,14 @@
           </a:ln>
         </p:spPr>
         <p:txBody>
-          <a:bodyPr wrap="square" lIns="72000" rIns="72000" tIns="36000" bIns="36000" anchor="ctr">
+          <a:bodyPr wrap="square" lIns="54000" rIns="54000" tIns="18000" bIns="18000" anchor="ctr">
             <a:spAutoFit/>
           </a:bodyPr>
           <a:lstStyle/>
           <a:p>
             <a:pPr algn="l"/>
             <a:r>
-              <a:rPr sz="1800" b="1">
+              <a:rPr sz="1600" b="1">
                 <a:solidFill>
                   <a:srgbClr val="FFFFFF"/>
                 </a:solidFill>
@@ -5634,8 +5675,8 @@
         </p:nvSpPr>
         <p:spPr>
           <a:xfrm>
-            <a:off x="4476600" y="1980000"/>
-            <a:ext cx="3240000" cy="1512001"/>
+            <a:off x="4476600" y="1872000"/>
+            <a:ext cx="3240000" cy="1548000"/>
           </a:xfrm>
           <a:prstGeom prst="rect">
             <a:avLst/>
@@ -5646,7 +5687,7 @@
           </a:ln>
         </p:spPr>
         <p:txBody>
-          <a:bodyPr wrap="square" lIns="72000" rIns="72000" tIns="36000" bIns="36000" anchor="ctr">
+          <a:bodyPr wrap="square" lIns="54000" rIns="54000" tIns="18000" bIns="18000" anchor="ctr">
             <a:spAutoFit/>
           </a:bodyPr>
           <a:lstStyle/>
@@ -5657,7 +5698,7 @@
               </a:lnSpc>
             </a:pPr>
             <a:r>
-              <a:rPr sz="1600" b="1">
+              <a:rPr sz="1500" b="1">
                 <a:solidFill>
                   <a:srgbClr val="FF0000"/>
                 </a:solidFill>
@@ -5674,24 +5715,14 @@
               </a:lnSpc>
             </a:pPr>
             <a:r>
-              <a:rPr sz="1400" b="0">
+              <a:rPr sz="1300" b="0">
                 <a:solidFill>
                   <a:srgbClr val="1A1A1A"/>
                 </a:solidFill>
                 <a:latin typeface="メイリオ"/>
                 <a:ea typeface="メイリオ"/>
               </a:rPr>
-              <a:t>を</a:t>
-            </a:r>
-            <a:r>
-              <a:rPr sz="1400" b="0">
-                <a:solidFill>
-                  <a:srgbClr val="1A1A1A"/>
-                </a:solidFill>
-                <a:latin typeface="メイリオ"/>
-                <a:ea typeface="メイリオ"/>
-              </a:rPr>
-              <a:t>学校全体の</a:t>
+              <a:t>を学校全体の</a:t>
             </a:r>
           </a:p>
           <a:p>
@@ -5701,7 +5732,7 @@
               </a:lnSpc>
             </a:pPr>
             <a:r>
-              <a:rPr sz="1400" b="0">
+              <a:rPr sz="1300" b="0">
                 <a:solidFill>
                   <a:srgbClr val="1A1A1A"/>
                 </a:solidFill>
@@ -5721,7 +5752,7 @@
         </p:nvSpPr>
         <p:spPr>
           <a:xfrm>
-            <a:off x="8040600" y="1260000"/>
+            <a:off x="8040600" y="1188000"/>
             <a:ext cx="3600000" cy="2340000"/>
           </a:xfrm>
           <a:prstGeom prst="rect">
@@ -5767,7 +5798,7 @@
         </p:nvSpPr>
         <p:spPr>
           <a:xfrm>
-            <a:off x="8040600" y="1260000"/>
+            <a:off x="8040600" y="1188000"/>
             <a:ext cx="3600000" cy="540000"/>
           </a:xfrm>
           <a:prstGeom prst="rect">
@@ -5811,7 +5842,7 @@
         </p:nvSpPr>
         <p:spPr>
           <a:xfrm>
-            <a:off x="8148600" y="1314000"/>
+            <a:off x="8148600" y="1242000"/>
             <a:ext cx="432000" cy="432000"/>
           </a:xfrm>
           <a:prstGeom prst="ellipse">
@@ -5854,7 +5885,7 @@
         </p:nvSpPr>
         <p:spPr>
           <a:xfrm>
-            <a:off x="8148600" y="1314000"/>
+            <a:off x="8148600" y="1242000"/>
             <a:ext cx="432000" cy="432000"/>
           </a:xfrm>
           <a:prstGeom prst="rect">
@@ -5866,14 +5897,14 @@
           </a:ln>
         </p:spPr>
         <p:txBody>
-          <a:bodyPr wrap="square" lIns="72000" rIns="72000" tIns="36000" bIns="36000" anchor="ctr">
+          <a:bodyPr wrap="square" lIns="54000" rIns="54000" tIns="18000" bIns="18000" anchor="ctr">
             <a:spAutoFit/>
           </a:bodyPr>
           <a:lstStyle/>
           <a:p>
             <a:pPr algn="ctr"/>
             <a:r>
-              <a:rPr sz="2000" b="1">
+              <a:rPr sz="1800" b="1">
                 <a:solidFill>
                   <a:srgbClr val="FFFFFF"/>
                 </a:solidFill>
@@ -5893,7 +5924,7 @@
         </p:nvSpPr>
         <p:spPr>
           <a:xfrm>
-            <a:off x="8652600" y="1260000"/>
+            <a:off x="8652600" y="1188000"/>
             <a:ext cx="2880000" cy="540000"/>
           </a:xfrm>
           <a:prstGeom prst="rect">
@@ -5905,14 +5936,14 @@
           </a:ln>
         </p:spPr>
         <p:txBody>
-          <a:bodyPr wrap="square" lIns="72000" rIns="72000" tIns="36000" bIns="36000" anchor="ctr">
+          <a:bodyPr wrap="square" lIns="54000" rIns="54000" tIns="18000" bIns="18000" anchor="ctr">
             <a:spAutoFit/>
           </a:bodyPr>
           <a:lstStyle/>
           <a:p>
             <a:pPr algn="l"/>
             <a:r>
-              <a:rPr sz="1800" b="1">
+              <a:rPr sz="1600" b="1">
                 <a:solidFill>
                   <a:srgbClr val="FFFFFF"/>
                 </a:solidFill>
@@ -5932,8 +5963,8 @@
         </p:nvSpPr>
         <p:spPr>
           <a:xfrm>
-            <a:off x="8220600" y="1980000"/>
-            <a:ext cx="3240000" cy="1512001"/>
+            <a:off x="8220600" y="1872000"/>
+            <a:ext cx="3240000" cy="1548000"/>
           </a:xfrm>
           <a:prstGeom prst="rect">
             <a:avLst/>
@@ -5944,7 +5975,7 @@
           </a:ln>
         </p:spPr>
         <p:txBody>
-          <a:bodyPr wrap="square" lIns="72000" rIns="72000" tIns="36000" bIns="36000" anchor="ctr">
+          <a:bodyPr wrap="square" lIns="54000" rIns="54000" tIns="18000" bIns="18000" anchor="ctr">
             <a:spAutoFit/>
           </a:bodyPr>
           <a:lstStyle/>
@@ -5955,7 +5986,7 @@
               </a:lnSpc>
             </a:pPr>
             <a:r>
-              <a:rPr sz="1600" b="1">
+              <a:rPr sz="1500" b="1">
                 <a:solidFill>
                   <a:srgbClr val="FF0000"/>
                 </a:solidFill>
@@ -5965,7 +5996,7 @@
               <a:t>話型・モデル提示</a:t>
             </a:r>
             <a:r>
-              <a:rPr sz="1400" b="0">
+              <a:rPr sz="1300" b="0">
                 <a:solidFill>
                   <a:srgbClr val="1A1A1A"/>
                 </a:solidFill>
@@ -5982,7 +6013,7 @@
               </a:lnSpc>
             </a:pPr>
             <a:r>
-              <a:rPr sz="1600" b="1">
+              <a:rPr sz="1500" b="1">
                 <a:solidFill>
                   <a:srgbClr val="FF0000"/>
                 </a:solidFill>
@@ -5992,7 +6023,7 @@
               <a:t>〝自信がない児童〟</a:t>
             </a:r>
             <a:r>
-              <a:rPr sz="1400" b="0">
+              <a:rPr sz="1300" b="0">
                 <a:solidFill>
                   <a:srgbClr val="1A1A1A"/>
                 </a:solidFill>
@@ -6009,7 +6040,7 @@
               </a:lnSpc>
             </a:pPr>
             <a:r>
-              <a:rPr sz="1400" b="0">
+              <a:rPr sz="1300" b="0">
                 <a:solidFill>
                   <a:srgbClr val="1A1A1A"/>
                 </a:solidFill>
@@ -6029,7 +6060,7 @@
         </p:nvSpPr>
         <p:spPr>
           <a:xfrm>
-            <a:off x="540000" y="3960000"/>
+            <a:off x="540000" y="3780000"/>
             <a:ext cx="2880000" cy="468000"/>
           </a:xfrm>
           <a:prstGeom prst="rect">
@@ -6073,7 +6104,7 @@
         </p:nvSpPr>
         <p:spPr>
           <a:xfrm>
-            <a:off x="540000" y="3960000"/>
+            <a:off x="540000" y="3780000"/>
             <a:ext cx="2880000" cy="468000"/>
           </a:xfrm>
           <a:prstGeom prst="rect">
@@ -6085,14 +6116,14 @@
           </a:ln>
         </p:spPr>
         <p:txBody>
-          <a:bodyPr wrap="square" lIns="72000" rIns="72000" tIns="36000" bIns="36000" anchor="ctr">
+          <a:bodyPr wrap="square" lIns="54000" rIns="54000" tIns="18000" bIns="18000" anchor="ctr">
             <a:spAutoFit/>
           </a:bodyPr>
           <a:lstStyle/>
           <a:p>
             <a:pPr algn="ctr"/>
             <a:r>
-              <a:rPr sz="1800" b="1">
+              <a:rPr sz="1600" b="1">
                 <a:solidFill>
                   <a:srgbClr val="FFFFFF"/>
                 </a:solidFill>
@@ -6112,8 +6143,8 @@
         </p:nvSpPr>
         <p:spPr>
           <a:xfrm>
-            <a:off x="540000" y="4428000"/>
-            <a:ext cx="11113200" cy="1800000"/>
+            <a:off x="540000" y="4248000"/>
+            <a:ext cx="11113200" cy="1980000"/>
           </a:xfrm>
           <a:prstGeom prst="rect">
             <a:avLst/>
@@ -6158,8 +6189,8 @@
         </p:nvSpPr>
         <p:spPr>
           <a:xfrm>
-            <a:off x="720000" y="4536000"/>
-            <a:ext cx="10753200" cy="1620000"/>
+            <a:off x="720000" y="4356000"/>
+            <a:ext cx="10753200" cy="1800000"/>
           </a:xfrm>
           <a:prstGeom prst="rect">
             <a:avLst/>
@@ -6170,18 +6201,18 @@
           </a:ln>
         </p:spPr>
         <p:txBody>
-          <a:bodyPr wrap="square" lIns="72000" rIns="72000" tIns="36000" bIns="36000" anchor="ctr">
+          <a:bodyPr wrap="square" lIns="54000" rIns="54000" tIns="18000" bIns="18000" anchor="ctr">
             <a:spAutoFit/>
           </a:bodyPr>
           <a:lstStyle/>
           <a:p>
             <a:pPr algn="ctr">
               <a:lnSpc>
-                <a:spcPct val="140000"/>
+                <a:spcPct val="145000"/>
               </a:lnSpc>
             </a:pPr>
             <a:r>
-              <a:rPr sz="2000" b="1">
+              <a:rPr sz="1800" b="1">
                 <a:solidFill>
                   <a:srgbClr val="002060"/>
                 </a:solidFill>
@@ -6191,24 +6222,24 @@
               <a:t>「対話を通して、学びをつなげる児童」</a:t>
             </a:r>
             <a:r>
-              <a:rPr sz="2000" b="1">
+              <a:rPr sz="1800" b="1">
                 <a:solidFill>
                   <a:srgbClr val="1A1A1A"/>
                 </a:solidFill>
                 <a:latin typeface="メイリオ"/>
                 <a:ea typeface="メイリオ"/>
               </a:rPr>
-              <a:t>は、</a:t>
+              <a:t> は、</a:t>
             </a:r>
           </a:p>
           <a:p>
             <a:pPr algn="ctr">
               <a:lnSpc>
-                <a:spcPct val="140000"/>
+                <a:spcPct val="145000"/>
               </a:lnSpc>
             </a:pPr>
             <a:r>
-              <a:rPr sz="2000" b="1">
+              <a:rPr sz="1700" b="1">
                 <a:solidFill>
                   <a:srgbClr val="1A1A1A"/>
                 </a:solidFill>
@@ -6218,7 +6249,7 @@
               <a:t>まず </a:t>
             </a:r>
             <a:r>
-              <a:rPr sz="2200" b="1">
+              <a:rPr sz="1900" b="1">
                 <a:solidFill>
                   <a:srgbClr val="FF0000"/>
                 </a:solidFill>
@@ -6228,31 +6259,31 @@
               <a:t>教師自身が〝対話で学びをつなげる姿〟</a:t>
             </a:r>
             <a:r>
-              <a:rPr sz="2000" b="1">
+              <a:rPr sz="1700" b="1">
                 <a:solidFill>
                   <a:srgbClr val="1A1A1A"/>
                 </a:solidFill>
                 <a:latin typeface="メイリオ"/>
                 <a:ea typeface="メイリオ"/>
               </a:rPr>
-              <a:t>から始まる。</a:t>
+              <a:t> から始まる。</a:t>
             </a:r>
           </a:p>
           <a:p>
             <a:pPr algn="ctr">
               <a:lnSpc>
-                <a:spcPct val="140000"/>
+                <a:spcPct val="145000"/>
               </a:lnSpc>
             </a:pPr>
           </a:p>
           <a:p>
             <a:pPr algn="ctr">
               <a:lnSpc>
-                <a:spcPct val="140000"/>
+                <a:spcPct val="145000"/>
               </a:lnSpc>
             </a:pPr>
             <a:r>
-              <a:rPr sz="1800" b="1">
+              <a:rPr sz="1600" b="1">
                 <a:solidFill>
                   <a:srgbClr val="1A1A1A"/>
                 </a:solidFill>
@@ -6265,22 +6296,22 @@
           <a:p>
             <a:pPr algn="ctr">
               <a:lnSpc>
-                <a:spcPct val="140000"/>
+                <a:spcPct val="145000"/>
               </a:lnSpc>
             </a:pPr>
             <a:r>
+              <a:rPr sz="1600" b="1">
+                <a:solidFill>
+                  <a:srgbClr val="1A1A1A"/>
+                </a:solidFill>
+                <a:latin typeface="メイリオ"/>
+                <a:ea typeface="メイリオ"/>
+              </a:rPr>
+              <a:t>明日の授業で </a:t>
+            </a:r>
+            <a:r>
               <a:rPr sz="1800" b="1">
                 <a:solidFill>
-                  <a:srgbClr val="1A1A1A"/>
-                </a:solidFill>
-                <a:latin typeface="メイリオ"/>
-                <a:ea typeface="メイリオ"/>
-              </a:rPr>
-              <a:t>明日の授業で</a:t>
-            </a:r>
-            <a:r>
-              <a:rPr sz="2000" b="1">
-                <a:solidFill>
                   <a:srgbClr val="FF0000"/>
                 </a:solidFill>
                 <a:latin typeface="メイリオ"/>
@@ -6289,7 +6320,7 @@
               <a:t>子どもたちに返っていきます</a:t>
             </a:r>
             <a:r>
-              <a:rPr sz="1800" b="1">
+              <a:rPr sz="1600" b="1">
                 <a:solidFill>
                   <a:srgbClr val="1A1A1A"/>
                 </a:solidFill>
@@ -6321,14 +6352,14 @@
           </a:ln>
         </p:spPr>
         <p:txBody>
-          <a:bodyPr wrap="square" lIns="72000" rIns="72000" tIns="36000" bIns="36000" anchor="t">
+          <a:bodyPr wrap="square" lIns="54000" rIns="54000" tIns="18000" bIns="18000" anchor="t">
             <a:spAutoFit/>
           </a:bodyPr>
           <a:lstStyle/>
           <a:p>
             <a:pPr algn="l"/>
             <a:r>
-              <a:rPr sz="1000" b="0">
+              <a:rPr sz="900" b="0">
                 <a:solidFill>
                   <a:srgbClr val="666666"/>
                 </a:solidFill>
@@ -6360,14 +6391,14 @@
           </a:ln>
         </p:spPr>
         <p:txBody>
-          <a:bodyPr wrap="square" lIns="72000" rIns="72000" tIns="36000" bIns="36000" anchor="t">
+          <a:bodyPr wrap="square" lIns="54000" rIns="54000" tIns="18000" bIns="18000" anchor="t">
             <a:spAutoFit/>
           </a:bodyPr>
           <a:lstStyle/>
           <a:p>
             <a:pPr algn="r"/>
             <a:r>
-              <a:rPr sz="1000" b="0">
+              <a:rPr sz="900" b="0">
                 <a:solidFill>
                   <a:srgbClr val="666666"/>
                 </a:solidFill>
@@ -6406,7 +6437,7 @@
         <p:spPr>
           <a:xfrm>
             <a:off x="288000" y="144000"/>
-            <a:ext cx="9000000" cy="792000"/>
+            <a:ext cx="8280000" cy="648000"/>
           </a:xfrm>
           <a:prstGeom prst="rect">
             <a:avLst/>
@@ -6417,14 +6448,14 @@
           </a:ln>
         </p:spPr>
         <p:txBody>
-          <a:bodyPr wrap="square" lIns="72000" rIns="72000" tIns="36000" bIns="36000" anchor="ctr">
+          <a:bodyPr wrap="square" lIns="54000" rIns="54000" tIns="18000" bIns="18000" anchor="ctr">
             <a:spAutoFit/>
           </a:bodyPr>
           <a:lstStyle/>
           <a:p>
             <a:pPr algn="l"/>
             <a:r>
-              <a:rPr sz="4000" b="1">
+              <a:rPr sz="3200" b="1">
                 <a:solidFill>
                   <a:srgbClr val="1A1A1A"/>
                 </a:solidFill>
@@ -6444,8 +6475,8 @@
         </p:nvSpPr>
         <p:spPr>
           <a:xfrm>
-            <a:off x="288000" y="900000"/>
-            <a:ext cx="11617200" cy="64800"/>
+            <a:off x="288000" y="827999"/>
+            <a:ext cx="11617200" cy="54000"/>
           </a:xfrm>
           <a:prstGeom prst="rect">
             <a:avLst/>
@@ -6488,7 +6519,7 @@
         </p:nvSpPr>
         <p:spPr>
           <a:xfrm>
-            <a:off x="540000" y="1440000"/>
+            <a:off x="540000" y="1350000"/>
             <a:ext cx="503999" cy="503999"/>
           </a:xfrm>
           <a:prstGeom prst="ellipse">
@@ -6531,7 +6562,7 @@
         </p:nvSpPr>
         <p:spPr>
           <a:xfrm>
-            <a:off x="540000" y="1440000"/>
+            <a:off x="540000" y="1350000"/>
             <a:ext cx="503999" cy="503999"/>
           </a:xfrm>
           <a:prstGeom prst="rect">
@@ -6543,14 +6574,14 @@
           </a:ln>
         </p:spPr>
         <p:txBody>
-          <a:bodyPr wrap="square" lIns="72000" rIns="72000" tIns="36000" bIns="36000" anchor="ctr">
+          <a:bodyPr wrap="square" lIns="54000" rIns="54000" tIns="18000" bIns="18000" anchor="ctr">
             <a:spAutoFit/>
           </a:bodyPr>
           <a:lstStyle/>
           <a:p>
             <a:pPr algn="ctr"/>
             <a:r>
-              <a:rPr sz="1800" b="1">
+              <a:rPr sz="1600" b="1">
                 <a:solidFill>
                   <a:srgbClr val="FFFFFF"/>
                 </a:solidFill>
@@ -6570,8 +6601,8 @@
         </p:nvSpPr>
         <p:spPr>
           <a:xfrm>
-            <a:off x="1188000" y="1368000"/>
-            <a:ext cx="1980000" cy="720000"/>
+            <a:off x="1188000" y="1260000"/>
+            <a:ext cx="2160000" cy="756000"/>
           </a:xfrm>
           <a:prstGeom prst="rect">
             <a:avLst/>
@@ -6582,14 +6613,14 @@
           </a:ln>
         </p:spPr>
         <p:txBody>
-          <a:bodyPr wrap="square" lIns="72000" rIns="72000" tIns="36000" bIns="36000" anchor="ctr">
+          <a:bodyPr wrap="square" lIns="54000" rIns="54000" tIns="18000" bIns="18000" anchor="ctr">
             <a:spAutoFit/>
           </a:bodyPr>
           <a:lstStyle/>
           <a:p>
             <a:pPr algn="l"/>
             <a:r>
-              <a:rPr sz="2000" b="1">
+              <a:rPr sz="1800" b="1">
                 <a:solidFill>
                   <a:srgbClr val="002060"/>
                 </a:solidFill>
@@ -6609,8 +6640,8 @@
         </p:nvSpPr>
         <p:spPr>
           <a:xfrm>
-            <a:off x="3240000" y="1368000"/>
-            <a:ext cx="6120000" cy="720000"/>
+            <a:off x="3420000" y="1260000"/>
+            <a:ext cx="6120000" cy="756000"/>
           </a:xfrm>
           <a:prstGeom prst="rect">
             <a:avLst/>
@@ -6621,14 +6652,14 @@
           </a:ln>
         </p:spPr>
         <p:txBody>
-          <a:bodyPr wrap="square" lIns="72000" rIns="72000" tIns="36000" bIns="36000" anchor="ctr">
+          <a:bodyPr wrap="square" lIns="54000" rIns="54000" tIns="18000" bIns="18000" anchor="ctr">
             <a:spAutoFit/>
           </a:bodyPr>
           <a:lstStyle/>
           <a:p>
             <a:pPr algn="l"/>
             <a:r>
-              <a:rPr sz="2200" b="1">
+              <a:rPr sz="2000" b="1">
                 <a:solidFill>
                   <a:srgbClr val="1A1A1A"/>
                 </a:solidFill>
@@ -6648,8 +6679,8 @@
         </p:nvSpPr>
         <p:spPr>
           <a:xfrm>
-            <a:off x="10033200" y="1368000"/>
-            <a:ext cx="1620000" cy="720000"/>
+            <a:off x="10033200" y="1260000"/>
+            <a:ext cx="1620000" cy="756000"/>
           </a:xfrm>
           <a:prstGeom prst="rect">
             <a:avLst/>
@@ -6660,14 +6691,14 @@
           </a:ln>
         </p:spPr>
         <p:txBody>
-          <a:bodyPr wrap="square" lIns="72000" rIns="72000" tIns="36000" bIns="36000" anchor="ctr">
+          <a:bodyPr wrap="square" lIns="54000" rIns="54000" tIns="18000" bIns="18000" anchor="ctr">
             <a:spAutoFit/>
           </a:bodyPr>
           <a:lstStyle/>
           <a:p>
             <a:pPr algn="r"/>
             <a:r>
-              <a:rPr sz="1800" b="0">
+              <a:rPr sz="1600" b="0">
                 <a:solidFill>
                   <a:srgbClr val="666666"/>
                 </a:solidFill>
@@ -6687,7 +6718,7 @@
         </p:nvSpPr>
         <p:spPr>
           <a:xfrm>
-            <a:off x="1188000" y="2070000"/>
+            <a:off x="1188000" y="1998000"/>
             <a:ext cx="10573200" cy="10800"/>
           </a:xfrm>
           <a:prstGeom prst="rect">
@@ -6731,7 +6762,7 @@
         </p:nvSpPr>
         <p:spPr>
           <a:xfrm>
-            <a:off x="540000" y="2160000"/>
+            <a:off x="540000" y="2106000"/>
             <a:ext cx="503999" cy="503999"/>
           </a:xfrm>
           <a:prstGeom prst="ellipse">
@@ -6774,7 +6805,7 @@
         </p:nvSpPr>
         <p:spPr>
           <a:xfrm>
-            <a:off x="540000" y="2160000"/>
+            <a:off x="540000" y="2106000"/>
             <a:ext cx="503999" cy="503999"/>
           </a:xfrm>
           <a:prstGeom prst="rect">
@@ -6786,14 +6817,14 @@
           </a:ln>
         </p:spPr>
         <p:txBody>
-          <a:bodyPr wrap="square" lIns="72000" rIns="72000" tIns="36000" bIns="36000" anchor="ctr">
+          <a:bodyPr wrap="square" lIns="54000" rIns="54000" tIns="18000" bIns="18000" anchor="ctr">
             <a:spAutoFit/>
           </a:bodyPr>
           <a:lstStyle/>
           <a:p>
             <a:pPr algn="ctr"/>
             <a:r>
-              <a:rPr sz="1800" b="1">
+              <a:rPr sz="1600" b="1">
                 <a:solidFill>
                   <a:srgbClr val="FFFFFF"/>
                 </a:solidFill>
@@ -6813,8 +6844,8 @@
         </p:nvSpPr>
         <p:spPr>
           <a:xfrm>
-            <a:off x="1188000" y="2088000"/>
-            <a:ext cx="1980000" cy="720000"/>
+            <a:off x="1188000" y="2016000"/>
+            <a:ext cx="2160000" cy="756000"/>
           </a:xfrm>
           <a:prstGeom prst="rect">
             <a:avLst/>
@@ -6825,14 +6856,14 @@
           </a:ln>
         </p:spPr>
         <p:txBody>
-          <a:bodyPr wrap="square" lIns="72000" rIns="72000" tIns="36000" bIns="36000" anchor="ctr">
+          <a:bodyPr wrap="square" lIns="54000" rIns="54000" tIns="18000" bIns="18000" anchor="ctr">
             <a:spAutoFit/>
           </a:bodyPr>
           <a:lstStyle/>
           <a:p>
             <a:pPr algn="l"/>
             <a:r>
-              <a:rPr sz="2000" b="1">
+              <a:rPr sz="1800" b="1">
                 <a:solidFill>
                   <a:srgbClr val="002060"/>
                 </a:solidFill>
@@ -6852,8 +6883,8 @@
         </p:nvSpPr>
         <p:spPr>
           <a:xfrm>
-            <a:off x="3240000" y="2088000"/>
-            <a:ext cx="6120000" cy="720000"/>
+            <a:off x="3420000" y="2016000"/>
+            <a:ext cx="6120000" cy="756000"/>
           </a:xfrm>
           <a:prstGeom prst="rect">
             <a:avLst/>
@@ -6864,14 +6895,14 @@
           </a:ln>
         </p:spPr>
         <p:txBody>
-          <a:bodyPr wrap="square" lIns="72000" rIns="72000" tIns="36000" bIns="36000" anchor="ctr">
+          <a:bodyPr wrap="square" lIns="54000" rIns="54000" tIns="18000" bIns="18000" anchor="ctr">
             <a:spAutoFit/>
           </a:bodyPr>
           <a:lstStyle/>
           <a:p>
             <a:pPr algn="l"/>
             <a:r>
-              <a:rPr sz="2200" b="1">
+              <a:rPr sz="2000" b="1">
                 <a:solidFill>
                   <a:srgbClr val="1A1A1A"/>
                 </a:solidFill>
@@ -6891,8 +6922,8 @@
         </p:nvSpPr>
         <p:spPr>
           <a:xfrm>
-            <a:off x="10033200" y="2088000"/>
-            <a:ext cx="1620000" cy="720000"/>
+            <a:off x="10033200" y="2016000"/>
+            <a:ext cx="1620000" cy="756000"/>
           </a:xfrm>
           <a:prstGeom prst="rect">
             <a:avLst/>
@@ -6903,14 +6934,14 @@
           </a:ln>
         </p:spPr>
         <p:txBody>
-          <a:bodyPr wrap="square" lIns="72000" rIns="72000" tIns="36000" bIns="36000" anchor="ctr">
+          <a:bodyPr wrap="square" lIns="54000" rIns="54000" tIns="18000" bIns="18000" anchor="ctr">
             <a:spAutoFit/>
           </a:bodyPr>
           <a:lstStyle/>
           <a:p>
             <a:pPr algn="r"/>
             <a:r>
-              <a:rPr sz="1800" b="0">
+              <a:rPr sz="1600" b="0">
                 <a:solidFill>
                   <a:srgbClr val="666666"/>
                 </a:solidFill>
@@ -6930,7 +6961,7 @@
         </p:nvSpPr>
         <p:spPr>
           <a:xfrm>
-            <a:off x="1188000" y="2790000"/>
+            <a:off x="1188000" y="2754000"/>
             <a:ext cx="10573200" cy="10800"/>
           </a:xfrm>
           <a:prstGeom prst="rect">
@@ -6974,7 +7005,7 @@
         </p:nvSpPr>
         <p:spPr>
           <a:xfrm>
-            <a:off x="540000" y="2880000"/>
+            <a:off x="540000" y="2862000"/>
             <a:ext cx="503999" cy="503999"/>
           </a:xfrm>
           <a:prstGeom prst="ellipse">
@@ -7017,7 +7048,7 @@
         </p:nvSpPr>
         <p:spPr>
           <a:xfrm>
-            <a:off x="540000" y="2880000"/>
+            <a:off x="540000" y="2862000"/>
             <a:ext cx="503999" cy="503999"/>
           </a:xfrm>
           <a:prstGeom prst="rect">
@@ -7029,14 +7060,14 @@
           </a:ln>
         </p:spPr>
         <p:txBody>
-          <a:bodyPr wrap="square" lIns="72000" rIns="72000" tIns="36000" bIns="36000" anchor="ctr">
+          <a:bodyPr wrap="square" lIns="54000" rIns="54000" tIns="18000" bIns="18000" anchor="ctr">
             <a:spAutoFit/>
           </a:bodyPr>
           <a:lstStyle/>
           <a:p>
             <a:pPr algn="ctr"/>
             <a:r>
-              <a:rPr sz="1800" b="1">
+              <a:rPr sz="1600" b="1">
                 <a:solidFill>
                   <a:srgbClr val="FFFFFF"/>
                 </a:solidFill>
@@ -7056,8 +7087,8 @@
         </p:nvSpPr>
         <p:spPr>
           <a:xfrm>
-            <a:off x="1188000" y="2808000"/>
-            <a:ext cx="1980000" cy="720000"/>
+            <a:off x="1188000" y="2772000"/>
+            <a:ext cx="2160000" cy="756000"/>
           </a:xfrm>
           <a:prstGeom prst="rect">
             <a:avLst/>
@@ -7068,14 +7099,14 @@
           </a:ln>
         </p:spPr>
         <p:txBody>
-          <a:bodyPr wrap="square" lIns="72000" rIns="72000" tIns="36000" bIns="36000" anchor="ctr">
+          <a:bodyPr wrap="square" lIns="54000" rIns="54000" tIns="18000" bIns="18000" anchor="ctr">
             <a:spAutoFit/>
           </a:bodyPr>
           <a:lstStyle/>
           <a:p>
             <a:pPr algn="l"/>
             <a:r>
-              <a:rPr sz="2000" b="1">
+              <a:rPr sz="1800" b="1">
                 <a:solidFill>
                   <a:srgbClr val="002060"/>
                 </a:solidFill>
@@ -7095,8 +7126,8 @@
         </p:nvSpPr>
         <p:spPr>
           <a:xfrm>
-            <a:off x="3240000" y="2808000"/>
-            <a:ext cx="6120000" cy="720000"/>
+            <a:off x="3420000" y="2772000"/>
+            <a:ext cx="6120000" cy="756000"/>
           </a:xfrm>
           <a:prstGeom prst="rect">
             <a:avLst/>
@@ -7107,14 +7138,14 @@
           </a:ln>
         </p:spPr>
         <p:txBody>
-          <a:bodyPr wrap="square" lIns="72000" rIns="72000" tIns="36000" bIns="36000" anchor="ctr">
+          <a:bodyPr wrap="square" lIns="54000" rIns="54000" tIns="18000" bIns="18000" anchor="ctr">
             <a:spAutoFit/>
           </a:bodyPr>
           <a:lstStyle/>
           <a:p>
             <a:pPr algn="l"/>
             <a:r>
-              <a:rPr sz="2200" b="1">
+              <a:rPr sz="2000" b="1">
                 <a:solidFill>
                   <a:srgbClr val="1A1A1A"/>
                 </a:solidFill>
@@ -7134,8 +7165,8 @@
         </p:nvSpPr>
         <p:spPr>
           <a:xfrm>
-            <a:off x="10033200" y="2808000"/>
-            <a:ext cx="1620000" cy="720000"/>
+            <a:off x="10033200" y="2772000"/>
+            <a:ext cx="1620000" cy="756000"/>
           </a:xfrm>
           <a:prstGeom prst="rect">
             <a:avLst/>
@@ -7146,14 +7177,14 @@
           </a:ln>
         </p:spPr>
         <p:txBody>
-          <a:bodyPr wrap="square" lIns="72000" rIns="72000" tIns="36000" bIns="36000" anchor="ctr">
+          <a:bodyPr wrap="square" lIns="54000" rIns="54000" tIns="18000" bIns="18000" anchor="ctr">
             <a:spAutoFit/>
           </a:bodyPr>
           <a:lstStyle/>
           <a:p>
             <a:pPr algn="r"/>
             <a:r>
-              <a:rPr sz="1800" b="0">
+              <a:rPr sz="1600" b="0">
                 <a:solidFill>
                   <a:srgbClr val="666666"/>
                 </a:solidFill>
@@ -7217,7 +7248,7 @@
         </p:nvSpPr>
         <p:spPr>
           <a:xfrm>
-            <a:off x="540000" y="3600000"/>
+            <a:off x="540000" y="3618000"/>
             <a:ext cx="503999" cy="503999"/>
           </a:xfrm>
           <a:prstGeom prst="ellipse">
@@ -7260,7 +7291,7 @@
         </p:nvSpPr>
         <p:spPr>
           <a:xfrm>
-            <a:off x="540000" y="3600000"/>
+            <a:off x="540000" y="3618000"/>
             <a:ext cx="503999" cy="503999"/>
           </a:xfrm>
           <a:prstGeom prst="rect">
@@ -7272,14 +7303,14 @@
           </a:ln>
         </p:spPr>
         <p:txBody>
-          <a:bodyPr wrap="square" lIns="72000" rIns="72000" tIns="36000" bIns="36000" anchor="ctr">
+          <a:bodyPr wrap="square" lIns="54000" rIns="54000" tIns="18000" bIns="18000" anchor="ctr">
             <a:spAutoFit/>
           </a:bodyPr>
           <a:lstStyle/>
           <a:p>
             <a:pPr algn="ctr"/>
             <a:r>
-              <a:rPr sz="1800" b="1">
+              <a:rPr sz="1600" b="1">
                 <a:solidFill>
                   <a:srgbClr val="FFFFFF"/>
                 </a:solidFill>
@@ -7300,7 +7331,7 @@
         <p:spPr>
           <a:xfrm>
             <a:off x="1188000" y="3528000"/>
-            <a:ext cx="1980000" cy="720000"/>
+            <a:ext cx="2160000" cy="756000"/>
           </a:xfrm>
           <a:prstGeom prst="rect">
             <a:avLst/>
@@ -7311,14 +7342,14 @@
           </a:ln>
         </p:spPr>
         <p:txBody>
-          <a:bodyPr wrap="square" lIns="72000" rIns="72000" tIns="36000" bIns="36000" anchor="ctr">
+          <a:bodyPr wrap="square" lIns="54000" rIns="54000" tIns="18000" bIns="18000" anchor="ctr">
             <a:spAutoFit/>
           </a:bodyPr>
           <a:lstStyle/>
           <a:p>
             <a:pPr algn="l"/>
             <a:r>
-              <a:rPr sz="2000" b="1">
+              <a:rPr sz="1800" b="1">
                 <a:solidFill>
                   <a:srgbClr val="002060"/>
                 </a:solidFill>
@@ -7338,8 +7369,8 @@
         </p:nvSpPr>
         <p:spPr>
           <a:xfrm>
-            <a:off x="3240000" y="3528000"/>
-            <a:ext cx="6120000" cy="720000"/>
+            <a:off x="3420000" y="3528000"/>
+            <a:ext cx="6120000" cy="756000"/>
           </a:xfrm>
           <a:prstGeom prst="rect">
             <a:avLst/>
@@ -7350,14 +7381,14 @@
           </a:ln>
         </p:spPr>
         <p:txBody>
-          <a:bodyPr wrap="square" lIns="72000" rIns="72000" tIns="36000" bIns="36000" anchor="ctr">
+          <a:bodyPr wrap="square" lIns="54000" rIns="54000" tIns="18000" bIns="18000" anchor="ctr">
             <a:spAutoFit/>
           </a:bodyPr>
           <a:lstStyle/>
           <a:p>
             <a:pPr algn="l"/>
             <a:r>
-              <a:rPr sz="2200" b="1">
+              <a:rPr sz="2000" b="1">
                 <a:solidFill>
                   <a:srgbClr val="1A1A1A"/>
                 </a:solidFill>
@@ -7378,7 +7409,7 @@
         <p:spPr>
           <a:xfrm>
             <a:off x="10033200" y="3528000"/>
-            <a:ext cx="1620000" cy="720000"/>
+            <a:ext cx="1620000" cy="756000"/>
           </a:xfrm>
           <a:prstGeom prst="rect">
             <a:avLst/>
@@ -7389,14 +7420,14 @@
           </a:ln>
         </p:spPr>
         <p:txBody>
-          <a:bodyPr wrap="square" lIns="72000" rIns="72000" tIns="36000" bIns="36000" anchor="ctr">
+          <a:bodyPr wrap="square" lIns="54000" rIns="54000" tIns="18000" bIns="18000" anchor="ctr">
             <a:spAutoFit/>
           </a:bodyPr>
           <a:lstStyle/>
           <a:p>
             <a:pPr algn="r"/>
             <a:r>
-              <a:rPr sz="1800" b="0">
+              <a:rPr sz="1600" b="0">
                 <a:solidFill>
                   <a:srgbClr val="666666"/>
                 </a:solidFill>
@@ -7416,7 +7447,7 @@
         </p:nvSpPr>
         <p:spPr>
           <a:xfrm>
-            <a:off x="1188000" y="4230000"/>
+            <a:off x="1188000" y="4266000"/>
             <a:ext cx="10573200" cy="10800"/>
           </a:xfrm>
           <a:prstGeom prst="rect">
@@ -7460,7 +7491,7 @@
         </p:nvSpPr>
         <p:spPr>
           <a:xfrm>
-            <a:off x="540000" y="4320000"/>
+            <a:off x="540000" y="4374000"/>
             <a:ext cx="503999" cy="503999"/>
           </a:xfrm>
           <a:prstGeom prst="ellipse">
@@ -7503,7 +7534,7 @@
         </p:nvSpPr>
         <p:spPr>
           <a:xfrm>
-            <a:off x="540000" y="4320000"/>
+            <a:off x="540000" y="4374000"/>
             <a:ext cx="503999" cy="503999"/>
           </a:xfrm>
           <a:prstGeom prst="rect">
@@ -7515,14 +7546,14 @@
           </a:ln>
         </p:spPr>
         <p:txBody>
-          <a:bodyPr wrap="square" lIns="72000" rIns="72000" tIns="36000" bIns="36000" anchor="ctr">
+          <a:bodyPr wrap="square" lIns="54000" rIns="54000" tIns="18000" bIns="18000" anchor="ctr">
             <a:spAutoFit/>
           </a:bodyPr>
           <a:lstStyle/>
           <a:p>
             <a:pPr algn="ctr"/>
             <a:r>
-              <a:rPr sz="1800" b="1">
+              <a:rPr sz="1600" b="1">
                 <a:solidFill>
                   <a:srgbClr val="FFFFFF"/>
                 </a:solidFill>
@@ -7542,8 +7573,8 @@
         </p:nvSpPr>
         <p:spPr>
           <a:xfrm>
-            <a:off x="1188000" y="4248000"/>
-            <a:ext cx="1980000" cy="720000"/>
+            <a:off x="1188000" y="4284000"/>
+            <a:ext cx="2160000" cy="756000"/>
           </a:xfrm>
           <a:prstGeom prst="rect">
             <a:avLst/>
@@ -7554,14 +7585,14 @@
           </a:ln>
         </p:spPr>
         <p:txBody>
-          <a:bodyPr wrap="square" lIns="72000" rIns="72000" tIns="36000" bIns="36000" anchor="ctr">
+          <a:bodyPr wrap="square" lIns="54000" rIns="54000" tIns="18000" bIns="18000" anchor="ctr">
             <a:spAutoFit/>
           </a:bodyPr>
           <a:lstStyle/>
           <a:p>
             <a:pPr algn="l"/>
             <a:r>
-              <a:rPr sz="2000" b="1">
+              <a:rPr sz="1800" b="1">
                 <a:solidFill>
                   <a:srgbClr val="002060"/>
                 </a:solidFill>
@@ -7581,8 +7612,8 @@
         </p:nvSpPr>
         <p:spPr>
           <a:xfrm>
-            <a:off x="3240000" y="4248000"/>
-            <a:ext cx="6120000" cy="720000"/>
+            <a:off x="3420000" y="4284000"/>
+            <a:ext cx="6120000" cy="756000"/>
           </a:xfrm>
           <a:prstGeom prst="rect">
             <a:avLst/>
@@ -7593,14 +7624,14 @@
           </a:ln>
         </p:spPr>
         <p:txBody>
-          <a:bodyPr wrap="square" lIns="72000" rIns="72000" tIns="36000" bIns="36000" anchor="ctr">
+          <a:bodyPr wrap="square" lIns="54000" rIns="54000" tIns="18000" bIns="18000" anchor="ctr">
             <a:spAutoFit/>
           </a:bodyPr>
           <a:lstStyle/>
           <a:p>
             <a:pPr algn="l"/>
             <a:r>
-              <a:rPr sz="2200" b="1">
+              <a:rPr sz="2000" b="1">
                 <a:solidFill>
                   <a:srgbClr val="1A1A1A"/>
                 </a:solidFill>
@@ -7620,8 +7651,8 @@
         </p:nvSpPr>
         <p:spPr>
           <a:xfrm>
-            <a:off x="10033200" y="4248000"/>
-            <a:ext cx="1620000" cy="720000"/>
+            <a:off x="10033200" y="4284000"/>
+            <a:ext cx="1620000" cy="756000"/>
           </a:xfrm>
           <a:prstGeom prst="rect">
             <a:avLst/>
@@ -7632,14 +7663,14 @@
           </a:ln>
         </p:spPr>
         <p:txBody>
-          <a:bodyPr wrap="square" lIns="72000" rIns="72000" tIns="36000" bIns="36000" anchor="ctr">
+          <a:bodyPr wrap="square" lIns="54000" rIns="54000" tIns="18000" bIns="18000" anchor="ctr">
             <a:spAutoFit/>
           </a:bodyPr>
           <a:lstStyle/>
           <a:p>
             <a:pPr algn="r"/>
             <a:r>
-              <a:rPr sz="1800" b="0">
+              <a:rPr sz="1600" b="0">
                 <a:solidFill>
                   <a:srgbClr val="666666"/>
                 </a:solidFill>
@@ -7659,7 +7690,7 @@
         </p:nvSpPr>
         <p:spPr>
           <a:xfrm>
-            <a:off x="1188000" y="4950000"/>
+            <a:off x="1188000" y="5022000"/>
             <a:ext cx="10573200" cy="10800"/>
           </a:xfrm>
           <a:prstGeom prst="rect">
@@ -7703,7 +7734,7 @@
         </p:nvSpPr>
         <p:spPr>
           <a:xfrm>
-            <a:off x="540000" y="5040000"/>
+            <a:off x="540000" y="5130000"/>
             <a:ext cx="503999" cy="503999"/>
           </a:xfrm>
           <a:prstGeom prst="ellipse">
@@ -7746,7 +7777,7 @@
         </p:nvSpPr>
         <p:spPr>
           <a:xfrm>
-            <a:off x="540000" y="5040000"/>
+            <a:off x="540000" y="5130000"/>
             <a:ext cx="503999" cy="503999"/>
           </a:xfrm>
           <a:prstGeom prst="rect">
@@ -7758,14 +7789,14 @@
           </a:ln>
         </p:spPr>
         <p:txBody>
-          <a:bodyPr wrap="square" lIns="72000" rIns="72000" tIns="36000" bIns="36000" anchor="ctr">
+          <a:bodyPr wrap="square" lIns="54000" rIns="54000" tIns="18000" bIns="18000" anchor="ctr">
             <a:spAutoFit/>
           </a:bodyPr>
           <a:lstStyle/>
           <a:p>
             <a:pPr algn="ctr"/>
             <a:r>
-              <a:rPr sz="1800" b="1">
+              <a:rPr sz="1600" b="1">
                 <a:solidFill>
                   <a:srgbClr val="FFFFFF"/>
                 </a:solidFill>
@@ -7785,8 +7816,8 @@
         </p:nvSpPr>
         <p:spPr>
           <a:xfrm>
-            <a:off x="1188000" y="4968000"/>
-            <a:ext cx="1980000" cy="720000"/>
+            <a:off x="1188000" y="5040000"/>
+            <a:ext cx="2160000" cy="756000"/>
           </a:xfrm>
           <a:prstGeom prst="rect">
             <a:avLst/>
@@ -7797,14 +7828,14 @@
           </a:ln>
         </p:spPr>
         <p:txBody>
-          <a:bodyPr wrap="square" lIns="72000" rIns="72000" tIns="36000" bIns="36000" anchor="ctr">
+          <a:bodyPr wrap="square" lIns="54000" rIns="54000" tIns="18000" bIns="18000" anchor="ctr">
             <a:spAutoFit/>
           </a:bodyPr>
           <a:lstStyle/>
           <a:p>
             <a:pPr algn="l"/>
             <a:r>
-              <a:rPr sz="2000" b="1">
+              <a:rPr sz="1800" b="1">
                 <a:solidFill>
                   <a:srgbClr val="002060"/>
                 </a:solidFill>
@@ -7824,8 +7855,8 @@
         </p:nvSpPr>
         <p:spPr>
           <a:xfrm>
-            <a:off x="3240000" y="4968000"/>
-            <a:ext cx="6120000" cy="720000"/>
+            <a:off x="3420000" y="5040000"/>
+            <a:ext cx="6120000" cy="756000"/>
           </a:xfrm>
           <a:prstGeom prst="rect">
             <a:avLst/>
@@ -7836,14 +7867,14 @@
           </a:ln>
         </p:spPr>
         <p:txBody>
-          <a:bodyPr wrap="square" lIns="72000" rIns="72000" tIns="36000" bIns="36000" anchor="ctr">
+          <a:bodyPr wrap="square" lIns="54000" rIns="54000" tIns="18000" bIns="18000" anchor="ctr">
             <a:spAutoFit/>
           </a:bodyPr>
           <a:lstStyle/>
           <a:p>
             <a:pPr algn="l"/>
             <a:r>
-              <a:rPr sz="2200" b="1">
+              <a:rPr sz="2000" b="1">
                 <a:solidFill>
                   <a:srgbClr val="1A1A1A"/>
                 </a:solidFill>
@@ -7863,8 +7894,8 @@
         </p:nvSpPr>
         <p:spPr>
           <a:xfrm>
-            <a:off x="10033200" y="4968000"/>
-            <a:ext cx="1620000" cy="720000"/>
+            <a:off x="10033200" y="5040000"/>
+            <a:ext cx="1620000" cy="756000"/>
           </a:xfrm>
           <a:prstGeom prst="rect">
             <a:avLst/>
@@ -7875,14 +7906,14 @@
           </a:ln>
         </p:spPr>
         <p:txBody>
-          <a:bodyPr wrap="square" lIns="72000" rIns="72000" tIns="36000" bIns="36000" anchor="ctr">
+          <a:bodyPr wrap="square" lIns="54000" rIns="54000" tIns="18000" bIns="18000" anchor="ctr">
             <a:spAutoFit/>
           </a:bodyPr>
           <a:lstStyle/>
           <a:p>
             <a:pPr algn="r"/>
             <a:r>
-              <a:rPr sz="1800" b="0">
+              <a:rPr sz="1600" b="0">
                 <a:solidFill>
                   <a:srgbClr val="666666"/>
                 </a:solidFill>
@@ -7914,14 +7945,14 @@
           </a:ln>
         </p:spPr>
         <p:txBody>
-          <a:bodyPr wrap="square" lIns="72000" rIns="72000" tIns="36000" bIns="36000" anchor="t">
+          <a:bodyPr wrap="square" lIns="54000" rIns="54000" tIns="18000" bIns="18000" anchor="t">
             <a:spAutoFit/>
           </a:bodyPr>
           <a:lstStyle/>
           <a:p>
             <a:pPr algn="l"/>
             <a:r>
-              <a:rPr sz="1000" b="0">
+              <a:rPr sz="900" b="0">
                 <a:solidFill>
                   <a:srgbClr val="666666"/>
                 </a:solidFill>
@@ -7953,14 +7984,14 @@
           </a:ln>
         </p:spPr>
         <p:txBody>
-          <a:bodyPr wrap="square" lIns="72000" rIns="72000" tIns="36000" bIns="36000" anchor="t">
+          <a:bodyPr wrap="square" lIns="54000" rIns="54000" tIns="18000" bIns="18000" anchor="t">
             <a:spAutoFit/>
           </a:bodyPr>
           <a:lstStyle/>
           <a:p>
             <a:pPr algn="r"/>
             <a:r>
-              <a:rPr sz="1000" b="0">
+              <a:rPr sz="900" b="0">
                 <a:solidFill>
                   <a:srgbClr val="666666"/>
                 </a:solidFill>
@@ -7999,7 +8030,7 @@
         <p:spPr>
           <a:xfrm>
             <a:off x="288000" y="144000"/>
-            <a:ext cx="9000000" cy="792000"/>
+            <a:ext cx="8280000" cy="648000"/>
           </a:xfrm>
           <a:prstGeom prst="rect">
             <a:avLst/>
@@ -8010,14 +8041,14 @@
           </a:ln>
         </p:spPr>
         <p:txBody>
-          <a:bodyPr wrap="square" lIns="72000" rIns="72000" tIns="36000" bIns="36000" anchor="ctr">
+          <a:bodyPr wrap="square" lIns="54000" rIns="54000" tIns="18000" bIns="18000" anchor="ctr">
             <a:spAutoFit/>
           </a:bodyPr>
           <a:lstStyle/>
           <a:p>
             <a:pPr algn="l"/>
             <a:r>
-              <a:rPr sz="4000" b="1">
+              <a:rPr sz="3200" b="1">
                 <a:solidFill>
                   <a:srgbClr val="1A1A1A"/>
                 </a:solidFill>
@@ -8037,8 +8068,8 @@
         </p:nvSpPr>
         <p:spPr>
           <a:xfrm>
-            <a:off x="288000" y="900000"/>
-            <a:ext cx="11617200" cy="64800"/>
+            <a:off x="288000" y="827999"/>
+            <a:ext cx="11617200" cy="54000"/>
           </a:xfrm>
           <a:prstGeom prst="rect">
             <a:avLst/>
@@ -8081,8 +8112,8 @@
         </p:nvSpPr>
         <p:spPr>
           <a:xfrm>
-            <a:off x="540000" y="1440000"/>
-            <a:ext cx="11113200" cy="2520000"/>
+            <a:off x="540000" y="1260000"/>
+            <a:ext cx="11113200" cy="3060000"/>
           </a:xfrm>
           <a:prstGeom prst="roundRect">
             <a:avLst/>
@@ -8127,8 +8158,8 @@
         </p:nvSpPr>
         <p:spPr>
           <a:xfrm>
-            <a:off x="900000" y="1548000"/>
-            <a:ext cx="10393200" cy="540000"/>
+            <a:off x="900000" y="1404000"/>
+            <a:ext cx="10393200" cy="468000"/>
           </a:xfrm>
           <a:prstGeom prst="rect">
             <a:avLst/>
@@ -8139,14 +8170,14 @@
           </a:ln>
         </p:spPr>
         <p:txBody>
-          <a:bodyPr wrap="square" lIns="72000" rIns="72000" tIns="36000" bIns="36000" anchor="t">
+          <a:bodyPr wrap="square" lIns="54000" rIns="54000" tIns="18000" bIns="18000" anchor="ctr">
             <a:spAutoFit/>
           </a:bodyPr>
           <a:lstStyle/>
           <a:p>
             <a:pPr algn="l"/>
             <a:r>
-              <a:rPr sz="2600" b="1">
+              <a:rPr sz="2200" b="1">
                 <a:solidFill>
                   <a:srgbClr val="002060"/>
                 </a:solidFill>
@@ -8166,8 +8197,8 @@
         </p:nvSpPr>
         <p:spPr>
           <a:xfrm>
-            <a:off x="900000" y="2160000"/>
-            <a:ext cx="10393200" cy="1800000"/>
+            <a:off x="900000" y="1980000"/>
+            <a:ext cx="10393200" cy="792000"/>
           </a:xfrm>
           <a:prstGeom prst="rect">
             <a:avLst/>
@@ -8178,28 +8209,28 @@
           </a:ln>
         </p:spPr>
         <p:txBody>
-          <a:bodyPr wrap="square" lIns="72000" rIns="72000" tIns="36000" bIns="36000" anchor="t">
+          <a:bodyPr wrap="square" lIns="54000" rIns="54000" tIns="18000" bIns="18000" anchor="ctr">
             <a:spAutoFit/>
           </a:bodyPr>
           <a:lstStyle/>
           <a:p>
             <a:pPr algn="l">
               <a:lnSpc>
-                <a:spcPct val="140000"/>
+                <a:spcPct val="130000"/>
               </a:lnSpc>
             </a:pPr>
             <a:r>
-              <a:rPr sz="3000" b="1">
+              <a:rPr sz="2200" b="1">
                 <a:solidFill>
                   <a:srgbClr val="1A1A1A"/>
                 </a:solidFill>
                 <a:latin typeface="メイリオ"/>
                 <a:ea typeface="メイリオ"/>
               </a:rPr>
-              <a:t>「今日の授業で、思わず</a:t>
-            </a:r>
-            <a:r>
-              <a:rPr sz="3800" b="1">
+              <a:t>「今日の授業で、思わず </a:t>
+            </a:r>
+            <a:r>
+              <a:rPr sz="2600" b="1">
                 <a:solidFill>
                   <a:srgbClr val="FF0000"/>
                 </a:solidFill>
@@ -8209,24 +8240,50 @@
               <a:t>〝おっ〟</a:t>
             </a:r>
             <a:r>
-              <a:rPr sz="3000" b="1">
+              <a:rPr sz="2200" b="1">
                 <a:solidFill>
                   <a:srgbClr val="1A1A1A"/>
                 </a:solidFill>
                 <a:latin typeface="メイリオ"/>
                 <a:ea typeface="メイリオ"/>
               </a:rPr>
-              <a:t>と心が動いた瞬間」を、</a:t>
-            </a:r>
-          </a:p>
+              <a:t> と心が動いた瞬間」を、</a:t>
+            </a:r>
+          </a:p>
+        </p:txBody>
+      </p:sp>
+      <p:sp>
+        <p:nvSpPr>
+          <p:cNvPr id="7" name="TextBox 6"/>
+          <p:cNvSpPr txBox="1"/>
+          <p:nvPr/>
+        </p:nvSpPr>
+        <p:spPr>
+          <a:xfrm>
+            <a:off x="900000" y="2880000"/>
+            <a:ext cx="10393200" cy="792000"/>
+          </a:xfrm>
+          <a:prstGeom prst="rect">
+            <a:avLst/>
+          </a:prstGeom>
+          <a:noFill/>
+          <a:ln>
+            <a:noFill/>
+          </a:ln>
+        </p:spPr>
+        <p:txBody>
+          <a:bodyPr wrap="square" lIns="54000" rIns="54000" tIns="18000" bIns="18000" anchor="ctr">
+            <a:spAutoFit/>
+          </a:bodyPr>
+          <a:lstStyle/>
           <a:p>
             <a:pPr algn="l">
               <a:lnSpc>
-                <a:spcPct val="140000"/>
+                <a:spcPct val="130000"/>
               </a:lnSpc>
             </a:pPr>
             <a:r>
-              <a:rPr sz="3800" b="1">
+              <a:rPr sz="3000" b="1">
                 <a:solidFill>
                   <a:srgbClr val="FF0000"/>
                 </a:solidFill>
@@ -8236,28 +8293,28 @@
               <a:t>ジェスチャー一つ</a:t>
             </a:r>
             <a:r>
-              <a:rPr sz="3000" b="1">
+              <a:rPr sz="2200" b="1">
                 <a:solidFill>
                   <a:srgbClr val="1A1A1A"/>
                 </a:solidFill>
                 <a:latin typeface="メイリオ"/>
                 <a:ea typeface="メイリオ"/>
               </a:rPr>
-              <a:t>で表してみてください。</a:t>
-            </a:r>
-          </a:p>
-        </p:txBody>
-      </p:sp>
-      <p:sp>
-        <p:nvSpPr>
-          <p:cNvPr id="7" name="Rectangle 6"/>
+              <a:t> で表してみてください。</a:t>
+            </a:r>
+          </a:p>
+        </p:txBody>
+      </p:sp>
+      <p:sp>
+        <p:nvSpPr>
+          <p:cNvPr id="8" name="Rectangle 7"/>
           <p:cNvSpPr/>
           <p:nvPr/>
         </p:nvSpPr>
         <p:spPr>
           <a:xfrm>
-            <a:off x="3960000" y="4500000"/>
-            <a:ext cx="4273200" cy="720000"/>
+            <a:off x="3960000" y="4680000"/>
+            <a:ext cx="4273200" cy="648000"/>
           </a:xfrm>
           <a:prstGeom prst="rect">
             <a:avLst/>
@@ -8294,14 +8351,14 @@
       </p:sp>
       <p:sp>
         <p:nvSpPr>
-          <p:cNvPr id="8" name="TextBox 7"/>
+          <p:cNvPr id="9" name="TextBox 8"/>
           <p:cNvSpPr txBox="1"/>
           <p:nvPr/>
         </p:nvSpPr>
         <p:spPr>
           <a:xfrm>
-            <a:off x="3960000" y="4500000"/>
-            <a:ext cx="4273200" cy="720000"/>
+            <a:off x="3960000" y="4680000"/>
+            <a:ext cx="4273200" cy="648000"/>
           </a:xfrm>
           <a:prstGeom prst="rect">
             <a:avLst/>
@@ -8312,14 +8369,14 @@
           </a:ln>
         </p:spPr>
         <p:txBody>
-          <a:bodyPr wrap="square" lIns="72000" rIns="72000" tIns="36000" bIns="36000" anchor="ctr">
+          <a:bodyPr wrap="square" lIns="54000" rIns="54000" tIns="18000" bIns="18000" anchor="ctr">
             <a:spAutoFit/>
           </a:bodyPr>
           <a:lstStyle/>
           <a:p>
             <a:pPr algn="ctr"/>
             <a:r>
-              <a:rPr sz="2600" b="1">
+              <a:rPr sz="2200" b="1">
                 <a:solidFill>
                   <a:srgbClr val="FFFFFF"/>
                 </a:solidFill>
@@ -8333,14 +8390,14 @@
       </p:sp>
       <p:sp>
         <p:nvSpPr>
-          <p:cNvPr id="9" name="TextBox 8"/>
+          <p:cNvPr id="10" name="TextBox 9"/>
           <p:cNvSpPr txBox="1"/>
           <p:nvPr/>
         </p:nvSpPr>
         <p:spPr>
           <a:xfrm>
             <a:off x="540000" y="5580000"/>
-            <a:ext cx="11113200" cy="432000"/>
+            <a:ext cx="11113200" cy="540000"/>
           </a:xfrm>
           <a:prstGeom prst="rect">
             <a:avLst/>
@@ -8351,14 +8408,14 @@
           </a:ln>
         </p:spPr>
         <p:txBody>
-          <a:bodyPr wrap="square" lIns="72000" rIns="72000" tIns="36000" bIns="36000" anchor="t">
+          <a:bodyPr wrap="square" lIns="54000" rIns="54000" tIns="18000" bIns="18000" anchor="ctr">
             <a:spAutoFit/>
           </a:bodyPr>
           <a:lstStyle/>
           <a:p>
             <a:pPr algn="ctr"/>
             <a:r>
-              <a:rPr sz="2000" b="1">
+              <a:rPr sz="1800" b="1">
                 <a:solidFill>
                   <a:srgbClr val="002060"/>
                 </a:solidFill>
@@ -8372,7 +8429,7 @@
       </p:sp>
       <p:sp>
         <p:nvSpPr>
-          <p:cNvPr id="10" name="TextBox 9"/>
+          <p:cNvPr id="11" name="TextBox 10"/>
           <p:cNvSpPr txBox="1"/>
           <p:nvPr/>
         </p:nvSpPr>
@@ -8390,14 +8447,14 @@
           </a:ln>
         </p:spPr>
         <p:txBody>
-          <a:bodyPr wrap="square" lIns="72000" rIns="72000" tIns="36000" bIns="36000" anchor="t">
+          <a:bodyPr wrap="square" lIns="54000" rIns="54000" tIns="18000" bIns="18000" anchor="t">
             <a:spAutoFit/>
           </a:bodyPr>
           <a:lstStyle/>
           <a:p>
             <a:pPr algn="l"/>
             <a:r>
-              <a:rPr sz="1000" b="0">
+              <a:rPr sz="900" b="0">
                 <a:solidFill>
                   <a:srgbClr val="666666"/>
                 </a:solidFill>
@@ -8411,7 +8468,7 @@
       </p:sp>
       <p:sp>
         <p:nvSpPr>
-          <p:cNvPr id="11" name="TextBox 10"/>
+          <p:cNvPr id="12" name="TextBox 11"/>
           <p:cNvSpPr txBox="1"/>
           <p:nvPr/>
         </p:nvSpPr>
@@ -8429,14 +8486,14 @@
           </a:ln>
         </p:spPr>
         <p:txBody>
-          <a:bodyPr wrap="square" lIns="72000" rIns="72000" tIns="36000" bIns="36000" anchor="t">
+          <a:bodyPr wrap="square" lIns="54000" rIns="54000" tIns="18000" bIns="18000" anchor="t">
             <a:spAutoFit/>
           </a:bodyPr>
           <a:lstStyle/>
           <a:p>
             <a:pPr algn="r"/>
             <a:r>
-              <a:rPr sz="1000" b="0">
+              <a:rPr sz="900" b="0">
                 <a:solidFill>
                   <a:srgbClr val="666666"/>
                 </a:solidFill>
@@ -8475,7 +8532,7 @@
         <p:spPr>
           <a:xfrm>
             <a:off x="288000" y="144000"/>
-            <a:ext cx="9000000" cy="792000"/>
+            <a:ext cx="8280000" cy="648000"/>
           </a:xfrm>
           <a:prstGeom prst="rect">
             <a:avLst/>
@@ -8486,14 +8543,14 @@
           </a:ln>
         </p:spPr>
         <p:txBody>
-          <a:bodyPr wrap="square" lIns="72000" rIns="72000" tIns="36000" bIns="36000" anchor="ctr">
+          <a:bodyPr wrap="square" lIns="54000" rIns="54000" tIns="18000" bIns="18000" anchor="ctr">
             <a:spAutoFit/>
           </a:bodyPr>
           <a:lstStyle/>
           <a:p>
             <a:pPr algn="l"/>
             <a:r>
-              <a:rPr sz="4000" b="1">
+              <a:rPr sz="3200" b="1">
                 <a:solidFill>
                   <a:srgbClr val="1A1A1A"/>
                 </a:solidFill>
@@ -8513,8 +8570,8 @@
         </p:nvSpPr>
         <p:spPr>
           <a:xfrm>
-            <a:off x="288000" y="900000"/>
-            <a:ext cx="11617200" cy="64800"/>
+            <a:off x="288000" y="827999"/>
+            <a:ext cx="11617200" cy="54000"/>
           </a:xfrm>
           <a:prstGeom prst="rect">
             <a:avLst/>
@@ -8557,7 +8614,7 @@
         </p:nvSpPr>
         <p:spPr>
           <a:xfrm>
-            <a:off x="540000" y="1152000"/>
+            <a:off x="540000" y="1080000"/>
             <a:ext cx="11113200" cy="503999"/>
           </a:xfrm>
           <a:prstGeom prst="rect">
@@ -8601,7 +8658,7 @@
         </p:nvSpPr>
         <p:spPr>
           <a:xfrm>
-            <a:off x="540000" y="1152000"/>
+            <a:off x="540000" y="1080000"/>
             <a:ext cx="11113200" cy="503999"/>
           </a:xfrm>
           <a:prstGeom prst="rect">
@@ -8613,14 +8670,14 @@
           </a:ln>
         </p:spPr>
         <p:txBody>
-          <a:bodyPr wrap="square" lIns="72000" rIns="72000" tIns="36000" bIns="36000" anchor="ctr">
+          <a:bodyPr wrap="square" lIns="54000" rIns="54000" tIns="18000" bIns="18000" anchor="ctr">
             <a:spAutoFit/>
           </a:bodyPr>
           <a:lstStyle/>
           <a:p>
             <a:pPr algn="ctr"/>
             <a:r>
-              <a:rPr sz="2000" b="1">
+              <a:rPr sz="1800" b="1">
                 <a:solidFill>
                   <a:srgbClr val="002060"/>
                 </a:solidFill>
@@ -8640,8 +8697,8 @@
         </p:nvSpPr>
         <p:spPr>
           <a:xfrm>
-            <a:off x="552600" y="1980000"/>
-            <a:ext cx="3600000" cy="3600000"/>
+            <a:off x="552600" y="1728000"/>
+            <a:ext cx="3600000" cy="4140000"/>
           </a:xfrm>
           <a:prstGeom prst="rect">
             <a:avLst/>
@@ -8686,8 +8743,8 @@
         </p:nvSpPr>
         <p:spPr>
           <a:xfrm>
-            <a:off x="552600" y="1980000"/>
-            <a:ext cx="3600000" cy="648000"/>
+            <a:off x="552600" y="1728000"/>
+            <a:ext cx="3600000" cy="792000"/>
           </a:xfrm>
           <a:prstGeom prst="rect">
             <a:avLst/>
@@ -8730,8 +8787,8 @@
         </p:nvSpPr>
         <p:spPr>
           <a:xfrm>
-            <a:off x="660600" y="1980000"/>
-            <a:ext cx="540000" cy="648000"/>
+            <a:off x="660600" y="1728000"/>
+            <a:ext cx="540000" cy="792000"/>
           </a:xfrm>
           <a:prstGeom prst="rect">
             <a:avLst/>
@@ -8742,7 +8799,7 @@
           </a:ln>
         </p:spPr>
         <p:txBody>
-          <a:bodyPr wrap="square" lIns="72000" rIns="72000" tIns="36000" bIns="36000" anchor="ctr">
+          <a:bodyPr wrap="square" lIns="54000" rIns="54000" tIns="18000" bIns="18000" anchor="ctr">
             <a:spAutoFit/>
           </a:bodyPr>
           <a:lstStyle/>
@@ -8769,8 +8826,8 @@
         </p:nvSpPr>
         <p:spPr>
           <a:xfrm>
-            <a:off x="1200600" y="1980000"/>
-            <a:ext cx="2880000" cy="648000"/>
+            <a:off x="1200600" y="1728000"/>
+            <a:ext cx="2880000" cy="792000"/>
           </a:xfrm>
           <a:prstGeom prst="rect">
             <a:avLst/>
@@ -8781,14 +8838,14 @@
           </a:ln>
         </p:spPr>
         <p:txBody>
-          <a:bodyPr wrap="square" lIns="72000" rIns="72000" tIns="36000" bIns="36000" anchor="ctr">
+          <a:bodyPr wrap="square" lIns="54000" rIns="54000" tIns="18000" bIns="18000" anchor="ctr">
             <a:spAutoFit/>
           </a:bodyPr>
           <a:lstStyle/>
           <a:p>
             <a:pPr algn="l"/>
             <a:r>
-              <a:rPr sz="1700" b="1">
+              <a:rPr sz="1500" b="1">
                 <a:solidFill>
                   <a:srgbClr val="FFFFFF"/>
                 </a:solidFill>
@@ -8808,8 +8865,8 @@
         </p:nvSpPr>
         <p:spPr>
           <a:xfrm>
-            <a:off x="732600" y="2772000"/>
-            <a:ext cx="3240000" cy="2700000"/>
+            <a:off x="732600" y="2664000"/>
+            <a:ext cx="3240000" cy="3060000"/>
           </a:xfrm>
           <a:prstGeom prst="rect">
             <a:avLst/>
@@ -8820,18 +8877,18 @@
           </a:ln>
         </p:spPr>
         <p:txBody>
-          <a:bodyPr wrap="square" lIns="72000" rIns="72000" tIns="36000" bIns="36000" anchor="t">
+          <a:bodyPr wrap="square" lIns="54000" rIns="54000" tIns="18000" bIns="18000" anchor="t">
             <a:spAutoFit/>
           </a:bodyPr>
           <a:lstStyle/>
           <a:p>
             <a:pPr algn="l">
               <a:lnSpc>
-                <a:spcPct val="140000"/>
+                <a:spcPct val="135000"/>
               </a:lnSpc>
             </a:pPr>
             <a:r>
-              <a:rPr sz="2000" b="1">
+              <a:rPr sz="1600" b="1">
                 <a:solidFill>
                   <a:srgbClr val="FF0000"/>
                 </a:solidFill>
@@ -8839,60 +8896,67 @@
                 <a:ea typeface="メイリオ"/>
               </a:rPr>
               <a:t>「いつ・どこで・だれが」</a:t>
-            </a:r>
-            <a:r>
-              <a:rPr sz="1800" b="0">
-                <a:solidFill>
-                  <a:srgbClr val="1A1A1A"/>
-                </a:solidFill>
-                <a:latin typeface="メイリオ"/>
-                <a:ea typeface="メイリオ"/>
-              </a:rPr>
-              <a:t>と質問の種類を整理。</a:t>
             </a:r>
           </a:p>
           <a:p>
             <a:pPr algn="l">
               <a:lnSpc>
-                <a:spcPct val="140000"/>
+                <a:spcPct val="135000"/>
               </a:lnSpc>
             </a:pPr>
+            <a:r>
+              <a:rPr sz="1500" b="0">
+                <a:solidFill>
+                  <a:srgbClr val="1A1A1A"/>
+                </a:solidFill>
+                <a:latin typeface="メイリオ"/>
+                <a:ea typeface="メイリオ"/>
+              </a:rPr>
+              <a:t>と質問の種類を整理。</a:t>
+            </a:r>
           </a:p>
           <a:p>
             <a:pPr algn="l">
               <a:lnSpc>
-                <a:spcPct val="140000"/>
+                <a:spcPct val="135000"/>
               </a:lnSpc>
             </a:pPr>
-            <a:r>
-              <a:rPr sz="1800" b="0">
-                <a:solidFill>
-                  <a:srgbClr val="1A1A1A"/>
-                </a:solidFill>
-                <a:latin typeface="メイリオ"/>
-                <a:ea typeface="メイリオ"/>
-              </a:rPr>
-              <a:t>児童が</a:t>
-            </a:r>
-            <a:r>
-              <a:rPr sz="2000" b="1">
-                <a:solidFill>
-                  <a:srgbClr val="FF0000"/>
-                </a:solidFill>
-                <a:latin typeface="メイリオ"/>
-                <a:ea typeface="メイリオ"/>
-              </a:rPr>
-              <a:t>〝自分が引き出した〟</a:t>
-            </a:r>
           </a:p>
           <a:p>
             <a:pPr algn="l">
               <a:lnSpc>
-                <a:spcPct val="140000"/>
+                <a:spcPct val="135000"/>
               </a:lnSpc>
             </a:pPr>
             <a:r>
-              <a:rPr sz="1800" b="0">
+              <a:rPr sz="1500" b="0">
+                <a:solidFill>
+                  <a:srgbClr val="1A1A1A"/>
+                </a:solidFill>
+                <a:latin typeface="メイリオ"/>
+                <a:ea typeface="メイリオ"/>
+              </a:rPr>
+              <a:t>児童が</a:t>
+            </a:r>
+            <a:r>
+              <a:rPr sz="1600" b="1">
+                <a:solidFill>
+                  <a:srgbClr val="FF0000"/>
+                </a:solidFill>
+                <a:latin typeface="メイリオ"/>
+                <a:ea typeface="メイリオ"/>
+              </a:rPr>
+              <a:t>〝自分が引き出した〟</a:t>
+            </a:r>
+          </a:p>
+          <a:p>
+            <a:pPr algn="l">
+              <a:lnSpc>
+                <a:spcPct val="135000"/>
+              </a:lnSpc>
+            </a:pPr>
+            <a:r>
+              <a:rPr sz="1500" b="0">
                 <a:solidFill>
                   <a:srgbClr val="1A1A1A"/>
                 </a:solidFill>
@@ -8912,8 +8976,8 @@
         </p:nvSpPr>
         <p:spPr>
           <a:xfrm>
-            <a:off x="4296600" y="1980000"/>
-            <a:ext cx="3600000" cy="3600000"/>
+            <a:off x="4296600" y="1728000"/>
+            <a:ext cx="3600000" cy="4140000"/>
           </a:xfrm>
           <a:prstGeom prst="rect">
             <a:avLst/>
@@ -8958,8 +9022,8 @@
         </p:nvSpPr>
         <p:spPr>
           <a:xfrm>
-            <a:off x="4296600" y="1980000"/>
-            <a:ext cx="3600000" cy="648000"/>
+            <a:off x="4296600" y="1728000"/>
+            <a:ext cx="3600000" cy="792000"/>
           </a:xfrm>
           <a:prstGeom prst="rect">
             <a:avLst/>
@@ -9002,8 +9066,8 @@
         </p:nvSpPr>
         <p:spPr>
           <a:xfrm>
-            <a:off x="4404600" y="1980000"/>
-            <a:ext cx="540000" cy="648000"/>
+            <a:off x="4404600" y="1728000"/>
+            <a:ext cx="540000" cy="792000"/>
           </a:xfrm>
           <a:prstGeom prst="rect">
             <a:avLst/>
@@ -9014,7 +9078,7 @@
           </a:ln>
         </p:spPr>
         <p:txBody>
-          <a:bodyPr wrap="square" lIns="72000" rIns="72000" tIns="36000" bIns="36000" anchor="ctr">
+          <a:bodyPr wrap="square" lIns="54000" rIns="54000" tIns="18000" bIns="18000" anchor="ctr">
             <a:spAutoFit/>
           </a:bodyPr>
           <a:lstStyle/>
@@ -9041,8 +9105,8 @@
         </p:nvSpPr>
         <p:spPr>
           <a:xfrm>
-            <a:off x="4944600" y="1980000"/>
-            <a:ext cx="2880000" cy="648000"/>
+            <a:off x="4944600" y="1728000"/>
+            <a:ext cx="2880000" cy="792000"/>
           </a:xfrm>
           <a:prstGeom prst="rect">
             <a:avLst/>
@@ -9053,14 +9117,14 @@
           </a:ln>
         </p:spPr>
         <p:txBody>
-          <a:bodyPr wrap="square" lIns="72000" rIns="72000" tIns="36000" bIns="36000" anchor="ctr">
+          <a:bodyPr wrap="square" lIns="54000" rIns="54000" tIns="18000" bIns="18000" anchor="ctr">
             <a:spAutoFit/>
           </a:bodyPr>
           <a:lstStyle/>
           <a:p>
             <a:pPr algn="l"/>
             <a:r>
-              <a:rPr sz="1700" b="1">
+              <a:rPr sz="1500" b="1">
                 <a:solidFill>
                   <a:srgbClr val="FFFFFF"/>
                 </a:solidFill>
@@ -9080,8 +9144,8 @@
         </p:nvSpPr>
         <p:spPr>
           <a:xfrm>
-            <a:off x="4476600" y="2772000"/>
-            <a:ext cx="3240000" cy="2700000"/>
+            <a:off x="4476600" y="2664000"/>
+            <a:ext cx="3240000" cy="3060000"/>
           </a:xfrm>
           <a:prstGeom prst="rect">
             <a:avLst/>
@@ -9092,18 +9156,18 @@
           </a:ln>
         </p:spPr>
         <p:txBody>
-          <a:bodyPr wrap="square" lIns="72000" rIns="72000" tIns="36000" bIns="36000" anchor="t">
+          <a:bodyPr wrap="square" lIns="54000" rIns="54000" tIns="18000" bIns="18000" anchor="t">
             <a:spAutoFit/>
           </a:bodyPr>
           <a:lstStyle/>
           <a:p>
             <a:pPr algn="l">
               <a:lnSpc>
-                <a:spcPct val="140000"/>
+                <a:spcPct val="135000"/>
               </a:lnSpc>
             </a:pPr>
             <a:r>
-              <a:rPr sz="1800" b="0">
+              <a:rPr sz="1500" b="0">
                 <a:solidFill>
                   <a:srgbClr val="1A1A1A"/>
                 </a:solidFill>
@@ -9116,11 +9180,11 @@
           <a:p>
             <a:pPr algn="l">
               <a:lnSpc>
-                <a:spcPct val="140000"/>
+                <a:spcPct val="135000"/>
               </a:lnSpc>
             </a:pPr>
             <a:r>
-              <a:rPr sz="2000" b="1">
+              <a:rPr sz="1600" b="1">
                 <a:solidFill>
                   <a:srgbClr val="FF0000"/>
                 </a:solidFill>
@@ -9130,7 +9194,7 @@
               <a:t>抽象論ではなく</a:t>
             </a:r>
             <a:r>
-              <a:rPr sz="1800" b="0">
+              <a:rPr sz="1500" b="0">
                 <a:solidFill>
                   <a:srgbClr val="1A1A1A"/>
                 </a:solidFill>
@@ -9143,11 +9207,11 @@
           <a:p>
             <a:pPr algn="l">
               <a:lnSpc>
-                <a:spcPct val="140000"/>
+                <a:spcPct val="135000"/>
               </a:lnSpc>
             </a:pPr>
             <a:r>
-              <a:rPr sz="2000" b="1">
+              <a:rPr sz="1600" b="1">
                 <a:solidFill>
                   <a:srgbClr val="FF0000"/>
                 </a:solidFill>
@@ -9157,7 +9221,7 @@
               <a:t>具体的な場面の観察</a:t>
             </a:r>
             <a:r>
-              <a:rPr sz="1800" b="0">
+              <a:rPr sz="1500" b="0">
                 <a:solidFill>
                   <a:srgbClr val="1A1A1A"/>
                 </a:solidFill>
@@ -9170,11 +9234,11 @@
           <a:p>
             <a:pPr algn="l">
               <a:lnSpc>
-                <a:spcPct val="140000"/>
+                <a:spcPct val="135000"/>
               </a:lnSpc>
             </a:pPr>
             <a:r>
-              <a:rPr sz="1800" b="0">
+              <a:rPr sz="1500" b="0">
                 <a:solidFill>
                   <a:srgbClr val="1A1A1A"/>
                 </a:solidFill>
@@ -9194,8 +9258,8 @@
         </p:nvSpPr>
         <p:spPr>
           <a:xfrm>
-            <a:off x="8040600" y="1980000"/>
-            <a:ext cx="3600000" cy="3600000"/>
+            <a:off x="8040600" y="1728000"/>
+            <a:ext cx="3600000" cy="4140000"/>
           </a:xfrm>
           <a:prstGeom prst="rect">
             <a:avLst/>
@@ -9240,8 +9304,8 @@
         </p:nvSpPr>
         <p:spPr>
           <a:xfrm>
-            <a:off x="8040600" y="1980000"/>
-            <a:ext cx="3600000" cy="648000"/>
+            <a:off x="8040600" y="1728000"/>
+            <a:ext cx="3600000" cy="792000"/>
           </a:xfrm>
           <a:prstGeom prst="rect">
             <a:avLst/>
@@ -9284,8 +9348,8 @@
         </p:nvSpPr>
         <p:spPr>
           <a:xfrm>
-            <a:off x="8148600" y="1980000"/>
-            <a:ext cx="540000" cy="648000"/>
+            <a:off x="8148600" y="1728000"/>
+            <a:ext cx="540000" cy="792000"/>
           </a:xfrm>
           <a:prstGeom prst="rect">
             <a:avLst/>
@@ -9296,7 +9360,7 @@
           </a:ln>
         </p:spPr>
         <p:txBody>
-          <a:bodyPr wrap="square" lIns="72000" rIns="72000" tIns="36000" bIns="36000" anchor="ctr">
+          <a:bodyPr wrap="square" lIns="54000" rIns="54000" tIns="18000" bIns="18000" anchor="ctr">
             <a:spAutoFit/>
           </a:bodyPr>
           <a:lstStyle/>
@@ -9323,8 +9387,8 @@
         </p:nvSpPr>
         <p:spPr>
           <a:xfrm>
-            <a:off x="8688600" y="1980000"/>
-            <a:ext cx="2880000" cy="648000"/>
+            <a:off x="8688600" y="1728000"/>
+            <a:ext cx="2880000" cy="792000"/>
           </a:xfrm>
           <a:prstGeom prst="rect">
             <a:avLst/>
@@ -9335,14 +9399,14 @@
           </a:ln>
         </p:spPr>
         <p:txBody>
-          <a:bodyPr wrap="square" lIns="72000" rIns="72000" tIns="36000" bIns="36000" anchor="ctr">
+          <a:bodyPr wrap="square" lIns="54000" rIns="54000" tIns="18000" bIns="18000" anchor="ctr">
             <a:spAutoFit/>
           </a:bodyPr>
           <a:lstStyle/>
           <a:p>
             <a:pPr algn="l"/>
             <a:r>
-              <a:rPr sz="1700" b="1">
+              <a:rPr sz="1500" b="1">
                 <a:solidFill>
                   <a:srgbClr val="FFFFFF"/>
                 </a:solidFill>
@@ -9362,8 +9426,8 @@
         </p:nvSpPr>
         <p:spPr>
           <a:xfrm>
-            <a:off x="8220600" y="2772000"/>
-            <a:ext cx="3240000" cy="2700000"/>
+            <a:off x="8220600" y="2664000"/>
+            <a:ext cx="3240000" cy="3060000"/>
           </a:xfrm>
           <a:prstGeom prst="rect">
             <a:avLst/>
@@ -9374,18 +9438,18 @@
           </a:ln>
         </p:spPr>
         <p:txBody>
-          <a:bodyPr wrap="square" lIns="72000" rIns="72000" tIns="36000" bIns="36000" anchor="t">
+          <a:bodyPr wrap="square" lIns="54000" rIns="54000" tIns="18000" bIns="18000" anchor="t">
             <a:spAutoFit/>
           </a:bodyPr>
           <a:lstStyle/>
           <a:p>
             <a:pPr algn="l">
               <a:lnSpc>
-                <a:spcPct val="140000"/>
+                <a:spcPct val="135000"/>
               </a:lnSpc>
             </a:pPr>
             <a:r>
-              <a:rPr sz="1800" b="0">
+              <a:rPr sz="1500" b="0">
                 <a:solidFill>
                   <a:srgbClr val="1A1A1A"/>
                 </a:solidFill>
@@ -9395,7 +9459,7 @@
               <a:t>「確かめ／</a:t>
             </a:r>
             <a:r>
-              <a:rPr sz="2000" b="1">
+              <a:rPr sz="1600" b="1">
                 <a:solidFill>
                   <a:srgbClr val="FF0000"/>
                 </a:solidFill>
@@ -9408,38 +9472,45 @@
           <a:p>
             <a:pPr algn="l">
               <a:lnSpc>
-                <a:spcPct val="140000"/>
+                <a:spcPct val="135000"/>
               </a:lnSpc>
             </a:pPr>
             <a:r>
-              <a:rPr sz="1800" b="0">
+              <a:rPr sz="1500" b="0">
                 <a:solidFill>
                   <a:srgbClr val="1A1A1A"/>
                 </a:solidFill>
                 <a:latin typeface="メイリオ"/>
                 <a:ea typeface="メイリオ"/>
               </a:rPr>
-              <a:t>／感想」</a:t>
-            </a:r>
-            <a:r>
-              <a:rPr sz="1800" b="0">
-                <a:solidFill>
-                  <a:srgbClr val="1A1A1A"/>
-                </a:solidFill>
-                <a:latin typeface="メイリオ"/>
-                <a:ea typeface="メイリオ"/>
-              </a:rPr>
-              <a:t>をクラス共通の</a:t>
+              <a:t>／感想」を</a:t>
             </a:r>
           </a:p>
           <a:p>
             <a:pPr algn="l">
               <a:lnSpc>
-                <a:spcPct val="140000"/>
+                <a:spcPct val="135000"/>
               </a:lnSpc>
             </a:pPr>
             <a:r>
-              <a:rPr sz="2000" b="1">
+              <a:rPr sz="1500" b="0">
+                <a:solidFill>
+                  <a:srgbClr val="1A1A1A"/>
+                </a:solidFill>
+                <a:latin typeface="メイリオ"/>
+                <a:ea typeface="メイリオ"/>
+              </a:rPr>
+              <a:t>クラス共通の</a:t>
+            </a:r>
+          </a:p>
+          <a:p>
+            <a:pPr algn="l">
+              <a:lnSpc>
+                <a:spcPct val="135000"/>
+              </a:lnSpc>
+            </a:pPr>
+            <a:r>
+              <a:rPr sz="1600" b="1">
                 <a:solidFill>
                   <a:srgbClr val="FF0000"/>
                 </a:solidFill>
@@ -9449,7 +9520,7 @@
               <a:t>〝対話の型〟</a:t>
             </a:r>
             <a:r>
-              <a:rPr sz="1800" b="0">
+              <a:rPr sz="1500" b="0">
                 <a:solidFill>
                   <a:srgbClr val="1A1A1A"/>
                 </a:solidFill>
@@ -9481,14 +9552,14 @@
           </a:ln>
         </p:spPr>
         <p:txBody>
-          <a:bodyPr wrap="square" lIns="72000" rIns="72000" tIns="36000" bIns="36000" anchor="t">
+          <a:bodyPr wrap="square" lIns="54000" rIns="54000" tIns="18000" bIns="18000" anchor="t">
             <a:spAutoFit/>
           </a:bodyPr>
           <a:lstStyle/>
           <a:p>
             <a:pPr algn="l"/>
             <a:r>
-              <a:rPr sz="1000" b="0">
+              <a:rPr sz="900" b="0">
                 <a:solidFill>
                   <a:srgbClr val="666666"/>
                 </a:solidFill>
@@ -9520,14 +9591,14 @@
           </a:ln>
         </p:spPr>
         <p:txBody>
-          <a:bodyPr wrap="square" lIns="72000" rIns="72000" tIns="36000" bIns="36000" anchor="t">
+          <a:bodyPr wrap="square" lIns="54000" rIns="54000" tIns="18000" bIns="18000" anchor="t">
             <a:spAutoFit/>
           </a:bodyPr>
           <a:lstStyle/>
           <a:p>
             <a:pPr algn="r"/>
             <a:r>
-              <a:rPr sz="1000" b="0">
+              <a:rPr sz="900" b="0">
                 <a:solidFill>
                   <a:srgbClr val="666666"/>
                 </a:solidFill>
@@ -9566,7 +9637,7 @@
         <p:spPr>
           <a:xfrm>
             <a:off x="288000" y="144000"/>
-            <a:ext cx="9000000" cy="792000"/>
+            <a:ext cx="8280000" cy="648000"/>
           </a:xfrm>
           <a:prstGeom prst="rect">
             <a:avLst/>
@@ -9577,14 +9648,14 @@
           </a:ln>
         </p:spPr>
         <p:txBody>
-          <a:bodyPr wrap="square" lIns="72000" rIns="72000" tIns="36000" bIns="36000" anchor="ctr">
+          <a:bodyPr wrap="square" lIns="54000" rIns="54000" tIns="18000" bIns="18000" anchor="ctr">
             <a:spAutoFit/>
           </a:bodyPr>
           <a:lstStyle/>
           <a:p>
             <a:pPr algn="l"/>
             <a:r>
-              <a:rPr sz="4000" b="1">
+              <a:rPr sz="3200" b="1">
                 <a:solidFill>
                   <a:srgbClr val="1A1A1A"/>
                 </a:solidFill>
@@ -9604,8 +9675,8 @@
         </p:nvSpPr>
         <p:spPr>
           <a:xfrm>
-            <a:off x="288000" y="900000"/>
-            <a:ext cx="11617200" cy="64800"/>
+            <a:off x="288000" y="827999"/>
+            <a:ext cx="11617200" cy="54000"/>
           </a:xfrm>
           <a:prstGeom prst="rect">
             <a:avLst/>
@@ -9648,8 +9719,8 @@
         </p:nvSpPr>
         <p:spPr>
           <a:xfrm>
-            <a:off x="540000" y="1260000"/>
-            <a:ext cx="7200000" cy="4500000"/>
+            <a:off x="540000" y="1188000"/>
+            <a:ext cx="7200000" cy="4680000"/>
           </a:xfrm>
           <a:prstGeom prst="rect">
             <a:avLst/>
@@ -9694,8 +9765,8 @@
         </p:nvSpPr>
         <p:spPr>
           <a:xfrm>
-            <a:off x="540000" y="1260000"/>
-            <a:ext cx="7200000" cy="4500000"/>
+            <a:off x="540000" y="1188000"/>
+            <a:ext cx="7200000" cy="4680000"/>
           </a:xfrm>
           <a:prstGeom prst="rect">
             <a:avLst/>
@@ -9706,14 +9777,14 @@
           </a:ln>
         </p:spPr>
         <p:txBody>
-          <a:bodyPr wrap="square" lIns="72000" rIns="72000" tIns="36000" bIns="36000" anchor="ctr">
+          <a:bodyPr wrap="square" lIns="54000" rIns="54000" tIns="18000" bIns="18000" anchor="ctr">
             <a:spAutoFit/>
           </a:bodyPr>
           <a:lstStyle/>
           <a:p>
             <a:pPr algn="ctr"/>
             <a:r>
-              <a:rPr sz="2200" b="0">
+              <a:rPr sz="2000" b="0">
                 <a:solidFill>
                   <a:srgbClr val="666666"/>
                 </a:solidFill>
@@ -9726,7 +9797,7 @@
           <a:p>
             <a:pPr algn="ctr"/>
             <a:r>
-              <a:rPr sz="2200" b="0">
+              <a:rPr sz="2000" b="0">
                 <a:solidFill>
                   <a:srgbClr val="666666"/>
                 </a:solidFill>
@@ -9739,7 +9810,7 @@
           <a:p>
             <a:pPr algn="ctr"/>
             <a:r>
-              <a:rPr sz="2200" b="0">
+              <a:rPr sz="2000" b="0">
                 <a:solidFill>
                   <a:srgbClr val="666666"/>
                 </a:solidFill>
@@ -9752,7 +9823,7 @@
           <a:p>
             <a:pPr algn="ctr"/>
             <a:r>
-              <a:rPr sz="2200" b="0">
+              <a:rPr sz="2000" b="0">
                 <a:solidFill>
                   <a:srgbClr val="666666"/>
                 </a:solidFill>
@@ -9765,7 +9836,7 @@
           <a:p>
             <a:pPr algn="ctr"/>
             <a:r>
-              <a:rPr sz="2200" b="0">
+              <a:rPr sz="2000" b="0">
                 <a:solidFill>
                   <a:srgbClr val="666666"/>
                 </a:solidFill>
@@ -9778,7 +9849,7 @@
           <a:p>
             <a:pPr algn="ctr"/>
             <a:r>
-              <a:rPr sz="2200" b="0">
+              <a:rPr sz="2000" b="0">
                 <a:solidFill>
                   <a:srgbClr val="666666"/>
                 </a:solidFill>
@@ -9798,7 +9869,7 @@
         </p:nvSpPr>
         <p:spPr>
           <a:xfrm>
-            <a:off x="7920000" y="1260000"/>
+            <a:off x="7920000" y="1188000"/>
             <a:ext cx="3733200" cy="288000"/>
           </a:xfrm>
           <a:prstGeom prst="rect">
@@ -9842,8 +9913,8 @@
         </p:nvSpPr>
         <p:spPr>
           <a:xfrm>
-            <a:off x="8028000" y="1260000"/>
-            <a:ext cx="3517200" cy="288000"/>
+            <a:off x="7920000" y="1188000"/>
+            <a:ext cx="3733200" cy="288000"/>
           </a:xfrm>
           <a:prstGeom prst="rect">
             <a:avLst/>
@@ -9854,14 +9925,14 @@
           </a:ln>
         </p:spPr>
         <p:txBody>
-          <a:bodyPr wrap="square" lIns="72000" rIns="72000" tIns="36000" bIns="36000" anchor="ctr">
+          <a:bodyPr wrap="square" lIns="54000" rIns="54000" tIns="18000" bIns="18000" anchor="ctr">
             <a:spAutoFit/>
           </a:bodyPr>
           <a:lstStyle/>
           <a:p>
-            <a:pPr algn="l"/>
-            <a:r>
-              <a:rPr sz="1400" b="1">
+            <a:pPr algn="ctr"/>
+            <a:r>
+              <a:rPr sz="1300" b="1">
                 <a:solidFill>
                   <a:srgbClr val="FFFFFF"/>
                 </a:solidFill>
@@ -9881,8 +9952,8 @@
         </p:nvSpPr>
         <p:spPr>
           <a:xfrm>
-            <a:off x="7920000" y="1548000"/>
-            <a:ext cx="3733200" cy="1800000"/>
+            <a:off x="7920000" y="1476000"/>
+            <a:ext cx="3733200" cy="1980000"/>
           </a:xfrm>
           <a:prstGeom prst="rect">
             <a:avLst/>
@@ -9927,8 +9998,8 @@
         </p:nvSpPr>
         <p:spPr>
           <a:xfrm>
-            <a:off x="8028000" y="1620000"/>
-            <a:ext cx="3517200" cy="1728000"/>
+            <a:off x="8010000" y="1548000"/>
+            <a:ext cx="3553200" cy="1835999"/>
           </a:xfrm>
           <a:prstGeom prst="rect">
             <a:avLst/>
@@ -9939,7 +10010,7 @@
           </a:ln>
         </p:spPr>
         <p:txBody>
-          <a:bodyPr wrap="square" lIns="72000" rIns="72000" tIns="36000" bIns="36000" anchor="t">
+          <a:bodyPr wrap="square" lIns="54000" rIns="54000" tIns="18000" bIns="18000" anchor="t">
             <a:spAutoFit/>
           </a:bodyPr>
           <a:lstStyle/>
@@ -9950,14 +10021,14 @@
               </a:lnSpc>
             </a:pPr>
             <a:r>
-              <a:rPr sz="1500" b="1">
+              <a:rPr sz="1400" b="1">
                 <a:solidFill>
                   <a:srgbClr val="FF0000"/>
                 </a:solidFill>
                 <a:latin typeface="メイリオ"/>
                 <a:ea typeface="メイリオ"/>
               </a:rPr>
-              <a:t>「いつ・どこで・だれが」</a:t>
+              <a:t>「いつ・</a:t>
             </a:r>
           </a:p>
           <a:p>
@@ -9967,14 +10038,14 @@
               </a:lnSpc>
             </a:pPr>
             <a:r>
-              <a:rPr sz="1400" b="0">
-                <a:solidFill>
-                  <a:srgbClr val="1A1A1A"/>
-                </a:solidFill>
-                <a:latin typeface="メイリオ"/>
-                <a:ea typeface="メイリオ"/>
-              </a:rPr>
-              <a:t>の板書整理が、</a:t>
+              <a:rPr sz="1400" b="1">
+                <a:solidFill>
+                  <a:srgbClr val="FF0000"/>
+                </a:solidFill>
+                <a:latin typeface="メイリオ"/>
+                <a:ea typeface="メイリオ"/>
+              </a:rPr>
+              <a:t>どこで・だれが」</a:t>
             </a:r>
           </a:p>
           <a:p>
@@ -9984,14 +10055,14 @@
               </a:lnSpc>
             </a:pPr>
             <a:r>
-              <a:rPr sz="1400" b="0">
+              <a:rPr sz="1300" b="0">
                 <a:solidFill>
                   <a:srgbClr val="1A1A1A"/>
                 </a:solidFill>
                 <a:latin typeface="メイリオ"/>
                 <a:ea typeface="メイリオ"/>
               </a:rPr>
-              <a:t>児童の質問を</a:t>
+              <a:t>の板書整理が、</a:t>
             </a:r>
           </a:p>
           <a:p>
@@ -10001,7 +10072,24 @@
               </a:lnSpc>
             </a:pPr>
             <a:r>
-              <a:rPr sz="1500" b="1">
+              <a:rPr sz="1300" b="0">
+                <a:solidFill>
+                  <a:srgbClr val="1A1A1A"/>
+                </a:solidFill>
+                <a:latin typeface="メイリオ"/>
+                <a:ea typeface="メイリオ"/>
+              </a:rPr>
+              <a:t>児童の質問を</a:t>
+            </a:r>
+          </a:p>
+          <a:p>
+            <a:pPr algn="l">
+              <a:lnSpc>
+                <a:spcPct val="130000"/>
+              </a:lnSpc>
+            </a:pPr>
+            <a:r>
+              <a:rPr sz="1400" b="1">
                 <a:solidFill>
                   <a:srgbClr val="FF0000"/>
                 </a:solidFill>
@@ -10011,7 +10099,7 @@
               <a:t>〝見える化〟</a:t>
             </a:r>
             <a:r>
-              <a:rPr sz="1400" b="0">
+              <a:rPr sz="1300" b="0">
                 <a:solidFill>
                   <a:srgbClr val="1A1A1A"/>
                 </a:solidFill>
@@ -10031,7 +10119,7 @@
         </p:nvSpPr>
         <p:spPr>
           <a:xfrm>
-            <a:off x="7920000" y="3600000"/>
+            <a:off x="7920000" y="3708000"/>
             <a:ext cx="3733200" cy="288000"/>
           </a:xfrm>
           <a:prstGeom prst="rect">
@@ -10075,8 +10163,8 @@
         </p:nvSpPr>
         <p:spPr>
           <a:xfrm>
-            <a:off x="8028000" y="3600000"/>
-            <a:ext cx="3517200" cy="288000"/>
+            <a:off x="7920000" y="3708000"/>
+            <a:ext cx="3733200" cy="288000"/>
           </a:xfrm>
           <a:prstGeom prst="rect">
             <a:avLst/>
@@ -10087,14 +10175,14 @@
           </a:ln>
         </p:spPr>
         <p:txBody>
-          <a:bodyPr wrap="square" lIns="72000" rIns="72000" tIns="36000" bIns="36000" anchor="ctr">
+          <a:bodyPr wrap="square" lIns="54000" rIns="54000" tIns="18000" bIns="18000" anchor="ctr">
             <a:spAutoFit/>
           </a:bodyPr>
           <a:lstStyle/>
           <a:p>
-            <a:pPr algn="l"/>
-            <a:r>
-              <a:rPr sz="1400" b="1">
+            <a:pPr algn="ctr"/>
+            <a:r>
+              <a:rPr sz="1300" b="1">
                 <a:solidFill>
                   <a:srgbClr val="FFFFFF"/>
                 </a:solidFill>
@@ -10114,8 +10202,8 @@
         </p:nvSpPr>
         <p:spPr>
           <a:xfrm>
-            <a:off x="7920000" y="3888000"/>
-            <a:ext cx="3733200" cy="1872000"/>
+            <a:off x="7920000" y="3996000"/>
+            <a:ext cx="3733200" cy="1980000"/>
           </a:xfrm>
           <a:prstGeom prst="rect">
             <a:avLst/>
@@ -10160,8 +10248,8 @@
         </p:nvSpPr>
         <p:spPr>
           <a:xfrm>
-            <a:off x="8028000" y="3960000"/>
-            <a:ext cx="3517200" cy="1800000"/>
+            <a:off x="8010000" y="4068000"/>
+            <a:ext cx="3553200" cy="1835999"/>
           </a:xfrm>
           <a:prstGeom prst="rect">
             <a:avLst/>
@@ -10172,7 +10260,7 @@
           </a:ln>
         </p:spPr>
         <p:txBody>
-          <a:bodyPr wrap="square" lIns="72000" rIns="72000" tIns="36000" bIns="36000" anchor="t">
+          <a:bodyPr wrap="square" lIns="54000" rIns="54000" tIns="18000" bIns="18000" anchor="t">
             <a:spAutoFit/>
           </a:bodyPr>
           <a:lstStyle/>
@@ -10183,7 +10271,7 @@
               </a:lnSpc>
             </a:pPr>
             <a:r>
-              <a:rPr sz="1400" b="0">
+              <a:rPr sz="1300" b="0">
                 <a:solidFill>
                   <a:srgbClr val="1A1A1A"/>
                 </a:solidFill>
@@ -10200,7 +10288,7 @@
               </a:lnSpc>
             </a:pPr>
             <a:r>
-              <a:rPr sz="1400" b="0">
+              <a:rPr sz="1300" b="0">
                 <a:solidFill>
                   <a:srgbClr val="1A1A1A"/>
                 </a:solidFill>
@@ -10210,7 +10298,7 @@
               <a:t>ペアで</a:t>
             </a:r>
             <a:r>
-              <a:rPr sz="1500" b="1">
+              <a:rPr sz="1400" b="1">
                 <a:solidFill>
                   <a:srgbClr val="FF0000"/>
                 </a:solidFill>
@@ -10220,7 +10308,7 @@
               <a:t>安心して</a:t>
             </a:r>
             <a:r>
-              <a:rPr sz="1400" b="0">
+              <a:rPr sz="1300" b="0">
                 <a:solidFill>
                   <a:srgbClr val="1A1A1A"/>
                 </a:solidFill>
@@ -10237,7 +10325,7 @@
               </a:lnSpc>
             </a:pPr>
             <a:r>
-              <a:rPr sz="1500" b="1">
+              <a:rPr sz="1400" b="1">
                 <a:solidFill>
                   <a:srgbClr val="FF0000"/>
                 </a:solidFill>
@@ -10247,7 +10335,7 @@
               <a:t>書く時間の確保</a:t>
             </a:r>
             <a:r>
-              <a:rPr sz="1400" b="0">
+              <a:rPr sz="1300" b="0">
                 <a:solidFill>
                   <a:srgbClr val="1A1A1A"/>
                 </a:solidFill>
@@ -10264,7 +10352,7 @@
               </a:lnSpc>
             </a:pPr>
             <a:r>
-              <a:rPr sz="1400" b="0">
+              <a:rPr sz="1300" b="0">
                 <a:solidFill>
                   <a:srgbClr val="1A1A1A"/>
                 </a:solidFill>
@@ -10296,14 +10384,14 @@
           </a:ln>
         </p:spPr>
         <p:txBody>
-          <a:bodyPr wrap="square" lIns="72000" rIns="72000" tIns="36000" bIns="36000" anchor="t">
+          <a:bodyPr wrap="square" lIns="54000" rIns="54000" tIns="18000" bIns="18000" anchor="t">
             <a:spAutoFit/>
           </a:bodyPr>
           <a:lstStyle/>
           <a:p>
             <a:pPr algn="l"/>
             <a:r>
-              <a:rPr sz="1000" b="0">
+              <a:rPr sz="900" b="0">
                 <a:solidFill>
                   <a:srgbClr val="666666"/>
                 </a:solidFill>
@@ -10335,14 +10423,14 @@
           </a:ln>
         </p:spPr>
         <p:txBody>
-          <a:bodyPr wrap="square" lIns="72000" rIns="72000" tIns="36000" bIns="36000" anchor="t">
+          <a:bodyPr wrap="square" lIns="54000" rIns="54000" tIns="18000" bIns="18000" anchor="t">
             <a:spAutoFit/>
           </a:bodyPr>
           <a:lstStyle/>
           <a:p>
             <a:pPr algn="r"/>
             <a:r>
-              <a:rPr sz="1000" b="0">
+              <a:rPr sz="900" b="0">
                 <a:solidFill>
                   <a:srgbClr val="666666"/>
                 </a:solidFill>
@@ -10381,7 +10469,7 @@
         <p:spPr>
           <a:xfrm>
             <a:off x="288000" y="144000"/>
-            <a:ext cx="9000000" cy="792000"/>
+            <a:ext cx="8280000" cy="648000"/>
           </a:xfrm>
           <a:prstGeom prst="rect">
             <a:avLst/>
@@ -10392,14 +10480,14 @@
           </a:ln>
         </p:spPr>
         <p:txBody>
-          <a:bodyPr wrap="square" lIns="72000" rIns="72000" tIns="36000" bIns="36000" anchor="ctr">
+          <a:bodyPr wrap="square" lIns="54000" rIns="54000" tIns="18000" bIns="18000" anchor="ctr">
             <a:spAutoFit/>
           </a:bodyPr>
           <a:lstStyle/>
           <a:p>
             <a:pPr algn="l"/>
             <a:r>
-              <a:rPr sz="4000" b="1">
+              <a:rPr sz="3200" b="1">
                 <a:solidFill>
                   <a:srgbClr val="1A1A1A"/>
                 </a:solidFill>
@@ -10419,8 +10507,8 @@
         </p:nvSpPr>
         <p:spPr>
           <a:xfrm>
-            <a:off x="288000" y="900000"/>
-            <a:ext cx="11617200" cy="64800"/>
+            <a:off x="288000" y="827999"/>
+            <a:ext cx="11617200" cy="54000"/>
           </a:xfrm>
           <a:prstGeom prst="rect">
             <a:avLst/>
@@ -10463,8 +10551,8 @@
         </p:nvSpPr>
         <p:spPr>
           <a:xfrm>
-            <a:off x="540000" y="1260000"/>
-            <a:ext cx="6120000" cy="2160000"/>
+            <a:off x="540000" y="1188000"/>
+            <a:ext cx="6120000" cy="2268000"/>
           </a:xfrm>
           <a:prstGeom prst="rect">
             <a:avLst/>
@@ -10509,8 +10597,8 @@
         </p:nvSpPr>
         <p:spPr>
           <a:xfrm>
-            <a:off x="540000" y="1260000"/>
-            <a:ext cx="6120000" cy="2160000"/>
+            <a:off x="540000" y="1188000"/>
+            <a:ext cx="6120000" cy="2268000"/>
           </a:xfrm>
           <a:prstGeom prst="rect">
             <a:avLst/>
@@ -10521,14 +10609,14 @@
           </a:ln>
         </p:spPr>
         <p:txBody>
-          <a:bodyPr wrap="square" lIns="72000" rIns="72000" tIns="36000" bIns="36000" anchor="ctr">
+          <a:bodyPr wrap="square" lIns="54000" rIns="54000" tIns="18000" bIns="18000" anchor="ctr">
             <a:spAutoFit/>
           </a:bodyPr>
           <a:lstStyle/>
           <a:p>
             <a:pPr algn="ctr"/>
             <a:r>
-              <a:rPr sz="1800" b="0">
+              <a:rPr sz="1600" b="0">
                 <a:solidFill>
                   <a:srgbClr val="666666"/>
                 </a:solidFill>
@@ -10549,7 +10637,7 @@
         <p:spPr>
           <a:xfrm>
             <a:off x="540000" y="3671999"/>
-            <a:ext cx="6120000" cy="2160000"/>
+            <a:ext cx="6120000" cy="2268000"/>
           </a:xfrm>
           <a:prstGeom prst="rect">
             <a:avLst/>
@@ -10595,7 +10683,7 @@
         <p:spPr>
           <a:xfrm>
             <a:off x="540000" y="3671999"/>
-            <a:ext cx="6120000" cy="2160000"/>
+            <a:ext cx="6120000" cy="2268000"/>
           </a:xfrm>
           <a:prstGeom prst="rect">
             <a:avLst/>
@@ -10606,14 +10694,14 @@
           </a:ln>
         </p:spPr>
         <p:txBody>
-          <a:bodyPr wrap="square" lIns="72000" rIns="72000" tIns="36000" bIns="36000" anchor="ctr">
+          <a:bodyPr wrap="square" lIns="54000" rIns="54000" tIns="18000" bIns="18000" anchor="ctr">
             <a:spAutoFit/>
           </a:bodyPr>
           <a:lstStyle/>
           <a:p>
             <a:pPr algn="ctr"/>
             <a:r>
-              <a:rPr sz="1800" b="0">
+              <a:rPr sz="1600" b="0">
                 <a:solidFill>
                   <a:srgbClr val="666666"/>
                 </a:solidFill>
@@ -10633,7 +10721,7 @@
         </p:nvSpPr>
         <p:spPr>
           <a:xfrm>
-            <a:off x="6840000" y="1260000"/>
+            <a:off x="6840000" y="1188000"/>
             <a:ext cx="4813200" cy="576000"/>
           </a:xfrm>
           <a:prstGeom prst="rect">
@@ -10677,7 +10765,7 @@
         </p:nvSpPr>
         <p:spPr>
           <a:xfrm>
-            <a:off x="6840000" y="1260000"/>
+            <a:off x="6840000" y="1188000"/>
             <a:ext cx="4813200" cy="576000"/>
           </a:xfrm>
           <a:prstGeom prst="rect">
@@ -10689,14 +10777,14 @@
           </a:ln>
         </p:spPr>
         <p:txBody>
-          <a:bodyPr wrap="square" lIns="72000" rIns="72000" tIns="36000" bIns="36000" anchor="ctr">
+          <a:bodyPr wrap="square" lIns="54000" rIns="54000" tIns="18000" bIns="18000" anchor="ctr">
             <a:spAutoFit/>
           </a:bodyPr>
           <a:lstStyle/>
           <a:p>
             <a:pPr algn="ctr"/>
             <a:r>
-              <a:rPr sz="1600" b="1">
+              <a:rPr sz="1500" b="1">
                 <a:solidFill>
                   <a:srgbClr val="FFFFFF"/>
                 </a:solidFill>
@@ -10709,7 +10797,7 @@
           <a:p>
             <a:pPr algn="ctr"/>
             <a:r>
-              <a:rPr sz="1600" b="1">
+              <a:rPr sz="1500" b="1">
                 <a:solidFill>
                   <a:srgbClr val="FFFFFF"/>
                 </a:solidFill>
@@ -10729,8 +10817,8 @@
         </p:nvSpPr>
         <p:spPr>
           <a:xfrm>
-            <a:off x="6840000" y="1908000"/>
-            <a:ext cx="4813200" cy="1152000"/>
+            <a:off x="6840000" y="1835999"/>
+            <a:ext cx="4813200" cy="1332000"/>
           </a:xfrm>
           <a:prstGeom prst="rect">
             <a:avLst/>
@@ -10775,8 +10863,8 @@
         </p:nvSpPr>
         <p:spPr>
           <a:xfrm>
-            <a:off x="6912000" y="1908000"/>
-            <a:ext cx="432000" cy="1152000"/>
+            <a:off x="6894000" y="1835999"/>
+            <a:ext cx="396000" cy="1332000"/>
           </a:xfrm>
           <a:prstGeom prst="rect">
             <a:avLst/>
@@ -10787,14 +10875,14 @@
           </a:ln>
         </p:spPr>
         <p:txBody>
-          <a:bodyPr wrap="square" lIns="72000" rIns="72000" tIns="36000" bIns="36000" anchor="ctr">
+          <a:bodyPr wrap="square" lIns="54000" rIns="54000" tIns="18000" bIns="18000" anchor="ctr">
             <a:spAutoFit/>
           </a:bodyPr>
           <a:lstStyle/>
           <a:p>
             <a:pPr algn="ctr"/>
             <a:r>
-              <a:rPr sz="2200" b="1">
+              <a:rPr sz="2000" b="1">
                 <a:solidFill>
                   <a:srgbClr val="FF0000"/>
                 </a:solidFill>
@@ -10814,8 +10902,8 @@
         </p:nvSpPr>
         <p:spPr>
           <a:xfrm>
-            <a:off x="7343999" y="1980000"/>
-            <a:ext cx="4237200" cy="503999"/>
+            <a:off x="7308000" y="1925999"/>
+            <a:ext cx="4309201" cy="576000"/>
           </a:xfrm>
           <a:prstGeom prst="rect">
             <a:avLst/>
@@ -10826,14 +10914,14 @@
           </a:ln>
         </p:spPr>
         <p:txBody>
-          <a:bodyPr wrap="square" lIns="72000" rIns="72000" tIns="36000" bIns="36000" anchor="t">
+          <a:bodyPr wrap="square" lIns="54000" rIns="54000" tIns="18000" bIns="18000" anchor="t">
             <a:spAutoFit/>
           </a:bodyPr>
           <a:lstStyle/>
           <a:p>
             <a:pPr algn="l"/>
             <a:r>
-              <a:rPr sz="1400" b="1">
+              <a:rPr sz="1300" b="1">
                 <a:solidFill>
                   <a:srgbClr val="002060"/>
                 </a:solidFill>
@@ -10853,8 +10941,8 @@
         </p:nvSpPr>
         <p:spPr>
           <a:xfrm>
-            <a:off x="7343999" y="2484000"/>
-            <a:ext cx="4237200" cy="576000"/>
+            <a:off x="7308000" y="2519999"/>
+            <a:ext cx="4309201" cy="612000"/>
           </a:xfrm>
           <a:prstGeom prst="rect">
             <a:avLst/>
@@ -10865,14 +10953,14 @@
           </a:ln>
         </p:spPr>
         <p:txBody>
-          <a:bodyPr wrap="square" lIns="72000" rIns="72000" tIns="36000" bIns="36000" anchor="t">
+          <a:bodyPr wrap="square" lIns="54000" rIns="54000" tIns="18000" bIns="18000" anchor="t">
             <a:spAutoFit/>
           </a:bodyPr>
           <a:lstStyle/>
           <a:p>
             <a:pPr algn="l"/>
             <a:r>
-              <a:rPr sz="1100" b="0">
+              <a:rPr sz="1000" b="0">
                 <a:solidFill>
                   <a:srgbClr val="1A1A1A"/>
                 </a:solidFill>
@@ -10885,7 +10973,7 @@
           <a:p>
             <a:pPr algn="l"/>
             <a:r>
-              <a:rPr sz="1100" b="0">
+              <a:rPr sz="1000" b="0">
                 <a:solidFill>
                   <a:srgbClr val="1A1A1A"/>
                 </a:solidFill>
@@ -10905,8 +10993,8 @@
         </p:nvSpPr>
         <p:spPr>
           <a:xfrm>
-            <a:off x="6840000" y="3114000"/>
-            <a:ext cx="4813200" cy="1152000"/>
+            <a:off x="6840000" y="3221999"/>
+            <a:ext cx="4813200" cy="1332000"/>
           </a:xfrm>
           <a:prstGeom prst="rect">
             <a:avLst/>
@@ -10951,8 +11039,8 @@
         </p:nvSpPr>
         <p:spPr>
           <a:xfrm>
-            <a:off x="6912000" y="3114000"/>
-            <a:ext cx="432000" cy="1152000"/>
+            <a:off x="6894000" y="3221999"/>
+            <a:ext cx="396000" cy="1332000"/>
           </a:xfrm>
           <a:prstGeom prst="rect">
             <a:avLst/>
@@ -10963,14 +11051,14 @@
           </a:ln>
         </p:spPr>
         <p:txBody>
-          <a:bodyPr wrap="square" lIns="72000" rIns="72000" tIns="36000" bIns="36000" anchor="ctr">
+          <a:bodyPr wrap="square" lIns="54000" rIns="54000" tIns="18000" bIns="18000" anchor="ctr">
             <a:spAutoFit/>
           </a:bodyPr>
           <a:lstStyle/>
           <a:p>
             <a:pPr algn="ctr"/>
             <a:r>
-              <a:rPr sz="2200" b="1">
+              <a:rPr sz="2000" b="1">
                 <a:solidFill>
                   <a:srgbClr val="FF0000"/>
                 </a:solidFill>
@@ -10990,8 +11078,8 @@
         </p:nvSpPr>
         <p:spPr>
           <a:xfrm>
-            <a:off x="7343999" y="3186000"/>
-            <a:ext cx="4237200" cy="503999"/>
+            <a:off x="7308000" y="3311999"/>
+            <a:ext cx="4309201" cy="576000"/>
           </a:xfrm>
           <a:prstGeom prst="rect">
             <a:avLst/>
@@ -11002,14 +11090,14 @@
           </a:ln>
         </p:spPr>
         <p:txBody>
-          <a:bodyPr wrap="square" lIns="72000" rIns="72000" tIns="36000" bIns="36000" anchor="t">
+          <a:bodyPr wrap="square" lIns="54000" rIns="54000" tIns="18000" bIns="18000" anchor="t">
             <a:spAutoFit/>
           </a:bodyPr>
           <a:lstStyle/>
           <a:p>
             <a:pPr algn="l"/>
             <a:r>
-              <a:rPr sz="1400" b="1">
+              <a:rPr sz="1300" b="1">
                 <a:solidFill>
                   <a:srgbClr val="002060"/>
                 </a:solidFill>
@@ -11022,7 +11110,7 @@
           <a:p>
             <a:pPr algn="l"/>
             <a:r>
-              <a:rPr sz="1400" b="1">
+              <a:rPr sz="1300" b="1">
                 <a:solidFill>
                   <a:srgbClr val="002060"/>
                 </a:solidFill>
@@ -11042,8 +11130,8 @@
         </p:nvSpPr>
         <p:spPr>
           <a:xfrm>
-            <a:off x="7343999" y="3690000"/>
-            <a:ext cx="4237200" cy="576000"/>
+            <a:off x="7308000" y="3905999"/>
+            <a:ext cx="4309201" cy="612000"/>
           </a:xfrm>
           <a:prstGeom prst="rect">
             <a:avLst/>
@@ -11054,14 +11142,14 @@
           </a:ln>
         </p:spPr>
         <p:txBody>
-          <a:bodyPr wrap="square" lIns="72000" rIns="72000" tIns="36000" bIns="36000" anchor="t">
+          <a:bodyPr wrap="square" lIns="54000" rIns="54000" tIns="18000" bIns="18000" anchor="t">
             <a:spAutoFit/>
           </a:bodyPr>
           <a:lstStyle/>
           <a:p>
             <a:pPr algn="l"/>
             <a:r>
-              <a:rPr sz="1100" b="0">
+              <a:rPr sz="1000" b="0">
                 <a:solidFill>
                   <a:srgbClr val="1A1A1A"/>
                 </a:solidFill>
@@ -11074,7 +11162,7 @@
           <a:p>
             <a:pPr algn="l"/>
             <a:r>
-              <a:rPr sz="1100" b="0">
+              <a:rPr sz="1000" b="0">
                 <a:solidFill>
                   <a:srgbClr val="1A1A1A"/>
                 </a:solidFill>
@@ -11094,8 +11182,8 @@
         </p:nvSpPr>
         <p:spPr>
           <a:xfrm>
-            <a:off x="6840000" y="4320000"/>
-            <a:ext cx="4813200" cy="1152000"/>
+            <a:off x="6840000" y="4607999"/>
+            <a:ext cx="4813200" cy="1332000"/>
           </a:xfrm>
           <a:prstGeom prst="rect">
             <a:avLst/>
@@ -11140,8 +11228,8 @@
         </p:nvSpPr>
         <p:spPr>
           <a:xfrm>
-            <a:off x="6912000" y="4320000"/>
-            <a:ext cx="432000" cy="1152000"/>
+            <a:off x="6894000" y="4607999"/>
+            <a:ext cx="396000" cy="1332000"/>
           </a:xfrm>
           <a:prstGeom prst="rect">
             <a:avLst/>
@@ -11152,14 +11240,14 @@
           </a:ln>
         </p:spPr>
         <p:txBody>
-          <a:bodyPr wrap="square" lIns="72000" rIns="72000" tIns="36000" bIns="36000" anchor="ctr">
+          <a:bodyPr wrap="square" lIns="54000" rIns="54000" tIns="18000" bIns="18000" anchor="ctr">
             <a:spAutoFit/>
           </a:bodyPr>
           <a:lstStyle/>
           <a:p>
             <a:pPr algn="ctr"/>
             <a:r>
-              <a:rPr sz="2200" b="1">
+              <a:rPr sz="2000" b="1">
                 <a:solidFill>
                   <a:srgbClr val="FF0000"/>
                 </a:solidFill>
@@ -11179,8 +11267,8 @@
         </p:nvSpPr>
         <p:spPr>
           <a:xfrm>
-            <a:off x="7343999" y="4392000"/>
-            <a:ext cx="4237200" cy="503999"/>
+            <a:off x="7308000" y="4697999"/>
+            <a:ext cx="4309201" cy="576000"/>
           </a:xfrm>
           <a:prstGeom prst="rect">
             <a:avLst/>
@@ -11191,14 +11279,14 @@
           </a:ln>
         </p:spPr>
         <p:txBody>
-          <a:bodyPr wrap="square" lIns="72000" rIns="72000" tIns="36000" bIns="36000" anchor="t">
+          <a:bodyPr wrap="square" lIns="54000" rIns="54000" tIns="18000" bIns="18000" anchor="t">
             <a:spAutoFit/>
           </a:bodyPr>
           <a:lstStyle/>
           <a:p>
             <a:pPr algn="l"/>
             <a:r>
-              <a:rPr sz="1400" b="1">
+              <a:rPr sz="1300" b="1">
                 <a:solidFill>
                   <a:srgbClr val="002060"/>
                 </a:solidFill>
@@ -11218,8 +11306,8 @@
         </p:nvSpPr>
         <p:spPr>
           <a:xfrm>
-            <a:off x="7343999" y="4896000"/>
-            <a:ext cx="4237200" cy="576000"/>
+            <a:off x="7308000" y="5291999"/>
+            <a:ext cx="4309201" cy="612000"/>
           </a:xfrm>
           <a:prstGeom prst="rect">
             <a:avLst/>
@@ -11230,14 +11318,14 @@
           </a:ln>
         </p:spPr>
         <p:txBody>
-          <a:bodyPr wrap="square" lIns="72000" rIns="72000" tIns="36000" bIns="36000" anchor="t">
+          <a:bodyPr wrap="square" lIns="54000" rIns="54000" tIns="18000" bIns="18000" anchor="t">
             <a:spAutoFit/>
           </a:bodyPr>
           <a:lstStyle/>
           <a:p>
             <a:pPr algn="l"/>
             <a:r>
-              <a:rPr sz="1100" b="0">
+              <a:rPr sz="1000" b="0">
                 <a:solidFill>
                   <a:srgbClr val="1A1A1A"/>
                 </a:solidFill>
@@ -11250,7 +11338,7 @@
           <a:p>
             <a:pPr algn="l"/>
             <a:r>
-              <a:rPr sz="1100" b="0">
+              <a:rPr sz="1000" b="0">
                 <a:solidFill>
                   <a:srgbClr val="1A1A1A"/>
                 </a:solidFill>
@@ -11282,14 +11370,14 @@
           </a:ln>
         </p:spPr>
         <p:txBody>
-          <a:bodyPr wrap="square" lIns="72000" rIns="72000" tIns="36000" bIns="36000" anchor="t">
+          <a:bodyPr wrap="square" lIns="54000" rIns="54000" tIns="18000" bIns="18000" anchor="t">
             <a:spAutoFit/>
           </a:bodyPr>
           <a:lstStyle/>
           <a:p>
             <a:pPr algn="l"/>
             <a:r>
-              <a:rPr sz="1000" b="0">
+              <a:rPr sz="900" b="0">
                 <a:solidFill>
                   <a:srgbClr val="666666"/>
                 </a:solidFill>
@@ -11321,14 +11409,14 @@
           </a:ln>
         </p:spPr>
         <p:txBody>
-          <a:bodyPr wrap="square" lIns="72000" rIns="72000" tIns="36000" bIns="36000" anchor="t">
+          <a:bodyPr wrap="square" lIns="54000" rIns="54000" tIns="18000" bIns="18000" anchor="t">
             <a:spAutoFit/>
           </a:bodyPr>
           <a:lstStyle/>
           <a:p>
             <a:pPr algn="r"/>
             <a:r>
-              <a:rPr sz="1000" b="0">
+              <a:rPr sz="900" b="0">
                 <a:solidFill>
                   <a:srgbClr val="666666"/>
                 </a:solidFill>
@@ -11367,7 +11455,7 @@
         <p:spPr>
           <a:xfrm>
             <a:off x="288000" y="144000"/>
-            <a:ext cx="9000000" cy="792000"/>
+            <a:ext cx="8280000" cy="648000"/>
           </a:xfrm>
           <a:prstGeom prst="rect">
             <a:avLst/>
@@ -11378,14 +11466,14 @@
           </a:ln>
         </p:spPr>
         <p:txBody>
-          <a:bodyPr wrap="square" lIns="72000" rIns="72000" tIns="36000" bIns="36000" anchor="ctr">
+          <a:bodyPr wrap="square" lIns="54000" rIns="54000" tIns="18000" bIns="18000" anchor="ctr">
             <a:spAutoFit/>
           </a:bodyPr>
           <a:lstStyle/>
           <a:p>
             <a:pPr algn="l"/>
             <a:r>
-              <a:rPr sz="4000" b="1">
+              <a:rPr sz="3200" b="1">
                 <a:solidFill>
                   <a:srgbClr val="1A1A1A"/>
                 </a:solidFill>
@@ -11405,8 +11493,8 @@
         </p:nvSpPr>
         <p:spPr>
           <a:xfrm>
-            <a:off x="288000" y="900000"/>
-            <a:ext cx="11617200" cy="64800"/>
+            <a:off x="288000" y="827999"/>
+            <a:ext cx="11617200" cy="54000"/>
           </a:xfrm>
           <a:prstGeom prst="rect">
             <a:avLst/>
@@ -11449,7 +11537,7 @@
         </p:nvSpPr>
         <p:spPr>
           <a:xfrm>
-            <a:off x="540000" y="1224000"/>
+            <a:off x="540000" y="1152000"/>
             <a:ext cx="1800000" cy="432000"/>
           </a:xfrm>
           <a:prstGeom prst="rect">
@@ -11493,7 +11581,7 @@
         </p:nvSpPr>
         <p:spPr>
           <a:xfrm>
-            <a:off x="540000" y="1224000"/>
+            <a:off x="540000" y="1152000"/>
             <a:ext cx="1800000" cy="432000"/>
           </a:xfrm>
           <a:prstGeom prst="rect">
@@ -11505,14 +11593,14 @@
           </a:ln>
         </p:spPr>
         <p:txBody>
-          <a:bodyPr wrap="square" lIns="72000" rIns="72000" tIns="36000" bIns="36000" anchor="ctr">
+          <a:bodyPr wrap="square" lIns="54000" rIns="54000" tIns="18000" bIns="18000" anchor="ctr">
             <a:spAutoFit/>
           </a:bodyPr>
           <a:lstStyle/>
           <a:p>
             <a:pPr algn="ctr"/>
             <a:r>
-              <a:rPr sz="1800" b="1">
+              <a:rPr sz="1600" b="1">
                 <a:solidFill>
                   <a:srgbClr val="FFFFFF"/>
                 </a:solidFill>
@@ -11532,7 +11620,7 @@
         </p:nvSpPr>
         <p:spPr>
           <a:xfrm>
-            <a:off x="2340000" y="1224000"/>
+            <a:off x="2340000" y="1152000"/>
             <a:ext cx="9313200" cy="432000"/>
           </a:xfrm>
           <a:prstGeom prst="rect">
@@ -11578,7 +11666,7 @@
         </p:nvSpPr>
         <p:spPr>
           <a:xfrm>
-            <a:off x="2340000" y="1224000"/>
+            <a:off x="2340000" y="1152000"/>
             <a:ext cx="9313200" cy="432000"/>
           </a:xfrm>
           <a:prstGeom prst="rect">
@@ -11590,14 +11678,14 @@
           </a:ln>
         </p:spPr>
         <p:txBody>
-          <a:bodyPr wrap="square" lIns="72000" rIns="72000" tIns="36000" bIns="36000" anchor="ctr">
+          <a:bodyPr wrap="square" lIns="54000" rIns="54000" tIns="18000" bIns="18000" anchor="ctr">
             <a:spAutoFit/>
           </a:bodyPr>
           <a:lstStyle/>
           <a:p>
             <a:pPr algn="ctr"/>
             <a:r>
-              <a:rPr sz="2200" b="1">
+              <a:rPr sz="2000" b="1">
                 <a:solidFill>
                   <a:srgbClr val="002060"/>
                 </a:solidFill>
@@ -11617,8 +11705,8 @@
         </p:nvSpPr>
         <p:spPr>
           <a:xfrm>
-            <a:off x="540000" y="1872000"/>
-            <a:ext cx="1800000" cy="900000"/>
+            <a:off x="540000" y="1692000"/>
+            <a:ext cx="1800000" cy="1007999"/>
           </a:xfrm>
           <a:prstGeom prst="rect">
             <a:avLst/>
@@ -11661,8 +11749,8 @@
         </p:nvSpPr>
         <p:spPr>
           <a:xfrm>
-            <a:off x="540000" y="1872000"/>
-            <a:ext cx="1800000" cy="900000"/>
+            <a:off x="540000" y="1692000"/>
+            <a:ext cx="1800000" cy="1007999"/>
           </a:xfrm>
           <a:prstGeom prst="rect">
             <a:avLst/>
@@ -11673,14 +11761,14 @@
           </a:ln>
         </p:spPr>
         <p:txBody>
-          <a:bodyPr wrap="square" lIns="72000" rIns="72000" tIns="36000" bIns="36000" anchor="ctr">
+          <a:bodyPr wrap="square" lIns="54000" rIns="54000" tIns="18000" bIns="18000" anchor="ctr">
             <a:spAutoFit/>
           </a:bodyPr>
           <a:lstStyle/>
           <a:p>
             <a:pPr algn="ctr"/>
             <a:r>
-              <a:rPr sz="1800" b="1">
+              <a:rPr sz="1600" b="1">
                 <a:solidFill>
                   <a:srgbClr val="FFFFFF"/>
                 </a:solidFill>
@@ -11700,8 +11788,8 @@
         </p:nvSpPr>
         <p:spPr>
           <a:xfrm>
-            <a:off x="2340000" y="1872000"/>
-            <a:ext cx="9313200" cy="900000"/>
+            <a:off x="2340000" y="1692000"/>
+            <a:ext cx="9313200" cy="1007999"/>
           </a:xfrm>
           <a:prstGeom prst="rect">
             <a:avLst/>
@@ -11746,8 +11834,8 @@
         </p:nvSpPr>
         <p:spPr>
           <a:xfrm>
-            <a:off x="2448000" y="1944000"/>
-            <a:ext cx="9097200" cy="756000"/>
+            <a:off x="2448000" y="1764000"/>
+            <a:ext cx="9097200" cy="864000"/>
           </a:xfrm>
           <a:prstGeom prst="rect">
             <a:avLst/>
@@ -11758,7 +11846,7 @@
           </a:ln>
         </p:spPr>
         <p:txBody>
-          <a:bodyPr wrap="square" lIns="72000" rIns="72000" tIns="36000" bIns="36000" anchor="t">
+          <a:bodyPr wrap="square" lIns="54000" rIns="54000" tIns="18000" bIns="18000" anchor="ctr">
             <a:spAutoFit/>
           </a:bodyPr>
           <a:lstStyle/>
@@ -11769,7 +11857,7 @@
               </a:lnSpc>
             </a:pPr>
             <a:r>
-              <a:rPr sz="1700" b="0">
+              <a:rPr sz="1400" b="0">
                 <a:solidFill>
                   <a:srgbClr val="1A1A1A"/>
                 </a:solidFill>
@@ -11779,7 +11867,7 @@
               <a:t>手だてや話題を工夫し、</a:t>
             </a:r>
             <a:r>
-              <a:rPr sz="1800" b="1">
+              <a:rPr sz="1500" b="1">
                 <a:solidFill>
                   <a:srgbClr val="FF0000"/>
                 </a:solidFill>
@@ -11789,7 +11877,7 @@
               <a:t>視点を明確にした対話を継続的に実践</a:t>
             </a:r>
             <a:r>
-              <a:rPr sz="1700" b="0">
+              <a:rPr sz="1400" b="0">
                 <a:solidFill>
                   <a:srgbClr val="1A1A1A"/>
                 </a:solidFill>
@@ -11806,7 +11894,7 @@
               </a:lnSpc>
             </a:pPr>
             <a:r>
-              <a:rPr sz="1700" b="0">
+              <a:rPr sz="1400" b="0">
                 <a:solidFill>
                   <a:srgbClr val="1A1A1A"/>
                 </a:solidFill>
@@ -11816,7 +11904,7 @@
               <a:t>ことで、児童の</a:t>
             </a:r>
             <a:r>
-              <a:rPr sz="1800" b="1">
+              <a:rPr sz="1500" b="1">
                 <a:solidFill>
                   <a:srgbClr val="FF0000"/>
                 </a:solidFill>
@@ -11826,7 +11914,7 @@
               <a:t>対話に広がりや深まりが見られる</a:t>
             </a:r>
             <a:r>
-              <a:rPr sz="1700" b="0">
+              <a:rPr sz="1400" b="0">
                 <a:solidFill>
                   <a:srgbClr val="1A1A1A"/>
                 </a:solidFill>
@@ -11846,7 +11934,7 @@
         </p:nvSpPr>
         <p:spPr>
           <a:xfrm>
-            <a:off x="540000" y="2880000"/>
+            <a:off x="540000" y="2844000"/>
             <a:ext cx="11113200" cy="324000"/>
           </a:xfrm>
           <a:prstGeom prst="rect">
@@ -11858,14 +11946,14 @@
           </a:ln>
         </p:spPr>
         <p:txBody>
-          <a:bodyPr wrap="square" lIns="72000" rIns="72000" tIns="36000" bIns="36000" anchor="t">
+          <a:bodyPr wrap="square" lIns="54000" rIns="54000" tIns="18000" bIns="18000" anchor="ctr">
             <a:spAutoFit/>
           </a:bodyPr>
           <a:lstStyle/>
           <a:p>
             <a:pPr algn="ctr"/>
             <a:r>
-              <a:rPr sz="1800" b="1">
+              <a:rPr sz="1600" b="1">
                 <a:solidFill>
                   <a:srgbClr val="FF0000"/>
                 </a:solidFill>
@@ -11885,7 +11973,7 @@
         </p:nvSpPr>
         <p:spPr>
           <a:xfrm>
-            <a:off x="552600" y="3420000"/>
+            <a:off x="552600" y="3311999"/>
             <a:ext cx="3600000" cy="468000"/>
           </a:xfrm>
           <a:prstGeom prst="rect">
@@ -11929,7 +12017,7 @@
         </p:nvSpPr>
         <p:spPr>
           <a:xfrm>
-            <a:off x="552600" y="3420000"/>
+            <a:off x="552600" y="3311999"/>
             <a:ext cx="3600000" cy="468000"/>
           </a:xfrm>
           <a:prstGeom prst="rect">
@@ -11941,14 +12029,14 @@
           </a:ln>
         </p:spPr>
         <p:txBody>
-          <a:bodyPr wrap="square" lIns="72000" rIns="72000" tIns="36000" bIns="36000" anchor="ctr">
+          <a:bodyPr wrap="square" lIns="54000" rIns="54000" tIns="18000" bIns="18000" anchor="ctr">
             <a:spAutoFit/>
           </a:bodyPr>
           <a:lstStyle/>
           <a:p>
             <a:pPr algn="ctr"/>
             <a:r>
-              <a:rPr sz="1800" b="1">
+              <a:rPr sz="1600" b="1">
                 <a:solidFill>
                   <a:srgbClr val="FFFFFF"/>
                 </a:solidFill>
@@ -11968,8 +12056,8 @@
         </p:nvSpPr>
         <p:spPr>
           <a:xfrm>
-            <a:off x="552600" y="3888000"/>
-            <a:ext cx="3600000" cy="1692000"/>
+            <a:off x="552600" y="3779999"/>
+            <a:ext cx="3600000" cy="2412000"/>
           </a:xfrm>
           <a:prstGeom prst="rect">
             <a:avLst/>
@@ -12014,8 +12102,8 @@
         </p:nvSpPr>
         <p:spPr>
           <a:xfrm>
-            <a:off x="660600" y="3996000"/>
-            <a:ext cx="3384000" cy="1476000"/>
+            <a:off x="660600" y="3887999"/>
+            <a:ext cx="3384000" cy="2160000"/>
           </a:xfrm>
           <a:prstGeom prst="rect">
             <a:avLst/>
@@ -12026,18 +12114,18 @@
           </a:ln>
         </p:spPr>
         <p:txBody>
-          <a:bodyPr wrap="square" lIns="72000" rIns="72000" tIns="36000" bIns="36000" anchor="ctr">
+          <a:bodyPr wrap="square" lIns="54000" rIns="54000" tIns="18000" bIns="18000" anchor="ctr">
             <a:spAutoFit/>
           </a:bodyPr>
           <a:lstStyle/>
           <a:p>
             <a:pPr algn="ctr">
               <a:lnSpc>
-                <a:spcPct val="130000"/>
+                <a:spcPct val="140000"/>
               </a:lnSpc>
             </a:pPr>
             <a:r>
-              <a:rPr sz="2000" b="1">
+              <a:rPr sz="1600" b="1">
                 <a:solidFill>
                   <a:srgbClr val="FF0000"/>
                 </a:solidFill>
@@ -12050,11 +12138,11 @@
           <a:p>
             <a:pPr algn="ctr">
               <a:lnSpc>
-                <a:spcPct val="130000"/>
+                <a:spcPct val="140000"/>
               </a:lnSpc>
             </a:pPr>
             <a:r>
-              <a:rPr sz="1800" b="0">
+              <a:rPr sz="1400" b="0">
                 <a:solidFill>
                   <a:srgbClr val="1A1A1A"/>
                 </a:solidFill>
@@ -12067,11 +12155,11 @@
           <a:p>
             <a:pPr algn="ctr">
               <a:lnSpc>
-                <a:spcPct val="130000"/>
+                <a:spcPct val="140000"/>
               </a:lnSpc>
             </a:pPr>
             <a:r>
-              <a:rPr sz="1800" b="0">
+              <a:rPr sz="1400" b="0">
                 <a:solidFill>
                   <a:srgbClr val="1A1A1A"/>
                 </a:solidFill>
@@ -12091,7 +12179,7 @@
         </p:nvSpPr>
         <p:spPr>
           <a:xfrm>
-            <a:off x="4296600" y="3420000"/>
+            <a:off x="4296600" y="3311999"/>
             <a:ext cx="3600000" cy="468000"/>
           </a:xfrm>
           <a:prstGeom prst="rect">
@@ -12135,7 +12223,7 @@
         </p:nvSpPr>
         <p:spPr>
           <a:xfrm>
-            <a:off x="4296600" y="3420000"/>
+            <a:off x="4296600" y="3311999"/>
             <a:ext cx="3600000" cy="468000"/>
           </a:xfrm>
           <a:prstGeom prst="rect">
@@ -12147,14 +12235,14 @@
           </a:ln>
         </p:spPr>
         <p:txBody>
-          <a:bodyPr wrap="square" lIns="72000" rIns="72000" tIns="36000" bIns="36000" anchor="ctr">
+          <a:bodyPr wrap="square" lIns="54000" rIns="54000" tIns="18000" bIns="18000" anchor="ctr">
             <a:spAutoFit/>
           </a:bodyPr>
           <a:lstStyle/>
           <a:p>
             <a:pPr algn="ctr"/>
             <a:r>
-              <a:rPr sz="1800" b="1">
+              <a:rPr sz="1600" b="1">
                 <a:solidFill>
                   <a:srgbClr val="FFFFFF"/>
                 </a:solidFill>
@@ -12174,8 +12262,8 @@
         </p:nvSpPr>
         <p:spPr>
           <a:xfrm>
-            <a:off x="4296600" y="3888000"/>
-            <a:ext cx="3600000" cy="1692000"/>
+            <a:off x="4296600" y="3779999"/>
+            <a:ext cx="3600000" cy="2412000"/>
           </a:xfrm>
           <a:prstGeom prst="rect">
             <a:avLst/>
@@ -12220,8 +12308,8 @@
         </p:nvSpPr>
         <p:spPr>
           <a:xfrm>
-            <a:off x="4404600" y="3996000"/>
-            <a:ext cx="3384000" cy="1476000"/>
+            <a:off x="4404600" y="3887999"/>
+            <a:ext cx="3384000" cy="2160000"/>
           </a:xfrm>
           <a:prstGeom prst="rect">
             <a:avLst/>
@@ -12232,18 +12320,18 @@
           </a:ln>
         </p:spPr>
         <p:txBody>
-          <a:bodyPr wrap="square" lIns="72000" rIns="72000" tIns="36000" bIns="36000" anchor="ctr">
+          <a:bodyPr wrap="square" lIns="54000" rIns="54000" tIns="18000" bIns="18000" anchor="ctr">
             <a:spAutoFit/>
           </a:bodyPr>
           <a:lstStyle/>
           <a:p>
             <a:pPr algn="ctr">
               <a:lnSpc>
-                <a:spcPct val="130000"/>
+                <a:spcPct val="140000"/>
               </a:lnSpc>
             </a:pPr>
             <a:r>
-              <a:rPr sz="2000" b="1">
+              <a:rPr sz="1600" b="1">
                 <a:solidFill>
                   <a:srgbClr val="FF0000"/>
                 </a:solidFill>
@@ -12256,11 +12344,11 @@
           <a:p>
             <a:pPr algn="ctr">
               <a:lnSpc>
-                <a:spcPct val="130000"/>
+                <a:spcPct val="140000"/>
               </a:lnSpc>
             </a:pPr>
             <a:r>
-              <a:rPr sz="1800" b="0">
+              <a:rPr sz="1400" b="0">
                 <a:solidFill>
                   <a:srgbClr val="1A1A1A"/>
                 </a:solidFill>
@@ -12273,11 +12361,11 @@
           <a:p>
             <a:pPr algn="ctr">
               <a:lnSpc>
-                <a:spcPct val="130000"/>
+                <a:spcPct val="140000"/>
               </a:lnSpc>
             </a:pPr>
             <a:r>
-              <a:rPr sz="1800" b="0">
+              <a:rPr sz="1400" b="0">
                 <a:solidFill>
                   <a:srgbClr val="1A1A1A"/>
                 </a:solidFill>
@@ -12297,7 +12385,7 @@
         </p:nvSpPr>
         <p:spPr>
           <a:xfrm>
-            <a:off x="8040600" y="3420000"/>
+            <a:off x="8040600" y="3311999"/>
             <a:ext cx="3600000" cy="468000"/>
           </a:xfrm>
           <a:prstGeom prst="rect">
@@ -12341,7 +12429,7 @@
         </p:nvSpPr>
         <p:spPr>
           <a:xfrm>
-            <a:off x="8040600" y="3420000"/>
+            <a:off x="8040600" y="3311999"/>
             <a:ext cx="3600000" cy="468000"/>
           </a:xfrm>
           <a:prstGeom prst="rect">
@@ -12353,14 +12441,14 @@
           </a:ln>
         </p:spPr>
         <p:txBody>
-          <a:bodyPr wrap="square" lIns="72000" rIns="72000" tIns="36000" bIns="36000" anchor="ctr">
+          <a:bodyPr wrap="square" lIns="54000" rIns="54000" tIns="18000" bIns="18000" anchor="ctr">
             <a:spAutoFit/>
           </a:bodyPr>
           <a:lstStyle/>
           <a:p>
             <a:pPr algn="ctr"/>
             <a:r>
-              <a:rPr sz="1800" b="1">
+              <a:rPr sz="1600" b="1">
                 <a:solidFill>
                   <a:srgbClr val="FFFFFF"/>
                 </a:solidFill>
@@ -12380,8 +12468,8 @@
         </p:nvSpPr>
         <p:spPr>
           <a:xfrm>
-            <a:off x="8040600" y="3888000"/>
-            <a:ext cx="3600000" cy="1692000"/>
+            <a:off x="8040600" y="3779999"/>
+            <a:ext cx="3600000" cy="2412000"/>
           </a:xfrm>
           <a:prstGeom prst="rect">
             <a:avLst/>
@@ -12426,8 +12514,8 @@
         </p:nvSpPr>
         <p:spPr>
           <a:xfrm>
-            <a:off x="8148600" y="3996000"/>
-            <a:ext cx="3384000" cy="1476000"/>
+            <a:off x="8148600" y="3887999"/>
+            <a:ext cx="3384000" cy="2160000"/>
           </a:xfrm>
           <a:prstGeom prst="rect">
             <a:avLst/>
@@ -12438,18 +12526,18 @@
           </a:ln>
         </p:spPr>
         <p:txBody>
-          <a:bodyPr wrap="square" lIns="72000" rIns="72000" tIns="36000" bIns="36000" anchor="ctr">
+          <a:bodyPr wrap="square" lIns="54000" rIns="54000" tIns="18000" bIns="18000" anchor="ctr">
             <a:spAutoFit/>
           </a:bodyPr>
           <a:lstStyle/>
           <a:p>
             <a:pPr algn="ctr">
               <a:lnSpc>
-                <a:spcPct val="130000"/>
+                <a:spcPct val="140000"/>
               </a:lnSpc>
             </a:pPr>
             <a:r>
-              <a:rPr sz="2000" b="1">
+              <a:rPr sz="1500" b="1">
                 <a:solidFill>
                   <a:srgbClr val="FF0000"/>
                 </a:solidFill>
@@ -12462,11 +12550,11 @@
           <a:p>
             <a:pPr algn="ctr">
               <a:lnSpc>
-                <a:spcPct val="130000"/>
+                <a:spcPct val="140000"/>
               </a:lnSpc>
             </a:pPr>
             <a:r>
-              <a:rPr sz="1800" b="0">
+              <a:rPr sz="1400" b="0">
                 <a:solidFill>
                   <a:srgbClr val="1A1A1A"/>
                 </a:solidFill>
@@ -12475,15 +12563,8 @@
               </a:rPr>
               <a:t>の</a:t>
             </a:r>
-          </a:p>
-          <a:p>
-            <a:pPr algn="ctr">
-              <a:lnSpc>
-                <a:spcPct val="130000"/>
-              </a:lnSpc>
-            </a:pPr>
-            <a:r>
-              <a:rPr sz="1800" b="0">
+            <a:r>
+              <a:rPr sz="1400" b="0">
                 <a:solidFill>
                   <a:srgbClr val="1A1A1A"/>
                 </a:solidFill>
@@ -12515,14 +12596,14 @@
           </a:ln>
         </p:spPr>
         <p:txBody>
-          <a:bodyPr wrap="square" lIns="72000" rIns="72000" tIns="36000" bIns="36000" anchor="t">
+          <a:bodyPr wrap="square" lIns="54000" rIns="54000" tIns="18000" bIns="18000" anchor="t">
             <a:spAutoFit/>
           </a:bodyPr>
           <a:lstStyle/>
           <a:p>
             <a:pPr algn="l"/>
             <a:r>
-              <a:rPr sz="1000" b="0">
+              <a:rPr sz="900" b="0">
                 <a:solidFill>
                   <a:srgbClr val="666666"/>
                 </a:solidFill>
@@ -12554,14 +12635,14 @@
           </a:ln>
         </p:spPr>
         <p:txBody>
-          <a:bodyPr wrap="square" lIns="72000" rIns="72000" tIns="36000" bIns="36000" anchor="t">
+          <a:bodyPr wrap="square" lIns="54000" rIns="54000" tIns="18000" bIns="18000" anchor="t">
             <a:spAutoFit/>
           </a:bodyPr>
           <a:lstStyle/>
           <a:p>
             <a:pPr algn="r"/>
             <a:r>
-              <a:rPr sz="1000" b="0">
+              <a:rPr sz="900" b="0">
                 <a:solidFill>
                   <a:srgbClr val="666666"/>
                 </a:solidFill>
@@ -12600,7 +12681,7 @@
         <p:spPr>
           <a:xfrm>
             <a:off x="288000" y="144000"/>
-            <a:ext cx="9000000" cy="792000"/>
+            <a:ext cx="8280000" cy="648000"/>
           </a:xfrm>
           <a:prstGeom prst="rect">
             <a:avLst/>
@@ -12611,14 +12692,14 @@
           </a:ln>
         </p:spPr>
         <p:txBody>
-          <a:bodyPr wrap="square" lIns="72000" rIns="72000" tIns="36000" bIns="36000" anchor="ctr">
+          <a:bodyPr wrap="square" lIns="54000" rIns="54000" tIns="18000" bIns="18000" anchor="ctr">
             <a:spAutoFit/>
           </a:bodyPr>
           <a:lstStyle/>
           <a:p>
             <a:pPr algn="l"/>
             <a:r>
-              <a:rPr sz="4000" b="1">
+              <a:rPr sz="3200" b="1">
                 <a:solidFill>
                   <a:srgbClr val="1A1A1A"/>
                 </a:solidFill>
@@ -12638,8 +12719,8 @@
         </p:nvSpPr>
         <p:spPr>
           <a:xfrm>
-            <a:off x="288000" y="900000"/>
-            <a:ext cx="11617200" cy="64800"/>
+            <a:off x="288000" y="827999"/>
+            <a:ext cx="11617200" cy="54000"/>
           </a:xfrm>
           <a:prstGeom prst="rect">
             <a:avLst/>
@@ -12682,8 +12763,8 @@
         </p:nvSpPr>
         <p:spPr>
           <a:xfrm>
-            <a:off x="7513200" y="144000"/>
-            <a:ext cx="4320000" cy="432000"/>
+            <a:off x="7513200" y="216000"/>
+            <a:ext cx="4320000" cy="503999"/>
           </a:xfrm>
           <a:prstGeom prst="rect">
             <a:avLst/>
@@ -12694,14 +12775,14 @@
           </a:ln>
         </p:spPr>
         <p:txBody>
-          <a:bodyPr wrap="square" lIns="72000" rIns="72000" tIns="36000" bIns="36000" anchor="ctr">
+          <a:bodyPr wrap="square" lIns="54000" rIns="54000" tIns="18000" bIns="18000" anchor="ctr">
             <a:spAutoFit/>
           </a:bodyPr>
           <a:lstStyle/>
           <a:p>
             <a:pPr algn="r"/>
             <a:r>
-              <a:rPr sz="1200" b="1">
+              <a:rPr sz="1100" b="1">
                 <a:solidFill>
                   <a:srgbClr val="666666"/>
                 </a:solidFill>
@@ -12721,7 +12802,7 @@
         </p:nvSpPr>
         <p:spPr>
           <a:xfrm>
-            <a:off x="540000" y="1224000"/>
+            <a:off x="540000" y="1152000"/>
             <a:ext cx="11113200" cy="468000"/>
           </a:xfrm>
           <a:prstGeom prst="rect">
@@ -12765,7 +12846,7 @@
         </p:nvSpPr>
         <p:spPr>
           <a:xfrm>
-            <a:off x="540000" y="1224000"/>
+            <a:off x="540000" y="1152000"/>
             <a:ext cx="11113200" cy="468000"/>
           </a:xfrm>
           <a:prstGeom prst="rect">
@@ -12777,14 +12858,14 @@
           </a:ln>
         </p:spPr>
         <p:txBody>
-          <a:bodyPr wrap="square" lIns="72000" rIns="72000" tIns="36000" bIns="36000" anchor="ctr">
+          <a:bodyPr wrap="square" lIns="54000" rIns="54000" tIns="18000" bIns="18000" anchor="ctr">
             <a:spAutoFit/>
           </a:bodyPr>
           <a:lstStyle/>
           <a:p>
             <a:pPr algn="ctr"/>
             <a:r>
-              <a:rPr sz="2000" b="1">
+              <a:rPr sz="1800" b="1">
                 <a:solidFill>
                   <a:srgbClr val="FFFFFF"/>
                 </a:solidFill>
@@ -12804,8 +12885,8 @@
         </p:nvSpPr>
         <p:spPr>
           <a:xfrm>
-            <a:off x="540000" y="1800000"/>
-            <a:ext cx="11113200" cy="1800000"/>
+            <a:off x="540000" y="1692000"/>
+            <a:ext cx="11113200" cy="2160000"/>
           </a:xfrm>
           <a:prstGeom prst="rect">
             <a:avLst/>
@@ -12850,8 +12931,8 @@
         </p:nvSpPr>
         <p:spPr>
           <a:xfrm>
-            <a:off x="720000" y="1908000"/>
-            <a:ext cx="10753200" cy="1620000"/>
+            <a:off x="720000" y="1800000"/>
+            <a:ext cx="10753200" cy="1944000"/>
           </a:xfrm>
           <a:prstGeom prst="rect">
             <a:avLst/>
@@ -12862,29 +12943,29 @@
           </a:ln>
         </p:spPr>
         <p:txBody>
-          <a:bodyPr wrap="square" lIns="72000" rIns="72000" tIns="36000" bIns="36000" anchor="t">
+          <a:bodyPr wrap="square" lIns="54000" rIns="54000" tIns="18000" bIns="18000" anchor="ctr">
             <a:spAutoFit/>
           </a:bodyPr>
           <a:lstStyle/>
           <a:p>
             <a:pPr algn="l">
               <a:lnSpc>
-                <a:spcPct val="160000"/>
+                <a:spcPct val="150000"/>
               </a:lnSpc>
             </a:pPr>
             <a:r>
+              <a:rPr sz="1800" b="1">
+                <a:solidFill>
+                  <a:srgbClr val="1A1A1A"/>
+                </a:solidFill>
+                <a:latin typeface="メイリオ"/>
+                <a:ea typeface="メイリオ"/>
+              </a:rPr>
+              <a:t>「必要なことを記録したり</a:t>
+            </a:r>
+            <a:r>
               <a:rPr sz="2200" b="1">
                 <a:solidFill>
-                  <a:srgbClr val="1A1A1A"/>
-                </a:solidFill>
-                <a:latin typeface="メイリオ"/>
-                <a:ea typeface="メイリオ"/>
-              </a:rPr>
-              <a:t>「必要なことを記録したり</a:t>
-            </a:r>
-            <a:r>
-              <a:rPr sz="2600" b="1">
-                <a:solidFill>
                   <a:srgbClr val="FF0000"/>
                 </a:solidFill>
                 <a:latin typeface="メイリオ"/>
@@ -12893,7 +12974,7 @@
               <a:t>質問したりしながら聞き</a:t>
             </a:r>
             <a:r>
-              <a:rPr sz="2200" b="1">
+              <a:rPr sz="1800" b="1">
                 <a:solidFill>
                   <a:srgbClr val="1A1A1A"/>
                 </a:solidFill>
@@ -12906,11 +12987,11 @@
           <a:p>
             <a:pPr algn="l">
               <a:lnSpc>
-                <a:spcPct val="160000"/>
+                <a:spcPct val="150000"/>
               </a:lnSpc>
             </a:pPr>
             <a:r>
-              <a:rPr sz="2200" b="1">
+              <a:rPr sz="1800" b="1">
                 <a:solidFill>
                   <a:srgbClr val="1A1A1A"/>
                 </a:solidFill>
@@ -12918,46 +12999,46 @@
                 <a:ea typeface="メイリオ"/>
               </a:rPr>
               <a:t>  話し手が伝えたいことや自分が聞きたいことの</a:t>
-            </a:r>
-            <a:r>
-              <a:rPr sz="2600" b="1">
-                <a:solidFill>
-                  <a:srgbClr val="FF0000"/>
-                </a:solidFill>
-                <a:latin typeface="メイリオ"/>
-                <a:ea typeface="メイリオ"/>
-              </a:rPr>
-              <a:t>中心を捉え</a:t>
-            </a:r>
-            <a:r>
-              <a:rPr sz="2200" b="1">
-                <a:solidFill>
-                  <a:srgbClr val="1A1A1A"/>
-                </a:solidFill>
-                <a:latin typeface="メイリオ"/>
-                <a:ea typeface="メイリオ"/>
-              </a:rPr>
-              <a:t>、</a:t>
             </a:r>
           </a:p>
           <a:p>
             <a:pPr algn="l">
               <a:lnSpc>
-                <a:spcPct val="160000"/>
+                <a:spcPct val="150000"/>
               </a:lnSpc>
             </a:pPr>
             <a:r>
+              <a:rPr sz="1800" b="1">
+                <a:solidFill>
+                  <a:srgbClr val="1A1A1A"/>
+                </a:solidFill>
+                <a:latin typeface="メイリオ"/>
+                <a:ea typeface="メイリオ"/>
+              </a:rPr>
+              <a:t>  </a:t>
+            </a:r>
+            <a:r>
               <a:rPr sz="2200" b="1">
                 <a:solidFill>
+                  <a:srgbClr val="FF0000"/>
+                </a:solidFill>
+                <a:latin typeface="メイリオ"/>
+                <a:ea typeface="メイリオ"/>
+              </a:rPr>
+              <a:t>中心を捉え</a:t>
+            </a:r>
+            <a:r>
+              <a:rPr sz="1800" b="1">
+                <a:solidFill>
                   <a:srgbClr val="1A1A1A"/>
                 </a:solidFill>
                 <a:latin typeface="メイリオ"/>
                 <a:ea typeface="メイリオ"/>
               </a:rPr>
-              <a:t>  </a:t>
-            </a:r>
-            <a:r>
-              <a:rPr sz="2600" b="1">
+              <a:t>、</a:t>
+            </a:r>
+            <a:r>
+              <a:rPr sz="2200" b="1">
                 <a:solidFill>
                   <a:srgbClr val="FF0000"/>
                 </a:solidFill>
@@ -12967,7 +13048,7 @@
               <a:t>自分の考えをもつ</a:t>
             </a:r>
             <a:r>
-              <a:rPr sz="2200" b="1">
+              <a:rPr sz="1800" b="1">
                 <a:solidFill>
                   <a:srgbClr val="1A1A1A"/>
                 </a:solidFill>
@@ -12987,7 +13068,7 @@
         </p:nvSpPr>
         <p:spPr>
           <a:xfrm>
-            <a:off x="540000" y="3780000"/>
+            <a:off x="540000" y="3960000"/>
             <a:ext cx="2520000" cy="432000"/>
           </a:xfrm>
           <a:prstGeom prst="rect">
@@ -13031,7 +13112,7 @@
         </p:nvSpPr>
         <p:spPr>
           <a:xfrm>
-            <a:off x="540000" y="3780000"/>
+            <a:off x="540000" y="3960000"/>
             <a:ext cx="2520000" cy="432000"/>
           </a:xfrm>
           <a:prstGeom prst="rect">
@@ -13043,14 +13124,14 @@
           </a:ln>
         </p:spPr>
         <p:txBody>
-          <a:bodyPr wrap="square" lIns="72000" rIns="72000" tIns="36000" bIns="36000" anchor="ctr">
+          <a:bodyPr wrap="square" lIns="54000" rIns="54000" tIns="18000" bIns="18000" anchor="ctr">
             <a:spAutoFit/>
           </a:bodyPr>
           <a:lstStyle/>
           <a:p>
             <a:pPr algn="ctr"/>
             <a:r>
-              <a:rPr sz="1800" b="1">
+              <a:rPr sz="1500" b="1">
                 <a:solidFill>
                   <a:srgbClr val="FFFFFF"/>
                 </a:solidFill>
@@ -13070,8 +13151,8 @@
         </p:nvSpPr>
         <p:spPr>
           <a:xfrm>
-            <a:off x="540000" y="4212000"/>
-            <a:ext cx="11113200" cy="1908000"/>
+            <a:off x="540000" y="4392000"/>
+            <a:ext cx="11113200" cy="1800000"/>
           </a:xfrm>
           <a:prstGeom prst="rect">
             <a:avLst/>
@@ -13116,8 +13197,8 @@
         </p:nvSpPr>
         <p:spPr>
           <a:xfrm>
-            <a:off x="720000" y="4320000"/>
-            <a:ext cx="10753200" cy="1800000"/>
+            <a:off x="720000" y="4500000"/>
+            <a:ext cx="10753200" cy="1620000"/>
           </a:xfrm>
           <a:prstGeom prst="rect">
             <a:avLst/>
@@ -13128,18 +13209,18 @@
           </a:ln>
         </p:spPr>
         <p:txBody>
-          <a:bodyPr wrap="square" lIns="72000" rIns="72000" tIns="36000" bIns="36000" anchor="t">
+          <a:bodyPr wrap="square" lIns="54000" rIns="54000" tIns="18000" bIns="18000" anchor="t">
             <a:spAutoFit/>
           </a:bodyPr>
           <a:lstStyle/>
           <a:p>
             <a:pPr algn="l">
               <a:lnSpc>
-                <a:spcPct val="140000"/>
+                <a:spcPct val="135000"/>
               </a:lnSpc>
             </a:pPr>
             <a:r>
-              <a:rPr sz="1800" b="0">
+              <a:rPr sz="1600" b="0">
                 <a:solidFill>
                   <a:srgbClr val="1A1A1A"/>
                 </a:solidFill>
@@ -13149,7 +13230,7 @@
               <a:t>・</a:t>
             </a:r>
             <a:r>
-              <a:rPr sz="2000" b="1">
+              <a:rPr sz="1800" b="1">
                 <a:solidFill>
                   <a:srgbClr val="FF0000"/>
                 </a:solidFill>
@@ -13162,21 +13243,21 @@
           <a:p>
             <a:pPr algn="l">
               <a:lnSpc>
-                <a:spcPct val="140000"/>
+                <a:spcPct val="135000"/>
               </a:lnSpc>
             </a:pPr>
             <a:r>
-              <a:rPr sz="1800" b="0">
+              <a:rPr sz="1600" b="0">
                 <a:solidFill>
                   <a:srgbClr val="1A1A1A"/>
                 </a:solidFill>
                 <a:latin typeface="メイリオ"/>
                 <a:ea typeface="メイリオ"/>
               </a:rPr>
-              <a:t>       = 解説で示された</a:t>
-            </a:r>
-            <a:r>
-              <a:rPr sz="2000" b="1">
+              <a:t>       = 解説で示された </a:t>
+            </a:r>
+            <a:r>
+              <a:rPr sz="1800" b="1">
                 <a:solidFill>
                   <a:srgbClr val="FF0000"/>
                 </a:solidFill>
@@ -13186,24 +13267,24 @@
               <a:t>〝聞く力の中核〟</a:t>
             </a:r>
             <a:r>
-              <a:rPr sz="1800" b="0">
+              <a:rPr sz="1600" b="0">
                 <a:solidFill>
                   <a:srgbClr val="1A1A1A"/>
                 </a:solidFill>
                 <a:latin typeface="メイリオ"/>
                 <a:ea typeface="メイリオ"/>
               </a:rPr>
-              <a:t>そのもの</a:t>
+              <a:t> そのもの</a:t>
             </a:r>
           </a:p>
           <a:p>
             <a:pPr algn="l">
               <a:lnSpc>
-                <a:spcPct val="140000"/>
+                <a:spcPct val="135000"/>
               </a:lnSpc>
             </a:pPr>
             <a:r>
-              <a:rPr sz="1800" b="0">
+              <a:rPr sz="1600" b="0">
                 <a:solidFill>
                   <a:srgbClr val="1A1A1A"/>
                 </a:solidFill>
@@ -13213,7 +13294,7 @@
               <a:t>・</a:t>
             </a:r>
             <a:r>
-              <a:rPr sz="2000" b="1">
+              <a:rPr sz="1800" b="1">
                 <a:solidFill>
                   <a:srgbClr val="FF0000"/>
                 </a:solidFill>
@@ -13226,21 +13307,21 @@
           <a:p>
             <a:pPr algn="l">
               <a:lnSpc>
-                <a:spcPct val="140000"/>
+                <a:spcPct val="135000"/>
               </a:lnSpc>
             </a:pPr>
             <a:r>
-              <a:rPr sz="1800" b="0">
+              <a:rPr sz="1600" b="0">
                 <a:solidFill>
                   <a:srgbClr val="1A1A1A"/>
                 </a:solidFill>
                 <a:latin typeface="メイリオ"/>
                 <a:ea typeface="メイリオ"/>
               </a:rPr>
-              <a:t>       → </a:t>
-            </a:r>
-            <a:r>
-              <a:rPr sz="2000" b="1">
+              <a:t>       →  </a:t>
+            </a:r>
+            <a:r>
+              <a:rPr sz="1800" b="1">
                 <a:solidFill>
                   <a:srgbClr val="002060"/>
                 </a:solidFill>
@@ -13272,14 +13353,14 @@
           </a:ln>
         </p:spPr>
         <p:txBody>
-          <a:bodyPr wrap="square" lIns="72000" rIns="72000" tIns="36000" bIns="36000" anchor="t">
+          <a:bodyPr wrap="square" lIns="54000" rIns="54000" tIns="18000" bIns="18000" anchor="t">
             <a:spAutoFit/>
           </a:bodyPr>
           <a:lstStyle/>
           <a:p>
             <a:pPr algn="l"/>
             <a:r>
-              <a:rPr sz="1000" b="0">
+              <a:rPr sz="900" b="0">
                 <a:solidFill>
                   <a:srgbClr val="666666"/>
                 </a:solidFill>
@@ -13311,14 +13392,14 @@
           </a:ln>
         </p:spPr>
         <p:txBody>
-          <a:bodyPr wrap="square" lIns="72000" rIns="72000" tIns="36000" bIns="36000" anchor="t">
+          <a:bodyPr wrap="square" lIns="54000" rIns="54000" tIns="18000" bIns="18000" anchor="t">
             <a:spAutoFit/>
           </a:bodyPr>
           <a:lstStyle/>
           <a:p>
             <a:pPr algn="r"/>
             <a:r>
-              <a:rPr sz="1000" b="0">
+              <a:rPr sz="900" b="0">
                 <a:solidFill>
                   <a:srgbClr val="666666"/>
                 </a:solidFill>
@@ -13357,7 +13438,7 @@
         <p:spPr>
           <a:xfrm>
             <a:off x="288000" y="144000"/>
-            <a:ext cx="9000000" cy="792000"/>
+            <a:ext cx="8280000" cy="648000"/>
           </a:xfrm>
           <a:prstGeom prst="rect">
             <a:avLst/>
@@ -13368,14 +13449,14 @@
           </a:ln>
         </p:spPr>
         <p:txBody>
-          <a:bodyPr wrap="square" lIns="72000" rIns="72000" tIns="36000" bIns="36000" anchor="ctr">
+          <a:bodyPr wrap="square" lIns="54000" rIns="54000" tIns="18000" bIns="18000" anchor="ctr">
             <a:spAutoFit/>
           </a:bodyPr>
           <a:lstStyle/>
           <a:p>
             <a:pPr algn="l"/>
             <a:r>
-              <a:rPr sz="4000" b="1">
+              <a:rPr sz="3200" b="1">
                 <a:solidFill>
                   <a:srgbClr val="1A1A1A"/>
                 </a:solidFill>
@@ -13395,8 +13476,8 @@
         </p:nvSpPr>
         <p:spPr>
           <a:xfrm>
-            <a:off x="288000" y="900000"/>
-            <a:ext cx="11617200" cy="64800"/>
+            <a:off x="288000" y="827999"/>
+            <a:ext cx="11617200" cy="54000"/>
           </a:xfrm>
           <a:prstGeom prst="rect">
             <a:avLst/>
@@ -13439,8 +13520,8 @@
         </p:nvSpPr>
         <p:spPr>
           <a:xfrm>
-            <a:off x="7513200" y="144000"/>
-            <a:ext cx="4320000" cy="432000"/>
+            <a:off x="7513200" y="216000"/>
+            <a:ext cx="4320000" cy="503999"/>
           </a:xfrm>
           <a:prstGeom prst="rect">
             <a:avLst/>
@@ -13451,14 +13532,14 @@
           </a:ln>
         </p:spPr>
         <p:txBody>
-          <a:bodyPr wrap="square" lIns="72000" rIns="72000" tIns="36000" bIns="36000" anchor="ctr">
+          <a:bodyPr wrap="square" lIns="54000" rIns="54000" tIns="18000" bIns="18000" anchor="ctr">
             <a:spAutoFit/>
           </a:bodyPr>
           <a:lstStyle/>
           <a:p>
             <a:pPr algn="r"/>
             <a:r>
-              <a:rPr sz="1200" b="1">
+              <a:rPr sz="1100" b="1">
                 <a:solidFill>
                   <a:srgbClr val="666666"/>
                 </a:solidFill>
@@ -13478,7 +13559,7 @@
         </p:nvSpPr>
         <p:spPr>
           <a:xfrm>
-            <a:off x="540000" y="1224000"/>
+            <a:off x="540000" y="1152000"/>
             <a:ext cx="11113200" cy="468000"/>
           </a:xfrm>
           <a:prstGeom prst="rect">
@@ -13522,7 +13603,7 @@
         </p:nvSpPr>
         <p:spPr>
           <a:xfrm>
-            <a:off x="540000" y="1224000"/>
+            <a:off x="540000" y="1152000"/>
             <a:ext cx="11113200" cy="468000"/>
           </a:xfrm>
           <a:prstGeom prst="rect">
@@ -13534,14 +13615,14 @@
           </a:ln>
         </p:spPr>
         <p:txBody>
-          <a:bodyPr wrap="square" lIns="72000" rIns="72000" tIns="36000" bIns="36000" anchor="ctr">
+          <a:bodyPr wrap="square" lIns="54000" rIns="54000" tIns="18000" bIns="18000" anchor="ctr">
             <a:spAutoFit/>
           </a:bodyPr>
           <a:lstStyle/>
           <a:p>
             <a:pPr algn="ctr"/>
             <a:r>
-              <a:rPr sz="2000" b="1">
+              <a:rPr sz="1800" b="1">
                 <a:solidFill>
                   <a:srgbClr val="FFFFFF"/>
                 </a:solidFill>
@@ -13561,7 +13642,7 @@
         </p:nvSpPr>
         <p:spPr>
           <a:xfrm>
-            <a:off x="540000" y="1692000"/>
+            <a:off x="540000" y="1620000"/>
             <a:ext cx="11113200" cy="972000"/>
           </a:xfrm>
           <a:prstGeom prst="rect">
@@ -13607,8 +13688,8 @@
         </p:nvSpPr>
         <p:spPr>
           <a:xfrm>
-            <a:off x="720000" y="1764000"/>
-            <a:ext cx="10753200" cy="864000"/>
+            <a:off x="720000" y="1692000"/>
+            <a:ext cx="10753200" cy="827999"/>
           </a:xfrm>
           <a:prstGeom prst="rect">
             <a:avLst/>
@@ -13619,7 +13700,7 @@
           </a:ln>
         </p:spPr>
         <p:txBody>
-          <a:bodyPr wrap="square" lIns="72000" rIns="72000" tIns="36000" bIns="36000" anchor="t">
+          <a:bodyPr wrap="square" lIns="54000" rIns="54000" tIns="18000" bIns="18000" anchor="ctr">
             <a:spAutoFit/>
           </a:bodyPr>
           <a:lstStyle/>
@@ -13630,7 +13711,7 @@
               </a:lnSpc>
             </a:pPr>
             <a:r>
-              <a:rPr sz="2200" b="1">
+              <a:rPr sz="1800" b="1">
                 <a:solidFill>
                   <a:srgbClr val="1A1A1A"/>
                 </a:solidFill>
@@ -13640,7 +13721,7 @@
               <a:t>「</a:t>
             </a:r>
             <a:r>
-              <a:rPr sz="2400" b="1">
+              <a:rPr sz="2000" b="1">
                 <a:solidFill>
                   <a:srgbClr val="FF0000"/>
                 </a:solidFill>
@@ -13650,7 +13731,7 @@
               <a:t>個別最適な学び</a:t>
             </a:r>
             <a:r>
-              <a:rPr sz="2200" b="1">
+              <a:rPr sz="1800" b="1">
                 <a:solidFill>
                   <a:srgbClr val="1A1A1A"/>
                 </a:solidFill>
@@ -13660,7 +13741,7 @@
               <a:t>」と「</a:t>
             </a:r>
             <a:r>
-              <a:rPr sz="2400" b="1">
+              <a:rPr sz="2000" b="1">
                 <a:solidFill>
                   <a:srgbClr val="FF0000"/>
                 </a:solidFill>
@@ -13670,7 +13751,7 @@
               <a:t>協働的な学び</a:t>
             </a:r>
             <a:r>
-              <a:rPr sz="2200" b="1">
+              <a:rPr sz="1800" b="1">
                 <a:solidFill>
                   <a:srgbClr val="1A1A1A"/>
                 </a:solidFill>
@@ -13680,7 +13761,7 @@
               <a:t>」を</a:t>
             </a:r>
             <a:r>
-              <a:rPr sz="2400" b="1">
+              <a:rPr sz="2000" b="1">
                 <a:solidFill>
                   <a:srgbClr val="002060"/>
                 </a:solidFill>
@@ -13690,7 +13771,7 @@
               <a:t>一体的に充実</a:t>
             </a:r>
             <a:r>
-              <a:rPr sz="2200" b="1">
+              <a:rPr sz="1800" b="1">
                 <a:solidFill>
                   <a:srgbClr val="1A1A1A"/>
                 </a:solidFill>
@@ -13707,7 +13788,7 @@
               </a:lnSpc>
             </a:pPr>
             <a:r>
-              <a:rPr sz="2200" b="1">
+              <a:rPr sz="1800" b="1">
                 <a:solidFill>
                   <a:srgbClr val="1A1A1A"/>
                 </a:solidFill>
@@ -13717,7 +13798,7 @@
               <a:t>   </a:t>
             </a:r>
             <a:r>
-              <a:rPr sz="2400" b="1">
+              <a:rPr sz="2000" b="1">
                 <a:solidFill>
                   <a:srgbClr val="FF0000"/>
                 </a:solidFill>
@@ -13727,14 +13808,14 @@
               <a:t>主体的・対話的で深い学び</a:t>
             </a:r>
             <a:r>
-              <a:rPr sz="2200" b="1">
+              <a:rPr sz="1800" b="1">
                 <a:solidFill>
                   <a:srgbClr val="1A1A1A"/>
                 </a:solidFill>
                 <a:latin typeface="メイリオ"/>
                 <a:ea typeface="メイリオ"/>
               </a:rPr>
-              <a:t>の実現を目指す。」</a:t>
+              <a:t> の実現を目指す。」</a:t>
             </a:r>
           </a:p>
         </p:txBody>
@@ -13747,7 +13828,7 @@
         </p:nvSpPr>
         <p:spPr>
           <a:xfrm>
-            <a:off x="540000" y="2772000"/>
+            <a:off x="540000" y="2700000"/>
             <a:ext cx="11113200" cy="324000"/>
           </a:xfrm>
           <a:prstGeom prst="rect">
@@ -13759,14 +13840,14 @@
           </a:ln>
         </p:spPr>
         <p:txBody>
-          <a:bodyPr wrap="square" lIns="72000" rIns="72000" tIns="36000" bIns="36000" anchor="t">
+          <a:bodyPr wrap="square" lIns="54000" rIns="54000" tIns="18000" bIns="18000" anchor="ctr">
             <a:spAutoFit/>
           </a:bodyPr>
           <a:lstStyle/>
           <a:p>
             <a:pPr algn="ctr"/>
             <a:r>
-              <a:rPr sz="1800" b="1">
+              <a:rPr sz="1600" b="1">
                 <a:solidFill>
                   <a:srgbClr val="FF0000"/>
                 </a:solidFill>
@@ -13786,8 +13867,8 @@
         </p:nvSpPr>
         <p:spPr>
           <a:xfrm>
-            <a:off x="552600" y="3168000"/>
-            <a:ext cx="2448000" cy="540000"/>
+            <a:off x="822600" y="3131999"/>
+            <a:ext cx="2340000" cy="540000"/>
           </a:xfrm>
           <a:prstGeom prst="rect">
             <a:avLst/>
@@ -13830,8 +13911,8 @@
         </p:nvSpPr>
         <p:spPr>
           <a:xfrm>
-            <a:off x="552600" y="3168000"/>
-            <a:ext cx="2448000" cy="540000"/>
+            <a:off x="822600" y="3131999"/>
+            <a:ext cx="2340000" cy="540000"/>
           </a:xfrm>
           <a:prstGeom prst="rect">
             <a:avLst/>
@@ -13842,14 +13923,14 @@
           </a:ln>
         </p:spPr>
         <p:txBody>
-          <a:bodyPr wrap="square" lIns="72000" rIns="72000" tIns="36000" bIns="36000" anchor="ctr">
+          <a:bodyPr wrap="square" lIns="54000" rIns="54000" tIns="18000" bIns="18000" anchor="ctr">
             <a:spAutoFit/>
           </a:bodyPr>
           <a:lstStyle/>
           <a:p>
             <a:pPr algn="ctr"/>
             <a:r>
-              <a:rPr sz="2400" b="1">
+              <a:rPr sz="2200" b="1">
                 <a:solidFill>
                   <a:srgbClr val="FFFFFF"/>
                 </a:solidFill>
@@ -13869,8 +13950,8 @@
         </p:nvSpPr>
         <p:spPr>
           <a:xfrm>
-            <a:off x="552600" y="3708000"/>
-            <a:ext cx="2448000" cy="1440000"/>
+            <a:off x="822600" y="3671999"/>
+            <a:ext cx="2340000" cy="1620000"/>
           </a:xfrm>
           <a:prstGeom prst="rect">
             <a:avLst/>
@@ -13915,8 +13996,8 @@
         </p:nvSpPr>
         <p:spPr>
           <a:xfrm>
-            <a:off x="552600" y="3780000"/>
-            <a:ext cx="2448000" cy="1296000"/>
+            <a:off x="822600" y="3743999"/>
+            <a:ext cx="2340000" cy="1476000"/>
           </a:xfrm>
           <a:prstGeom prst="rect">
             <a:avLst/>
@@ -13927,14 +14008,14 @@
           </a:ln>
         </p:spPr>
         <p:txBody>
-          <a:bodyPr wrap="square" lIns="72000" rIns="72000" tIns="36000" bIns="36000" anchor="ctr">
+          <a:bodyPr wrap="square" lIns="54000" rIns="54000" tIns="18000" bIns="18000" anchor="ctr">
             <a:spAutoFit/>
           </a:bodyPr>
           <a:lstStyle/>
           <a:p>
             <a:pPr algn="ctr"/>
             <a:r>
-              <a:rPr sz="1600" b="1">
+              <a:rPr sz="1400" b="1">
                 <a:solidFill>
                   <a:srgbClr val="1A1A1A"/>
                 </a:solidFill>
@@ -13947,7 +14028,7 @@
           <a:p>
             <a:pPr algn="ctr"/>
             <a:r>
-              <a:rPr sz="1600" b="1">
+              <a:rPr sz="1400" b="1">
                 <a:solidFill>
                   <a:srgbClr val="1A1A1A"/>
                 </a:solidFill>
@@ -13967,8 +14048,8 @@
         </p:nvSpPr>
         <p:spPr>
           <a:xfrm>
-            <a:off x="3036600" y="3978000"/>
-            <a:ext cx="360000" cy="360000"/>
+            <a:off x="3198600" y="4031999"/>
+            <a:ext cx="324000" cy="360000"/>
           </a:xfrm>
           <a:prstGeom prst="rightArrow">
             <a:avLst/>
@@ -14010,8 +14091,8 @@
         </p:nvSpPr>
         <p:spPr>
           <a:xfrm>
-            <a:off x="3432600" y="3168000"/>
-            <a:ext cx="2448000" cy="540000"/>
+            <a:off x="3558600" y="3131999"/>
+            <a:ext cx="2340000" cy="540000"/>
           </a:xfrm>
           <a:prstGeom prst="rect">
             <a:avLst/>
@@ -14054,8 +14135,8 @@
         </p:nvSpPr>
         <p:spPr>
           <a:xfrm>
-            <a:off x="3432600" y="3168000"/>
-            <a:ext cx="2448000" cy="540000"/>
+            <a:off x="3558600" y="3131999"/>
+            <a:ext cx="2340000" cy="540000"/>
           </a:xfrm>
           <a:prstGeom prst="rect">
             <a:avLst/>
@@ -14066,14 +14147,14 @@
           </a:ln>
         </p:spPr>
         <p:txBody>
-          <a:bodyPr wrap="square" lIns="72000" rIns="72000" tIns="36000" bIns="36000" anchor="ctr">
+          <a:bodyPr wrap="square" lIns="54000" rIns="54000" tIns="18000" bIns="18000" anchor="ctr">
             <a:spAutoFit/>
           </a:bodyPr>
           <a:lstStyle/>
           <a:p>
             <a:pPr algn="ctr"/>
             <a:r>
-              <a:rPr sz="2400" b="1">
+              <a:rPr sz="2200" b="1">
                 <a:solidFill>
                   <a:srgbClr val="FFFFFF"/>
                 </a:solidFill>
@@ -14093,8 +14174,8 @@
         </p:nvSpPr>
         <p:spPr>
           <a:xfrm>
-            <a:off x="3432600" y="3708000"/>
-            <a:ext cx="2448000" cy="1440000"/>
+            <a:off x="3558600" y="3671999"/>
+            <a:ext cx="2340000" cy="1620000"/>
           </a:xfrm>
           <a:prstGeom prst="rect">
             <a:avLst/>
@@ -14139,8 +14220,8 @@
         </p:nvSpPr>
         <p:spPr>
           <a:xfrm>
-            <a:off x="3432600" y="3780000"/>
-            <a:ext cx="2448000" cy="1296000"/>
+            <a:off x="3558600" y="3743999"/>
+            <a:ext cx="2340000" cy="1476000"/>
           </a:xfrm>
           <a:prstGeom prst="rect">
             <a:avLst/>
@@ -14151,14 +14232,14 @@
           </a:ln>
         </p:spPr>
         <p:txBody>
-          <a:bodyPr wrap="square" lIns="72000" rIns="72000" tIns="36000" bIns="36000" anchor="ctr">
+          <a:bodyPr wrap="square" lIns="54000" rIns="54000" tIns="18000" bIns="18000" anchor="ctr">
             <a:spAutoFit/>
           </a:bodyPr>
           <a:lstStyle/>
           <a:p>
             <a:pPr algn="ctr"/>
             <a:r>
-              <a:rPr sz="1600" b="1">
+              <a:rPr sz="1400" b="1">
                 <a:solidFill>
                   <a:srgbClr val="1A1A1A"/>
                 </a:solidFill>
@@ -14171,7 +14252,7 @@
           <a:p>
             <a:pPr algn="ctr"/>
             <a:r>
-              <a:rPr sz="1600" b="1">
+              <a:rPr sz="1400" b="1">
                 <a:solidFill>
                   <a:srgbClr val="1A1A1A"/>
                 </a:solidFill>
@@ -14191,8 +14272,8 @@
         </p:nvSpPr>
         <p:spPr>
           <a:xfrm>
-            <a:off x="5916600" y="3978000"/>
-            <a:ext cx="360000" cy="360000"/>
+            <a:off x="5934600" y="4031999"/>
+            <a:ext cx="324000" cy="360000"/>
           </a:xfrm>
           <a:prstGeom prst="rightArrow">
             <a:avLst/>
@@ -14234,8 +14315,8 @@
         </p:nvSpPr>
         <p:spPr>
           <a:xfrm>
-            <a:off x="6312600" y="3168000"/>
-            <a:ext cx="2448000" cy="540000"/>
+            <a:off x="6294600" y="3131999"/>
+            <a:ext cx="2340000" cy="540000"/>
           </a:xfrm>
           <a:prstGeom prst="rect">
             <a:avLst/>
@@ -14278,8 +14359,8 @@
         </p:nvSpPr>
         <p:spPr>
           <a:xfrm>
-            <a:off x="6312600" y="3168000"/>
-            <a:ext cx="2448000" cy="540000"/>
+            <a:off x="6294600" y="3131999"/>
+            <a:ext cx="2340000" cy="540000"/>
           </a:xfrm>
           <a:prstGeom prst="rect">
             <a:avLst/>
@@ -14290,14 +14371,14 @@
           </a:ln>
         </p:spPr>
         <p:txBody>
-          <a:bodyPr wrap="square" lIns="72000" rIns="72000" tIns="36000" bIns="36000" anchor="ctr">
+          <a:bodyPr wrap="square" lIns="54000" rIns="54000" tIns="18000" bIns="18000" anchor="ctr">
             <a:spAutoFit/>
           </a:bodyPr>
           <a:lstStyle/>
           <a:p>
             <a:pPr algn="ctr"/>
             <a:r>
-              <a:rPr sz="2400" b="1">
+              <a:rPr sz="2200" b="1">
                 <a:solidFill>
                   <a:srgbClr val="FFFFFF"/>
                 </a:solidFill>
@@ -14317,8 +14398,8 @@
         </p:nvSpPr>
         <p:spPr>
           <a:xfrm>
-            <a:off x="6312600" y="3708000"/>
-            <a:ext cx="2448000" cy="1440000"/>
+            <a:off x="6294600" y="3671999"/>
+            <a:ext cx="2340000" cy="1620000"/>
           </a:xfrm>
           <a:prstGeom prst="rect">
             <a:avLst/>
@@ -14363,8 +14444,8 @@
         </p:nvSpPr>
         <p:spPr>
           <a:xfrm>
-            <a:off x="6312600" y="3780000"/>
-            <a:ext cx="2448000" cy="1296000"/>
+            <a:off x="6294600" y="3743999"/>
+            <a:ext cx="2340000" cy="1476000"/>
           </a:xfrm>
           <a:prstGeom prst="rect">
             <a:avLst/>
@@ -14375,14 +14456,14 @@
           </a:ln>
         </p:spPr>
         <p:txBody>
-          <a:bodyPr wrap="square" lIns="72000" rIns="72000" tIns="36000" bIns="36000" anchor="ctr">
+          <a:bodyPr wrap="square" lIns="54000" rIns="54000" tIns="18000" bIns="18000" anchor="ctr">
             <a:spAutoFit/>
           </a:bodyPr>
           <a:lstStyle/>
           <a:p>
             <a:pPr algn="ctr"/>
             <a:r>
-              <a:rPr sz="1600" b="1">
+              <a:rPr sz="1400" b="1">
                 <a:solidFill>
                   <a:srgbClr val="1A1A1A"/>
                 </a:solidFill>
@@ -14395,7 +14476,7 @@
           <a:p>
             <a:pPr algn="ctr"/>
             <a:r>
-              <a:rPr sz="1600" b="1">
+              <a:rPr sz="1400" b="1">
                 <a:solidFill>
                   <a:srgbClr val="1A1A1A"/>
                 </a:solidFill>
@@ -14415,8 +14496,8 @@
         </p:nvSpPr>
         <p:spPr>
           <a:xfrm>
-            <a:off x="8796600" y="3978000"/>
-            <a:ext cx="360000" cy="360000"/>
+            <a:off x="8670600" y="4031999"/>
+            <a:ext cx="324000" cy="360000"/>
           </a:xfrm>
           <a:prstGeom prst="rightArrow">
             <a:avLst/>
@@ -14458,8 +14539,8 @@
         </p:nvSpPr>
         <p:spPr>
           <a:xfrm>
-            <a:off x="9192600" y="3168000"/>
-            <a:ext cx="2448000" cy="540000"/>
+            <a:off x="9030600" y="3131999"/>
+            <a:ext cx="2340000" cy="540000"/>
           </a:xfrm>
           <a:prstGeom prst="rect">
             <a:avLst/>
@@ -14502,8 +14583,8 @@
         </p:nvSpPr>
         <p:spPr>
           <a:xfrm>
-            <a:off x="9192600" y="3168000"/>
-            <a:ext cx="2448000" cy="540000"/>
+            <a:off x="9030600" y="3131999"/>
+            <a:ext cx="2340000" cy="540000"/>
           </a:xfrm>
           <a:prstGeom prst="rect">
             <a:avLst/>
@@ -14514,14 +14595,14 @@
           </a:ln>
         </p:spPr>
         <p:txBody>
-          <a:bodyPr wrap="square" lIns="72000" rIns="72000" tIns="36000" bIns="36000" anchor="ctr">
+          <a:bodyPr wrap="square" lIns="54000" rIns="54000" tIns="18000" bIns="18000" anchor="ctr">
             <a:spAutoFit/>
           </a:bodyPr>
           <a:lstStyle/>
           <a:p>
             <a:pPr algn="ctr"/>
             <a:r>
-              <a:rPr sz="2400" b="1">
+              <a:rPr sz="2200" b="1">
                 <a:solidFill>
                   <a:srgbClr val="FFFFFF"/>
                 </a:solidFill>
@@ -14541,8 +14622,8 @@
         </p:nvSpPr>
         <p:spPr>
           <a:xfrm>
-            <a:off x="9192600" y="3708000"/>
-            <a:ext cx="2448000" cy="1440000"/>
+            <a:off x="9030600" y="3671999"/>
+            <a:ext cx="2340000" cy="1620000"/>
           </a:xfrm>
           <a:prstGeom prst="rect">
             <a:avLst/>
@@ -14587,8 +14668,8 @@
         </p:nvSpPr>
         <p:spPr>
           <a:xfrm>
-            <a:off x="9192600" y="3780000"/>
-            <a:ext cx="2448000" cy="1296000"/>
+            <a:off x="9030600" y="3743999"/>
+            <a:ext cx="2340000" cy="1476000"/>
           </a:xfrm>
           <a:prstGeom prst="rect">
             <a:avLst/>
@@ -14599,14 +14680,14 @@
           </a:ln>
         </p:spPr>
         <p:txBody>
-          <a:bodyPr wrap="square" lIns="72000" rIns="72000" tIns="36000" bIns="36000" anchor="ctr">
+          <a:bodyPr wrap="square" lIns="54000" rIns="54000" tIns="18000" bIns="18000" anchor="ctr">
             <a:spAutoFit/>
           </a:bodyPr>
           <a:lstStyle/>
           <a:p>
             <a:pPr algn="ctr"/>
             <a:r>
-              <a:rPr sz="1600" b="1">
+              <a:rPr sz="1400" b="1">
                 <a:solidFill>
                   <a:srgbClr val="1A1A1A"/>
                 </a:solidFill>
@@ -14619,7 +14700,7 @@
           <a:p>
             <a:pPr algn="ctr"/>
             <a:r>
-              <a:rPr sz="1600" b="1">
+              <a:rPr sz="1400" b="1">
                 <a:solidFill>
                   <a:srgbClr val="1A1A1A"/>
                 </a:solidFill>
@@ -14639,8 +14720,8 @@
         </p:nvSpPr>
         <p:spPr>
           <a:xfrm>
-            <a:off x="540000" y="5292000"/>
-            <a:ext cx="11113200" cy="432000"/>
+            <a:off x="540000" y="5580000"/>
+            <a:ext cx="11113200" cy="468000"/>
           </a:xfrm>
           <a:prstGeom prst="rect">
             <a:avLst/>
@@ -14651,14 +14732,14 @@
           </a:ln>
         </p:spPr>
         <p:txBody>
-          <a:bodyPr wrap="square" lIns="72000" rIns="72000" tIns="36000" bIns="36000" anchor="t">
+          <a:bodyPr wrap="square" lIns="54000" rIns="54000" tIns="18000" bIns="18000" anchor="ctr">
             <a:spAutoFit/>
           </a:bodyPr>
           <a:lstStyle/>
           <a:p>
             <a:pPr algn="ctr"/>
             <a:r>
-              <a:rPr sz="2000" b="1">
+              <a:rPr sz="1800" b="1">
                 <a:solidFill>
                   <a:srgbClr val="FF0000"/>
                 </a:solidFill>
@@ -14668,18 +14749,18 @@
               <a:t>個別 ⇄ 協働</a:t>
             </a:r>
             <a:r>
+              <a:rPr sz="1600" b="1">
+                <a:solidFill>
+                  <a:srgbClr val="1A1A1A"/>
+                </a:solidFill>
+                <a:latin typeface="メイリオ"/>
+                <a:ea typeface="メイリオ"/>
+              </a:rPr>
+              <a:t> の往還が、児童の </a:t>
+            </a:r>
+            <a:r>
               <a:rPr sz="1800" b="1">
                 <a:solidFill>
-                  <a:srgbClr val="1A1A1A"/>
-                </a:solidFill>
-                <a:latin typeface="メイリオ"/>
-                <a:ea typeface="メイリオ"/>
-              </a:rPr>
-              <a:t> の往還が、児童の</a:t>
-            </a:r>
-            <a:r>
-              <a:rPr sz="2000" b="1">
-                <a:solidFill>
                   <a:srgbClr val="FF0000"/>
                 </a:solidFill>
                 <a:latin typeface="メイリオ"/>
@@ -14688,7 +14769,7 @@
               <a:t>〝学びをつなげる〟</a:t>
             </a:r>
             <a:r>
-              <a:rPr sz="1800" b="1">
+              <a:rPr sz="1600" b="1">
                 <a:solidFill>
                   <a:srgbClr val="1A1A1A"/>
                 </a:solidFill>
@@ -14720,14 +14801,14 @@
           </a:ln>
         </p:spPr>
         <p:txBody>
-          <a:bodyPr wrap="square" lIns="72000" rIns="72000" tIns="36000" bIns="36000" anchor="t">
+          <a:bodyPr wrap="square" lIns="54000" rIns="54000" tIns="18000" bIns="18000" anchor="t">
             <a:spAutoFit/>
           </a:bodyPr>
           <a:lstStyle/>
           <a:p>
             <a:pPr algn="l"/>
             <a:r>
-              <a:rPr sz="1000" b="0">
+              <a:rPr sz="900" b="0">
                 <a:solidFill>
                   <a:srgbClr val="666666"/>
                 </a:solidFill>
@@ -14759,14 +14840,14 @@
           </a:ln>
         </p:spPr>
         <p:txBody>
-          <a:bodyPr wrap="square" lIns="72000" rIns="72000" tIns="36000" bIns="36000" anchor="t">
+          <a:bodyPr wrap="square" lIns="54000" rIns="54000" tIns="18000" bIns="18000" anchor="t">
             <a:spAutoFit/>
           </a:bodyPr>
           <a:lstStyle/>
           <a:p>
             <a:pPr algn="r"/>
             <a:r>
-              <a:rPr sz="1000" b="0">
+              <a:rPr sz="900" b="0">
                 <a:solidFill>
                   <a:srgbClr val="666666"/>
                 </a:solidFill>

--- a/指導講評_対話を通して学びをつなげる児童.pptx
+++ b/指導講評_対話を通して学びをつなげる児童.pptx
@@ -3214,7 +3214,7 @@
           <a:p>
             <a:pPr algn="ctr"/>
             <a:r>
-              <a:rPr sz="2200" b="1">
+              <a:rPr sz="2400" b="1">
                 <a:solidFill>
                   <a:srgbClr val="1A1A1A"/>
                 </a:solidFill>
@@ -3528,7 +3528,7 @@
           <a:p>
             <a:pPr algn="l"/>
             <a:r>
-              <a:rPr sz="3200" b="1">
+              <a:rPr sz="3000" b="1">
                 <a:solidFill>
                   <a:srgbClr val="1A1A1A"/>
                 </a:solidFill>
@@ -3632,7 +3632,7 @@
         <p:spPr>
           <a:xfrm>
             <a:off x="540000" y="1152000"/>
-            <a:ext cx="5580000" cy="468000"/>
+            <a:ext cx="6300000" cy="468000"/>
           </a:xfrm>
           <a:prstGeom prst="rect">
             <a:avLst/>
@@ -3676,7 +3676,7 @@
         <p:spPr>
           <a:xfrm>
             <a:off x="540000" y="1152000"/>
-            <a:ext cx="5580000" cy="468000"/>
+            <a:ext cx="6300000" cy="468000"/>
           </a:xfrm>
           <a:prstGeom prst="rect">
             <a:avLst/>
@@ -3694,7 +3694,7 @@
           <a:p>
             <a:pPr algn="ctr"/>
             <a:r>
-              <a:rPr sz="1800" b="1">
+              <a:rPr sz="2000" b="1">
                 <a:solidFill>
                   <a:srgbClr val="FFFFFF"/>
                 </a:solidFill>
@@ -3715,7 +3715,7 @@
         <p:spPr>
           <a:xfrm>
             <a:off x="540000" y="1620000"/>
-            <a:ext cx="5580000" cy="4572000"/>
+            <a:ext cx="6300000" cy="4572000"/>
           </a:xfrm>
           <a:prstGeom prst="rect">
             <a:avLst/>
@@ -3760,8 +3760,57 @@
         </p:nvSpPr>
         <p:spPr>
           <a:xfrm>
-            <a:off x="720000" y="1800000"/>
-            <a:ext cx="5220000" cy="4248000"/>
+            <a:off x="720000" y="1764000"/>
+            <a:ext cx="5940000" cy="503999"/>
+          </a:xfrm>
+          <a:prstGeom prst="rect">
+            <a:avLst/>
+          </a:prstGeom>
+          <a:noFill/>
+          <a:ln>
+            <a:noFill/>
+          </a:ln>
+        </p:spPr>
+        <p:txBody>
+          <a:bodyPr wrap="square" lIns="54000" rIns="54000" tIns="18000" bIns="18000" anchor="ctr">
+            <a:spAutoFit/>
+          </a:bodyPr>
+          <a:lstStyle/>
+          <a:p>
+            <a:pPr algn="l"/>
+            <a:r>
+              <a:rPr sz="2000" b="1">
+                <a:solidFill>
+                  <a:srgbClr val="002060"/>
+                </a:solidFill>
+                <a:latin typeface="メイリオ"/>
+                <a:ea typeface="メイリオ"/>
+              </a:rPr>
+              <a:t>●  </a:t>
+            </a:r>
+            <a:r>
+              <a:rPr sz="2000" b="1">
+                <a:solidFill>
+                  <a:srgbClr val="FF0000"/>
+                </a:solidFill>
+                <a:latin typeface="メイリオ"/>
+                <a:ea typeface="メイリオ"/>
+              </a:rPr>
+              <a:t>主体的に学び、考え、行動する力</a:t>
+            </a:r>
+          </a:p>
+        </p:txBody>
+      </p:sp>
+      <p:sp>
+        <p:nvSpPr>
+          <p:cNvPr id="9" name="TextBox 8"/>
+          <p:cNvSpPr txBox="1"/>
+          <p:nvPr/>
+        </p:nvSpPr>
+        <p:spPr>
+          <a:xfrm>
+            <a:off x="720000" y="2232000"/>
+            <a:ext cx="5940000" cy="360000"/>
           </a:xfrm>
           <a:prstGeom prst="rect">
             <a:avLst/>
@@ -3777,183 +3826,226 @@
           </a:bodyPr>
           <a:lstStyle/>
           <a:p>
-            <a:pPr algn="l">
-              <a:lnSpc>
-                <a:spcPct val="135000"/>
-              </a:lnSpc>
-            </a:pPr>
-            <a:r>
-              <a:rPr sz="1700" b="1">
+            <a:pPr algn="l"/>
+            <a:r>
+              <a:rPr sz="1800" b="0">
+                <a:solidFill>
+                  <a:srgbClr val="1A1A1A"/>
+                </a:solidFill>
+                <a:latin typeface="メイリオ"/>
+                <a:ea typeface="メイリオ"/>
+              </a:rPr>
+              <a:t>      の育成</a:t>
+            </a:r>
+          </a:p>
+        </p:txBody>
+      </p:sp>
+      <p:sp>
+        <p:nvSpPr>
+          <p:cNvPr id="10" name="TextBox 9"/>
+          <p:cNvSpPr txBox="1"/>
+          <p:nvPr/>
+        </p:nvSpPr>
+        <p:spPr>
+          <a:xfrm>
+            <a:off x="720000" y="2916000"/>
+            <a:ext cx="5940000" cy="503999"/>
+          </a:xfrm>
+          <a:prstGeom prst="rect">
+            <a:avLst/>
+          </a:prstGeom>
+          <a:noFill/>
+          <a:ln>
+            <a:noFill/>
+          </a:ln>
+        </p:spPr>
+        <p:txBody>
+          <a:bodyPr wrap="square" lIns="54000" rIns="54000" tIns="18000" bIns="18000" anchor="ctr">
+            <a:spAutoFit/>
+          </a:bodyPr>
+          <a:lstStyle/>
+          <a:p>
+            <a:pPr algn="l"/>
+            <a:r>
+              <a:rPr sz="2000" b="1">
                 <a:solidFill>
                   <a:srgbClr val="002060"/>
                 </a:solidFill>
                 <a:latin typeface="メイリオ"/>
                 <a:ea typeface="メイリオ"/>
               </a:rPr>
+              <a:t>●  「</a:t>
+            </a:r>
+            <a:r>
+              <a:rPr sz="2000" b="1">
+                <a:solidFill>
+                  <a:srgbClr val="FF0000"/>
+                </a:solidFill>
+                <a:latin typeface="メイリオ"/>
+                <a:ea typeface="メイリオ"/>
+              </a:rPr>
+              <a:t>話す・聞く・読む・書く</a:t>
+            </a:r>
+            <a:r>
+              <a:rPr sz="1800" b="0">
+                <a:solidFill>
+                  <a:srgbClr val="1A1A1A"/>
+                </a:solidFill>
+                <a:latin typeface="メイリオ"/>
+                <a:ea typeface="メイリオ"/>
+              </a:rPr>
+              <a:t>」言語能力を</a:t>
+            </a:r>
+          </a:p>
+        </p:txBody>
+      </p:sp>
+      <p:sp>
+        <p:nvSpPr>
+          <p:cNvPr id="11" name="TextBox 10"/>
+          <p:cNvSpPr txBox="1"/>
+          <p:nvPr/>
+        </p:nvSpPr>
+        <p:spPr>
+          <a:xfrm>
+            <a:off x="720000" y="3384000"/>
+            <a:ext cx="5940000" cy="360000"/>
+          </a:xfrm>
+          <a:prstGeom prst="rect">
+            <a:avLst/>
+          </a:prstGeom>
+          <a:noFill/>
+          <a:ln>
+            <a:noFill/>
+          </a:ln>
+        </p:spPr>
+        <p:txBody>
+          <a:bodyPr wrap="square" lIns="54000" rIns="54000" tIns="18000" bIns="18000" anchor="t">
+            <a:spAutoFit/>
+          </a:bodyPr>
+          <a:lstStyle/>
+          <a:p>
+            <a:pPr algn="l"/>
+            <a:r>
+              <a:rPr sz="1800" b="0">
+                <a:solidFill>
+                  <a:srgbClr val="1A1A1A"/>
+                </a:solidFill>
+                <a:latin typeface="メイリオ"/>
+                <a:ea typeface="メイリオ"/>
+              </a:rPr>
+              <a:t>      全教育活動で計画的に育成</a:t>
+            </a:r>
+          </a:p>
+        </p:txBody>
+      </p:sp>
+      <p:sp>
+        <p:nvSpPr>
+          <p:cNvPr id="12" name="TextBox 11"/>
+          <p:cNvSpPr txBox="1"/>
+          <p:nvPr/>
+        </p:nvSpPr>
+        <p:spPr>
+          <a:xfrm>
+            <a:off x="720000" y="4068000"/>
+            <a:ext cx="5940000" cy="503999"/>
+          </a:xfrm>
+          <a:prstGeom prst="rect">
+            <a:avLst/>
+          </a:prstGeom>
+          <a:noFill/>
+          <a:ln>
+            <a:noFill/>
+          </a:ln>
+        </p:spPr>
+        <p:txBody>
+          <a:bodyPr wrap="square" lIns="54000" rIns="54000" tIns="18000" bIns="18000" anchor="ctr">
+            <a:spAutoFit/>
+          </a:bodyPr>
+          <a:lstStyle/>
+          <a:p>
+            <a:pPr algn="l"/>
+            <a:r>
+              <a:rPr sz="2000" b="1">
+                <a:solidFill>
+                  <a:srgbClr val="002060"/>
+                </a:solidFill>
+                <a:latin typeface="メイリオ"/>
+                <a:ea typeface="メイリオ"/>
+              </a:rPr>
               <a:t>●  </a:t>
             </a:r>
             <a:r>
-              <a:rPr sz="1700" b="1">
+              <a:rPr sz="2000" b="1">
                 <a:solidFill>
                   <a:srgbClr val="FF0000"/>
                 </a:solidFill>
                 <a:latin typeface="メイリオ"/>
                 <a:ea typeface="メイリオ"/>
               </a:rPr>
-              <a:t>主体的に学び、考え、行動する力</a:t>
-            </a:r>
-          </a:p>
-          <a:p>
-            <a:pPr algn="l">
-              <a:lnSpc>
-                <a:spcPct val="135000"/>
-              </a:lnSpc>
-            </a:pPr>
-            <a:r>
-              <a:rPr sz="1500" b="0">
+              <a:t>思考力・判断力・表現力等</a:t>
+            </a:r>
+            <a:r>
+              <a:rPr sz="1800" b="0">
                 <a:solidFill>
                   <a:srgbClr val="1A1A1A"/>
                 </a:solidFill>
                 <a:latin typeface="メイリオ"/>
                 <a:ea typeface="メイリオ"/>
               </a:rPr>
-              <a:t>     の育成</a:t>
-            </a:r>
-          </a:p>
-          <a:p>
-            <a:pPr algn="l">
-              <a:lnSpc>
-                <a:spcPct val="135000"/>
-              </a:lnSpc>
-            </a:pPr>
-          </a:p>
-          <a:p>
-            <a:pPr algn="l">
-              <a:lnSpc>
-                <a:spcPct val="135000"/>
-              </a:lnSpc>
-            </a:pPr>
-            <a:r>
-              <a:rPr sz="1700" b="1">
-                <a:solidFill>
-                  <a:srgbClr val="002060"/>
-                </a:solidFill>
-                <a:latin typeface="メイリオ"/>
-                <a:ea typeface="メイリオ"/>
-              </a:rPr>
-              <a:t>●  「</a:t>
-            </a:r>
-            <a:r>
-              <a:rPr sz="1700" b="1">
-                <a:solidFill>
-                  <a:srgbClr val="FF0000"/>
-                </a:solidFill>
-                <a:latin typeface="メイリオ"/>
-                <a:ea typeface="メイリオ"/>
-              </a:rPr>
-              <a:t>話す・聞く・読む・書く</a:t>
-            </a:r>
-            <a:r>
-              <a:rPr sz="1500" b="0">
+              <a:t>の基盤として</a:t>
+            </a:r>
+          </a:p>
+        </p:txBody>
+      </p:sp>
+      <p:sp>
+        <p:nvSpPr>
+          <p:cNvPr id="13" name="TextBox 12"/>
+          <p:cNvSpPr txBox="1"/>
+          <p:nvPr/>
+        </p:nvSpPr>
+        <p:spPr>
+          <a:xfrm>
+            <a:off x="720000" y="4536000"/>
+            <a:ext cx="5940000" cy="360000"/>
+          </a:xfrm>
+          <a:prstGeom prst="rect">
+            <a:avLst/>
+          </a:prstGeom>
+          <a:noFill/>
+          <a:ln>
+            <a:noFill/>
+          </a:ln>
+        </p:spPr>
+        <p:txBody>
+          <a:bodyPr wrap="square" lIns="54000" rIns="54000" tIns="18000" bIns="18000" anchor="t">
+            <a:spAutoFit/>
+          </a:bodyPr>
+          <a:lstStyle/>
+          <a:p>
+            <a:pPr algn="l"/>
+            <a:r>
+              <a:rPr sz="1800" b="0">
                 <a:solidFill>
                   <a:srgbClr val="1A1A1A"/>
                 </a:solidFill>
                 <a:latin typeface="メイリオ"/>
                 <a:ea typeface="メイリオ"/>
               </a:rPr>
-              <a:t>」言語能力を</a:t>
-            </a:r>
-          </a:p>
-          <a:p>
-            <a:pPr algn="l">
-              <a:lnSpc>
-                <a:spcPct val="135000"/>
-              </a:lnSpc>
-            </a:pPr>
-            <a:r>
-              <a:rPr sz="1500" b="0">
-                <a:solidFill>
-                  <a:srgbClr val="1A1A1A"/>
-                </a:solidFill>
-                <a:latin typeface="メイリオ"/>
-                <a:ea typeface="メイリオ"/>
-              </a:rPr>
-              <a:t>     全教育活動で計画的に育成</a:t>
-            </a:r>
-          </a:p>
-          <a:p>
-            <a:pPr algn="l">
-              <a:lnSpc>
-                <a:spcPct val="135000"/>
-              </a:lnSpc>
-            </a:pPr>
-          </a:p>
-          <a:p>
-            <a:pPr algn="l">
-              <a:lnSpc>
-                <a:spcPct val="135000"/>
-              </a:lnSpc>
-            </a:pPr>
-            <a:r>
-              <a:rPr sz="1700" b="1">
-                <a:solidFill>
-                  <a:srgbClr val="002060"/>
-                </a:solidFill>
-                <a:latin typeface="メイリオ"/>
-                <a:ea typeface="メイリオ"/>
-              </a:rPr>
-              <a:t>●  </a:t>
-            </a:r>
-            <a:r>
-              <a:rPr sz="1700" b="1">
-                <a:solidFill>
-                  <a:srgbClr val="FF0000"/>
-                </a:solidFill>
-                <a:latin typeface="メイリオ"/>
-                <a:ea typeface="メイリオ"/>
-              </a:rPr>
-              <a:t>思考力・判断力・表現力等</a:t>
-            </a:r>
-            <a:r>
-              <a:rPr sz="1500" b="0">
-                <a:solidFill>
-                  <a:srgbClr val="1A1A1A"/>
-                </a:solidFill>
-                <a:latin typeface="メイリオ"/>
-                <a:ea typeface="メイリオ"/>
-              </a:rPr>
-              <a:t>の基盤として</a:t>
-            </a:r>
-          </a:p>
-          <a:p>
-            <a:pPr algn="l">
-              <a:lnSpc>
-                <a:spcPct val="135000"/>
-              </a:lnSpc>
-            </a:pPr>
-            <a:r>
-              <a:rPr sz="1500" b="0">
-                <a:solidFill>
-                  <a:srgbClr val="1A1A1A"/>
-                </a:solidFill>
-                <a:latin typeface="メイリオ"/>
-                <a:ea typeface="メイリオ"/>
-              </a:rPr>
-              <a:t>     言語能力を位置づける</a:t>
-            </a:r>
-          </a:p>
-        </p:txBody>
-      </p:sp>
-      <p:sp>
-        <p:nvSpPr>
-          <p:cNvPr id="9" name="Rectangle 8"/>
+              <a:t>      言語能力を位置づける</a:t>
+            </a:r>
+          </a:p>
+        </p:txBody>
+      </p:sp>
+      <p:sp>
+        <p:nvSpPr>
+          <p:cNvPr id="14" name="Rectangle 13"/>
           <p:cNvSpPr/>
           <p:nvPr/>
         </p:nvSpPr>
         <p:spPr>
           <a:xfrm>
-            <a:off x="6300000" y="1152000"/>
-            <a:ext cx="5353200" cy="468000"/>
+            <a:off x="7020000" y="1152000"/>
+            <a:ext cx="4633200" cy="468000"/>
           </a:xfrm>
           <a:prstGeom prst="rect">
             <a:avLst/>
@@ -3990,14 +4082,14 @@
       </p:sp>
       <p:sp>
         <p:nvSpPr>
-          <p:cNvPr id="10" name="TextBox 9"/>
-          <p:cNvSpPr txBox="1"/>
-          <p:nvPr/>
-        </p:nvSpPr>
-        <p:spPr>
-          <a:xfrm>
-            <a:off x="6300000" y="1152000"/>
-            <a:ext cx="5353200" cy="468000"/>
+          <p:cNvPr id="15" name="TextBox 14"/>
+          <p:cNvSpPr txBox="1"/>
+          <p:nvPr/>
+        </p:nvSpPr>
+        <p:spPr>
+          <a:xfrm>
+            <a:off x="7020000" y="1152000"/>
+            <a:ext cx="4633200" cy="468000"/>
           </a:xfrm>
           <a:prstGeom prst="rect">
             <a:avLst/>
@@ -4015,7 +4107,7 @@
           <a:p>
             <a:pPr algn="ctr"/>
             <a:r>
-              <a:rPr sz="1600" b="1">
+              <a:rPr sz="1700" b="1">
                 <a:solidFill>
                   <a:srgbClr val="FFFFFF"/>
                 </a:solidFill>
@@ -4029,14 +4121,14 @@
       </p:sp>
       <p:sp>
         <p:nvSpPr>
-          <p:cNvPr id="11" name="Rectangle 10"/>
+          <p:cNvPr id="16" name="Rectangle 15"/>
           <p:cNvSpPr/>
           <p:nvPr/>
         </p:nvSpPr>
         <p:spPr>
           <a:xfrm>
-            <a:off x="6300000" y="1620000"/>
-            <a:ext cx="5353200" cy="4572000"/>
+            <a:off x="7020000" y="1620000"/>
+            <a:ext cx="4633200" cy="4572000"/>
           </a:xfrm>
           <a:prstGeom prst="rect">
             <a:avLst/>
@@ -4075,14 +4167,14 @@
       </p:sp>
       <p:sp>
         <p:nvSpPr>
-          <p:cNvPr id="12" name="TextBox 11"/>
-          <p:cNvSpPr txBox="1"/>
-          <p:nvPr/>
-        </p:nvSpPr>
-        <p:spPr>
-          <a:xfrm>
-            <a:off x="6408000" y="1800000"/>
-            <a:ext cx="5137200" cy="4248000"/>
+          <p:cNvPr id="17" name="TextBox 16"/>
+          <p:cNvSpPr txBox="1"/>
+          <p:nvPr/>
+        </p:nvSpPr>
+        <p:spPr>
+          <a:xfrm>
+            <a:off x="7128000" y="1800000"/>
+            <a:ext cx="4417200" cy="432000"/>
           </a:xfrm>
           <a:prstGeom prst="rect">
             <a:avLst/>
@@ -4098,13 +4190,9 @@
           </a:bodyPr>
           <a:lstStyle/>
           <a:p>
-            <a:pPr algn="l">
-              <a:lnSpc>
-                <a:spcPct val="130000"/>
-              </a:lnSpc>
-            </a:pPr>
-            <a:r>
-              <a:rPr sz="1400" b="0">
+            <a:pPr algn="ctr"/>
+            <a:r>
+              <a:rPr sz="1700" b="0">
                 <a:solidFill>
                   <a:srgbClr val="1A1A1A"/>
                 </a:solidFill>
@@ -4114,21 +4202,36 @@
               <a:t>本校研究仮説の</a:t>
             </a:r>
           </a:p>
-          <a:p>
-            <a:pPr algn="l">
-              <a:lnSpc>
-                <a:spcPct val="130000"/>
-              </a:lnSpc>
-            </a:pPr>
-          </a:p>
-          <a:p>
-            <a:pPr algn="l">
-              <a:lnSpc>
-                <a:spcPct val="130000"/>
-              </a:lnSpc>
-            </a:pPr>
-            <a:r>
-              <a:rPr sz="1600" b="1">
+        </p:txBody>
+      </p:sp>
+      <p:sp>
+        <p:nvSpPr>
+          <p:cNvPr id="18" name="TextBox 17"/>
+          <p:cNvSpPr txBox="1"/>
+          <p:nvPr/>
+        </p:nvSpPr>
+        <p:spPr>
+          <a:xfrm>
+            <a:off x="7128000" y="2340000"/>
+            <a:ext cx="4417200" cy="540000"/>
+          </a:xfrm>
+          <a:prstGeom prst="rect">
+            <a:avLst/>
+          </a:prstGeom>
+          <a:noFill/>
+          <a:ln>
+            <a:noFill/>
+          </a:ln>
+        </p:spPr>
+        <p:txBody>
+          <a:bodyPr wrap="square" lIns="54000" rIns="54000" tIns="18000" bIns="18000" anchor="t">
+            <a:spAutoFit/>
+          </a:bodyPr>
+          <a:lstStyle/>
+          <a:p>
+            <a:pPr algn="ctr"/>
+            <a:r>
+              <a:rPr sz="2000" b="1">
                 <a:solidFill>
                   <a:srgbClr val="FF0000"/>
                 </a:solidFill>
@@ -4138,72 +4241,124 @@
               <a:t>「視点を明確にした</a:t>
             </a:r>
           </a:p>
-          <a:p>
-            <a:pPr algn="l">
-              <a:lnSpc>
-                <a:spcPct val="130000"/>
-              </a:lnSpc>
-            </a:pPr>
-            <a:r>
-              <a:rPr sz="1600" b="1">
+        </p:txBody>
+      </p:sp>
+      <p:sp>
+        <p:nvSpPr>
+          <p:cNvPr id="19" name="TextBox 18"/>
+          <p:cNvSpPr txBox="1"/>
+          <p:nvPr/>
+        </p:nvSpPr>
+        <p:spPr>
+          <a:xfrm>
+            <a:off x="7128000" y="2880000"/>
+            <a:ext cx="4417200" cy="540000"/>
+          </a:xfrm>
+          <a:prstGeom prst="rect">
+            <a:avLst/>
+          </a:prstGeom>
+          <a:noFill/>
+          <a:ln>
+            <a:noFill/>
+          </a:ln>
+        </p:spPr>
+        <p:txBody>
+          <a:bodyPr wrap="square" lIns="54000" rIns="54000" tIns="18000" bIns="18000" anchor="t">
+            <a:spAutoFit/>
+          </a:bodyPr>
+          <a:lstStyle/>
+          <a:p>
+            <a:pPr algn="ctr"/>
+            <a:r>
+              <a:rPr sz="2000" b="1">
                 <a:solidFill>
                   <a:srgbClr val="FF0000"/>
                 </a:solidFill>
                 <a:latin typeface="メイリオ"/>
                 <a:ea typeface="メイリオ"/>
               </a:rPr>
-              <a:t>  対話の継続」</a:t>
-            </a:r>
-          </a:p>
-          <a:p>
-            <a:pPr algn="l">
-              <a:lnSpc>
-                <a:spcPct val="130000"/>
-              </a:lnSpc>
-            </a:pPr>
-          </a:p>
-          <a:p>
-            <a:pPr algn="l">
-              <a:lnSpc>
-                <a:spcPct val="130000"/>
-              </a:lnSpc>
-            </a:pPr>
-            <a:r>
-              <a:rPr sz="1400" b="0">
+              <a:t>対話の継続」</a:t>
+            </a:r>
+          </a:p>
+        </p:txBody>
+      </p:sp>
+      <p:sp>
+        <p:nvSpPr>
+          <p:cNvPr id="20" name="TextBox 19"/>
+          <p:cNvSpPr txBox="1"/>
+          <p:nvPr/>
+        </p:nvSpPr>
+        <p:spPr>
+          <a:xfrm>
+            <a:off x="7128000" y="3600000"/>
+            <a:ext cx="4417200" cy="432000"/>
+          </a:xfrm>
+          <a:prstGeom prst="rect">
+            <a:avLst/>
+          </a:prstGeom>
+          <a:noFill/>
+          <a:ln>
+            <a:noFill/>
+          </a:ln>
+        </p:spPr>
+        <p:txBody>
+          <a:bodyPr wrap="square" lIns="54000" rIns="54000" tIns="18000" bIns="18000" anchor="t">
+            <a:spAutoFit/>
+          </a:bodyPr>
+          <a:lstStyle/>
+          <a:p>
+            <a:pPr algn="ctr"/>
+            <a:r>
+              <a:rPr sz="1700" b="0">
                 <a:solidFill>
                   <a:srgbClr val="1A1A1A"/>
                 </a:solidFill>
                 <a:latin typeface="メイリオ"/>
                 <a:ea typeface="メイリオ"/>
               </a:rPr>
-              <a:t>は、都の言語能力</a:t>
-            </a:r>
-          </a:p>
-          <a:p>
-            <a:pPr algn="l">
-              <a:lnSpc>
-                <a:spcPct val="130000"/>
-              </a:lnSpc>
-            </a:pPr>
-            <a:r>
-              <a:rPr sz="1400" b="0">
+              <a:t>は、都の言語能力育成の</a:t>
+            </a:r>
+          </a:p>
+        </p:txBody>
+      </p:sp>
+      <p:sp>
+        <p:nvSpPr>
+          <p:cNvPr id="21" name="TextBox 20"/>
+          <p:cNvSpPr txBox="1"/>
+          <p:nvPr/>
+        </p:nvSpPr>
+        <p:spPr>
+          <a:xfrm>
+            <a:off x="7128000" y="4031999"/>
+            <a:ext cx="4417200" cy="432000"/>
+          </a:xfrm>
+          <a:prstGeom prst="rect">
+            <a:avLst/>
+          </a:prstGeom>
+          <a:noFill/>
+          <a:ln>
+            <a:noFill/>
+          </a:ln>
+        </p:spPr>
+        <p:txBody>
+          <a:bodyPr wrap="square" lIns="54000" rIns="54000" tIns="18000" bIns="18000" anchor="ctr">
+            <a:spAutoFit/>
+          </a:bodyPr>
+          <a:lstStyle/>
+          <a:p>
+            <a:pPr algn="ctr"/>
+            <a:r>
+              <a:rPr sz="1700" b="0">
                 <a:solidFill>
                   <a:srgbClr val="1A1A1A"/>
                 </a:solidFill>
                 <a:latin typeface="メイリオ"/>
                 <a:ea typeface="メイリオ"/>
               </a:rPr>
-              <a:t>育成の方向と</a:t>
-            </a:r>
-          </a:p>
-          <a:p>
-            <a:pPr algn="l">
-              <a:lnSpc>
-                <a:spcPct val="130000"/>
-              </a:lnSpc>
-            </a:pPr>
-            <a:r>
-              <a:rPr sz="1600" b="1">
+              <a:t>方向と </a:t>
+            </a:r>
+            <a:r>
+              <a:rPr sz="2000" b="1">
                 <a:solidFill>
                   <a:srgbClr val="FF0000"/>
                 </a:solidFill>
@@ -4213,7 +4368,7 @@
               <a:t>完全に一致</a:t>
             </a:r>
             <a:r>
-              <a:rPr sz="1400" b="0">
+              <a:rPr sz="1700" b="0">
                 <a:solidFill>
                   <a:srgbClr val="1A1A1A"/>
                 </a:solidFill>
@@ -4223,21 +4378,36 @@
               <a:t>。</a:t>
             </a:r>
           </a:p>
-          <a:p>
-            <a:pPr algn="l">
-              <a:lnSpc>
-                <a:spcPct val="130000"/>
-              </a:lnSpc>
-            </a:pPr>
-          </a:p>
-          <a:p>
-            <a:pPr algn="l">
-              <a:lnSpc>
-                <a:spcPct val="130000"/>
-              </a:lnSpc>
-            </a:pPr>
-            <a:r>
-              <a:rPr sz="1400" b="0">
+        </p:txBody>
+      </p:sp>
+      <p:sp>
+        <p:nvSpPr>
+          <p:cNvPr id="22" name="TextBox 21"/>
+          <p:cNvSpPr txBox="1"/>
+          <p:nvPr/>
+        </p:nvSpPr>
+        <p:spPr>
+          <a:xfrm>
+            <a:off x="7128000" y="4752000"/>
+            <a:ext cx="4417200" cy="432000"/>
+          </a:xfrm>
+          <a:prstGeom prst="rect">
+            <a:avLst/>
+          </a:prstGeom>
+          <a:noFill/>
+          <a:ln>
+            <a:noFill/>
+          </a:ln>
+        </p:spPr>
+        <p:txBody>
+          <a:bodyPr wrap="square" lIns="54000" rIns="54000" tIns="18000" bIns="18000" anchor="t">
+            <a:spAutoFit/>
+          </a:bodyPr>
+          <a:lstStyle/>
+          <a:p>
+            <a:pPr algn="ctr"/>
+            <a:r>
+              <a:rPr sz="1700" b="0">
                 <a:solidFill>
                   <a:srgbClr val="1A1A1A"/>
                 </a:solidFill>
@@ -4247,45 +4417,50 @@
               <a:t>校内研究は、</a:t>
             </a:r>
           </a:p>
-          <a:p>
-            <a:pPr algn="l">
-              <a:lnSpc>
-                <a:spcPct val="130000"/>
-              </a:lnSpc>
-            </a:pPr>
-            <a:r>
-              <a:rPr sz="1600" b="1">
+        </p:txBody>
+      </p:sp>
+      <p:sp>
+        <p:nvSpPr>
+          <p:cNvPr id="23" name="TextBox 22"/>
+          <p:cNvSpPr txBox="1"/>
+          <p:nvPr/>
+        </p:nvSpPr>
+        <p:spPr>
+          <a:xfrm>
+            <a:off x="7128000" y="5220000"/>
+            <a:ext cx="4417200" cy="540000"/>
+          </a:xfrm>
+          <a:prstGeom prst="rect">
+            <a:avLst/>
+          </a:prstGeom>
+          <a:noFill/>
+          <a:ln>
+            <a:noFill/>
+          </a:ln>
+        </p:spPr>
+        <p:txBody>
+          <a:bodyPr wrap="square" lIns="54000" rIns="54000" tIns="18000" bIns="18000" anchor="t">
+            <a:spAutoFit/>
+          </a:bodyPr>
+          <a:lstStyle/>
+          <a:p>
+            <a:pPr algn="ctr"/>
+            <a:r>
+              <a:rPr sz="2000" b="1">
                 <a:solidFill>
                   <a:srgbClr val="002060"/>
                 </a:solidFill>
                 <a:latin typeface="メイリオ"/>
                 <a:ea typeface="メイリオ"/>
               </a:rPr>
-              <a:t>都の施策推進</a:t>
-            </a:r>
-          </a:p>
-          <a:p>
-            <a:pPr algn="l">
-              <a:lnSpc>
-                <a:spcPct val="130000"/>
-              </a:lnSpc>
-            </a:pPr>
-            <a:r>
-              <a:rPr sz="1600" b="1">
-                <a:solidFill>
-                  <a:srgbClr val="002060"/>
-                </a:solidFill>
-                <a:latin typeface="メイリオ"/>
-                <a:ea typeface="メイリオ"/>
-              </a:rPr>
-              <a:t>そのもの。</a:t>
-            </a:r>
-          </a:p>
-        </p:txBody>
-      </p:sp>
-      <p:sp>
-        <p:nvSpPr>
-          <p:cNvPr id="13" name="TextBox 12"/>
+              <a:t>都の施策推進そのもの。</a:t>
+            </a:r>
+          </a:p>
+        </p:txBody>
+      </p:sp>
+      <p:sp>
+        <p:nvSpPr>
+          <p:cNvPr id="24" name="TextBox 23"/>
           <p:cNvSpPr txBox="1"/>
           <p:nvPr/>
         </p:nvSpPr>
@@ -4324,7 +4499,7 @@
       </p:sp>
       <p:sp>
         <p:nvSpPr>
-          <p:cNvPr id="14" name="TextBox 13"/>
+          <p:cNvPr id="25" name="TextBox 24"/>
           <p:cNvSpPr txBox="1"/>
           <p:nvPr/>
         </p:nvSpPr>
@@ -4406,7 +4581,7 @@
           <a:p>
             <a:pPr algn="l"/>
             <a:r>
-              <a:rPr sz="3200" b="1">
+              <a:rPr sz="3000" b="1">
                 <a:solidFill>
                   <a:srgbClr val="1A1A1A"/>
                 </a:solidFill>
@@ -4535,7 +4710,7 @@
           <a:p>
             <a:pPr algn="ctr"/>
             <a:r>
-              <a:rPr sz="1800" b="1">
+              <a:rPr sz="2000" b="1">
                 <a:solidFill>
                   <a:srgbClr val="1A1A1A"/>
                 </a:solidFill>
@@ -4545,18 +4720,18 @@
               <a:t>📊  児童の意識調査より：「</a:t>
             </a:r>
             <a:r>
+              <a:rPr sz="2200" b="1">
+                <a:solidFill>
+                  <a:srgbClr val="FF0000"/>
+                </a:solidFill>
+                <a:latin typeface="メイリオ"/>
+                <a:ea typeface="メイリオ"/>
+              </a:rPr>
+              <a:t>質問を考えながら聞く</a:t>
+            </a:r>
+            <a:r>
               <a:rPr sz="2000" b="1">
                 <a:solidFill>
-                  <a:srgbClr val="FF0000"/>
-                </a:solidFill>
-                <a:latin typeface="メイリオ"/>
-                <a:ea typeface="メイリオ"/>
-              </a:rPr>
-              <a:t>質問を考えながら聞く</a:t>
-            </a:r>
-            <a:r>
-              <a:rPr sz="1800" b="1">
-                <a:solidFill>
                   <a:srgbClr val="1A1A1A"/>
                 </a:solidFill>
                 <a:latin typeface="メイリオ"/>
@@ -4565,7 +4740,7 @@
               <a:t>」と答えた児童は ▶ </a:t>
             </a:r>
             <a:r>
-              <a:rPr sz="2800" b="1">
+              <a:rPr sz="3000" b="1">
                 <a:solidFill>
                   <a:srgbClr val="FF0000"/>
                 </a:solidFill>
@@ -4585,8 +4760,8 @@
         </p:nvSpPr>
         <p:spPr>
           <a:xfrm>
-            <a:off x="540000" y="2088000"/>
-            <a:ext cx="3600000" cy="432000"/>
+            <a:off x="540000" y="2124000"/>
+            <a:ext cx="4680000" cy="432000"/>
           </a:xfrm>
           <a:prstGeom prst="rect">
             <a:avLst/>
@@ -4629,8 +4804,8 @@
         </p:nvSpPr>
         <p:spPr>
           <a:xfrm>
-            <a:off x="540000" y="2088000"/>
-            <a:ext cx="3600000" cy="432000"/>
+            <a:off x="540000" y="2124000"/>
+            <a:ext cx="4680000" cy="432000"/>
           </a:xfrm>
           <a:prstGeom prst="rect">
             <a:avLst/>
@@ -4648,7 +4823,7 @@
           <a:p>
             <a:pPr algn="ctr"/>
             <a:r>
-              <a:rPr sz="1500" b="1">
+              <a:rPr sz="1700" b="1">
                 <a:solidFill>
                   <a:srgbClr val="FFFFFF"/>
                 </a:solidFill>
@@ -4668,8 +4843,8 @@
         </p:nvSpPr>
         <p:spPr>
           <a:xfrm>
-            <a:off x="540000" y="2520000"/>
-            <a:ext cx="11113200" cy="2880000"/>
+            <a:off x="540000" y="2664000"/>
+            <a:ext cx="11113200" cy="1368000"/>
           </a:xfrm>
           <a:prstGeom prst="rect">
             <a:avLst/>
@@ -4708,204 +4883,14 @@
       </p:sp>
       <p:sp>
         <p:nvSpPr>
-          <p:cNvPr id="9" name="TextBox 8"/>
-          <p:cNvSpPr txBox="1"/>
-          <p:nvPr/>
-        </p:nvSpPr>
-        <p:spPr>
-          <a:xfrm>
-            <a:off x="900000" y="2700000"/>
-            <a:ext cx="10393200" cy="1260000"/>
-          </a:xfrm>
-          <a:prstGeom prst="rect">
-            <a:avLst/>
-          </a:prstGeom>
-          <a:noFill/>
-          <a:ln>
-            <a:noFill/>
-          </a:ln>
-        </p:spPr>
-        <p:txBody>
-          <a:bodyPr wrap="square" lIns="54000" rIns="54000" tIns="18000" bIns="18000" anchor="t">
-            <a:spAutoFit/>
-          </a:bodyPr>
-          <a:lstStyle/>
-          <a:p>
-            <a:pPr algn="l">
-              <a:lnSpc>
-                <a:spcPct val="150000"/>
-              </a:lnSpc>
-            </a:pPr>
-            <a:r>
-              <a:rPr sz="1800" b="1">
-                <a:solidFill>
-                  <a:srgbClr val="1A1A1A"/>
-                </a:solidFill>
-                <a:latin typeface="メイリオ"/>
-                <a:ea typeface="メイリオ"/>
-              </a:rPr>
-              <a:t>①  自分の学年・教科で、</a:t>
-            </a:r>
-            <a:r>
-              <a:rPr sz="1900" b="1">
-                <a:solidFill>
-                  <a:srgbClr val="FF0000"/>
-                </a:solidFill>
-                <a:latin typeface="メイリオ"/>
-                <a:ea typeface="メイリオ"/>
-              </a:rPr>
-              <a:t>「質問の種類」</a:t>
-            </a:r>
-            <a:r>
-              <a:rPr sz="1800" b="1">
-                <a:solidFill>
-                  <a:srgbClr val="1A1A1A"/>
-                </a:solidFill>
-                <a:latin typeface="メイリオ"/>
-                <a:ea typeface="メイリオ"/>
-              </a:rPr>
-              <a:t>のような</a:t>
-            </a:r>
-          </a:p>
-          <a:p>
-            <a:pPr algn="l">
-              <a:lnSpc>
-                <a:spcPct val="150000"/>
-              </a:lnSpc>
-            </a:pPr>
-            <a:r>
-              <a:rPr sz="1800" b="1">
-                <a:solidFill>
-                  <a:srgbClr val="1A1A1A"/>
-                </a:solidFill>
-                <a:latin typeface="メイリオ"/>
-                <a:ea typeface="メイリオ"/>
-              </a:rPr>
-              <a:t>     </a:t>
-            </a:r>
-            <a:r>
-              <a:rPr sz="1900" b="1">
-                <a:solidFill>
-                  <a:srgbClr val="FF0000"/>
-                </a:solidFill>
-                <a:latin typeface="メイリオ"/>
-                <a:ea typeface="メイリオ"/>
-              </a:rPr>
-              <a:t>〝対話の足場〟</a:t>
-            </a:r>
-            <a:r>
-              <a:rPr sz="1800" b="1">
-                <a:solidFill>
-                  <a:srgbClr val="1A1A1A"/>
-                </a:solidFill>
-                <a:latin typeface="メイリオ"/>
-                <a:ea typeface="メイリオ"/>
-              </a:rPr>
-              <a:t>を作るとしたら、何ができますか？</a:t>
-            </a:r>
-          </a:p>
-        </p:txBody>
-      </p:sp>
-      <p:sp>
-        <p:nvSpPr>
-          <p:cNvPr id="10" name="TextBox 9"/>
-          <p:cNvSpPr txBox="1"/>
-          <p:nvPr/>
-        </p:nvSpPr>
-        <p:spPr>
-          <a:xfrm>
-            <a:off x="900000" y="4068000"/>
-            <a:ext cx="10393200" cy="1260000"/>
-          </a:xfrm>
-          <a:prstGeom prst="rect">
-            <a:avLst/>
-          </a:prstGeom>
-          <a:noFill/>
-          <a:ln>
-            <a:noFill/>
-          </a:ln>
-        </p:spPr>
-        <p:txBody>
-          <a:bodyPr wrap="square" lIns="54000" rIns="54000" tIns="18000" bIns="18000" anchor="t">
-            <a:spAutoFit/>
-          </a:bodyPr>
-          <a:lstStyle/>
-          <a:p>
-            <a:pPr algn="l">
-              <a:lnSpc>
-                <a:spcPct val="150000"/>
-              </a:lnSpc>
-            </a:pPr>
-            <a:r>
-              <a:rPr sz="1800" b="1">
-                <a:solidFill>
-                  <a:srgbClr val="1A1A1A"/>
-                </a:solidFill>
-                <a:latin typeface="メイリオ"/>
-                <a:ea typeface="メイリオ"/>
-              </a:rPr>
-              <a:t>②  児童が</a:t>
-            </a:r>
-            <a:r>
-              <a:rPr sz="1900" b="1">
-                <a:solidFill>
-                  <a:srgbClr val="FF0000"/>
-                </a:solidFill>
-                <a:latin typeface="メイリオ"/>
-                <a:ea typeface="メイリオ"/>
-              </a:rPr>
-              <a:t>〝伝えてよかった・聞けてよかった〟</a:t>
-            </a:r>
-            <a:r>
-              <a:rPr sz="1800" b="1">
-                <a:solidFill>
-                  <a:srgbClr val="1A1A1A"/>
-                </a:solidFill>
-                <a:latin typeface="メイリオ"/>
-                <a:ea typeface="メイリオ"/>
-              </a:rPr>
-              <a:t>と</a:t>
-            </a:r>
-          </a:p>
-          <a:p>
-            <a:pPr algn="l">
-              <a:lnSpc>
-                <a:spcPct val="150000"/>
-              </a:lnSpc>
-            </a:pPr>
-            <a:r>
-              <a:rPr sz="1800" b="1">
-                <a:solidFill>
-                  <a:srgbClr val="1A1A1A"/>
-                </a:solidFill>
-                <a:latin typeface="メイリオ"/>
-                <a:ea typeface="メイリオ"/>
-              </a:rPr>
-              <a:t>     実感する場面を、</a:t>
-            </a:r>
-            <a:r>
-              <a:rPr sz="1900" b="1">
-                <a:solidFill>
-                  <a:srgbClr val="FF0000"/>
-                </a:solidFill>
-                <a:latin typeface="メイリオ"/>
-                <a:ea typeface="メイリオ"/>
-              </a:rPr>
-              <a:t>どう仕掛けますか？</a:t>
-            </a:r>
-          </a:p>
-        </p:txBody>
-      </p:sp>
-      <p:sp>
-        <p:nvSpPr>
-          <p:cNvPr id="11" name="Rectangle 10"/>
+          <p:cNvPr id="9" name="Rectangle 8"/>
           <p:cNvSpPr/>
           <p:nvPr/>
         </p:nvSpPr>
         <p:spPr>
           <a:xfrm>
-            <a:off x="2880000" y="5652000"/>
-            <a:ext cx="6433200" cy="576000"/>
+            <a:off x="540000" y="2664000"/>
+            <a:ext cx="540000" cy="1368000"/>
           </a:xfrm>
           <a:prstGeom prst="rect">
             <a:avLst/>
@@ -4942,18 +4927,436 @@
       </p:sp>
       <p:sp>
         <p:nvSpPr>
+          <p:cNvPr id="10" name="TextBox 9"/>
+          <p:cNvSpPr txBox="1"/>
+          <p:nvPr/>
+        </p:nvSpPr>
+        <p:spPr>
+          <a:xfrm>
+            <a:off x="540000" y="2664000"/>
+            <a:ext cx="540000" cy="1368000"/>
+          </a:xfrm>
+          <a:prstGeom prst="rect">
+            <a:avLst/>
+          </a:prstGeom>
+          <a:noFill/>
+          <a:ln>
+            <a:noFill/>
+          </a:ln>
+        </p:spPr>
+        <p:txBody>
+          <a:bodyPr wrap="square" lIns="54000" rIns="54000" tIns="18000" bIns="18000" anchor="ctr">
+            <a:spAutoFit/>
+          </a:bodyPr>
+          <a:lstStyle/>
+          <a:p>
+            <a:pPr algn="ctr"/>
+            <a:r>
+              <a:rPr sz="3200" b="1">
+                <a:solidFill>
+                  <a:srgbClr val="FFFFFF"/>
+                </a:solidFill>
+                <a:latin typeface="メイリオ"/>
+                <a:ea typeface="メイリオ"/>
+              </a:rPr>
+              <a:t>①</a:t>
+            </a:r>
+          </a:p>
+        </p:txBody>
+      </p:sp>
+      <p:sp>
+        <p:nvSpPr>
+          <p:cNvPr id="11" name="TextBox 10"/>
+          <p:cNvSpPr txBox="1"/>
+          <p:nvPr/>
+        </p:nvSpPr>
+        <p:spPr>
+          <a:xfrm>
+            <a:off x="1260000" y="2844000"/>
+            <a:ext cx="10285200" cy="468000"/>
+          </a:xfrm>
+          <a:prstGeom prst="rect">
+            <a:avLst/>
+          </a:prstGeom>
+          <a:noFill/>
+          <a:ln>
+            <a:noFill/>
+          </a:ln>
+        </p:spPr>
+        <p:txBody>
+          <a:bodyPr wrap="square" lIns="54000" rIns="54000" tIns="18000" bIns="18000" anchor="ctr">
+            <a:spAutoFit/>
+          </a:bodyPr>
+          <a:lstStyle/>
+          <a:p>
+            <a:pPr algn="l"/>
+            <a:r>
+              <a:rPr sz="2000" b="1">
+                <a:solidFill>
+                  <a:srgbClr val="1A1A1A"/>
+                </a:solidFill>
+                <a:latin typeface="メイリオ"/>
+                <a:ea typeface="メイリオ"/>
+              </a:rPr>
+              <a:t>自分の学年・教科で、</a:t>
+            </a:r>
+            <a:r>
+              <a:rPr sz="2100" b="1">
+                <a:solidFill>
+                  <a:srgbClr val="FF0000"/>
+                </a:solidFill>
+                <a:latin typeface="メイリオ"/>
+                <a:ea typeface="メイリオ"/>
+              </a:rPr>
+              <a:t>「質問の種類」</a:t>
+            </a:r>
+            <a:r>
+              <a:rPr sz="2000" b="1">
+                <a:solidFill>
+                  <a:srgbClr val="1A1A1A"/>
+                </a:solidFill>
+                <a:latin typeface="メイリオ"/>
+                <a:ea typeface="メイリオ"/>
+              </a:rPr>
+              <a:t> のような</a:t>
+            </a:r>
+          </a:p>
+        </p:txBody>
+      </p:sp>
+      <p:sp>
+        <p:nvSpPr>
           <p:cNvPr id="12" name="TextBox 11"/>
           <p:cNvSpPr txBox="1"/>
           <p:nvPr/>
         </p:nvSpPr>
         <p:spPr>
           <a:xfrm>
-            <a:off x="2880000" y="5652000"/>
+            <a:off x="1260000" y="3384000"/>
+            <a:ext cx="10285200" cy="468000"/>
+          </a:xfrm>
+          <a:prstGeom prst="rect">
+            <a:avLst/>
+          </a:prstGeom>
+          <a:noFill/>
+          <a:ln>
+            <a:noFill/>
+          </a:ln>
+        </p:spPr>
+        <p:txBody>
+          <a:bodyPr wrap="square" lIns="54000" rIns="54000" tIns="18000" bIns="18000" anchor="ctr">
+            <a:spAutoFit/>
+          </a:bodyPr>
+          <a:lstStyle/>
+          <a:p>
+            <a:pPr algn="l"/>
+            <a:r>
+              <a:rPr sz="2200" b="1">
+                <a:solidFill>
+                  <a:srgbClr val="FF0000"/>
+                </a:solidFill>
+                <a:latin typeface="メイリオ"/>
+                <a:ea typeface="メイリオ"/>
+              </a:rPr>
+              <a:t>〝対話の足場〟</a:t>
+            </a:r>
+            <a:r>
+              <a:rPr sz="2000" b="1">
+                <a:solidFill>
+                  <a:srgbClr val="1A1A1A"/>
+                </a:solidFill>
+                <a:latin typeface="メイリオ"/>
+                <a:ea typeface="メイリオ"/>
+              </a:rPr>
+              <a:t> を作るとしたら、何ができますか？</a:t>
+            </a:r>
+          </a:p>
+        </p:txBody>
+      </p:sp>
+      <p:sp>
+        <p:nvSpPr>
+          <p:cNvPr id="13" name="Rectangle 12"/>
+          <p:cNvSpPr/>
+          <p:nvPr/>
+        </p:nvSpPr>
+        <p:spPr>
+          <a:xfrm>
+            <a:off x="540000" y="4140000"/>
+            <a:ext cx="11113200" cy="1368000"/>
+          </a:xfrm>
+          <a:prstGeom prst="rect">
+            <a:avLst/>
+          </a:prstGeom>
+          <a:solidFill>
+            <a:srgbClr val="FFF2CC"/>
+          </a:solidFill>
+          <a:ln w="25400">
+            <a:solidFill>
+              <a:srgbClr val="002060"/>
+            </a:solidFill>
+          </a:ln>
+          <a:effectLst/>
+        </p:spPr>
+        <p:style>
+          <a:lnRef idx="1">
+            <a:schemeClr val="accent1"/>
+          </a:lnRef>
+          <a:fillRef idx="3">
+            <a:schemeClr val="accent1"/>
+          </a:fillRef>
+          <a:effectRef idx="2">
+            <a:schemeClr val="accent1"/>
+          </a:effectRef>
+          <a:fontRef idx="minor">
+            <a:schemeClr val="lt1"/>
+          </a:fontRef>
+        </p:style>
+        <p:txBody>
+          <a:bodyPr rtlCol="0" anchor="ctr"/>
+          <a:lstStyle/>
+          <a:p>
+            <a:pPr algn="ctr"/>
+          </a:p>
+        </p:txBody>
+      </p:sp>
+      <p:sp>
+        <p:nvSpPr>
+          <p:cNvPr id="14" name="Rectangle 13"/>
+          <p:cNvSpPr/>
+          <p:nvPr/>
+        </p:nvSpPr>
+        <p:spPr>
+          <a:xfrm>
+            <a:off x="540000" y="4140000"/>
+            <a:ext cx="540000" cy="1368000"/>
+          </a:xfrm>
+          <a:prstGeom prst="rect">
+            <a:avLst/>
+          </a:prstGeom>
+          <a:solidFill>
+            <a:srgbClr val="FF0000"/>
+          </a:solidFill>
+          <a:ln>
+            <a:noFill/>
+          </a:ln>
+          <a:effectLst/>
+        </p:spPr>
+        <p:style>
+          <a:lnRef idx="1">
+            <a:schemeClr val="accent1"/>
+          </a:lnRef>
+          <a:fillRef idx="3">
+            <a:schemeClr val="accent1"/>
+          </a:fillRef>
+          <a:effectRef idx="2">
+            <a:schemeClr val="accent1"/>
+          </a:effectRef>
+          <a:fontRef idx="minor">
+            <a:schemeClr val="lt1"/>
+          </a:fontRef>
+        </p:style>
+        <p:txBody>
+          <a:bodyPr rtlCol="0" anchor="ctr"/>
+          <a:lstStyle/>
+          <a:p>
+            <a:pPr algn="ctr"/>
+          </a:p>
+        </p:txBody>
+      </p:sp>
+      <p:sp>
+        <p:nvSpPr>
+          <p:cNvPr id="15" name="TextBox 14"/>
+          <p:cNvSpPr txBox="1"/>
+          <p:nvPr/>
+        </p:nvSpPr>
+        <p:spPr>
+          <a:xfrm>
+            <a:off x="540000" y="4140000"/>
+            <a:ext cx="540000" cy="1368000"/>
+          </a:xfrm>
+          <a:prstGeom prst="rect">
+            <a:avLst/>
+          </a:prstGeom>
+          <a:noFill/>
+          <a:ln>
+            <a:noFill/>
+          </a:ln>
+        </p:spPr>
+        <p:txBody>
+          <a:bodyPr wrap="square" lIns="54000" rIns="54000" tIns="18000" bIns="18000" anchor="ctr">
+            <a:spAutoFit/>
+          </a:bodyPr>
+          <a:lstStyle/>
+          <a:p>
+            <a:pPr algn="ctr"/>
+            <a:r>
+              <a:rPr sz="3200" b="1">
+                <a:solidFill>
+                  <a:srgbClr val="FFFFFF"/>
+                </a:solidFill>
+                <a:latin typeface="メイリオ"/>
+                <a:ea typeface="メイリオ"/>
+              </a:rPr>
+              <a:t>②</a:t>
+            </a:r>
+          </a:p>
+        </p:txBody>
+      </p:sp>
+      <p:sp>
+        <p:nvSpPr>
+          <p:cNvPr id="16" name="TextBox 15"/>
+          <p:cNvSpPr txBox="1"/>
+          <p:nvPr/>
+        </p:nvSpPr>
+        <p:spPr>
+          <a:xfrm>
+            <a:off x="1260000" y="4320000"/>
+            <a:ext cx="10285200" cy="468000"/>
+          </a:xfrm>
+          <a:prstGeom prst="rect">
+            <a:avLst/>
+          </a:prstGeom>
+          <a:noFill/>
+          <a:ln>
+            <a:noFill/>
+          </a:ln>
+        </p:spPr>
+        <p:txBody>
+          <a:bodyPr wrap="square" lIns="54000" rIns="54000" tIns="18000" bIns="18000" anchor="ctr">
+            <a:spAutoFit/>
+          </a:bodyPr>
+          <a:lstStyle/>
+          <a:p>
+            <a:pPr algn="l"/>
+            <a:r>
+              <a:rPr sz="2000" b="1">
+                <a:solidFill>
+                  <a:srgbClr val="1A1A1A"/>
+                </a:solidFill>
+                <a:latin typeface="メイリオ"/>
+                <a:ea typeface="メイリオ"/>
+              </a:rPr>
+              <a:t>児童が </a:t>
+            </a:r>
+            <a:r>
+              <a:rPr sz="2100" b="1">
+                <a:solidFill>
+                  <a:srgbClr val="FF0000"/>
+                </a:solidFill>
+                <a:latin typeface="メイリオ"/>
+                <a:ea typeface="メイリオ"/>
+              </a:rPr>
+              <a:t>〝伝えてよかった・聞けてよかった〟</a:t>
+            </a:r>
+          </a:p>
+        </p:txBody>
+      </p:sp>
+      <p:sp>
+        <p:nvSpPr>
+          <p:cNvPr id="17" name="TextBox 16"/>
+          <p:cNvSpPr txBox="1"/>
+          <p:nvPr/>
+        </p:nvSpPr>
+        <p:spPr>
+          <a:xfrm>
+            <a:off x="1260000" y="4860000"/>
+            <a:ext cx="10285200" cy="468000"/>
+          </a:xfrm>
+          <a:prstGeom prst="rect">
+            <a:avLst/>
+          </a:prstGeom>
+          <a:noFill/>
+          <a:ln>
+            <a:noFill/>
+          </a:ln>
+        </p:spPr>
+        <p:txBody>
+          <a:bodyPr wrap="square" lIns="54000" rIns="54000" tIns="18000" bIns="18000" anchor="ctr">
+            <a:spAutoFit/>
+          </a:bodyPr>
+          <a:lstStyle/>
+          <a:p>
+            <a:pPr algn="l"/>
+            <a:r>
+              <a:rPr sz="2000" b="1">
+                <a:solidFill>
+                  <a:srgbClr val="1A1A1A"/>
+                </a:solidFill>
+                <a:latin typeface="メイリオ"/>
+                <a:ea typeface="メイリオ"/>
+              </a:rPr>
+              <a:t>と実感する場面を、</a:t>
+            </a:r>
+            <a:r>
+              <a:rPr sz="2200" b="1">
+                <a:solidFill>
+                  <a:srgbClr val="FF0000"/>
+                </a:solidFill>
+                <a:latin typeface="メイリオ"/>
+                <a:ea typeface="メイリオ"/>
+              </a:rPr>
+              <a:t>どう仕掛けますか？</a:t>
+            </a:r>
+          </a:p>
+        </p:txBody>
+      </p:sp>
+      <p:sp>
+        <p:nvSpPr>
+          <p:cNvPr id="18" name="Rectangle 17"/>
+          <p:cNvSpPr/>
+          <p:nvPr/>
+        </p:nvSpPr>
+        <p:spPr>
+          <a:xfrm>
+            <a:off x="2880000" y="5832000"/>
             <a:ext cx="6433200" cy="576000"/>
           </a:xfrm>
           <a:prstGeom prst="rect">
             <a:avLst/>
           </a:prstGeom>
+          <a:solidFill>
+            <a:srgbClr val="FF0000"/>
+          </a:solidFill>
+          <a:ln>
+            <a:noFill/>
+          </a:ln>
+          <a:effectLst/>
+        </p:spPr>
+        <p:style>
+          <a:lnRef idx="1">
+            <a:schemeClr val="accent1"/>
+          </a:lnRef>
+          <a:fillRef idx="3">
+            <a:schemeClr val="accent1"/>
+          </a:fillRef>
+          <a:effectRef idx="2">
+            <a:schemeClr val="accent1"/>
+          </a:effectRef>
+          <a:fontRef idx="minor">
+            <a:schemeClr val="lt1"/>
+          </a:fontRef>
+        </p:style>
+        <p:txBody>
+          <a:bodyPr rtlCol="0" anchor="ctr"/>
+          <a:lstStyle/>
+          <a:p>
+            <a:pPr algn="ctr"/>
+          </a:p>
+        </p:txBody>
+      </p:sp>
+      <p:sp>
+        <p:nvSpPr>
+          <p:cNvPr id="19" name="TextBox 18"/>
+          <p:cNvSpPr txBox="1"/>
+          <p:nvPr/>
+        </p:nvSpPr>
+        <p:spPr>
+          <a:xfrm>
+            <a:off x="2880000" y="5832000"/>
+            <a:ext cx="6433200" cy="576000"/>
+          </a:xfrm>
+          <a:prstGeom prst="rect">
+            <a:avLst/>
+          </a:prstGeom>
           <a:noFill/>
           <a:ln>
             <a:noFill/>
@@ -4981,7 +5384,7 @@
       </p:sp>
       <p:sp>
         <p:nvSpPr>
-          <p:cNvPr id="13" name="TextBox 12"/>
+          <p:cNvPr id="20" name="TextBox 19"/>
           <p:cNvSpPr txBox="1"/>
           <p:nvPr/>
         </p:nvSpPr>
@@ -5020,7 +5423,7 @@
       </p:sp>
       <p:sp>
         <p:nvSpPr>
-          <p:cNvPr id="14" name="TextBox 13"/>
+          <p:cNvPr id="21" name="TextBox 20"/>
           <p:cNvSpPr txBox="1"/>
           <p:nvPr/>
         </p:nvSpPr>
@@ -5102,7 +5505,7 @@
           <a:p>
             <a:pPr algn="l"/>
             <a:r>
-              <a:rPr sz="3200" b="1">
+              <a:rPr sz="3000" b="1">
                 <a:solidFill>
                   <a:srgbClr val="1A1A1A"/>
                 </a:solidFill>
@@ -5357,7 +5760,7 @@
           <a:p>
             <a:pPr algn="l"/>
             <a:r>
-              <a:rPr sz="1600" b="1">
+              <a:rPr sz="1700" b="1">
                 <a:solidFill>
                   <a:srgbClr val="FFFFFF"/>
                 </a:solidFill>
@@ -5400,17 +5803,17 @@
               </a:lnSpc>
             </a:pPr>
             <a:r>
-              <a:rPr sz="1300" b="0">
+              <a:rPr sz="1400" b="0">
                 <a:solidFill>
                   <a:srgbClr val="1A1A1A"/>
                 </a:solidFill>
                 <a:latin typeface="メイリオ"/>
                 <a:ea typeface="メイリオ"/>
               </a:rPr>
-              <a:t>児童が</a:t>
-            </a:r>
-            <a:r>
-              <a:rPr sz="1500" b="1">
+              <a:t>児童が </a:t>
+            </a:r>
+            <a:r>
+              <a:rPr sz="1600" b="1">
                 <a:solidFill>
                   <a:srgbClr val="FF0000"/>
                 </a:solidFill>
@@ -5427,7 +5830,7 @@
               </a:lnSpc>
             </a:pPr>
             <a:r>
-              <a:rPr sz="1300" b="0">
+              <a:rPr sz="1400" b="0">
                 <a:solidFill>
                   <a:srgbClr val="1A1A1A"/>
                 </a:solidFill>
@@ -5444,7 +5847,7 @@
               </a:lnSpc>
             </a:pPr>
             <a:r>
-              <a:rPr sz="1300" b="0">
+              <a:rPr sz="1400" b="0">
                 <a:solidFill>
                   <a:srgbClr val="1A1A1A"/>
                 </a:solidFill>
@@ -5655,7 +6058,7 @@
           <a:p>
             <a:pPr algn="l"/>
             <a:r>
-              <a:rPr sz="1600" b="1">
+              <a:rPr sz="1700" b="1">
                 <a:solidFill>
                   <a:srgbClr val="FFFFFF"/>
                 </a:solidFill>
@@ -5698,7 +6101,7 @@
               </a:lnSpc>
             </a:pPr>
             <a:r>
-              <a:rPr sz="1500" b="1">
+              <a:rPr sz="1600" b="1">
                 <a:solidFill>
                   <a:srgbClr val="FF0000"/>
                 </a:solidFill>
@@ -5715,7 +6118,7 @@
               </a:lnSpc>
             </a:pPr>
             <a:r>
-              <a:rPr sz="1300" b="0">
+              <a:rPr sz="1400" b="0">
                 <a:solidFill>
                   <a:srgbClr val="1A1A1A"/>
                 </a:solidFill>
@@ -5732,7 +6135,7 @@
               </a:lnSpc>
             </a:pPr>
             <a:r>
-              <a:rPr sz="1300" b="0">
+              <a:rPr sz="1400" b="0">
                 <a:solidFill>
                   <a:srgbClr val="1A1A1A"/>
                 </a:solidFill>
@@ -5943,7 +6346,7 @@
           <a:p>
             <a:pPr algn="l"/>
             <a:r>
-              <a:rPr sz="1600" b="1">
+              <a:rPr sz="1700" b="1">
                 <a:solidFill>
                   <a:srgbClr val="FFFFFF"/>
                 </a:solidFill>
@@ -5986,7 +6389,7 @@
               </a:lnSpc>
             </a:pPr>
             <a:r>
-              <a:rPr sz="1500" b="1">
+              <a:rPr sz="1600" b="1">
                 <a:solidFill>
                   <a:srgbClr val="FF0000"/>
                 </a:solidFill>
@@ -5996,7 +6399,7 @@
               <a:t>話型・モデル提示</a:t>
             </a:r>
             <a:r>
-              <a:rPr sz="1300" b="0">
+              <a:rPr sz="1400" b="0">
                 <a:solidFill>
                   <a:srgbClr val="1A1A1A"/>
                 </a:solidFill>
@@ -6013,7 +6416,7 @@
               </a:lnSpc>
             </a:pPr>
             <a:r>
-              <a:rPr sz="1500" b="1">
+              <a:rPr sz="1600" b="1">
                 <a:solidFill>
                   <a:srgbClr val="FF0000"/>
                 </a:solidFill>
@@ -6023,7 +6426,7 @@
               <a:t>〝自信がない児童〟</a:t>
             </a:r>
             <a:r>
-              <a:rPr sz="1300" b="0">
+              <a:rPr sz="1400" b="0">
                 <a:solidFill>
                   <a:srgbClr val="1A1A1A"/>
                 </a:solidFill>
@@ -6040,7 +6443,7 @@
               </a:lnSpc>
             </a:pPr>
             <a:r>
-              <a:rPr sz="1300" b="0">
+              <a:rPr sz="1400" b="0">
                 <a:solidFill>
                   <a:srgbClr val="1A1A1A"/>
                 </a:solidFill>
@@ -6123,7 +6526,7 @@
           <a:p>
             <a:pPr algn="ctr"/>
             <a:r>
-              <a:rPr sz="1600" b="1">
+              <a:rPr sz="1700" b="1">
                 <a:solidFill>
                   <a:srgbClr val="FFFFFF"/>
                 </a:solidFill>
@@ -6189,8 +6592,8 @@
         </p:nvSpPr>
         <p:spPr>
           <a:xfrm>
-            <a:off x="720000" y="4356000"/>
-            <a:ext cx="10753200" cy="1800000"/>
+            <a:off x="720000" y="4392000"/>
+            <a:ext cx="10753200" cy="432000"/>
           </a:xfrm>
           <a:prstGeom prst="rect">
             <a:avLst/>
@@ -6206,127 +6609,182 @@
           </a:bodyPr>
           <a:lstStyle/>
           <a:p>
-            <a:pPr algn="ctr">
-              <a:lnSpc>
-                <a:spcPct val="145000"/>
-              </a:lnSpc>
-            </a:pPr>
+            <a:pPr algn="ctr"/>
+            <a:r>
+              <a:rPr sz="1900" b="1">
+                <a:solidFill>
+                  <a:srgbClr val="002060"/>
+                </a:solidFill>
+                <a:latin typeface="メイリオ"/>
+                <a:ea typeface="メイリオ"/>
+              </a:rPr>
+              <a:t>「対話を通して、学びをつなげる児童」</a:t>
+            </a:r>
             <a:r>
               <a:rPr sz="1800" b="1">
                 <a:solidFill>
-                  <a:srgbClr val="002060"/>
-                </a:solidFill>
-                <a:latin typeface="メイリオ"/>
-                <a:ea typeface="メイリオ"/>
-              </a:rPr>
-              <a:t>「対話を通して、学びをつなげる児童」</a:t>
+                  <a:srgbClr val="1A1A1A"/>
+                </a:solidFill>
+                <a:latin typeface="メイリオ"/>
+                <a:ea typeface="メイリオ"/>
+              </a:rPr>
+              <a:t> は、</a:t>
+            </a:r>
+          </a:p>
+        </p:txBody>
+      </p:sp>
+      <p:sp>
+        <p:nvSpPr>
+          <p:cNvPr id="26" name="TextBox 25"/>
+          <p:cNvSpPr txBox="1"/>
+          <p:nvPr/>
+        </p:nvSpPr>
+        <p:spPr>
+          <a:xfrm>
+            <a:off x="720000" y="4860000"/>
+            <a:ext cx="10753200" cy="432000"/>
+          </a:xfrm>
+          <a:prstGeom prst="rect">
+            <a:avLst/>
+          </a:prstGeom>
+          <a:noFill/>
+          <a:ln>
+            <a:noFill/>
+          </a:ln>
+        </p:spPr>
+        <p:txBody>
+          <a:bodyPr wrap="square" lIns="54000" rIns="54000" tIns="18000" bIns="18000" anchor="ctr">
+            <a:spAutoFit/>
+          </a:bodyPr>
+          <a:lstStyle/>
+          <a:p>
+            <a:pPr algn="ctr"/>
+            <a:r>
+              <a:rPr sz="1700" b="1">
+                <a:solidFill>
+                  <a:srgbClr val="1A1A1A"/>
+                </a:solidFill>
+                <a:latin typeface="メイリオ"/>
+                <a:ea typeface="メイリオ"/>
+              </a:rPr>
+              <a:t>まず </a:t>
+            </a:r>
+            <a:r>
+              <a:rPr sz="1900" b="1">
+                <a:solidFill>
+                  <a:srgbClr val="FF0000"/>
+                </a:solidFill>
+                <a:latin typeface="メイリオ"/>
+                <a:ea typeface="メイリオ"/>
+              </a:rPr>
+              <a:t>教師自身が〝対話で学びをつなげる姿〟</a:t>
+            </a:r>
+            <a:r>
+              <a:rPr sz="1700" b="1">
+                <a:solidFill>
+                  <a:srgbClr val="1A1A1A"/>
+                </a:solidFill>
+                <a:latin typeface="メイリオ"/>
+                <a:ea typeface="メイリオ"/>
+              </a:rPr>
+              <a:t> から始まる。</a:t>
+            </a:r>
+          </a:p>
+        </p:txBody>
+      </p:sp>
+      <p:sp>
+        <p:nvSpPr>
+          <p:cNvPr id="27" name="TextBox 26"/>
+          <p:cNvSpPr txBox="1"/>
+          <p:nvPr/>
+        </p:nvSpPr>
+        <p:spPr>
+          <a:xfrm>
+            <a:off x="720000" y="5472000"/>
+            <a:ext cx="10753200" cy="396000"/>
+          </a:xfrm>
+          <a:prstGeom prst="rect">
+            <a:avLst/>
+          </a:prstGeom>
+          <a:noFill/>
+          <a:ln>
+            <a:noFill/>
+          </a:ln>
+        </p:spPr>
+        <p:txBody>
+          <a:bodyPr wrap="square" lIns="54000" rIns="54000" tIns="18000" bIns="18000" anchor="ctr">
+            <a:spAutoFit/>
+          </a:bodyPr>
+          <a:lstStyle/>
+          <a:p>
+            <a:pPr algn="ctr"/>
+            <a:r>
+              <a:rPr sz="1600" b="1">
+                <a:solidFill>
+                  <a:srgbClr val="1A1A1A"/>
+                </a:solidFill>
+                <a:latin typeface="メイリオ"/>
+                <a:ea typeface="メイリオ"/>
+              </a:rPr>
+              <a:t>今日皆さんが隣の先生と交わした言葉が、</a:t>
+            </a:r>
+          </a:p>
+        </p:txBody>
+      </p:sp>
+      <p:sp>
+        <p:nvSpPr>
+          <p:cNvPr id="28" name="TextBox 27"/>
+          <p:cNvSpPr txBox="1"/>
+          <p:nvPr/>
+        </p:nvSpPr>
+        <p:spPr>
+          <a:xfrm>
+            <a:off x="720000" y="5867999"/>
+            <a:ext cx="10753200" cy="396000"/>
+          </a:xfrm>
+          <a:prstGeom prst="rect">
+            <a:avLst/>
+          </a:prstGeom>
+          <a:noFill/>
+          <a:ln>
+            <a:noFill/>
+          </a:ln>
+        </p:spPr>
+        <p:txBody>
+          <a:bodyPr wrap="square" lIns="54000" rIns="54000" tIns="18000" bIns="18000" anchor="ctr">
+            <a:spAutoFit/>
+          </a:bodyPr>
+          <a:lstStyle/>
+          <a:p>
+            <a:pPr algn="ctr"/>
+            <a:r>
+              <a:rPr sz="1600" b="1">
+                <a:solidFill>
+                  <a:srgbClr val="1A1A1A"/>
+                </a:solidFill>
+                <a:latin typeface="メイリオ"/>
+                <a:ea typeface="メイリオ"/>
+              </a:rPr>
+              <a:t>明日の授業で </a:t>
             </a:r>
             <a:r>
               <a:rPr sz="1800" b="1">
                 <a:solidFill>
+                  <a:srgbClr val="FF0000"/>
+                </a:solidFill>
+                <a:latin typeface="メイリオ"/>
+                <a:ea typeface="メイリオ"/>
+              </a:rPr>
+              <a:t>子どもたちに返っていきます</a:t>
+            </a:r>
+            <a:r>
+              <a:rPr sz="1600" b="1">
+                <a:solidFill>
                   <a:srgbClr val="1A1A1A"/>
                 </a:solidFill>
                 <a:latin typeface="メイリオ"/>
                 <a:ea typeface="メイリオ"/>
               </a:rPr>
-              <a:t> は、</a:t>
-            </a:r>
-          </a:p>
-          <a:p>
-            <a:pPr algn="ctr">
-              <a:lnSpc>
-                <a:spcPct val="145000"/>
-              </a:lnSpc>
-            </a:pPr>
-            <a:r>
-              <a:rPr sz="1700" b="1">
-                <a:solidFill>
-                  <a:srgbClr val="1A1A1A"/>
-                </a:solidFill>
-                <a:latin typeface="メイリオ"/>
-                <a:ea typeface="メイリオ"/>
-              </a:rPr>
-              <a:t>まず </a:t>
-            </a:r>
-            <a:r>
-              <a:rPr sz="1900" b="1">
-                <a:solidFill>
-                  <a:srgbClr val="FF0000"/>
-                </a:solidFill>
-                <a:latin typeface="メイリオ"/>
-                <a:ea typeface="メイリオ"/>
-              </a:rPr>
-              <a:t>教師自身が〝対話で学びをつなげる姿〟</a:t>
-            </a:r>
-            <a:r>
-              <a:rPr sz="1700" b="1">
-                <a:solidFill>
-                  <a:srgbClr val="1A1A1A"/>
-                </a:solidFill>
-                <a:latin typeface="メイリオ"/>
-                <a:ea typeface="メイリオ"/>
-              </a:rPr>
-              <a:t> から始まる。</a:t>
-            </a:r>
-          </a:p>
-          <a:p>
-            <a:pPr algn="ctr">
-              <a:lnSpc>
-                <a:spcPct val="145000"/>
-              </a:lnSpc>
-            </a:pPr>
-          </a:p>
-          <a:p>
-            <a:pPr algn="ctr">
-              <a:lnSpc>
-                <a:spcPct val="145000"/>
-              </a:lnSpc>
-            </a:pPr>
-            <a:r>
-              <a:rPr sz="1600" b="1">
-                <a:solidFill>
-                  <a:srgbClr val="1A1A1A"/>
-                </a:solidFill>
-                <a:latin typeface="メイリオ"/>
-                <a:ea typeface="メイリオ"/>
-              </a:rPr>
-              <a:t>今日皆さんが隣の先生と交わした言葉が、</a:t>
-            </a:r>
-          </a:p>
-          <a:p>
-            <a:pPr algn="ctr">
-              <a:lnSpc>
-                <a:spcPct val="145000"/>
-              </a:lnSpc>
-            </a:pPr>
-            <a:r>
-              <a:rPr sz="1600" b="1">
-                <a:solidFill>
-                  <a:srgbClr val="1A1A1A"/>
-                </a:solidFill>
-                <a:latin typeface="メイリオ"/>
-                <a:ea typeface="メイリオ"/>
-              </a:rPr>
-              <a:t>明日の授業で </a:t>
-            </a:r>
-            <a:r>
-              <a:rPr sz="1800" b="1">
-                <a:solidFill>
-                  <a:srgbClr val="FF0000"/>
-                </a:solidFill>
-                <a:latin typeface="メイリオ"/>
-                <a:ea typeface="メイリオ"/>
-              </a:rPr>
-              <a:t>子どもたちに返っていきます</a:t>
-            </a:r>
-            <a:r>
-              <a:rPr sz="1600" b="1">
-                <a:solidFill>
-                  <a:srgbClr val="1A1A1A"/>
-                </a:solidFill>
-                <a:latin typeface="メイリオ"/>
-                <a:ea typeface="メイリオ"/>
-              </a:rPr>
               <a:t>。</a:t>
             </a:r>
           </a:p>
@@ -6334,7 +6792,7 @@
       </p:sp>
       <p:sp>
         <p:nvSpPr>
-          <p:cNvPr id="26" name="TextBox 25"/>
+          <p:cNvPr id="29" name="TextBox 28"/>
           <p:cNvSpPr txBox="1"/>
           <p:nvPr/>
         </p:nvSpPr>
@@ -6373,7 +6831,7 @@
       </p:sp>
       <p:sp>
         <p:nvSpPr>
-          <p:cNvPr id="27" name="TextBox 26"/>
+          <p:cNvPr id="30" name="TextBox 29"/>
           <p:cNvSpPr txBox="1"/>
           <p:nvPr/>
         </p:nvSpPr>
@@ -6455,7 +6913,7 @@
           <a:p>
             <a:pPr algn="l"/>
             <a:r>
-              <a:rPr sz="3200" b="1">
+              <a:rPr sz="3000" b="1">
                 <a:solidFill>
                   <a:srgbClr val="1A1A1A"/>
                 </a:solidFill>
@@ -8048,7 +8506,7 @@
           <a:p>
             <a:pPr algn="l"/>
             <a:r>
-              <a:rPr sz="3200" b="1">
+              <a:rPr sz="3000" b="1">
                 <a:solidFill>
                   <a:srgbClr val="1A1A1A"/>
                 </a:solidFill>
@@ -8113,7 +8571,7 @@
         <p:spPr>
           <a:xfrm>
             <a:off x="540000" y="1260000"/>
-            <a:ext cx="11113200" cy="3060000"/>
+            <a:ext cx="11113200" cy="3240000"/>
           </a:xfrm>
           <a:prstGeom prst="roundRect">
             <a:avLst/>
@@ -8158,7 +8616,7 @@
         </p:nvSpPr>
         <p:spPr>
           <a:xfrm>
-            <a:off x="900000" y="1404000"/>
+            <a:off x="900000" y="1440000"/>
             <a:ext cx="10393200" cy="468000"/>
           </a:xfrm>
           <a:prstGeom prst="rect">
@@ -8177,7 +8635,7 @@
           <a:p>
             <a:pPr algn="l"/>
             <a:r>
-              <a:rPr sz="2200" b="1">
+              <a:rPr sz="2400" b="1">
                 <a:solidFill>
                   <a:srgbClr val="002060"/>
                 </a:solidFill>
@@ -8197,8 +8655,8 @@
         </p:nvSpPr>
         <p:spPr>
           <a:xfrm>
-            <a:off x="900000" y="1980000"/>
-            <a:ext cx="10393200" cy="792000"/>
+            <a:off x="900000" y="2088000"/>
+            <a:ext cx="10393200" cy="900000"/>
           </a:xfrm>
           <a:prstGeom prst="rect">
             <a:avLst/>
@@ -8220,7 +8678,7 @@
               </a:lnSpc>
             </a:pPr>
             <a:r>
-              <a:rPr sz="2200" b="1">
+              <a:rPr sz="2400" b="1">
                 <a:solidFill>
                   <a:srgbClr val="1A1A1A"/>
                 </a:solidFill>
@@ -8230,7 +8688,7 @@
               <a:t>「今日の授業で、思わず </a:t>
             </a:r>
             <a:r>
-              <a:rPr sz="2600" b="1">
+              <a:rPr sz="2800" b="1">
                 <a:solidFill>
                   <a:srgbClr val="FF0000"/>
                 </a:solidFill>
@@ -8240,7 +8698,7 @@
               <a:t>〝おっ〟</a:t>
             </a:r>
             <a:r>
-              <a:rPr sz="2200" b="1">
+              <a:rPr sz="2400" b="1">
                 <a:solidFill>
                   <a:srgbClr val="1A1A1A"/>
                 </a:solidFill>
@@ -8260,8 +8718,8 @@
         </p:nvSpPr>
         <p:spPr>
           <a:xfrm>
-            <a:off x="900000" y="2880000"/>
-            <a:ext cx="10393200" cy="792000"/>
+            <a:off x="900000" y="3168000"/>
+            <a:ext cx="10393200" cy="900000"/>
           </a:xfrm>
           <a:prstGeom prst="rect">
             <a:avLst/>
@@ -8283,7 +8741,7 @@
               </a:lnSpc>
             </a:pPr>
             <a:r>
-              <a:rPr sz="3000" b="1">
+              <a:rPr sz="3200" b="1">
                 <a:solidFill>
                   <a:srgbClr val="FF0000"/>
                 </a:solidFill>
@@ -8293,7 +8751,7 @@
               <a:t>ジェスチャー一つ</a:t>
             </a:r>
             <a:r>
-              <a:rPr sz="2200" b="1">
+              <a:rPr sz="2400" b="1">
                 <a:solidFill>
                   <a:srgbClr val="1A1A1A"/>
                 </a:solidFill>
@@ -8313,7 +8771,7 @@
         </p:nvSpPr>
         <p:spPr>
           <a:xfrm>
-            <a:off x="3960000" y="4680000"/>
+            <a:off x="3960000" y="4860000"/>
             <a:ext cx="4273200" cy="648000"/>
           </a:xfrm>
           <a:prstGeom prst="rect">
@@ -8357,7 +8815,7 @@
         </p:nvSpPr>
         <p:spPr>
           <a:xfrm>
-            <a:off x="3960000" y="4680000"/>
+            <a:off x="3960000" y="4860000"/>
             <a:ext cx="4273200" cy="648000"/>
           </a:xfrm>
           <a:prstGeom prst="rect">
@@ -8396,7 +8854,7 @@
         </p:nvSpPr>
         <p:spPr>
           <a:xfrm>
-            <a:off x="540000" y="5580000"/>
+            <a:off x="540000" y="5760000"/>
             <a:ext cx="11113200" cy="540000"/>
           </a:xfrm>
           <a:prstGeom prst="rect">
@@ -8415,7 +8873,7 @@
           <a:p>
             <a:pPr algn="ctr"/>
             <a:r>
-              <a:rPr sz="1800" b="1">
+              <a:rPr sz="2000" b="1">
                 <a:solidFill>
                   <a:srgbClr val="002060"/>
                 </a:solidFill>
@@ -8550,7 +9008,7 @@
           <a:p>
             <a:pPr algn="l"/>
             <a:r>
-              <a:rPr sz="3200" b="1">
+              <a:rPr sz="3000" b="1">
                 <a:solidFill>
                   <a:srgbClr val="1A1A1A"/>
                 </a:solidFill>
@@ -8806,7 +9264,7 @@
           <a:p>
             <a:pPr algn="ctr"/>
             <a:r>
-              <a:rPr sz="2600" b="1">
+              <a:rPr sz="2800" b="1">
                 <a:solidFill>
                   <a:srgbClr val="FFFFFF"/>
                 </a:solidFill>
@@ -8826,8 +9284,8 @@
         </p:nvSpPr>
         <p:spPr>
           <a:xfrm>
-            <a:off x="1200600" y="1728000"/>
-            <a:ext cx="2880000" cy="792000"/>
+            <a:off x="1236600" y="1728000"/>
+            <a:ext cx="2844000" cy="792000"/>
           </a:xfrm>
           <a:prstGeom prst="rect">
             <a:avLst/>
@@ -8845,7 +9303,7 @@
           <a:p>
             <a:pPr algn="l"/>
             <a:r>
-              <a:rPr sz="1500" b="1">
+              <a:rPr sz="1600" b="1">
                 <a:solidFill>
                   <a:srgbClr val="FFFFFF"/>
                 </a:solidFill>
@@ -8884,11 +9342,11 @@
           <a:p>
             <a:pPr algn="l">
               <a:lnSpc>
-                <a:spcPct val="135000"/>
+                <a:spcPct val="140000"/>
               </a:lnSpc>
             </a:pPr>
             <a:r>
-              <a:rPr sz="1600" b="1">
+              <a:rPr sz="1700" b="1">
                 <a:solidFill>
                   <a:srgbClr val="FF0000"/>
                 </a:solidFill>
@@ -8901,11 +9359,11 @@
           <a:p>
             <a:pPr algn="l">
               <a:lnSpc>
-                <a:spcPct val="135000"/>
+                <a:spcPct val="140000"/>
               </a:lnSpc>
             </a:pPr>
             <a:r>
-              <a:rPr sz="1500" b="0">
+              <a:rPr sz="1700" b="0">
                 <a:solidFill>
                   <a:srgbClr val="1A1A1A"/>
                 </a:solidFill>
@@ -8918,18 +9376,18 @@
           <a:p>
             <a:pPr algn="l">
               <a:lnSpc>
-                <a:spcPct val="135000"/>
+                <a:spcPct val="140000"/>
               </a:lnSpc>
             </a:pPr>
           </a:p>
           <a:p>
             <a:pPr algn="l">
               <a:lnSpc>
-                <a:spcPct val="135000"/>
+                <a:spcPct val="140000"/>
               </a:lnSpc>
             </a:pPr>
             <a:r>
-              <a:rPr sz="1500" b="0">
+              <a:rPr sz="1700" b="0">
                 <a:solidFill>
                   <a:srgbClr val="1A1A1A"/>
                 </a:solidFill>
@@ -8939,7 +9397,7 @@
               <a:t>児童が</a:t>
             </a:r>
             <a:r>
-              <a:rPr sz="1600" b="1">
+              <a:rPr sz="1700" b="1">
                 <a:solidFill>
                   <a:srgbClr val="FF0000"/>
                 </a:solidFill>
@@ -8952,11 +9410,11 @@
           <a:p>
             <a:pPr algn="l">
               <a:lnSpc>
-                <a:spcPct val="135000"/>
+                <a:spcPct val="140000"/>
               </a:lnSpc>
             </a:pPr>
             <a:r>
-              <a:rPr sz="1500" b="0">
+              <a:rPr sz="1700" b="0">
                 <a:solidFill>
                   <a:srgbClr val="1A1A1A"/>
                 </a:solidFill>
@@ -9085,7 +9543,7 @@
           <a:p>
             <a:pPr algn="ctr"/>
             <a:r>
-              <a:rPr sz="2600" b="1">
+              <a:rPr sz="2800" b="1">
                 <a:solidFill>
                   <a:srgbClr val="FFFFFF"/>
                 </a:solidFill>
@@ -9105,8 +9563,8 @@
         </p:nvSpPr>
         <p:spPr>
           <a:xfrm>
-            <a:off x="4944600" y="1728000"/>
-            <a:ext cx="2880000" cy="792000"/>
+            <a:off x="4980600" y="1728000"/>
+            <a:ext cx="2844000" cy="792000"/>
           </a:xfrm>
           <a:prstGeom prst="rect">
             <a:avLst/>
@@ -9124,7 +9582,7 @@
           <a:p>
             <a:pPr algn="l"/>
             <a:r>
-              <a:rPr sz="1500" b="1">
+              <a:rPr sz="1600" b="1">
                 <a:solidFill>
                   <a:srgbClr val="FFFFFF"/>
                 </a:solidFill>
@@ -9163,11 +9621,11 @@
           <a:p>
             <a:pPr algn="l">
               <a:lnSpc>
-                <a:spcPct val="135000"/>
+                <a:spcPct val="140000"/>
               </a:lnSpc>
             </a:pPr>
             <a:r>
-              <a:rPr sz="1500" b="0">
+              <a:rPr sz="1700" b="0">
                 <a:solidFill>
                   <a:srgbClr val="1A1A1A"/>
                 </a:solidFill>
@@ -9180,11 +9638,11 @@
           <a:p>
             <a:pPr algn="l">
               <a:lnSpc>
-                <a:spcPct val="135000"/>
+                <a:spcPct val="140000"/>
               </a:lnSpc>
             </a:pPr>
             <a:r>
-              <a:rPr sz="1600" b="1">
+              <a:rPr sz="1700" b="1">
                 <a:solidFill>
                   <a:srgbClr val="FF0000"/>
                 </a:solidFill>
@@ -9194,7 +9652,7 @@
               <a:t>抽象論ではなく</a:t>
             </a:r>
             <a:r>
-              <a:rPr sz="1500" b="0">
+              <a:rPr sz="1700" b="0">
                 <a:solidFill>
                   <a:srgbClr val="1A1A1A"/>
                 </a:solidFill>
@@ -9207,11 +9665,11 @@
           <a:p>
             <a:pPr algn="l">
               <a:lnSpc>
-                <a:spcPct val="135000"/>
+                <a:spcPct val="140000"/>
               </a:lnSpc>
             </a:pPr>
             <a:r>
-              <a:rPr sz="1600" b="1">
+              <a:rPr sz="1700" b="1">
                 <a:solidFill>
                   <a:srgbClr val="FF0000"/>
                 </a:solidFill>
@@ -9221,7 +9679,7 @@
               <a:t>具体的な場面の観察</a:t>
             </a:r>
             <a:r>
-              <a:rPr sz="1500" b="0">
+              <a:rPr sz="1700" b="0">
                 <a:solidFill>
                   <a:srgbClr val="1A1A1A"/>
                 </a:solidFill>
@@ -9234,11 +9692,11 @@
           <a:p>
             <a:pPr algn="l">
               <a:lnSpc>
-                <a:spcPct val="135000"/>
+                <a:spcPct val="140000"/>
               </a:lnSpc>
             </a:pPr>
             <a:r>
-              <a:rPr sz="1500" b="0">
+              <a:rPr sz="1700" b="0">
                 <a:solidFill>
                   <a:srgbClr val="1A1A1A"/>
                 </a:solidFill>
@@ -9367,7 +9825,7 @@
           <a:p>
             <a:pPr algn="ctr"/>
             <a:r>
-              <a:rPr sz="2600" b="1">
+              <a:rPr sz="2800" b="1">
                 <a:solidFill>
                   <a:srgbClr val="FFFFFF"/>
                 </a:solidFill>
@@ -9387,8 +9845,8 @@
         </p:nvSpPr>
         <p:spPr>
           <a:xfrm>
-            <a:off x="8688600" y="1728000"/>
-            <a:ext cx="2880000" cy="792000"/>
+            <a:off x="8724600" y="1728000"/>
+            <a:ext cx="2844000" cy="792000"/>
           </a:xfrm>
           <a:prstGeom prst="rect">
             <a:avLst/>
@@ -9406,7 +9864,7 @@
           <a:p>
             <a:pPr algn="l"/>
             <a:r>
-              <a:rPr sz="1500" b="1">
+              <a:rPr sz="1600" b="1">
                 <a:solidFill>
                   <a:srgbClr val="FFFFFF"/>
                 </a:solidFill>
@@ -9445,11 +9903,11 @@
           <a:p>
             <a:pPr algn="l">
               <a:lnSpc>
-                <a:spcPct val="135000"/>
+                <a:spcPct val="140000"/>
               </a:lnSpc>
             </a:pPr>
             <a:r>
-              <a:rPr sz="1500" b="0">
+              <a:rPr sz="1700" b="0">
                 <a:solidFill>
                   <a:srgbClr val="1A1A1A"/>
                 </a:solidFill>
@@ -9457,60 +9915,60 @@
                 <a:ea typeface="メイリオ"/>
               </a:rPr>
               <a:t>「確かめ／</a:t>
-            </a:r>
-            <a:r>
-              <a:rPr sz="1600" b="1">
-                <a:solidFill>
-                  <a:srgbClr val="FF0000"/>
-                </a:solidFill>
-                <a:latin typeface="メイリオ"/>
-                <a:ea typeface="メイリオ"/>
-              </a:rPr>
-              <a:t>セカンドクエスチョン</a:t>
             </a:r>
           </a:p>
           <a:p>
             <a:pPr algn="l">
               <a:lnSpc>
-                <a:spcPct val="135000"/>
+                <a:spcPct val="140000"/>
               </a:lnSpc>
             </a:pPr>
             <a:r>
-              <a:rPr sz="1500" b="0">
-                <a:solidFill>
-                  <a:srgbClr val="1A1A1A"/>
-                </a:solidFill>
-                <a:latin typeface="メイリオ"/>
-                <a:ea typeface="メイリオ"/>
-              </a:rPr>
-              <a:t>／感想」を</a:t>
+              <a:rPr sz="1700" b="1">
+                <a:solidFill>
+                  <a:srgbClr val="FF0000"/>
+                </a:solidFill>
+                <a:latin typeface="メイリオ"/>
+                <a:ea typeface="メイリオ"/>
+              </a:rPr>
+              <a:t>セカンドクエスチョン</a:t>
             </a:r>
           </a:p>
           <a:p>
             <a:pPr algn="l">
               <a:lnSpc>
-                <a:spcPct val="135000"/>
+                <a:spcPct val="140000"/>
               </a:lnSpc>
             </a:pPr>
             <a:r>
-              <a:rPr sz="1500" b="0">
+              <a:rPr sz="1700" b="0">
                 <a:solidFill>
                   <a:srgbClr val="1A1A1A"/>
                 </a:solidFill>
                 <a:latin typeface="メイリオ"/>
                 <a:ea typeface="メイリオ"/>
               </a:rPr>
-              <a:t>クラス共通の</a:t>
+              <a:t>／感想」を</a:t>
             </a:r>
           </a:p>
           <a:p>
             <a:pPr algn="l">
               <a:lnSpc>
-                <a:spcPct val="135000"/>
+                <a:spcPct val="140000"/>
               </a:lnSpc>
             </a:pPr>
             <a:r>
-              <a:rPr sz="1600" b="1">
+              <a:rPr sz="1700" b="0">
+                <a:solidFill>
+                  <a:srgbClr val="1A1A1A"/>
+                </a:solidFill>
+                <a:latin typeface="メイリオ"/>
+                <a:ea typeface="メイリオ"/>
+              </a:rPr>
+              <a:t>クラス共通の</a:t>
+            </a:r>
+            <a:r>
+              <a:rPr sz="1700" b="1">
                 <a:solidFill>
                   <a:srgbClr val="FF0000"/>
                 </a:solidFill>
@@ -9519,8 +9977,15 @@
               </a:rPr>
               <a:t>〝対話の型〟</a:t>
             </a:r>
-            <a:r>
-              <a:rPr sz="1500" b="0">
+          </a:p>
+          <a:p>
+            <a:pPr algn="l">
+              <a:lnSpc>
+                <a:spcPct val="140000"/>
+              </a:lnSpc>
+            </a:pPr>
+            <a:r>
+              <a:rPr sz="1700" b="0">
                 <a:solidFill>
                   <a:srgbClr val="1A1A1A"/>
                 </a:solidFill>
@@ -9655,7 +10120,7 @@
           <a:p>
             <a:pPr algn="l"/>
             <a:r>
-              <a:rPr sz="3200" b="1">
+              <a:rPr sz="3000" b="1">
                 <a:solidFill>
                   <a:srgbClr val="1A1A1A"/>
                 </a:solidFill>
@@ -9719,8 +10184,8 @@
         </p:nvSpPr>
         <p:spPr>
           <a:xfrm>
-            <a:off x="540000" y="1188000"/>
-            <a:ext cx="7200000" cy="4680000"/>
+            <a:off x="540000" y="1152000"/>
+            <a:ext cx="11113200" cy="3420000"/>
           </a:xfrm>
           <a:prstGeom prst="rect">
             <a:avLst/>
@@ -9765,8 +10230,8 @@
         </p:nvSpPr>
         <p:spPr>
           <a:xfrm>
-            <a:off x="540000" y="1188000"/>
-            <a:ext cx="7200000" cy="4680000"/>
+            <a:off x="540000" y="1152000"/>
+            <a:ext cx="11113200" cy="3420000"/>
           </a:xfrm>
           <a:prstGeom prst="rect">
             <a:avLst/>
@@ -9784,20 +10249,20 @@
           <a:p>
             <a:pPr algn="ctr"/>
             <a:r>
-              <a:rPr sz="2000" b="0">
+              <a:rPr sz="2200" b="0">
                 <a:solidFill>
                   <a:srgbClr val="666666"/>
                 </a:solidFill>
                 <a:latin typeface="メイリオ"/>
                 <a:ea typeface="メイリオ"/>
               </a:rPr>
-              <a:t>📷</a:t>
-            </a:r>
-          </a:p>
-          <a:p>
-            <a:pPr algn="ctr"/>
-            <a:r>
-              <a:rPr sz="2000" b="0">
+              <a:t>📷  【ここに授業写真を貼り付け】</a:t>
+            </a:r>
+          </a:p>
+          <a:p>
+            <a:pPr algn="ctr"/>
+            <a:r>
+              <a:rPr sz="2200" b="0">
                 <a:solidFill>
                   <a:srgbClr val="666666"/>
                 </a:solidFill>
@@ -9810,53 +10275,14 @@
           <a:p>
             <a:pPr algn="ctr"/>
             <a:r>
-              <a:rPr sz="2000" b="0">
+              <a:rPr sz="2200" b="0">
                 <a:solidFill>
                   <a:srgbClr val="666666"/>
                 </a:solidFill>
                 <a:latin typeface="メイリオ"/>
                 <a:ea typeface="メイリオ"/>
               </a:rPr>
-              <a:t>【ここに授業写真を貼り付け】</a:t>
-            </a:r>
-          </a:p>
-          <a:p>
-            <a:pPr algn="ctr"/>
-            <a:r>
-              <a:rPr sz="2000" b="0">
-                <a:solidFill>
-                  <a:srgbClr val="666666"/>
-                </a:solidFill>
-                <a:latin typeface="メイリオ"/>
-                <a:ea typeface="メイリオ"/>
-              </a:rPr>
-              <a:t/>
-            </a:r>
-          </a:p>
-          <a:p>
-            <a:pPr algn="ctr"/>
-            <a:r>
-              <a:rPr sz="2000" b="0">
-                <a:solidFill>
-                  <a:srgbClr val="666666"/>
-                </a:solidFill>
-                <a:latin typeface="メイリオ"/>
-                <a:ea typeface="メイリオ"/>
-              </a:rPr>
-              <a:t>教師の話を聞き、ワークシートに</a:t>
-            </a:r>
-          </a:p>
-          <a:p>
-            <a:pPr algn="ctr"/>
-            <a:r>
-              <a:rPr sz="2000" b="0">
-                <a:solidFill>
-                  <a:srgbClr val="666666"/>
-                </a:solidFill>
-                <a:latin typeface="メイリオ"/>
-                <a:ea typeface="メイリオ"/>
-              </a:rPr>
-              <a:t>質問を記入している場面</a:t>
+              <a:t>教師の話を聞き、ワークシートに質問を記入している場面</a:t>
             </a:r>
           </a:p>
         </p:txBody>
@@ -9869,8 +10295,8 @@
         </p:nvSpPr>
         <p:spPr>
           <a:xfrm>
-            <a:off x="7920000" y="1188000"/>
-            <a:ext cx="3733200" cy="288000"/>
+            <a:off x="540000" y="4752000"/>
+            <a:ext cx="5466600" cy="324000"/>
           </a:xfrm>
           <a:prstGeom prst="rect">
             <a:avLst/>
@@ -9913,8 +10339,8 @@
         </p:nvSpPr>
         <p:spPr>
           <a:xfrm>
-            <a:off x="7920000" y="1188000"/>
-            <a:ext cx="3733200" cy="288000"/>
+            <a:off x="540000" y="4752000"/>
+            <a:ext cx="5466600" cy="324000"/>
           </a:xfrm>
           <a:prstGeom prst="rect">
             <a:avLst/>
@@ -9932,7 +10358,7 @@
           <a:p>
             <a:pPr algn="ctr"/>
             <a:r>
-              <a:rPr sz="1300" b="1">
+              <a:rPr sz="1500" b="1">
                 <a:solidFill>
                   <a:srgbClr val="FFFFFF"/>
                 </a:solidFill>
@@ -9952,8 +10378,8 @@
         </p:nvSpPr>
         <p:spPr>
           <a:xfrm>
-            <a:off x="7920000" y="1476000"/>
-            <a:ext cx="3733200" cy="1980000"/>
+            <a:off x="540000" y="5076000"/>
+            <a:ext cx="5466600" cy="1116000"/>
           </a:xfrm>
           <a:prstGeom prst="rect">
             <a:avLst/>
@@ -9998,115 +10424,84 @@
         </p:nvSpPr>
         <p:spPr>
           <a:xfrm>
-            <a:off x="8010000" y="1548000"/>
-            <a:ext cx="3553200" cy="1835999"/>
-          </a:xfrm>
-          <a:prstGeom prst="rect">
-            <a:avLst/>
-          </a:prstGeom>
-          <a:noFill/>
-          <a:ln>
-            <a:noFill/>
-          </a:ln>
-        </p:spPr>
-        <p:txBody>
-          <a:bodyPr wrap="square" lIns="54000" rIns="54000" tIns="18000" bIns="18000" anchor="t">
+            <a:off x="648000" y="5148000"/>
+            <a:ext cx="5250600" cy="1008000"/>
+          </a:xfrm>
+          <a:prstGeom prst="rect">
+            <a:avLst/>
+          </a:prstGeom>
+          <a:noFill/>
+          <a:ln>
+            <a:noFill/>
+          </a:ln>
+        </p:spPr>
+        <p:txBody>
+          <a:bodyPr wrap="square" lIns="54000" rIns="54000" tIns="18000" bIns="18000" anchor="ctr">
             <a:spAutoFit/>
           </a:bodyPr>
           <a:lstStyle/>
           <a:p>
             <a:pPr algn="l">
               <a:lnSpc>
-                <a:spcPct val="130000"/>
+                <a:spcPct val="150000"/>
               </a:lnSpc>
             </a:pPr>
             <a:r>
-              <a:rPr sz="1400" b="1">
+              <a:rPr sz="1800" b="1">
                 <a:solidFill>
                   <a:srgbClr val="FF0000"/>
                 </a:solidFill>
                 <a:latin typeface="メイリオ"/>
                 <a:ea typeface="メイリオ"/>
               </a:rPr>
-              <a:t>「いつ・</a:t>
+              <a:t>「いつ・どこで・だれが」</a:t>
+            </a:r>
+            <a:r>
+              <a:rPr sz="1700" b="0">
+                <a:solidFill>
+                  <a:srgbClr val="1A1A1A"/>
+                </a:solidFill>
+                <a:latin typeface="メイリオ"/>
+                <a:ea typeface="メイリオ"/>
+              </a:rPr>
+              <a:t>の板書整理が、</a:t>
             </a:r>
           </a:p>
           <a:p>
             <a:pPr algn="l">
               <a:lnSpc>
-                <a:spcPct val="130000"/>
+                <a:spcPct val="150000"/>
               </a:lnSpc>
             </a:pPr>
             <a:r>
-              <a:rPr sz="1400" b="1">
+              <a:rPr sz="1700" b="0">
+                <a:solidFill>
+                  <a:srgbClr val="1A1A1A"/>
+                </a:solidFill>
+                <a:latin typeface="メイリオ"/>
+                <a:ea typeface="メイリオ"/>
+              </a:rPr>
+              <a:t>児童の質問を </a:t>
+            </a:r>
+            <a:r>
+              <a:rPr sz="1800" b="1">
                 <a:solidFill>
                   <a:srgbClr val="FF0000"/>
                 </a:solidFill>
                 <a:latin typeface="メイリオ"/>
                 <a:ea typeface="メイリオ"/>
               </a:rPr>
-              <a:t>どこで・だれが」</a:t>
-            </a:r>
-          </a:p>
-          <a:p>
-            <a:pPr algn="l">
-              <a:lnSpc>
-                <a:spcPct val="130000"/>
-              </a:lnSpc>
-            </a:pPr>
-            <a:r>
-              <a:rPr sz="1300" b="0">
+              <a:t>〝見える化〟</a:t>
+            </a:r>
+            <a:r>
+              <a:rPr sz="1700" b="0">
                 <a:solidFill>
                   <a:srgbClr val="1A1A1A"/>
                 </a:solidFill>
                 <a:latin typeface="メイリオ"/>
                 <a:ea typeface="メイリオ"/>
               </a:rPr>
-              <a:t>の板書整理が、</a:t>
-            </a:r>
-          </a:p>
-          <a:p>
-            <a:pPr algn="l">
-              <a:lnSpc>
-                <a:spcPct val="130000"/>
-              </a:lnSpc>
-            </a:pPr>
-            <a:r>
-              <a:rPr sz="1300" b="0">
-                <a:solidFill>
-                  <a:srgbClr val="1A1A1A"/>
-                </a:solidFill>
-                <a:latin typeface="メイリオ"/>
-                <a:ea typeface="メイリオ"/>
-              </a:rPr>
-              <a:t>児童の質問を</a:t>
-            </a:r>
-          </a:p>
-          <a:p>
-            <a:pPr algn="l">
-              <a:lnSpc>
-                <a:spcPct val="130000"/>
-              </a:lnSpc>
-            </a:pPr>
-            <a:r>
-              <a:rPr sz="1400" b="1">
-                <a:solidFill>
-                  <a:srgbClr val="FF0000"/>
-                </a:solidFill>
-                <a:latin typeface="メイリオ"/>
-                <a:ea typeface="メイリオ"/>
-              </a:rPr>
-              <a:t>〝見える化〟</a:t>
-            </a:r>
-            <a:r>
-              <a:rPr sz="1300" b="0">
-                <a:solidFill>
-                  <a:srgbClr val="1A1A1A"/>
-                </a:solidFill>
-                <a:latin typeface="メイリオ"/>
-                <a:ea typeface="メイリオ"/>
-              </a:rPr>
-              <a:t>している。</a:t>
+              <a:t> している。</a:t>
             </a:r>
           </a:p>
         </p:txBody>
@@ -10119,8 +10514,8 @@
         </p:nvSpPr>
         <p:spPr>
           <a:xfrm>
-            <a:off x="7920000" y="3708000"/>
-            <a:ext cx="3733200" cy="288000"/>
+            <a:off x="6186600" y="4752000"/>
+            <a:ext cx="5466600" cy="324000"/>
           </a:xfrm>
           <a:prstGeom prst="rect">
             <a:avLst/>
@@ -10163,8 +10558,8 @@
         </p:nvSpPr>
         <p:spPr>
           <a:xfrm>
-            <a:off x="7920000" y="3708000"/>
-            <a:ext cx="3733200" cy="288000"/>
+            <a:off x="6186600" y="4752000"/>
+            <a:ext cx="5466600" cy="324000"/>
           </a:xfrm>
           <a:prstGeom prst="rect">
             <a:avLst/>
@@ -10182,7 +10577,7 @@
           <a:p>
             <a:pPr algn="ctr"/>
             <a:r>
-              <a:rPr sz="1300" b="1">
+              <a:rPr sz="1500" b="1">
                 <a:solidFill>
                   <a:srgbClr val="FFFFFF"/>
                 </a:solidFill>
@@ -10202,8 +10597,8 @@
         </p:nvSpPr>
         <p:spPr>
           <a:xfrm>
-            <a:off x="7920000" y="3996000"/>
-            <a:ext cx="3733200" cy="1980000"/>
+            <a:off x="6186600" y="5076000"/>
+            <a:ext cx="5466600" cy="1116000"/>
           </a:xfrm>
           <a:prstGeom prst="rect">
             <a:avLst/>
@@ -10248,118 +10643,84 @@
         </p:nvSpPr>
         <p:spPr>
           <a:xfrm>
-            <a:off x="8010000" y="4068000"/>
-            <a:ext cx="3553200" cy="1835999"/>
-          </a:xfrm>
-          <a:prstGeom prst="rect">
-            <a:avLst/>
-          </a:prstGeom>
-          <a:noFill/>
-          <a:ln>
-            <a:noFill/>
-          </a:ln>
-        </p:spPr>
-        <p:txBody>
-          <a:bodyPr wrap="square" lIns="54000" rIns="54000" tIns="18000" bIns="18000" anchor="t">
+            <a:off x="6294600" y="5148000"/>
+            <a:ext cx="5250600" cy="1008000"/>
+          </a:xfrm>
+          <a:prstGeom prst="rect">
+            <a:avLst/>
+          </a:prstGeom>
+          <a:noFill/>
+          <a:ln>
+            <a:noFill/>
+          </a:ln>
+        </p:spPr>
+        <p:txBody>
+          <a:bodyPr wrap="square" lIns="54000" rIns="54000" tIns="18000" bIns="18000" anchor="ctr">
             <a:spAutoFit/>
           </a:bodyPr>
           <a:lstStyle/>
           <a:p>
             <a:pPr algn="l">
               <a:lnSpc>
-                <a:spcPct val="130000"/>
+                <a:spcPct val="150000"/>
               </a:lnSpc>
             </a:pPr>
             <a:r>
-              <a:rPr sz="1300" b="0">
+              <a:rPr sz="1700" b="0">
                 <a:solidFill>
                   <a:srgbClr val="1A1A1A"/>
                 </a:solidFill>
                 <a:latin typeface="メイリオ"/>
                 <a:ea typeface="メイリオ"/>
               </a:rPr>
-              <a:t>自分が考えた質問を</a:t>
+              <a:t>自分が考えた質問をペアで </a:t>
+            </a:r>
+            <a:r>
+              <a:rPr sz="1800" b="1">
+                <a:solidFill>
+                  <a:srgbClr val="FF0000"/>
+                </a:solidFill>
+                <a:latin typeface="メイリオ"/>
+                <a:ea typeface="メイリオ"/>
+              </a:rPr>
+              <a:t>安心して交流</a:t>
+            </a:r>
+            <a:r>
+              <a:rPr sz="1700" b="0">
+                <a:solidFill>
+                  <a:srgbClr val="1A1A1A"/>
+                </a:solidFill>
+                <a:latin typeface="メイリオ"/>
+                <a:ea typeface="メイリオ"/>
+              </a:rPr>
+              <a:t>。</a:t>
             </a:r>
           </a:p>
           <a:p>
             <a:pPr algn="l">
               <a:lnSpc>
-                <a:spcPct val="130000"/>
+                <a:spcPct val="150000"/>
               </a:lnSpc>
             </a:pPr>
             <a:r>
-              <a:rPr sz="1300" b="0">
+              <a:rPr sz="1800" b="1">
+                <a:solidFill>
+                  <a:srgbClr val="FF0000"/>
+                </a:solidFill>
+                <a:latin typeface="メイリオ"/>
+                <a:ea typeface="メイリオ"/>
+              </a:rPr>
+              <a:t>書く時間の確保</a:t>
+            </a:r>
+            <a:r>
+              <a:rPr sz="1700" b="0">
                 <a:solidFill>
                   <a:srgbClr val="1A1A1A"/>
                 </a:solidFill>
                 <a:latin typeface="メイリオ"/>
                 <a:ea typeface="メイリオ"/>
               </a:rPr>
-              <a:t>ペアで</a:t>
-            </a:r>
-            <a:r>
-              <a:rPr sz="1400" b="1">
-                <a:solidFill>
-                  <a:srgbClr val="FF0000"/>
-                </a:solidFill>
-                <a:latin typeface="メイリオ"/>
-                <a:ea typeface="メイリオ"/>
-              </a:rPr>
-              <a:t>安心して</a:t>
-            </a:r>
-            <a:r>
-              <a:rPr sz="1300" b="0">
-                <a:solidFill>
-                  <a:srgbClr val="1A1A1A"/>
-                </a:solidFill>
-                <a:latin typeface="メイリオ"/>
-                <a:ea typeface="メイリオ"/>
-              </a:rPr>
-              <a:t>交流。</a:t>
-            </a:r>
-          </a:p>
-          <a:p>
-            <a:pPr algn="l">
-              <a:lnSpc>
-                <a:spcPct val="130000"/>
-              </a:lnSpc>
-            </a:pPr>
-            <a:r>
-              <a:rPr sz="1400" b="1">
-                <a:solidFill>
-                  <a:srgbClr val="FF0000"/>
-                </a:solidFill>
-                <a:latin typeface="メイリオ"/>
-                <a:ea typeface="メイリオ"/>
-              </a:rPr>
-              <a:t>書く時間の確保</a:t>
-            </a:r>
-            <a:r>
-              <a:rPr sz="1300" b="0">
-                <a:solidFill>
-                  <a:srgbClr val="1A1A1A"/>
-                </a:solidFill>
-                <a:latin typeface="メイリオ"/>
-                <a:ea typeface="メイリオ"/>
-              </a:rPr>
-              <a:t>が</a:t>
-            </a:r>
-          </a:p>
-          <a:p>
-            <a:pPr algn="l">
-              <a:lnSpc>
-                <a:spcPct val="130000"/>
-              </a:lnSpc>
-            </a:pPr>
-            <a:r>
-              <a:rPr sz="1300" b="0">
-                <a:solidFill>
-                  <a:srgbClr val="1A1A1A"/>
-                </a:solidFill>
-                <a:latin typeface="メイリオ"/>
-                <a:ea typeface="メイリオ"/>
-              </a:rPr>
-              <a:t>発言の自信に。</a:t>
+              <a:t>が発言の自信に。</a:t>
             </a:r>
           </a:p>
         </p:txBody>
@@ -10487,7 +10848,7 @@
           <a:p>
             <a:pPr algn="l"/>
             <a:r>
-              <a:rPr sz="3200" b="1">
+              <a:rPr sz="3000" b="1">
                 <a:solidFill>
                   <a:srgbClr val="1A1A1A"/>
                 </a:solidFill>
@@ -10784,7 +11145,7 @@
           <a:p>
             <a:pPr algn="ctr"/>
             <a:r>
-              <a:rPr sz="1500" b="1">
+              <a:rPr sz="1700" b="1">
                 <a:solidFill>
                   <a:srgbClr val="FFFFFF"/>
                 </a:solidFill>
@@ -10797,7 +11158,7 @@
           <a:p>
             <a:pPr algn="ctr"/>
             <a:r>
-              <a:rPr sz="1500" b="1">
+              <a:rPr sz="1700" b="1">
                 <a:solidFill>
                   <a:srgbClr val="FFFFFF"/>
                 </a:solidFill>
@@ -10864,7 +11225,7 @@
         <p:spPr>
           <a:xfrm>
             <a:off x="6894000" y="1835999"/>
-            <a:ext cx="396000" cy="1332000"/>
+            <a:ext cx="432000" cy="1332000"/>
           </a:xfrm>
           <a:prstGeom prst="rect">
             <a:avLst/>
@@ -10882,7 +11243,7 @@
           <a:p>
             <a:pPr algn="ctr"/>
             <a:r>
-              <a:rPr sz="2000" b="1">
+              <a:rPr sz="2200" b="1">
                 <a:solidFill>
                   <a:srgbClr val="FF0000"/>
                 </a:solidFill>
@@ -10902,8 +11263,8 @@
         </p:nvSpPr>
         <p:spPr>
           <a:xfrm>
-            <a:off x="7308000" y="1925999"/>
-            <a:ext cx="4309201" cy="576000"/>
+            <a:off x="7343999" y="1925999"/>
+            <a:ext cx="4273200" cy="576000"/>
           </a:xfrm>
           <a:prstGeom prst="rect">
             <a:avLst/>
@@ -10921,7 +11282,7 @@
           <a:p>
             <a:pPr algn="l"/>
             <a:r>
-              <a:rPr sz="1300" b="1">
+              <a:rPr sz="1400" b="1">
                 <a:solidFill>
                   <a:srgbClr val="002060"/>
                 </a:solidFill>
@@ -10941,8 +11302,8 @@
         </p:nvSpPr>
         <p:spPr>
           <a:xfrm>
-            <a:off x="7308000" y="2519999"/>
-            <a:ext cx="4309201" cy="612000"/>
+            <a:off x="7343999" y="2519999"/>
+            <a:ext cx="4273200" cy="612000"/>
           </a:xfrm>
           <a:prstGeom prst="rect">
             <a:avLst/>
@@ -10960,7 +11321,7 @@
           <a:p>
             <a:pPr algn="l"/>
             <a:r>
-              <a:rPr sz="1000" b="0">
+              <a:rPr sz="1100" b="0">
                 <a:solidFill>
                   <a:srgbClr val="1A1A1A"/>
                 </a:solidFill>
@@ -10973,7 +11334,7 @@
           <a:p>
             <a:pPr algn="l"/>
             <a:r>
-              <a:rPr sz="1000" b="0">
+              <a:rPr sz="1100" b="0">
                 <a:solidFill>
                   <a:srgbClr val="1A1A1A"/>
                 </a:solidFill>
@@ -11040,7 +11401,7 @@
         <p:spPr>
           <a:xfrm>
             <a:off x="6894000" y="3221999"/>
-            <a:ext cx="396000" cy="1332000"/>
+            <a:ext cx="432000" cy="1332000"/>
           </a:xfrm>
           <a:prstGeom prst="rect">
             <a:avLst/>
@@ -11058,7 +11419,7 @@
           <a:p>
             <a:pPr algn="ctr"/>
             <a:r>
-              <a:rPr sz="2000" b="1">
+              <a:rPr sz="2200" b="1">
                 <a:solidFill>
                   <a:srgbClr val="FF0000"/>
                 </a:solidFill>
@@ -11078,8 +11439,8 @@
         </p:nvSpPr>
         <p:spPr>
           <a:xfrm>
-            <a:off x="7308000" y="3311999"/>
-            <a:ext cx="4309201" cy="576000"/>
+            <a:off x="7343999" y="3311999"/>
+            <a:ext cx="4273200" cy="576000"/>
           </a:xfrm>
           <a:prstGeom prst="rect">
             <a:avLst/>
@@ -11097,7 +11458,7 @@
           <a:p>
             <a:pPr algn="l"/>
             <a:r>
-              <a:rPr sz="1300" b="1">
+              <a:rPr sz="1400" b="1">
                 <a:solidFill>
                   <a:srgbClr val="002060"/>
                 </a:solidFill>
@@ -11110,7 +11471,7 @@
           <a:p>
             <a:pPr algn="l"/>
             <a:r>
-              <a:rPr sz="1300" b="1">
+              <a:rPr sz="1400" b="1">
                 <a:solidFill>
                   <a:srgbClr val="002060"/>
                 </a:solidFill>
@@ -11130,8 +11491,8 @@
         </p:nvSpPr>
         <p:spPr>
           <a:xfrm>
-            <a:off x="7308000" y="3905999"/>
-            <a:ext cx="4309201" cy="612000"/>
+            <a:off x="7343999" y="3905999"/>
+            <a:ext cx="4273200" cy="612000"/>
           </a:xfrm>
           <a:prstGeom prst="rect">
             <a:avLst/>
@@ -11149,7 +11510,7 @@
           <a:p>
             <a:pPr algn="l"/>
             <a:r>
-              <a:rPr sz="1000" b="0">
+              <a:rPr sz="1100" b="0">
                 <a:solidFill>
                   <a:srgbClr val="1A1A1A"/>
                 </a:solidFill>
@@ -11162,7 +11523,7 @@
           <a:p>
             <a:pPr algn="l"/>
             <a:r>
-              <a:rPr sz="1000" b="0">
+              <a:rPr sz="1100" b="0">
                 <a:solidFill>
                   <a:srgbClr val="1A1A1A"/>
                 </a:solidFill>
@@ -11229,7 +11590,7 @@
         <p:spPr>
           <a:xfrm>
             <a:off x="6894000" y="4607999"/>
-            <a:ext cx="396000" cy="1332000"/>
+            <a:ext cx="432000" cy="1332000"/>
           </a:xfrm>
           <a:prstGeom prst="rect">
             <a:avLst/>
@@ -11247,7 +11608,7 @@
           <a:p>
             <a:pPr algn="ctr"/>
             <a:r>
-              <a:rPr sz="2000" b="1">
+              <a:rPr sz="2200" b="1">
                 <a:solidFill>
                   <a:srgbClr val="FF0000"/>
                 </a:solidFill>
@@ -11267,8 +11628,8 @@
         </p:nvSpPr>
         <p:spPr>
           <a:xfrm>
-            <a:off x="7308000" y="4697999"/>
-            <a:ext cx="4309201" cy="576000"/>
+            <a:off x="7343999" y="4697999"/>
+            <a:ext cx="4273200" cy="576000"/>
           </a:xfrm>
           <a:prstGeom prst="rect">
             <a:avLst/>
@@ -11286,7 +11647,7 @@
           <a:p>
             <a:pPr algn="l"/>
             <a:r>
-              <a:rPr sz="1300" b="1">
+              <a:rPr sz="1400" b="1">
                 <a:solidFill>
                   <a:srgbClr val="002060"/>
                 </a:solidFill>
@@ -11306,8 +11667,8 @@
         </p:nvSpPr>
         <p:spPr>
           <a:xfrm>
-            <a:off x="7308000" y="5291999"/>
-            <a:ext cx="4309201" cy="612000"/>
+            <a:off x="7343999" y="5291999"/>
+            <a:ext cx="4273200" cy="612000"/>
           </a:xfrm>
           <a:prstGeom prst="rect">
             <a:avLst/>
@@ -11325,7 +11686,7 @@
           <a:p>
             <a:pPr algn="l"/>
             <a:r>
-              <a:rPr sz="1000" b="0">
+              <a:rPr sz="1100" b="0">
                 <a:solidFill>
                   <a:srgbClr val="1A1A1A"/>
                 </a:solidFill>
@@ -11338,7 +11699,7 @@
           <a:p>
             <a:pPr algn="l"/>
             <a:r>
-              <a:rPr sz="1000" b="0">
+              <a:rPr sz="1100" b="0">
                 <a:solidFill>
                   <a:srgbClr val="1A1A1A"/>
                 </a:solidFill>
@@ -11473,7 +11834,7 @@
           <a:p>
             <a:pPr algn="l"/>
             <a:r>
-              <a:rPr sz="3200" b="1">
+              <a:rPr sz="3000" b="1">
                 <a:solidFill>
                   <a:srgbClr val="1A1A1A"/>
                 </a:solidFill>
@@ -11600,7 +11961,7 @@
           <a:p>
             <a:pPr algn="ctr"/>
             <a:r>
-              <a:rPr sz="1600" b="1">
+              <a:rPr sz="1800" b="1">
                 <a:solidFill>
                   <a:srgbClr val="FFFFFF"/>
                 </a:solidFill>
@@ -11685,7 +12046,7 @@
           <a:p>
             <a:pPr algn="ctr"/>
             <a:r>
-              <a:rPr sz="2000" b="1">
+              <a:rPr sz="2200" b="1">
                 <a:solidFill>
                   <a:srgbClr val="002060"/>
                 </a:solidFill>
@@ -11768,7 +12129,7 @@
           <a:p>
             <a:pPr algn="ctr"/>
             <a:r>
-              <a:rPr sz="1600" b="1">
+              <a:rPr sz="1800" b="1">
                 <a:solidFill>
                   <a:srgbClr val="FFFFFF"/>
                 </a:solidFill>
@@ -11857,7 +12218,7 @@
               </a:lnSpc>
             </a:pPr>
             <a:r>
-              <a:rPr sz="1400" b="0">
+              <a:rPr sz="1500" b="0">
                 <a:solidFill>
                   <a:srgbClr val="1A1A1A"/>
                 </a:solidFill>
@@ -11867,7 +12228,7 @@
               <a:t>手だてや話題を工夫し、</a:t>
             </a:r>
             <a:r>
-              <a:rPr sz="1500" b="1">
+              <a:rPr sz="1600" b="1">
                 <a:solidFill>
                   <a:srgbClr val="FF0000"/>
                 </a:solidFill>
@@ -11877,7 +12238,7 @@
               <a:t>視点を明確にした対話を継続的に実践</a:t>
             </a:r>
             <a:r>
-              <a:rPr sz="1400" b="0">
+              <a:rPr sz="1500" b="0">
                 <a:solidFill>
                   <a:srgbClr val="1A1A1A"/>
                 </a:solidFill>
@@ -11894,7 +12255,7 @@
               </a:lnSpc>
             </a:pPr>
             <a:r>
-              <a:rPr sz="1400" b="0">
+              <a:rPr sz="1500" b="0">
                 <a:solidFill>
                   <a:srgbClr val="1A1A1A"/>
                 </a:solidFill>
@@ -11904,7 +12265,7 @@
               <a:t>ことで、児童の</a:t>
             </a:r>
             <a:r>
-              <a:rPr sz="1500" b="1">
+              <a:rPr sz="1600" b="1">
                 <a:solidFill>
                   <a:srgbClr val="FF0000"/>
                 </a:solidFill>
@@ -11914,7 +12275,7 @@
               <a:t>対話に広がりや深まりが見られる</a:t>
             </a:r>
             <a:r>
-              <a:rPr sz="1400" b="0">
+              <a:rPr sz="1500" b="0">
                 <a:solidFill>
                   <a:srgbClr val="1A1A1A"/>
                 </a:solidFill>
@@ -11953,7 +12314,7 @@
           <a:p>
             <a:pPr algn="ctr"/>
             <a:r>
-              <a:rPr sz="1600" b="1">
+              <a:rPr sz="1800" b="1">
                 <a:solidFill>
                   <a:srgbClr val="FF0000"/>
                 </a:solidFill>
@@ -12036,7 +12397,7 @@
           <a:p>
             <a:pPr algn="ctr"/>
             <a:r>
-              <a:rPr sz="1600" b="1">
+              <a:rPr sz="1800" b="1">
                 <a:solidFill>
                   <a:srgbClr val="FFFFFF"/>
                 </a:solidFill>
@@ -12121,11 +12482,11 @@
           <a:p>
             <a:pPr algn="ctr">
               <a:lnSpc>
-                <a:spcPct val="140000"/>
+                <a:spcPct val="150000"/>
               </a:lnSpc>
             </a:pPr>
             <a:r>
-              <a:rPr sz="1600" b="1">
+              <a:rPr sz="1800" b="1">
                 <a:solidFill>
                   <a:srgbClr val="FF0000"/>
                 </a:solidFill>
@@ -12138,11 +12499,11 @@
           <a:p>
             <a:pPr algn="ctr">
               <a:lnSpc>
-                <a:spcPct val="140000"/>
+                <a:spcPct val="150000"/>
               </a:lnSpc>
             </a:pPr>
             <a:r>
-              <a:rPr sz="1400" b="0">
+              <a:rPr sz="1600" b="0">
                 <a:solidFill>
                   <a:srgbClr val="1A1A1A"/>
                 </a:solidFill>
@@ -12155,11 +12516,11 @@
           <a:p>
             <a:pPr algn="ctr">
               <a:lnSpc>
-                <a:spcPct val="140000"/>
+                <a:spcPct val="150000"/>
               </a:lnSpc>
             </a:pPr>
             <a:r>
-              <a:rPr sz="1400" b="0">
+              <a:rPr sz="1600" b="0">
                 <a:solidFill>
                   <a:srgbClr val="1A1A1A"/>
                 </a:solidFill>
@@ -12242,7 +12603,7 @@
           <a:p>
             <a:pPr algn="ctr"/>
             <a:r>
-              <a:rPr sz="1600" b="1">
+              <a:rPr sz="1800" b="1">
                 <a:solidFill>
                   <a:srgbClr val="FFFFFF"/>
                 </a:solidFill>
@@ -12327,11 +12688,11 @@
           <a:p>
             <a:pPr algn="ctr">
               <a:lnSpc>
-                <a:spcPct val="140000"/>
+                <a:spcPct val="150000"/>
               </a:lnSpc>
             </a:pPr>
             <a:r>
-              <a:rPr sz="1600" b="1">
+              <a:rPr sz="1800" b="1">
                 <a:solidFill>
                   <a:srgbClr val="FF0000"/>
                 </a:solidFill>
@@ -12344,11 +12705,11 @@
           <a:p>
             <a:pPr algn="ctr">
               <a:lnSpc>
-                <a:spcPct val="140000"/>
+                <a:spcPct val="150000"/>
               </a:lnSpc>
             </a:pPr>
             <a:r>
-              <a:rPr sz="1400" b="0">
+              <a:rPr sz="1600" b="0">
                 <a:solidFill>
                   <a:srgbClr val="1A1A1A"/>
                 </a:solidFill>
@@ -12361,11 +12722,11 @@
           <a:p>
             <a:pPr algn="ctr">
               <a:lnSpc>
-                <a:spcPct val="140000"/>
+                <a:spcPct val="150000"/>
               </a:lnSpc>
             </a:pPr>
             <a:r>
-              <a:rPr sz="1400" b="0">
+              <a:rPr sz="1600" b="0">
                 <a:solidFill>
                   <a:srgbClr val="1A1A1A"/>
                 </a:solidFill>
@@ -12448,7 +12809,7 @@
           <a:p>
             <a:pPr algn="ctr"/>
             <a:r>
-              <a:rPr sz="1600" b="1">
+              <a:rPr sz="1800" b="1">
                 <a:solidFill>
                   <a:srgbClr val="FFFFFF"/>
                 </a:solidFill>
@@ -12533,11 +12894,11 @@
           <a:p>
             <a:pPr algn="ctr">
               <a:lnSpc>
-                <a:spcPct val="140000"/>
+                <a:spcPct val="150000"/>
               </a:lnSpc>
             </a:pPr>
             <a:r>
-              <a:rPr sz="1500" b="1">
+              <a:rPr sz="1700" b="1">
                 <a:solidFill>
                   <a:srgbClr val="FF0000"/>
                 </a:solidFill>
@@ -12550,28 +12911,18 @@
           <a:p>
             <a:pPr algn="ctr">
               <a:lnSpc>
-                <a:spcPct val="140000"/>
+                <a:spcPct val="150000"/>
               </a:lnSpc>
             </a:pPr>
             <a:r>
-              <a:rPr sz="1400" b="0">
+              <a:rPr sz="1600" b="0">
                 <a:solidFill>
                   <a:srgbClr val="1A1A1A"/>
                 </a:solidFill>
                 <a:latin typeface="メイリオ"/>
                 <a:ea typeface="メイリオ"/>
               </a:rPr>
-              <a:t>の</a:t>
-            </a:r>
-            <a:r>
-              <a:rPr sz="1400" b="0">
-                <a:solidFill>
-                  <a:srgbClr val="1A1A1A"/>
-                </a:solidFill>
-                <a:latin typeface="メイリオ"/>
-                <a:ea typeface="メイリオ"/>
-              </a:rPr>
-              <a:t>3観点を提示</a:t>
+              <a:t>の3観点を提示</a:t>
             </a:r>
           </a:p>
         </p:txBody>
@@ -12699,7 +13050,7 @@
           <a:p>
             <a:pPr algn="l"/>
             <a:r>
-              <a:rPr sz="3200" b="1">
+              <a:rPr sz="3000" b="1">
                 <a:solidFill>
                   <a:srgbClr val="1A1A1A"/>
                 </a:solidFill>
@@ -12865,7 +13216,7 @@
           <a:p>
             <a:pPr algn="ctr"/>
             <a:r>
-              <a:rPr sz="1800" b="1">
+              <a:rPr sz="1900" b="1">
                 <a:solidFill>
                   <a:srgbClr val="FFFFFF"/>
                 </a:solidFill>
@@ -12885,7 +13236,7 @@
         </p:nvSpPr>
         <p:spPr>
           <a:xfrm>
-            <a:off x="540000" y="1692000"/>
+            <a:off x="540000" y="1728000"/>
             <a:ext cx="11113200" cy="2160000"/>
           </a:xfrm>
           <a:prstGeom prst="rect">
@@ -12931,8 +13282,8 @@
         </p:nvSpPr>
         <p:spPr>
           <a:xfrm>
-            <a:off x="720000" y="1800000"/>
-            <a:ext cx="10753200" cy="1944000"/>
+            <a:off x="720000" y="1836000"/>
+            <a:ext cx="10753200" cy="576000"/>
           </a:xfrm>
           <a:prstGeom prst="rect">
             <a:avLst/>
@@ -12948,11 +13299,7 @@
           </a:bodyPr>
           <a:lstStyle/>
           <a:p>
-            <a:pPr algn="l">
-              <a:lnSpc>
-                <a:spcPct val="150000"/>
-              </a:lnSpc>
-            </a:pPr>
+            <a:pPr algn="l"/>
             <a:r>
               <a:rPr sz="1800" b="1">
                 <a:solidFill>
@@ -12961,7 +13308,7 @@
                 <a:latin typeface="メイリオ"/>
                 <a:ea typeface="メイリオ"/>
               </a:rPr>
-              <a:t>「必要なことを記録したり</a:t>
+              <a:t>「必要なことを記録したり </a:t>
             </a:r>
             <a:r>
               <a:rPr sz="2200" b="1">
@@ -12984,12 +13331,34 @@
               <a:t>、</a:t>
             </a:r>
           </a:p>
-          <a:p>
-            <a:pPr algn="l">
-              <a:lnSpc>
-                <a:spcPct val="150000"/>
-              </a:lnSpc>
-            </a:pPr>
+        </p:txBody>
+      </p:sp>
+      <p:sp>
+        <p:nvSpPr>
+          <p:cNvPr id="9" name="TextBox 8"/>
+          <p:cNvSpPr txBox="1"/>
+          <p:nvPr/>
+        </p:nvSpPr>
+        <p:spPr>
+          <a:xfrm>
+            <a:off x="720000" y="2448000"/>
+            <a:ext cx="10753200" cy="576000"/>
+          </a:xfrm>
+          <a:prstGeom prst="rect">
+            <a:avLst/>
+          </a:prstGeom>
+          <a:noFill/>
+          <a:ln>
+            <a:noFill/>
+          </a:ln>
+        </p:spPr>
+        <p:txBody>
+          <a:bodyPr wrap="square" lIns="54000" rIns="54000" tIns="18000" bIns="18000" anchor="ctr">
+            <a:spAutoFit/>
+          </a:bodyPr>
+          <a:lstStyle/>
+          <a:p>
+            <a:pPr algn="l"/>
             <a:r>
               <a:rPr sz="1800" b="1">
                 <a:solidFill>
@@ -12998,15 +13367,18 @@
                 <a:latin typeface="メイリオ"/>
                 <a:ea typeface="メイリオ"/>
               </a:rPr>
-              <a:t>  話し手が伝えたいことや自分が聞きたいことの</a:t>
-            </a:r>
-          </a:p>
-          <a:p>
-            <a:pPr algn="l">
-              <a:lnSpc>
-                <a:spcPct val="150000"/>
-              </a:lnSpc>
-            </a:pPr>
+              <a:t>  話し手が伝えたいことや自分が聞きたいことの </a:t>
+            </a:r>
+            <a:r>
+              <a:rPr sz="2200" b="1">
+                <a:solidFill>
+                  <a:srgbClr val="FF0000"/>
+                </a:solidFill>
+                <a:latin typeface="メイリオ"/>
+                <a:ea typeface="メイリオ"/>
+              </a:rPr>
+              <a:t>中心を捉え</a:t>
+            </a:r>
             <a:r>
               <a:rPr sz="1800" b="1">
                 <a:solidFill>
@@ -13015,7 +13387,46 @@
                 <a:latin typeface="メイリオ"/>
                 <a:ea typeface="メイリオ"/>
               </a:rPr>
-              <a:t>  </a:t>
+              <a:t>、</a:t>
+            </a:r>
+          </a:p>
+        </p:txBody>
+      </p:sp>
+      <p:sp>
+        <p:nvSpPr>
+          <p:cNvPr id="10" name="TextBox 9"/>
+          <p:cNvSpPr txBox="1"/>
+          <p:nvPr/>
+        </p:nvSpPr>
+        <p:spPr>
+          <a:xfrm>
+            <a:off x="720000" y="3096000"/>
+            <a:ext cx="10753200" cy="576000"/>
+          </a:xfrm>
+          <a:prstGeom prst="rect">
+            <a:avLst/>
+          </a:prstGeom>
+          <a:noFill/>
+          <a:ln>
+            <a:noFill/>
+          </a:ln>
+        </p:spPr>
+        <p:txBody>
+          <a:bodyPr wrap="square" lIns="54000" rIns="54000" tIns="18000" bIns="18000" anchor="ctr">
+            <a:spAutoFit/>
+          </a:bodyPr>
+          <a:lstStyle/>
+          <a:p>
+            <a:pPr algn="l"/>
+            <a:r>
+              <a:rPr sz="1800" b="1">
+                <a:solidFill>
+                  <a:srgbClr val="1A1A1A"/>
+                </a:solidFill>
+                <a:latin typeface="メイリオ"/>
+                <a:ea typeface="メイリオ"/>
+              </a:rPr>
+              <a:t>   </a:t>
             </a:r>
             <a:r>
               <a:rPr sz="2200" b="1">
@@ -13025,7 +13436,7 @@
                 <a:latin typeface="メイリオ"/>
                 <a:ea typeface="メイリオ"/>
               </a:rPr>
-              <a:t>中心を捉え</a:t>
+              <a:t>自分の考えをもつ</a:t>
             </a:r>
             <a:r>
               <a:rPr sz="1800" b="1">
@@ -13035,41 +13446,21 @@
                 <a:latin typeface="メイリオ"/>
                 <a:ea typeface="メイリオ"/>
               </a:rPr>
-              <a:t>、</a:t>
-            </a:r>
-            <a:r>
-              <a:rPr sz="2200" b="1">
-                <a:solidFill>
-                  <a:srgbClr val="FF0000"/>
-                </a:solidFill>
-                <a:latin typeface="メイリオ"/>
-                <a:ea typeface="メイリオ"/>
-              </a:rPr>
-              <a:t>自分の考えをもつ</a:t>
-            </a:r>
-            <a:r>
-              <a:rPr sz="1800" b="1">
-                <a:solidFill>
-                  <a:srgbClr val="1A1A1A"/>
-                </a:solidFill>
-                <a:latin typeface="メイリオ"/>
-                <a:ea typeface="メイリオ"/>
-              </a:rPr>
-              <a:t>こと。」</a:t>
-            </a:r>
-          </a:p>
-        </p:txBody>
-      </p:sp>
-      <p:sp>
-        <p:nvSpPr>
-          <p:cNvPr id="9" name="Rectangle 8"/>
+              <a:t> こと。」</a:t>
+            </a:r>
+          </a:p>
+        </p:txBody>
+      </p:sp>
+      <p:sp>
+        <p:nvSpPr>
+          <p:cNvPr id="11" name="Rectangle 10"/>
           <p:cNvSpPr/>
           <p:nvPr/>
         </p:nvSpPr>
         <p:spPr>
           <a:xfrm>
-            <a:off x="540000" y="3960000"/>
-            <a:ext cx="2520000" cy="432000"/>
+            <a:off x="540000" y="4031999"/>
+            <a:ext cx="2880000" cy="432000"/>
           </a:xfrm>
           <a:prstGeom prst="rect">
             <a:avLst/>
@@ -13106,14 +13497,14 @@
       </p:sp>
       <p:sp>
         <p:nvSpPr>
-          <p:cNvPr id="10" name="TextBox 9"/>
-          <p:cNvSpPr txBox="1"/>
-          <p:nvPr/>
-        </p:nvSpPr>
-        <p:spPr>
-          <a:xfrm>
-            <a:off x="540000" y="3960000"/>
-            <a:ext cx="2520000" cy="432000"/>
+          <p:cNvPr id="12" name="TextBox 11"/>
+          <p:cNvSpPr txBox="1"/>
+          <p:nvPr/>
+        </p:nvSpPr>
+        <p:spPr>
+          <a:xfrm>
+            <a:off x="540000" y="4031999"/>
+            <a:ext cx="2880000" cy="432000"/>
           </a:xfrm>
           <a:prstGeom prst="rect">
             <a:avLst/>
@@ -13131,7 +13522,7 @@
           <a:p>
             <a:pPr algn="ctr"/>
             <a:r>
-              <a:rPr sz="1500" b="1">
+              <a:rPr sz="1600" b="1">
                 <a:solidFill>
                   <a:srgbClr val="FFFFFF"/>
                 </a:solidFill>
@@ -13145,13 +13536,13 @@
       </p:sp>
       <p:sp>
         <p:nvSpPr>
-          <p:cNvPr id="11" name="Rectangle 10"/>
+          <p:cNvPr id="13" name="Rectangle 12"/>
           <p:cNvSpPr/>
           <p:nvPr/>
         </p:nvSpPr>
         <p:spPr>
           <a:xfrm>
-            <a:off x="540000" y="4392000"/>
+            <a:off x="540000" y="4464000"/>
             <a:ext cx="11113200" cy="1800000"/>
           </a:xfrm>
           <a:prstGeom prst="rect">
@@ -13191,36 +13582,32 @@
       </p:sp>
       <p:sp>
         <p:nvSpPr>
-          <p:cNvPr id="12" name="TextBox 11"/>
-          <p:cNvSpPr txBox="1"/>
-          <p:nvPr/>
-        </p:nvSpPr>
-        <p:spPr>
-          <a:xfrm>
-            <a:off x="720000" y="4500000"/>
-            <a:ext cx="10753200" cy="1620000"/>
-          </a:xfrm>
-          <a:prstGeom prst="rect">
-            <a:avLst/>
-          </a:prstGeom>
-          <a:noFill/>
-          <a:ln>
-            <a:noFill/>
-          </a:ln>
-        </p:spPr>
-        <p:txBody>
-          <a:bodyPr wrap="square" lIns="54000" rIns="54000" tIns="18000" bIns="18000" anchor="t">
-            <a:spAutoFit/>
-          </a:bodyPr>
-          <a:lstStyle/>
-          <a:p>
-            <a:pPr algn="l">
-              <a:lnSpc>
-                <a:spcPct val="135000"/>
-              </a:lnSpc>
-            </a:pPr>
-            <a:r>
-              <a:rPr sz="1600" b="0">
+          <p:cNvPr id="14" name="TextBox 13"/>
+          <p:cNvSpPr txBox="1"/>
+          <p:nvPr/>
+        </p:nvSpPr>
+        <p:spPr>
+          <a:xfrm>
+            <a:off x="720000" y="4536000"/>
+            <a:ext cx="10753200" cy="432000"/>
+          </a:xfrm>
+          <a:prstGeom prst="rect">
+            <a:avLst/>
+          </a:prstGeom>
+          <a:noFill/>
+          <a:ln>
+            <a:noFill/>
+          </a:ln>
+        </p:spPr>
+        <p:txBody>
+          <a:bodyPr wrap="square" lIns="54000" rIns="54000" tIns="18000" bIns="18000" anchor="ctr">
+            <a:spAutoFit/>
+          </a:bodyPr>
+          <a:lstStyle/>
+          <a:p>
+            <a:pPr algn="l"/>
+            <a:r>
+              <a:rPr sz="1800" b="0">
                 <a:solidFill>
                   <a:srgbClr val="1A1A1A"/>
                 </a:solidFill>
@@ -13230,7 +13617,7 @@
               <a:t>・</a:t>
             </a:r>
             <a:r>
-              <a:rPr sz="1800" b="1">
+              <a:rPr sz="1900" b="1">
                 <a:solidFill>
                   <a:srgbClr val="FF0000"/>
                 </a:solidFill>
@@ -13240,14 +13627,36 @@
               <a:t>「質問の種類」を可視化する手だて</a:t>
             </a:r>
           </a:p>
-          <a:p>
-            <a:pPr algn="l">
-              <a:lnSpc>
-                <a:spcPct val="135000"/>
-              </a:lnSpc>
-            </a:pPr>
-            <a:r>
-              <a:rPr sz="1600" b="0">
+        </p:txBody>
+      </p:sp>
+      <p:sp>
+        <p:nvSpPr>
+          <p:cNvPr id="15" name="TextBox 14"/>
+          <p:cNvSpPr txBox="1"/>
+          <p:nvPr/>
+        </p:nvSpPr>
+        <p:spPr>
+          <a:xfrm>
+            <a:off x="720000" y="4968000"/>
+            <a:ext cx="10753200" cy="432000"/>
+          </a:xfrm>
+          <a:prstGeom prst="rect">
+            <a:avLst/>
+          </a:prstGeom>
+          <a:noFill/>
+          <a:ln>
+            <a:noFill/>
+          </a:ln>
+        </p:spPr>
+        <p:txBody>
+          <a:bodyPr wrap="square" lIns="54000" rIns="54000" tIns="18000" bIns="18000" anchor="ctr">
+            <a:spAutoFit/>
+          </a:bodyPr>
+          <a:lstStyle/>
+          <a:p>
+            <a:pPr algn="l"/>
+            <a:r>
+              <a:rPr sz="1700" b="0">
                 <a:solidFill>
                   <a:srgbClr val="1A1A1A"/>
                 </a:solidFill>
@@ -13257,7 +13666,7 @@
               <a:t>       = 解説で示された </a:t>
             </a:r>
             <a:r>
-              <a:rPr sz="1800" b="1">
+              <a:rPr sz="1900" b="1">
                 <a:solidFill>
                   <a:srgbClr val="FF0000"/>
                 </a:solidFill>
@@ -13267,7 +13676,7 @@
               <a:t>〝聞く力の中核〟</a:t>
             </a:r>
             <a:r>
-              <a:rPr sz="1600" b="0">
+              <a:rPr sz="1700" b="0">
                 <a:solidFill>
                   <a:srgbClr val="1A1A1A"/>
                 </a:solidFill>
@@ -13277,14 +13686,36 @@
               <a:t> そのもの</a:t>
             </a:r>
           </a:p>
-          <a:p>
-            <a:pPr algn="l">
-              <a:lnSpc>
-                <a:spcPct val="135000"/>
-              </a:lnSpc>
-            </a:pPr>
-            <a:r>
-              <a:rPr sz="1600" b="0">
+        </p:txBody>
+      </p:sp>
+      <p:sp>
+        <p:nvSpPr>
+          <p:cNvPr id="16" name="TextBox 15"/>
+          <p:cNvSpPr txBox="1"/>
+          <p:nvPr/>
+        </p:nvSpPr>
+        <p:spPr>
+          <a:xfrm>
+            <a:off x="720000" y="5436000"/>
+            <a:ext cx="10753200" cy="432000"/>
+          </a:xfrm>
+          <a:prstGeom prst="rect">
+            <a:avLst/>
+          </a:prstGeom>
+          <a:noFill/>
+          <a:ln>
+            <a:noFill/>
+          </a:ln>
+        </p:spPr>
+        <p:txBody>
+          <a:bodyPr wrap="square" lIns="54000" rIns="54000" tIns="18000" bIns="18000" anchor="ctr">
+            <a:spAutoFit/>
+          </a:bodyPr>
+          <a:lstStyle/>
+          <a:p>
+            <a:pPr algn="l"/>
+            <a:r>
+              <a:rPr sz="1800" b="0">
                 <a:solidFill>
                   <a:srgbClr val="1A1A1A"/>
                 </a:solidFill>
@@ -13294,7 +13725,7 @@
               <a:t>・</a:t>
             </a:r>
             <a:r>
-              <a:rPr sz="1800" b="1">
+              <a:rPr sz="1900" b="1">
                 <a:solidFill>
                   <a:srgbClr val="FF0000"/>
                 </a:solidFill>
@@ -13303,25 +13734,18 @@
               </a:rPr>
               <a:t>「中心を捉え、自分の考えをもつ」</a:t>
             </a:r>
-          </a:p>
-          <a:p>
-            <a:pPr algn="l">
-              <a:lnSpc>
-                <a:spcPct val="135000"/>
-              </a:lnSpc>
-            </a:pPr>
-            <a:r>
-              <a:rPr sz="1600" b="0">
+            <a:r>
+              <a:rPr sz="1700" b="0">
                 <a:solidFill>
                   <a:srgbClr val="1A1A1A"/>
                 </a:solidFill>
                 <a:latin typeface="メイリオ"/>
                 <a:ea typeface="メイリオ"/>
               </a:rPr>
-              <a:t>       →  </a:t>
-            </a:r>
-            <a:r>
-              <a:rPr sz="1800" b="1">
+              <a:t>   →   </a:t>
+            </a:r>
+            <a:r>
+              <a:rPr sz="1900" b="1">
                 <a:solidFill>
                   <a:srgbClr val="002060"/>
                 </a:solidFill>
@@ -13335,7 +13759,7 @@
       </p:sp>
       <p:sp>
         <p:nvSpPr>
-          <p:cNvPr id="13" name="TextBox 12"/>
+          <p:cNvPr id="17" name="TextBox 16"/>
           <p:cNvSpPr txBox="1"/>
           <p:nvPr/>
         </p:nvSpPr>
@@ -13374,7 +13798,7 @@
       </p:sp>
       <p:sp>
         <p:nvSpPr>
-          <p:cNvPr id="14" name="TextBox 13"/>
+          <p:cNvPr id="18" name="TextBox 17"/>
           <p:cNvSpPr txBox="1"/>
           <p:nvPr/>
         </p:nvSpPr>
@@ -13456,7 +13880,7 @@
           <a:p>
             <a:pPr algn="l"/>
             <a:r>
-              <a:rPr sz="3200" b="1">
+              <a:rPr sz="3000" b="1">
                 <a:solidFill>
                   <a:srgbClr val="1A1A1A"/>
                 </a:solidFill>
@@ -13622,7 +14046,7 @@
           <a:p>
             <a:pPr algn="ctr"/>
             <a:r>
-              <a:rPr sz="1800" b="1">
+              <a:rPr sz="1900" b="1">
                 <a:solidFill>
                   <a:srgbClr val="FFFFFF"/>
                 </a:solidFill>
@@ -13689,7 +14113,7 @@
         <p:spPr>
           <a:xfrm>
             <a:off x="720000" y="1692000"/>
-            <a:ext cx="10753200" cy="827999"/>
+            <a:ext cx="10753200" cy="432000"/>
           </a:xfrm>
           <a:prstGeom prst="rect">
             <a:avLst/>
@@ -13705,13 +14129,9 @@
           </a:bodyPr>
           <a:lstStyle/>
           <a:p>
-            <a:pPr algn="ctr">
-              <a:lnSpc>
-                <a:spcPct val="150000"/>
-              </a:lnSpc>
-            </a:pPr>
-            <a:r>
-              <a:rPr sz="1800" b="1">
+            <a:pPr algn="ctr"/>
+            <a:r>
+              <a:rPr sz="1900" b="1">
                 <a:solidFill>
                   <a:srgbClr val="1A1A1A"/>
                 </a:solidFill>
@@ -13721,7 +14141,7 @@
               <a:t>「</a:t>
             </a:r>
             <a:r>
-              <a:rPr sz="2000" b="1">
+              <a:rPr sz="2100" b="1">
                 <a:solidFill>
                   <a:srgbClr val="FF0000"/>
                 </a:solidFill>
@@ -13731,7 +14151,7 @@
               <a:t>個別最適な学び</a:t>
             </a:r>
             <a:r>
-              <a:rPr sz="1800" b="1">
+              <a:rPr sz="1900" b="1">
                 <a:solidFill>
                   <a:srgbClr val="1A1A1A"/>
                 </a:solidFill>
@@ -13741,7 +14161,7 @@
               <a:t>」と「</a:t>
             </a:r>
             <a:r>
-              <a:rPr sz="2000" b="1">
+              <a:rPr sz="2100" b="1">
                 <a:solidFill>
                   <a:srgbClr val="FF0000"/>
                 </a:solidFill>
@@ -13751,17 +14171,17 @@
               <a:t>協働的な学び</a:t>
             </a:r>
             <a:r>
-              <a:rPr sz="1800" b="1">
+              <a:rPr sz="1900" b="1">
                 <a:solidFill>
                   <a:srgbClr val="1A1A1A"/>
                 </a:solidFill>
                 <a:latin typeface="メイリオ"/>
                 <a:ea typeface="メイリオ"/>
               </a:rPr>
-              <a:t>」を</a:t>
-            </a:r>
-            <a:r>
-              <a:rPr sz="2000" b="1">
+              <a:t>」を </a:t>
+            </a:r>
+            <a:r>
+              <a:rPr sz="2100" b="1">
                 <a:solidFill>
                   <a:srgbClr val="002060"/>
                 </a:solidFill>
@@ -13771,34 +14191,56 @@
               <a:t>一体的に充実</a:t>
             </a:r>
             <a:r>
-              <a:rPr sz="1800" b="1">
+              <a:rPr sz="1900" b="1">
                 <a:solidFill>
                   <a:srgbClr val="1A1A1A"/>
                 </a:solidFill>
                 <a:latin typeface="メイリオ"/>
                 <a:ea typeface="メイリオ"/>
               </a:rPr>
-              <a:t>させ、</a:t>
-            </a:r>
-          </a:p>
-          <a:p>
-            <a:pPr algn="ctr">
-              <a:lnSpc>
-                <a:spcPct val="150000"/>
-              </a:lnSpc>
-            </a:pPr>
-            <a:r>
-              <a:rPr sz="1800" b="1">
+              <a:t> させ、</a:t>
+            </a:r>
+          </a:p>
+        </p:txBody>
+      </p:sp>
+      <p:sp>
+        <p:nvSpPr>
+          <p:cNvPr id="9" name="TextBox 8"/>
+          <p:cNvSpPr txBox="1"/>
+          <p:nvPr/>
+        </p:nvSpPr>
+        <p:spPr>
+          <a:xfrm>
+            <a:off x="720000" y="2124000"/>
+            <a:ext cx="10753200" cy="432000"/>
+          </a:xfrm>
+          <a:prstGeom prst="rect">
+            <a:avLst/>
+          </a:prstGeom>
+          <a:noFill/>
+          <a:ln>
+            <a:noFill/>
+          </a:ln>
+        </p:spPr>
+        <p:txBody>
+          <a:bodyPr wrap="square" lIns="54000" rIns="54000" tIns="18000" bIns="18000" anchor="ctr">
+            <a:spAutoFit/>
+          </a:bodyPr>
+          <a:lstStyle/>
+          <a:p>
+            <a:pPr algn="ctr"/>
+            <a:r>
+              <a:rPr sz="1900" b="1">
                 <a:solidFill>
                   <a:srgbClr val="1A1A1A"/>
                 </a:solidFill>
                 <a:latin typeface="メイリオ"/>
                 <a:ea typeface="メイリオ"/>
               </a:rPr>
-              <a:t>   </a:t>
-            </a:r>
-            <a:r>
-              <a:rPr sz="2000" b="1">
+              <a:t>  </a:t>
+            </a:r>
+            <a:r>
+              <a:rPr sz="2100" b="1">
                 <a:solidFill>
                   <a:srgbClr val="FF0000"/>
                 </a:solidFill>
@@ -13808,7 +14250,7 @@
               <a:t>主体的・対話的で深い学び</a:t>
             </a:r>
             <a:r>
-              <a:rPr sz="1800" b="1">
+              <a:rPr sz="1900" b="1">
                 <a:solidFill>
                   <a:srgbClr val="1A1A1A"/>
                 </a:solidFill>
@@ -13822,7 +14264,7 @@
       </p:sp>
       <p:sp>
         <p:nvSpPr>
-          <p:cNvPr id="9" name="TextBox 8"/>
+          <p:cNvPr id="10" name="TextBox 9"/>
           <p:cNvSpPr txBox="1"/>
           <p:nvPr/>
         </p:nvSpPr>
@@ -13847,7 +14289,7 @@
           <a:p>
             <a:pPr algn="ctr"/>
             <a:r>
-              <a:rPr sz="1600" b="1">
+              <a:rPr sz="1800" b="1">
                 <a:solidFill>
                   <a:srgbClr val="FF0000"/>
                 </a:solidFill>
@@ -13861,7 +14303,7 @@
       </p:sp>
       <p:sp>
         <p:nvSpPr>
-          <p:cNvPr id="10" name="Rectangle 9"/>
+          <p:cNvPr id="11" name="Rectangle 10"/>
           <p:cNvSpPr/>
           <p:nvPr/>
         </p:nvSpPr>
@@ -13905,7 +14347,7 @@
       </p:sp>
       <p:sp>
         <p:nvSpPr>
-          <p:cNvPr id="11" name="TextBox 10"/>
+          <p:cNvPr id="12" name="TextBox 11"/>
           <p:cNvSpPr txBox="1"/>
           <p:nvPr/>
         </p:nvSpPr>
@@ -13944,7 +14386,7 @@
       </p:sp>
       <p:sp>
         <p:nvSpPr>
-          <p:cNvPr id="12" name="Rectangle 11"/>
+          <p:cNvPr id="13" name="Rectangle 12"/>
           <p:cNvSpPr/>
           <p:nvPr/>
         </p:nvSpPr>
@@ -13990,7 +14432,7 @@
       </p:sp>
       <p:sp>
         <p:nvSpPr>
-          <p:cNvPr id="13" name="TextBox 12"/>
+          <p:cNvPr id="14" name="TextBox 13"/>
           <p:cNvSpPr txBox="1"/>
           <p:nvPr/>
         </p:nvSpPr>
@@ -14015,7 +14457,7 @@
           <a:p>
             <a:pPr algn="ctr"/>
             <a:r>
-              <a:rPr sz="1400" b="1">
+              <a:rPr sz="1500" b="1">
                 <a:solidFill>
                   <a:srgbClr val="1A1A1A"/>
                 </a:solidFill>
@@ -14028,7 +14470,7 @@
           <a:p>
             <a:pPr algn="ctr"/>
             <a:r>
-              <a:rPr sz="1400" b="1">
+              <a:rPr sz="1500" b="1">
                 <a:solidFill>
                   <a:srgbClr val="1A1A1A"/>
                 </a:solidFill>
@@ -14042,7 +14484,7 @@
       </p:sp>
       <p:sp>
         <p:nvSpPr>
-          <p:cNvPr id="14" name="Right Arrow 13"/>
+          <p:cNvPr id="15" name="Right Arrow 14"/>
           <p:cNvSpPr/>
           <p:nvPr/>
         </p:nvSpPr>
@@ -14085,7 +14527,7 @@
       </p:sp>
       <p:sp>
         <p:nvSpPr>
-          <p:cNvPr id="15" name="Rectangle 14"/>
+          <p:cNvPr id="16" name="Rectangle 15"/>
           <p:cNvSpPr/>
           <p:nvPr/>
         </p:nvSpPr>
@@ -14129,7 +14571,7 @@
       </p:sp>
       <p:sp>
         <p:nvSpPr>
-          <p:cNvPr id="16" name="TextBox 15"/>
+          <p:cNvPr id="17" name="TextBox 16"/>
           <p:cNvSpPr txBox="1"/>
           <p:nvPr/>
         </p:nvSpPr>
@@ -14168,7 +14610,7 @@
       </p:sp>
       <p:sp>
         <p:nvSpPr>
-          <p:cNvPr id="17" name="Rectangle 16"/>
+          <p:cNvPr id="18" name="Rectangle 17"/>
           <p:cNvSpPr/>
           <p:nvPr/>
         </p:nvSpPr>
@@ -14214,7 +14656,7 @@
       </p:sp>
       <p:sp>
         <p:nvSpPr>
-          <p:cNvPr id="18" name="TextBox 17"/>
+          <p:cNvPr id="19" name="TextBox 18"/>
           <p:cNvSpPr txBox="1"/>
           <p:nvPr/>
         </p:nvSpPr>
@@ -14239,7 +14681,7 @@
           <a:p>
             <a:pPr algn="ctr"/>
             <a:r>
-              <a:rPr sz="1400" b="1">
+              <a:rPr sz="1500" b="1">
                 <a:solidFill>
                   <a:srgbClr val="1A1A1A"/>
                 </a:solidFill>
@@ -14252,7 +14694,7 @@
           <a:p>
             <a:pPr algn="ctr"/>
             <a:r>
-              <a:rPr sz="1400" b="1">
+              <a:rPr sz="1500" b="1">
                 <a:solidFill>
                   <a:srgbClr val="1A1A1A"/>
                 </a:solidFill>
@@ -14266,7 +14708,7 @@
       </p:sp>
       <p:sp>
         <p:nvSpPr>
-          <p:cNvPr id="19" name="Right Arrow 18"/>
+          <p:cNvPr id="20" name="Right Arrow 19"/>
           <p:cNvSpPr/>
           <p:nvPr/>
         </p:nvSpPr>
@@ -14309,7 +14751,7 @@
       </p:sp>
       <p:sp>
         <p:nvSpPr>
-          <p:cNvPr id="20" name="Rectangle 19"/>
+          <p:cNvPr id="21" name="Rectangle 20"/>
           <p:cNvSpPr/>
           <p:nvPr/>
         </p:nvSpPr>
@@ -14353,7 +14795,7 @@
       </p:sp>
       <p:sp>
         <p:nvSpPr>
-          <p:cNvPr id="21" name="TextBox 20"/>
+          <p:cNvPr id="22" name="TextBox 21"/>
           <p:cNvSpPr txBox="1"/>
           <p:nvPr/>
         </p:nvSpPr>
@@ -14392,7 +14834,7 @@
       </p:sp>
       <p:sp>
         <p:nvSpPr>
-          <p:cNvPr id="22" name="Rectangle 21"/>
+          <p:cNvPr id="23" name="Rectangle 22"/>
           <p:cNvSpPr/>
           <p:nvPr/>
         </p:nvSpPr>
@@ -14438,7 +14880,7 @@
       </p:sp>
       <p:sp>
         <p:nvSpPr>
-          <p:cNvPr id="23" name="TextBox 22"/>
+          <p:cNvPr id="24" name="TextBox 23"/>
           <p:cNvSpPr txBox="1"/>
           <p:nvPr/>
         </p:nvSpPr>
@@ -14463,7 +14905,7 @@
           <a:p>
             <a:pPr algn="ctr"/>
             <a:r>
-              <a:rPr sz="1400" b="1">
+              <a:rPr sz="1500" b="1">
                 <a:solidFill>
                   <a:srgbClr val="1A1A1A"/>
                 </a:solidFill>
@@ -14476,7 +14918,7 @@
           <a:p>
             <a:pPr algn="ctr"/>
             <a:r>
-              <a:rPr sz="1400" b="1">
+              <a:rPr sz="1500" b="1">
                 <a:solidFill>
                   <a:srgbClr val="1A1A1A"/>
                 </a:solidFill>
@@ -14490,7 +14932,7 @@
       </p:sp>
       <p:sp>
         <p:nvSpPr>
-          <p:cNvPr id="24" name="Right Arrow 23"/>
+          <p:cNvPr id="25" name="Right Arrow 24"/>
           <p:cNvSpPr/>
           <p:nvPr/>
         </p:nvSpPr>
@@ -14533,7 +14975,7 @@
       </p:sp>
       <p:sp>
         <p:nvSpPr>
-          <p:cNvPr id="25" name="Rectangle 24"/>
+          <p:cNvPr id="26" name="Rectangle 25"/>
           <p:cNvSpPr/>
           <p:nvPr/>
         </p:nvSpPr>
@@ -14577,7 +15019,7 @@
       </p:sp>
       <p:sp>
         <p:nvSpPr>
-          <p:cNvPr id="26" name="TextBox 25"/>
+          <p:cNvPr id="27" name="TextBox 26"/>
           <p:cNvSpPr txBox="1"/>
           <p:nvPr/>
         </p:nvSpPr>
@@ -14616,7 +15058,7 @@
       </p:sp>
       <p:sp>
         <p:nvSpPr>
-          <p:cNvPr id="27" name="Rectangle 26"/>
+          <p:cNvPr id="28" name="Rectangle 27"/>
           <p:cNvSpPr/>
           <p:nvPr/>
         </p:nvSpPr>
@@ -14662,7 +15104,7 @@
       </p:sp>
       <p:sp>
         <p:nvSpPr>
-          <p:cNvPr id="28" name="TextBox 27"/>
+          <p:cNvPr id="29" name="TextBox 28"/>
           <p:cNvSpPr txBox="1"/>
           <p:nvPr/>
         </p:nvSpPr>
@@ -14687,7 +15129,7 @@
           <a:p>
             <a:pPr algn="ctr"/>
             <a:r>
-              <a:rPr sz="1400" b="1">
+              <a:rPr sz="1500" b="1">
                 <a:solidFill>
                   <a:srgbClr val="1A1A1A"/>
                 </a:solidFill>
@@ -14700,7 +15142,7 @@
           <a:p>
             <a:pPr algn="ctr"/>
             <a:r>
-              <a:rPr sz="1400" b="1">
+              <a:rPr sz="1500" b="1">
                 <a:solidFill>
                   <a:srgbClr val="1A1A1A"/>
                 </a:solidFill>
@@ -14714,7 +15156,7 @@
       </p:sp>
       <p:sp>
         <p:nvSpPr>
-          <p:cNvPr id="29" name="TextBox 28"/>
+          <p:cNvPr id="30" name="TextBox 29"/>
           <p:cNvSpPr txBox="1"/>
           <p:nvPr/>
         </p:nvSpPr>
@@ -14739,43 +15181,43 @@
           <a:p>
             <a:pPr algn="ctr"/>
             <a:r>
+              <a:rPr sz="2000" b="1">
+                <a:solidFill>
+                  <a:srgbClr val="FF0000"/>
+                </a:solidFill>
+                <a:latin typeface="メイリオ"/>
+                <a:ea typeface="メイリオ"/>
+              </a:rPr>
+              <a:t>個別 ⇄ 協働</a:t>
+            </a:r>
+            <a:r>
               <a:rPr sz="1800" b="1">
                 <a:solidFill>
+                  <a:srgbClr val="1A1A1A"/>
+                </a:solidFill>
+                <a:latin typeface="メイリオ"/>
+                <a:ea typeface="メイリオ"/>
+              </a:rPr>
+              <a:t> の往還が、児童の </a:t>
+            </a:r>
+            <a:r>
+              <a:rPr sz="2000" b="1">
+                <a:solidFill>
                   <a:srgbClr val="FF0000"/>
                 </a:solidFill>
                 <a:latin typeface="メイリオ"/>
                 <a:ea typeface="メイリオ"/>
               </a:rPr>
-              <a:t>個別 ⇄ 協働</a:t>
-            </a:r>
-            <a:r>
-              <a:rPr sz="1600" b="1">
+              <a:t>〝学びをつなげる〟</a:t>
+            </a:r>
+            <a:r>
+              <a:rPr sz="1800" b="1">
                 <a:solidFill>
                   <a:srgbClr val="1A1A1A"/>
                 </a:solidFill>
                 <a:latin typeface="メイリオ"/>
                 <a:ea typeface="メイリオ"/>
               </a:rPr>
-              <a:t> の往還が、児童の </a:t>
-            </a:r>
-            <a:r>
-              <a:rPr sz="1800" b="1">
-                <a:solidFill>
-                  <a:srgbClr val="FF0000"/>
-                </a:solidFill>
-                <a:latin typeface="メイリオ"/>
-                <a:ea typeface="メイリオ"/>
-              </a:rPr>
-              <a:t>〝学びをつなげる〟</a:t>
-            </a:r>
-            <a:r>
-              <a:rPr sz="1600" b="1">
-                <a:solidFill>
-                  <a:srgbClr val="1A1A1A"/>
-                </a:solidFill>
-                <a:latin typeface="メイリオ"/>
-                <a:ea typeface="メイリオ"/>
-              </a:rPr>
               <a:t> 土台になる</a:t>
             </a:r>
           </a:p>
@@ -14783,7 +15225,7 @@
       </p:sp>
       <p:sp>
         <p:nvSpPr>
-          <p:cNvPr id="30" name="TextBox 29"/>
+          <p:cNvPr id="31" name="TextBox 30"/>
           <p:cNvSpPr txBox="1"/>
           <p:nvPr/>
         </p:nvSpPr>
@@ -14822,7 +15264,7 @@
       </p:sp>
       <p:sp>
         <p:nvSpPr>
-          <p:cNvPr id="31" name="TextBox 30"/>
+          <p:cNvPr id="32" name="TextBox 31"/>
           <p:cNvSpPr txBox="1"/>
           <p:nvPr/>
         </p:nvSpPr>

--- a/指導講評_対話を通して学びをつなげる児童.pptx
+++ b/指導講評_対話を通して学びをつなげる児童.pptx
@@ -3196,6 +3196,45 @@
         <p:spPr>
           <a:xfrm>
             <a:off x="360000" y="827999"/>
+            <a:ext cx="11473200" cy="468000"/>
+          </a:xfrm>
+          <a:prstGeom prst="rect">
+            <a:avLst/>
+          </a:prstGeom>
+          <a:noFill/>
+          <a:ln>
+            <a:noFill/>
+          </a:ln>
+        </p:spPr>
+        <p:txBody>
+          <a:bodyPr wrap="square" lIns="54000" rIns="54000" tIns="18000" bIns="18000" anchor="ctr">
+            <a:spAutoFit/>
+          </a:bodyPr>
+          <a:lstStyle/>
+          <a:p>
+            <a:pPr algn="ctr"/>
+            <a:r>
+              <a:rPr sz="2600" b="1">
+                <a:solidFill>
+                  <a:srgbClr val="1A1A1A"/>
+                </a:solidFill>
+                <a:latin typeface="メイリオ"/>
+                <a:ea typeface="メイリオ"/>
+              </a:rPr>
+              <a:t>練馬区立開進第四小学校  校内研究</a:t>
+            </a:r>
+          </a:p>
+        </p:txBody>
+      </p:sp>
+      <p:sp>
+        <p:nvSpPr>
+          <p:cNvPr id="5" name="TextBox 4"/>
+          <p:cNvSpPr txBox="1"/>
+          <p:nvPr/>
+        </p:nvSpPr>
+        <p:spPr>
+          <a:xfrm>
+            <a:off x="360000" y="1368000"/>
             <a:ext cx="11473200" cy="432000"/>
           </a:xfrm>
           <a:prstGeom prst="rect">
@@ -3214,46 +3253,7 @@
           <a:p>
             <a:pPr algn="ctr"/>
             <a:r>
-              <a:rPr sz="2400" b="1">
-                <a:solidFill>
-                  <a:srgbClr val="1A1A1A"/>
-                </a:solidFill>
-                <a:latin typeface="メイリオ"/>
-                <a:ea typeface="メイリオ"/>
-              </a:rPr>
-              <a:t>練馬区立開進第四小学校  校内研究</a:t>
-            </a:r>
-          </a:p>
-        </p:txBody>
-      </p:sp>
-      <p:sp>
-        <p:nvSpPr>
-          <p:cNvPr id="5" name="TextBox 4"/>
-          <p:cNvSpPr txBox="1"/>
-          <p:nvPr/>
-        </p:nvSpPr>
-        <p:spPr>
-          <a:xfrm>
-            <a:off x="360000" y="1332000"/>
-            <a:ext cx="11473200" cy="360000"/>
-          </a:xfrm>
-          <a:prstGeom prst="rect">
-            <a:avLst/>
-          </a:prstGeom>
-          <a:noFill/>
-          <a:ln>
-            <a:noFill/>
-          </a:ln>
-        </p:spPr>
-        <p:txBody>
-          <a:bodyPr wrap="square" lIns="54000" rIns="54000" tIns="18000" bIns="18000" anchor="ctr">
-            <a:spAutoFit/>
-          </a:bodyPr>
-          <a:lstStyle/>
-          <a:p>
-            <a:pPr algn="ctr"/>
-            <a:r>
-              <a:rPr sz="1800" b="1">
+              <a:rPr sz="2000" b="1">
                 <a:solidFill>
                   <a:srgbClr val="1A1A1A"/>
                 </a:solidFill>
@@ -3336,7 +3336,7 @@
           <a:p>
             <a:pPr algn="ctr"/>
             <a:r>
-              <a:rPr sz="2800" b="1">
+              <a:rPr sz="3200" b="1">
                 <a:solidFill>
                   <a:srgbClr val="002060"/>
                 </a:solidFill>
@@ -3375,7 +3375,7 @@
           <a:p>
             <a:pPr algn="ctr"/>
             <a:r>
-              <a:rPr sz="5200" b="1">
+              <a:rPr sz="5600" b="1">
                 <a:solidFill>
                   <a:srgbClr val="1A1A1A"/>
                 </a:solidFill>
@@ -3388,7 +3388,7 @@
           <a:p>
             <a:pPr algn="ctr"/>
             <a:r>
-              <a:rPr sz="5200" b="1">
+              <a:rPr sz="5600" b="1">
                 <a:solidFill>
                   <a:srgbClr val="1A1A1A"/>
                 </a:solidFill>
@@ -3452,8 +3452,8 @@
         </p:nvSpPr>
         <p:spPr>
           <a:xfrm>
-            <a:off x="360000" y="5688000"/>
-            <a:ext cx="11473200" cy="432000"/>
+            <a:off x="360000" y="5652000"/>
+            <a:ext cx="11473200" cy="468000"/>
           </a:xfrm>
           <a:prstGeom prst="rect">
             <a:avLst/>
@@ -3471,7 +3471,7 @@
           <a:p>
             <a:pPr algn="ctr"/>
             <a:r>
-              <a:rPr sz="1600" b="1">
+              <a:rPr sz="1800" b="1">
                 <a:solidFill>
                   <a:srgbClr val="1A1A1A"/>
                 </a:solidFill>
@@ -3509,8 +3509,8 @@
         </p:nvSpPr>
         <p:spPr>
           <a:xfrm>
-            <a:off x="288000" y="144000"/>
-            <a:ext cx="8280000" cy="648000"/>
+            <a:off x="288000" y="108000"/>
+            <a:ext cx="8280000" cy="720000"/>
           </a:xfrm>
           <a:prstGeom prst="rect">
             <a:avLst/>
@@ -3528,7 +3528,7 @@
           <a:p>
             <a:pPr algn="l"/>
             <a:r>
-              <a:rPr sz="3000" b="1">
+              <a:rPr sz="3400" b="1">
                 <a:solidFill>
                   <a:srgbClr val="1A1A1A"/>
                 </a:solidFill>
@@ -3548,7 +3548,7 @@
         </p:nvSpPr>
         <p:spPr>
           <a:xfrm>
-            <a:off x="288000" y="827999"/>
+            <a:off x="288000" y="864000"/>
             <a:ext cx="11617200" cy="54000"/>
           </a:xfrm>
           <a:prstGeom prst="rect">
@@ -3593,7 +3593,7 @@
         <p:spPr>
           <a:xfrm>
             <a:off x="7513200" y="216000"/>
-            <a:ext cx="4320000" cy="503999"/>
+            <a:ext cx="4320000" cy="612000"/>
           </a:xfrm>
           <a:prstGeom prst="rect">
             <a:avLst/>
@@ -3611,14 +3611,14 @@
           <a:p>
             <a:pPr algn="r"/>
             <a:r>
-              <a:rPr sz="1100" b="1">
+              <a:rPr sz="1300" b="1">
                 <a:solidFill>
                   <a:srgbClr val="666666"/>
                 </a:solidFill>
                 <a:latin typeface="メイリオ"/>
                 <a:ea typeface="メイリオ"/>
               </a:rPr>
-              <a:t>「東京都教育ビジョン（第5次）」／「言語能力向上推進事業」</a:t>
+              <a:t>「東京都教育ビジョン（第5次）」</a:t>
             </a:r>
           </a:p>
         </p:txBody>
@@ -3632,7 +3632,7 @@
         <p:spPr>
           <a:xfrm>
             <a:off x="540000" y="1152000"/>
-            <a:ext cx="6300000" cy="468000"/>
+            <a:ext cx="6300000" cy="503999"/>
           </a:xfrm>
           <a:prstGeom prst="rect">
             <a:avLst/>
@@ -3676,7 +3676,7 @@
         <p:spPr>
           <a:xfrm>
             <a:off x="540000" y="1152000"/>
-            <a:ext cx="6300000" cy="468000"/>
+            <a:ext cx="6300000" cy="503999"/>
           </a:xfrm>
           <a:prstGeom prst="rect">
             <a:avLst/>
@@ -3694,7 +3694,7 @@
           <a:p>
             <a:pPr algn="ctr"/>
             <a:r>
-              <a:rPr sz="2000" b="1">
+              <a:rPr sz="2200" b="1">
                 <a:solidFill>
                   <a:srgbClr val="FFFFFF"/>
                 </a:solidFill>
@@ -3714,8 +3714,8 @@
         </p:nvSpPr>
         <p:spPr>
           <a:xfrm>
-            <a:off x="540000" y="1620000"/>
-            <a:ext cx="6300000" cy="4572000"/>
+            <a:off x="540000" y="1655999"/>
+            <a:ext cx="6300000" cy="4536000"/>
           </a:xfrm>
           <a:prstGeom prst="rect">
             <a:avLst/>
@@ -3760,7 +3760,7 @@
         </p:nvSpPr>
         <p:spPr>
           <a:xfrm>
-            <a:off x="720000" y="1764000"/>
+            <a:off x="720000" y="1835999"/>
             <a:ext cx="5940000" cy="503999"/>
           </a:xfrm>
           <a:prstGeom prst="rect">
@@ -3779,7 +3779,7 @@
           <a:p>
             <a:pPr algn="l"/>
             <a:r>
-              <a:rPr sz="2000" b="1">
+              <a:rPr sz="2400" b="1">
                 <a:solidFill>
                   <a:srgbClr val="002060"/>
                 </a:solidFill>
@@ -3789,14 +3789,14 @@
               <a:t>●  </a:t>
             </a:r>
             <a:r>
-              <a:rPr sz="2000" b="1">
+              <a:rPr sz="2200" b="1">
                 <a:solidFill>
                   <a:srgbClr val="FF0000"/>
                 </a:solidFill>
                 <a:latin typeface="メイリオ"/>
                 <a:ea typeface="メイリオ"/>
               </a:rPr>
-              <a:t>主体的に学び、考え、行動する力</a:t>
+              <a:t>主体的に学び・考え・行動</a:t>
             </a:r>
           </a:p>
         </p:txBody>
@@ -3809,8 +3809,8 @@
         </p:nvSpPr>
         <p:spPr>
           <a:xfrm>
-            <a:off x="720000" y="2232000"/>
-            <a:ext cx="5940000" cy="360000"/>
+            <a:off x="720000" y="2339998"/>
+            <a:ext cx="5940000" cy="432000"/>
           </a:xfrm>
           <a:prstGeom prst="rect">
             <a:avLst/>
@@ -3828,14 +3828,14 @@
           <a:p>
             <a:pPr algn="l"/>
             <a:r>
-              <a:rPr sz="1800" b="0">
+              <a:rPr sz="2000" b="0">
                 <a:solidFill>
                   <a:srgbClr val="1A1A1A"/>
                 </a:solidFill>
                 <a:latin typeface="メイリオ"/>
                 <a:ea typeface="メイリオ"/>
               </a:rPr>
-              <a:t>      の育成</a:t>
+              <a:t>       する力の育成</a:t>
             </a:r>
           </a:p>
         </p:txBody>
@@ -3848,7 +3848,7 @@
         </p:nvSpPr>
         <p:spPr>
           <a:xfrm>
-            <a:off x="720000" y="2916000"/>
+            <a:off x="720000" y="3203999"/>
             <a:ext cx="5940000" cy="503999"/>
           </a:xfrm>
           <a:prstGeom prst="rect">
@@ -3867,7 +3867,7 @@
           <a:p>
             <a:pPr algn="l"/>
             <a:r>
-              <a:rPr sz="2000" b="1">
+              <a:rPr sz="2400" b="1">
                 <a:solidFill>
                   <a:srgbClr val="002060"/>
                 </a:solidFill>
@@ -3877,7 +3877,7 @@
               <a:t>●  「</a:t>
             </a:r>
             <a:r>
-              <a:rPr sz="2000" b="1">
+              <a:rPr sz="2200" b="1">
                 <a:solidFill>
                   <a:srgbClr val="FF0000"/>
                 </a:solidFill>
@@ -3887,28 +3887,126 @@
               <a:t>話す・聞く・読む・書く</a:t>
             </a:r>
             <a:r>
-              <a:rPr sz="1800" b="0">
+              <a:rPr sz="2200" b="1">
+                <a:solidFill>
+                  <a:srgbClr val="002060"/>
+                </a:solidFill>
+                <a:latin typeface="メイリオ"/>
+                <a:ea typeface="メイリオ"/>
+              </a:rPr>
+              <a:t>」</a:t>
+            </a:r>
+          </a:p>
+        </p:txBody>
+      </p:sp>
+      <p:sp>
+        <p:nvSpPr>
+          <p:cNvPr id="11" name="TextBox 10"/>
+          <p:cNvSpPr txBox="1"/>
+          <p:nvPr/>
+        </p:nvSpPr>
+        <p:spPr>
+          <a:xfrm>
+            <a:off x="720000" y="3707998"/>
+            <a:ext cx="5940000" cy="432000"/>
+          </a:xfrm>
+          <a:prstGeom prst="rect">
+            <a:avLst/>
+          </a:prstGeom>
+          <a:noFill/>
+          <a:ln>
+            <a:noFill/>
+          </a:ln>
+        </p:spPr>
+        <p:txBody>
+          <a:bodyPr wrap="square" lIns="54000" rIns="54000" tIns="18000" bIns="18000" anchor="t">
+            <a:spAutoFit/>
+          </a:bodyPr>
+          <a:lstStyle/>
+          <a:p>
+            <a:pPr algn="l"/>
+            <a:r>
+              <a:rPr sz="2000" b="0">
                 <a:solidFill>
                   <a:srgbClr val="1A1A1A"/>
                 </a:solidFill>
                 <a:latin typeface="メイリオ"/>
                 <a:ea typeface="メイリオ"/>
               </a:rPr>
-              <a:t>」言語能力を</a:t>
-            </a:r>
-          </a:p>
-        </p:txBody>
-      </p:sp>
-      <p:sp>
-        <p:nvSpPr>
-          <p:cNvPr id="11" name="TextBox 10"/>
-          <p:cNvSpPr txBox="1"/>
-          <p:nvPr/>
-        </p:nvSpPr>
-        <p:spPr>
-          <a:xfrm>
-            <a:off x="720000" y="3384000"/>
-            <a:ext cx="5940000" cy="360000"/>
+              <a:t>       言語能力を全教育で育成</a:t>
+            </a:r>
+          </a:p>
+        </p:txBody>
+      </p:sp>
+      <p:sp>
+        <p:nvSpPr>
+          <p:cNvPr id="12" name="TextBox 11"/>
+          <p:cNvSpPr txBox="1"/>
+          <p:nvPr/>
+        </p:nvSpPr>
+        <p:spPr>
+          <a:xfrm>
+            <a:off x="720000" y="4571999"/>
+            <a:ext cx="5940000" cy="503999"/>
+          </a:xfrm>
+          <a:prstGeom prst="rect">
+            <a:avLst/>
+          </a:prstGeom>
+          <a:noFill/>
+          <a:ln>
+            <a:noFill/>
+          </a:ln>
+        </p:spPr>
+        <p:txBody>
+          <a:bodyPr wrap="square" lIns="54000" rIns="54000" tIns="18000" bIns="18000" anchor="ctr">
+            <a:spAutoFit/>
+          </a:bodyPr>
+          <a:lstStyle/>
+          <a:p>
+            <a:pPr algn="l"/>
+            <a:r>
+              <a:rPr sz="2400" b="1">
+                <a:solidFill>
+                  <a:srgbClr val="002060"/>
+                </a:solidFill>
+                <a:latin typeface="メイリオ"/>
+                <a:ea typeface="メイリオ"/>
+              </a:rPr>
+              <a:t>●  </a:t>
+            </a:r>
+            <a:r>
+              <a:rPr sz="2200" b="1">
+                <a:solidFill>
+                  <a:srgbClr val="FF0000"/>
+                </a:solidFill>
+                <a:latin typeface="メイリオ"/>
+                <a:ea typeface="メイリオ"/>
+              </a:rPr>
+              <a:t>思考・判断・表現力</a:t>
+            </a:r>
+            <a:r>
+              <a:rPr sz="2200" b="1">
+                <a:solidFill>
+                  <a:srgbClr val="002060"/>
+                </a:solidFill>
+                <a:latin typeface="メイリオ"/>
+                <a:ea typeface="メイリオ"/>
+              </a:rPr>
+              <a:t>の基盤</a:t>
+            </a:r>
+          </a:p>
+        </p:txBody>
+      </p:sp>
+      <p:sp>
+        <p:nvSpPr>
+          <p:cNvPr id="13" name="TextBox 12"/>
+          <p:cNvSpPr txBox="1"/>
+          <p:nvPr/>
+        </p:nvSpPr>
+        <p:spPr>
+          <a:xfrm>
+            <a:off x="720000" y="5075998"/>
+            <a:ext cx="5940000" cy="432000"/>
           </a:xfrm>
           <a:prstGeom prst="rect">
             <a:avLst/>
@@ -3926,112 +4024,14 @@
           <a:p>
             <a:pPr algn="l"/>
             <a:r>
-              <a:rPr sz="1800" b="0">
+              <a:rPr sz="2000" b="0">
                 <a:solidFill>
                   <a:srgbClr val="1A1A1A"/>
                 </a:solidFill>
                 <a:latin typeface="メイリオ"/>
                 <a:ea typeface="メイリオ"/>
               </a:rPr>
-              <a:t>      全教育活動で計画的に育成</a:t>
-            </a:r>
-          </a:p>
-        </p:txBody>
-      </p:sp>
-      <p:sp>
-        <p:nvSpPr>
-          <p:cNvPr id="12" name="TextBox 11"/>
-          <p:cNvSpPr txBox="1"/>
-          <p:nvPr/>
-        </p:nvSpPr>
-        <p:spPr>
-          <a:xfrm>
-            <a:off x="720000" y="4068000"/>
-            <a:ext cx="5940000" cy="503999"/>
-          </a:xfrm>
-          <a:prstGeom prst="rect">
-            <a:avLst/>
-          </a:prstGeom>
-          <a:noFill/>
-          <a:ln>
-            <a:noFill/>
-          </a:ln>
-        </p:spPr>
-        <p:txBody>
-          <a:bodyPr wrap="square" lIns="54000" rIns="54000" tIns="18000" bIns="18000" anchor="ctr">
-            <a:spAutoFit/>
-          </a:bodyPr>
-          <a:lstStyle/>
-          <a:p>
-            <a:pPr algn="l"/>
-            <a:r>
-              <a:rPr sz="2000" b="1">
-                <a:solidFill>
-                  <a:srgbClr val="002060"/>
-                </a:solidFill>
-                <a:latin typeface="メイリオ"/>
-                <a:ea typeface="メイリオ"/>
-              </a:rPr>
-              <a:t>●  </a:t>
-            </a:r>
-            <a:r>
-              <a:rPr sz="2000" b="1">
-                <a:solidFill>
-                  <a:srgbClr val="FF0000"/>
-                </a:solidFill>
-                <a:latin typeface="メイリオ"/>
-                <a:ea typeface="メイリオ"/>
-              </a:rPr>
-              <a:t>思考力・判断力・表現力等</a:t>
-            </a:r>
-            <a:r>
-              <a:rPr sz="1800" b="0">
-                <a:solidFill>
-                  <a:srgbClr val="1A1A1A"/>
-                </a:solidFill>
-                <a:latin typeface="メイリオ"/>
-                <a:ea typeface="メイリオ"/>
-              </a:rPr>
-              <a:t>の基盤として</a:t>
-            </a:r>
-          </a:p>
-        </p:txBody>
-      </p:sp>
-      <p:sp>
-        <p:nvSpPr>
-          <p:cNvPr id="13" name="TextBox 12"/>
-          <p:cNvSpPr txBox="1"/>
-          <p:nvPr/>
-        </p:nvSpPr>
-        <p:spPr>
-          <a:xfrm>
-            <a:off x="720000" y="4536000"/>
-            <a:ext cx="5940000" cy="360000"/>
-          </a:xfrm>
-          <a:prstGeom prst="rect">
-            <a:avLst/>
-          </a:prstGeom>
-          <a:noFill/>
-          <a:ln>
-            <a:noFill/>
-          </a:ln>
-        </p:spPr>
-        <p:txBody>
-          <a:bodyPr wrap="square" lIns="54000" rIns="54000" tIns="18000" bIns="18000" anchor="t">
-            <a:spAutoFit/>
-          </a:bodyPr>
-          <a:lstStyle/>
-          <a:p>
-            <a:pPr algn="l"/>
-            <a:r>
-              <a:rPr sz="1800" b="0">
-                <a:solidFill>
-                  <a:srgbClr val="1A1A1A"/>
-                </a:solidFill>
-                <a:latin typeface="メイリオ"/>
-                <a:ea typeface="メイリオ"/>
-              </a:rPr>
-              <a:t>      言語能力を位置づける</a:t>
+              <a:t>       として言語能力を位置づけ</a:t>
             </a:r>
           </a:p>
         </p:txBody>
@@ -4045,7 +4045,7 @@
         <p:spPr>
           <a:xfrm>
             <a:off x="7020000" y="1152000"/>
-            <a:ext cx="4633200" cy="468000"/>
+            <a:ext cx="4633200" cy="503999"/>
           </a:xfrm>
           <a:prstGeom prst="rect">
             <a:avLst/>
@@ -4089,7 +4089,7 @@
         <p:spPr>
           <a:xfrm>
             <a:off x="7020000" y="1152000"/>
-            <a:ext cx="4633200" cy="468000"/>
+            <a:ext cx="4633200" cy="503999"/>
           </a:xfrm>
           <a:prstGeom prst="rect">
             <a:avLst/>
@@ -4107,7 +4107,7 @@
           <a:p>
             <a:pPr algn="ctr"/>
             <a:r>
-              <a:rPr sz="1700" b="1">
+              <a:rPr sz="1900" b="1">
                 <a:solidFill>
                   <a:srgbClr val="FFFFFF"/>
                 </a:solidFill>
@@ -4127,8 +4127,8 @@
         </p:nvSpPr>
         <p:spPr>
           <a:xfrm>
-            <a:off x="7020000" y="1620000"/>
-            <a:ext cx="4633200" cy="4572000"/>
+            <a:off x="7020000" y="1655999"/>
+            <a:ext cx="4633200" cy="4536000"/>
           </a:xfrm>
           <a:prstGeom prst="rect">
             <a:avLst/>
@@ -4173,8 +4173,8 @@
         </p:nvSpPr>
         <p:spPr>
           <a:xfrm>
-            <a:off x="7128000" y="1800000"/>
-            <a:ext cx="4417200" cy="432000"/>
+            <a:off x="7128000" y="1872000"/>
+            <a:ext cx="4417200" cy="468000"/>
           </a:xfrm>
           <a:prstGeom prst="rect">
             <a:avLst/>
@@ -4192,7 +4192,7 @@
           <a:p>
             <a:pPr algn="ctr"/>
             <a:r>
-              <a:rPr sz="1700" b="0">
+              <a:rPr sz="2000" b="0">
                 <a:solidFill>
                   <a:srgbClr val="1A1A1A"/>
                 </a:solidFill>
@@ -4212,8 +4212,8 @@
         </p:nvSpPr>
         <p:spPr>
           <a:xfrm>
-            <a:off x="7128000" y="2340000"/>
-            <a:ext cx="4417200" cy="540000"/>
+            <a:off x="7128000" y="2448000"/>
+            <a:ext cx="4417200" cy="576000"/>
           </a:xfrm>
           <a:prstGeom prst="rect">
             <a:avLst/>
@@ -4231,14 +4231,14 @@
           <a:p>
             <a:pPr algn="ctr"/>
             <a:r>
-              <a:rPr sz="2000" b="1">
+              <a:rPr sz="2400" b="1">
                 <a:solidFill>
                   <a:srgbClr val="FF0000"/>
                 </a:solidFill>
                 <a:latin typeface="メイリオ"/>
                 <a:ea typeface="メイリオ"/>
               </a:rPr>
-              <a:t>「視点を明確にした</a:t>
+              <a:t>「視点を明確に</a:t>
             </a:r>
           </a:p>
         </p:txBody>
@@ -4251,8 +4251,8 @@
         </p:nvSpPr>
         <p:spPr>
           <a:xfrm>
-            <a:off x="7128000" y="2880000"/>
-            <a:ext cx="4417200" cy="540000"/>
+            <a:off x="7128000" y="3024000"/>
+            <a:ext cx="4417200" cy="576000"/>
           </a:xfrm>
           <a:prstGeom prst="rect">
             <a:avLst/>
@@ -4270,14 +4270,14 @@
           <a:p>
             <a:pPr algn="ctr"/>
             <a:r>
-              <a:rPr sz="2000" b="1">
+              <a:rPr sz="2400" b="1">
                 <a:solidFill>
                   <a:srgbClr val="FF0000"/>
                 </a:solidFill>
                 <a:latin typeface="メイリオ"/>
                 <a:ea typeface="メイリオ"/>
               </a:rPr>
-              <a:t>対話の継続」</a:t>
+              <a:t>した対話の継続」</a:t>
             </a:r>
           </a:p>
         </p:txBody>
@@ -4290,8 +4290,8 @@
         </p:nvSpPr>
         <p:spPr>
           <a:xfrm>
-            <a:off x="7128000" y="3600000"/>
-            <a:ext cx="4417200" cy="432000"/>
+            <a:off x="7128000" y="3888000"/>
+            <a:ext cx="4417200" cy="468000"/>
           </a:xfrm>
           <a:prstGeom prst="rect">
             <a:avLst/>
@@ -4309,14 +4309,14 @@
           <a:p>
             <a:pPr algn="ctr"/>
             <a:r>
-              <a:rPr sz="1700" b="0">
+              <a:rPr sz="2000" b="0">
                 <a:solidFill>
                   <a:srgbClr val="1A1A1A"/>
                 </a:solidFill>
                 <a:latin typeface="メイリオ"/>
                 <a:ea typeface="メイリオ"/>
               </a:rPr>
-              <a:t>は、都の言語能力育成の</a:t>
+              <a:t>は、都の方向と</a:t>
             </a:r>
           </a:p>
         </p:txBody>
@@ -4329,67 +4329,86 @@
         </p:nvSpPr>
         <p:spPr>
           <a:xfrm>
-            <a:off x="7128000" y="4031999"/>
-            <a:ext cx="4417200" cy="432000"/>
-          </a:xfrm>
-          <a:prstGeom prst="rect">
-            <a:avLst/>
-          </a:prstGeom>
-          <a:noFill/>
-          <a:ln>
-            <a:noFill/>
-          </a:ln>
-        </p:spPr>
-        <p:txBody>
-          <a:bodyPr wrap="square" lIns="54000" rIns="54000" tIns="18000" bIns="18000" anchor="ctr">
-            <a:spAutoFit/>
-          </a:bodyPr>
-          <a:lstStyle/>
-          <a:p>
-            <a:pPr algn="ctr"/>
-            <a:r>
-              <a:rPr sz="1700" b="0">
+            <a:off x="7128000" y="4392000"/>
+            <a:ext cx="4417200" cy="576000"/>
+          </a:xfrm>
+          <a:prstGeom prst="rect">
+            <a:avLst/>
+          </a:prstGeom>
+          <a:noFill/>
+          <a:ln>
+            <a:noFill/>
+          </a:ln>
+        </p:spPr>
+        <p:txBody>
+          <a:bodyPr wrap="square" lIns="54000" rIns="54000" tIns="18000" bIns="18000" anchor="t">
+            <a:spAutoFit/>
+          </a:bodyPr>
+          <a:lstStyle/>
+          <a:p>
+            <a:pPr algn="ctr"/>
+            <a:r>
+              <a:rPr sz="2400" b="1">
+                <a:solidFill>
+                  <a:srgbClr val="FF0000"/>
+                </a:solidFill>
+                <a:latin typeface="メイリオ"/>
+                <a:ea typeface="メイリオ"/>
+              </a:rPr>
+              <a:t>完全に一致。</a:t>
+            </a:r>
+          </a:p>
+        </p:txBody>
+      </p:sp>
+      <p:sp>
+        <p:nvSpPr>
+          <p:cNvPr id="22" name="TextBox 21"/>
+          <p:cNvSpPr txBox="1"/>
+          <p:nvPr/>
+        </p:nvSpPr>
+        <p:spPr>
+          <a:xfrm>
+            <a:off x="7128000" y="5220000"/>
+            <a:ext cx="4417200" cy="468000"/>
+          </a:xfrm>
+          <a:prstGeom prst="rect">
+            <a:avLst/>
+          </a:prstGeom>
+          <a:noFill/>
+          <a:ln>
+            <a:noFill/>
+          </a:ln>
+        </p:spPr>
+        <p:txBody>
+          <a:bodyPr wrap="square" lIns="54000" rIns="54000" tIns="18000" bIns="18000" anchor="t">
+            <a:spAutoFit/>
+          </a:bodyPr>
+          <a:lstStyle/>
+          <a:p>
+            <a:pPr algn="ctr"/>
+            <a:r>
+              <a:rPr sz="2000" b="0">
                 <a:solidFill>
                   <a:srgbClr val="1A1A1A"/>
                 </a:solidFill>
                 <a:latin typeface="メイリオ"/>
                 <a:ea typeface="メイリオ"/>
               </a:rPr>
-              <a:t>方向と </a:t>
-            </a:r>
-            <a:r>
-              <a:rPr sz="2000" b="1">
-                <a:solidFill>
-                  <a:srgbClr val="FF0000"/>
-                </a:solidFill>
-                <a:latin typeface="メイリオ"/>
-                <a:ea typeface="メイリオ"/>
-              </a:rPr>
-              <a:t>完全に一致</a:t>
-            </a:r>
-            <a:r>
-              <a:rPr sz="1700" b="0">
-                <a:solidFill>
-                  <a:srgbClr val="1A1A1A"/>
-                </a:solidFill>
-                <a:latin typeface="メイリオ"/>
-                <a:ea typeface="メイリオ"/>
-              </a:rPr>
-              <a:t>。</a:t>
-            </a:r>
-          </a:p>
-        </p:txBody>
-      </p:sp>
-      <p:sp>
-        <p:nvSpPr>
-          <p:cNvPr id="22" name="TextBox 21"/>
-          <p:cNvSpPr txBox="1"/>
-          <p:nvPr/>
-        </p:nvSpPr>
-        <p:spPr>
-          <a:xfrm>
-            <a:off x="7128000" y="4752000"/>
-            <a:ext cx="4417200" cy="432000"/>
+              <a:t>校内研究は、</a:t>
+            </a:r>
+          </a:p>
+        </p:txBody>
+      </p:sp>
+      <p:sp>
+        <p:nvSpPr>
+          <p:cNvPr id="23" name="TextBox 22"/>
+          <p:cNvSpPr txBox="1"/>
+          <p:nvPr/>
+        </p:nvSpPr>
+        <p:spPr>
+          <a:xfrm>
+            <a:off x="7128000" y="5688000"/>
+            <a:ext cx="4417200" cy="503999"/>
           </a:xfrm>
           <a:prstGeom prst="rect">
             <a:avLst/>
@@ -4407,46 +4426,7 @@
           <a:p>
             <a:pPr algn="ctr"/>
             <a:r>
-              <a:rPr sz="1700" b="0">
-                <a:solidFill>
-                  <a:srgbClr val="1A1A1A"/>
-                </a:solidFill>
-                <a:latin typeface="メイリオ"/>
-                <a:ea typeface="メイリオ"/>
-              </a:rPr>
-              <a:t>校内研究は、</a:t>
-            </a:r>
-          </a:p>
-        </p:txBody>
-      </p:sp>
-      <p:sp>
-        <p:nvSpPr>
-          <p:cNvPr id="23" name="TextBox 22"/>
-          <p:cNvSpPr txBox="1"/>
-          <p:nvPr/>
-        </p:nvSpPr>
-        <p:spPr>
-          <a:xfrm>
-            <a:off x="7128000" y="5220000"/>
-            <a:ext cx="4417200" cy="540000"/>
-          </a:xfrm>
-          <a:prstGeom prst="rect">
-            <a:avLst/>
-          </a:prstGeom>
-          <a:noFill/>
-          <a:ln>
-            <a:noFill/>
-          </a:ln>
-        </p:spPr>
-        <p:txBody>
-          <a:bodyPr wrap="square" lIns="54000" rIns="54000" tIns="18000" bIns="18000" anchor="t">
-            <a:spAutoFit/>
-          </a:bodyPr>
-          <a:lstStyle/>
-          <a:p>
-            <a:pPr algn="ctr"/>
-            <a:r>
-              <a:rPr sz="2000" b="1">
+              <a:rPr sz="2200" b="1">
                 <a:solidFill>
                   <a:srgbClr val="002060"/>
                 </a:solidFill>
@@ -4485,7 +4465,7 @@
           <a:p>
             <a:pPr algn="l"/>
             <a:r>
-              <a:rPr sz="900" b="0">
+              <a:rPr sz="1000" b="0">
                 <a:solidFill>
                   <a:srgbClr val="666666"/>
                 </a:solidFill>
@@ -4524,7 +4504,7 @@
           <a:p>
             <a:pPr algn="r"/>
             <a:r>
-              <a:rPr sz="900" b="0">
+              <a:rPr sz="1000" b="0">
                 <a:solidFill>
                   <a:srgbClr val="666666"/>
                 </a:solidFill>
@@ -4562,8 +4542,8 @@
         </p:nvSpPr>
         <p:spPr>
           <a:xfrm>
-            <a:off x="288000" y="144000"/>
-            <a:ext cx="8280000" cy="648000"/>
+            <a:off x="288000" y="108000"/>
+            <a:ext cx="8280000" cy="720000"/>
           </a:xfrm>
           <a:prstGeom prst="rect">
             <a:avLst/>
@@ -4581,7 +4561,7 @@
           <a:p>
             <a:pPr algn="l"/>
             <a:r>
-              <a:rPr sz="3000" b="1">
+              <a:rPr sz="3400" b="1">
                 <a:solidFill>
                   <a:srgbClr val="1A1A1A"/>
                 </a:solidFill>
@@ -4601,7 +4581,7 @@
         </p:nvSpPr>
         <p:spPr>
           <a:xfrm>
-            <a:off x="288000" y="827999"/>
+            <a:off x="288000" y="864000"/>
             <a:ext cx="11617200" cy="54000"/>
           </a:xfrm>
           <a:prstGeom prst="rect">
@@ -4646,7 +4626,7 @@
         <p:spPr>
           <a:xfrm>
             <a:off x="540000" y="1152000"/>
-            <a:ext cx="11113200" cy="792000"/>
+            <a:ext cx="11113200" cy="827999"/>
           </a:xfrm>
           <a:prstGeom prst="rect">
             <a:avLst/>
@@ -4692,7 +4672,7 @@
         <p:spPr>
           <a:xfrm>
             <a:off x="720000" y="1224000"/>
-            <a:ext cx="10753200" cy="648000"/>
+            <a:ext cx="10753200" cy="684000"/>
           </a:xfrm>
           <a:prstGeom prst="rect">
             <a:avLst/>
@@ -4710,37 +4690,37 @@
           <a:p>
             <a:pPr algn="ctr"/>
             <a:r>
-              <a:rPr sz="2000" b="1">
+              <a:rPr sz="2200" b="1">
                 <a:solidFill>
                   <a:srgbClr val="1A1A1A"/>
                 </a:solidFill>
                 <a:latin typeface="メイリオ"/>
                 <a:ea typeface="メイリオ"/>
               </a:rPr>
-              <a:t>📊  児童の意識調査より：「</a:t>
+              <a:t>📊  「</a:t>
+            </a:r>
+            <a:r>
+              <a:rPr sz="2400" b="1">
+                <a:solidFill>
+                  <a:srgbClr val="FF0000"/>
+                </a:solidFill>
+                <a:latin typeface="メイリオ"/>
+                <a:ea typeface="メイリオ"/>
+              </a:rPr>
+              <a:t>質問を考えながら聞く</a:t>
             </a:r>
             <a:r>
               <a:rPr sz="2200" b="1">
                 <a:solidFill>
-                  <a:srgbClr val="FF0000"/>
-                </a:solidFill>
-                <a:latin typeface="メイリオ"/>
-                <a:ea typeface="メイリオ"/>
-              </a:rPr>
-              <a:t>質問を考えながら聞く</a:t>
-            </a:r>
-            <a:r>
-              <a:rPr sz="2000" b="1">
-                <a:solidFill>
                   <a:srgbClr val="1A1A1A"/>
                 </a:solidFill>
                 <a:latin typeface="メイリオ"/>
                 <a:ea typeface="メイリオ"/>
               </a:rPr>
-              <a:t>」と答えた児童は ▶ </a:t>
-            </a:r>
-            <a:r>
-              <a:rPr sz="3000" b="1">
+              <a:t>」と答えた児童 ▶ </a:t>
+            </a:r>
+            <a:r>
+              <a:rPr sz="3600" b="1">
                 <a:solidFill>
                   <a:srgbClr val="FF0000"/>
                 </a:solidFill>
@@ -4761,7 +4741,7 @@
         <p:spPr>
           <a:xfrm>
             <a:off x="540000" y="2124000"/>
-            <a:ext cx="4680000" cy="432000"/>
+            <a:ext cx="5400000" cy="468000"/>
           </a:xfrm>
           <a:prstGeom prst="rect">
             <a:avLst/>
@@ -4805,7 +4785,7 @@
         <p:spPr>
           <a:xfrm>
             <a:off x="540000" y="2124000"/>
-            <a:ext cx="4680000" cy="432000"/>
+            <a:ext cx="5400000" cy="468000"/>
           </a:xfrm>
           <a:prstGeom prst="rect">
             <a:avLst/>
@@ -4823,14 +4803,14 @@
           <a:p>
             <a:pPr algn="ctr"/>
             <a:r>
-              <a:rPr sz="1700" b="1">
+              <a:rPr sz="2000" b="1">
                 <a:solidFill>
                   <a:srgbClr val="FFFFFF"/>
                 </a:solidFill>
                 <a:latin typeface="メイリオ"/>
                 <a:ea typeface="メイリオ"/>
               </a:rPr>
-              <a:t>Q．  隣の先生と1分間  考えてみてください</a:t>
+              <a:t>Q．  隣の先生と1分間  考えてみて</a:t>
             </a:r>
           </a:p>
         </p:txBody>
@@ -4843,8 +4823,8 @@
         </p:nvSpPr>
         <p:spPr>
           <a:xfrm>
-            <a:off x="540000" y="2664000"/>
-            <a:ext cx="11113200" cy="1368000"/>
+            <a:off x="540000" y="2700000"/>
+            <a:ext cx="11113200" cy="1332000"/>
           </a:xfrm>
           <a:prstGeom prst="rect">
             <a:avLst/>
@@ -4889,8 +4869,8 @@
         </p:nvSpPr>
         <p:spPr>
           <a:xfrm>
-            <a:off x="540000" y="2664000"/>
-            <a:ext cx="540000" cy="1368000"/>
+            <a:off x="540000" y="2700000"/>
+            <a:ext cx="540000" cy="1332000"/>
           </a:xfrm>
           <a:prstGeom prst="rect">
             <a:avLst/>
@@ -4933,8 +4913,8 @@
         </p:nvSpPr>
         <p:spPr>
           <a:xfrm>
-            <a:off x="540000" y="2664000"/>
-            <a:ext cx="540000" cy="1368000"/>
+            <a:off x="540000" y="2700000"/>
+            <a:ext cx="540000" cy="1332000"/>
           </a:xfrm>
           <a:prstGeom prst="rect">
             <a:avLst/>
@@ -4952,7 +4932,7 @@
           <a:p>
             <a:pPr algn="ctr"/>
             <a:r>
-              <a:rPr sz="3200" b="1">
+              <a:rPr sz="3600" b="1">
                 <a:solidFill>
                   <a:srgbClr val="FFFFFF"/>
                 </a:solidFill>
@@ -4973,7 +4953,7 @@
         <p:spPr>
           <a:xfrm>
             <a:off x="1260000" y="2844000"/>
-            <a:ext cx="10285200" cy="468000"/>
+            <a:ext cx="10285200" cy="503999"/>
           </a:xfrm>
           <a:prstGeom prst="rect">
             <a:avLst/>
@@ -4991,17 +4971,17 @@
           <a:p>
             <a:pPr algn="l"/>
             <a:r>
-              <a:rPr sz="2000" b="1">
+              <a:rPr sz="2200" b="1">
                 <a:solidFill>
                   <a:srgbClr val="1A1A1A"/>
                 </a:solidFill>
                 <a:latin typeface="メイリオ"/>
                 <a:ea typeface="メイリオ"/>
               </a:rPr>
-              <a:t>自分の学年・教科で、</a:t>
-            </a:r>
-            <a:r>
-              <a:rPr sz="2100" b="1">
+              <a:t>自分の教科で、</a:t>
+            </a:r>
+            <a:r>
+              <a:rPr sz="2400" b="1">
                 <a:solidFill>
                   <a:srgbClr val="FF0000"/>
                 </a:solidFill>
@@ -5011,7 +4991,7 @@
               <a:t>「質問の種類」</a:t>
             </a:r>
             <a:r>
-              <a:rPr sz="2000" b="1">
+              <a:rPr sz="2200" b="1">
                 <a:solidFill>
                   <a:srgbClr val="1A1A1A"/>
                 </a:solidFill>
@@ -5032,7 +5012,7 @@
         <p:spPr>
           <a:xfrm>
             <a:off x="1260000" y="3384000"/>
-            <a:ext cx="10285200" cy="468000"/>
+            <a:ext cx="10285200" cy="503999"/>
           </a:xfrm>
           <a:prstGeom prst="rect">
             <a:avLst/>
@@ -5050,24 +5030,24 @@
           <a:p>
             <a:pPr algn="l"/>
             <a:r>
+              <a:rPr sz="2600" b="1">
+                <a:solidFill>
+                  <a:srgbClr val="FF0000"/>
+                </a:solidFill>
+                <a:latin typeface="メイリオ"/>
+                <a:ea typeface="メイリオ"/>
+              </a:rPr>
+              <a:t>〝対話の足場〟</a:t>
+            </a:r>
+            <a:r>
               <a:rPr sz="2200" b="1">
                 <a:solidFill>
-                  <a:srgbClr val="FF0000"/>
-                </a:solidFill>
-                <a:latin typeface="メイリオ"/>
-                <a:ea typeface="メイリオ"/>
-              </a:rPr>
-              <a:t>〝対話の足場〟</a:t>
-            </a:r>
-            <a:r>
-              <a:rPr sz="2000" b="1">
-                <a:solidFill>
                   <a:srgbClr val="1A1A1A"/>
                 </a:solidFill>
                 <a:latin typeface="メイリオ"/>
                 <a:ea typeface="メイリオ"/>
               </a:rPr>
-              <a:t> を作るとしたら、何ができますか？</a:t>
+              <a:t> を作るとしたら？</a:t>
             </a:r>
           </a:p>
         </p:txBody>
@@ -5081,7 +5061,7 @@
         <p:spPr>
           <a:xfrm>
             <a:off x="540000" y="4140000"/>
-            <a:ext cx="11113200" cy="1368000"/>
+            <a:ext cx="11113200" cy="1332000"/>
           </a:xfrm>
           <a:prstGeom prst="rect">
             <a:avLst/>
@@ -5127,7 +5107,7 @@
         <p:spPr>
           <a:xfrm>
             <a:off x="540000" y="4140000"/>
-            <a:ext cx="540000" cy="1368000"/>
+            <a:ext cx="540000" cy="1332000"/>
           </a:xfrm>
           <a:prstGeom prst="rect">
             <a:avLst/>
@@ -5171,7 +5151,7 @@
         <p:spPr>
           <a:xfrm>
             <a:off x="540000" y="4140000"/>
-            <a:ext cx="540000" cy="1368000"/>
+            <a:ext cx="540000" cy="1332000"/>
           </a:xfrm>
           <a:prstGeom prst="rect">
             <a:avLst/>
@@ -5189,7 +5169,7 @@
           <a:p>
             <a:pPr algn="ctr"/>
             <a:r>
-              <a:rPr sz="3200" b="1">
+              <a:rPr sz="3600" b="1">
                 <a:solidFill>
                   <a:srgbClr val="FFFFFF"/>
                 </a:solidFill>
@@ -5209,8 +5189,8 @@
         </p:nvSpPr>
         <p:spPr>
           <a:xfrm>
-            <a:off x="1260000" y="4320000"/>
-            <a:ext cx="10285200" cy="468000"/>
+            <a:off x="1260000" y="4284000"/>
+            <a:ext cx="10285200" cy="503999"/>
           </a:xfrm>
           <a:prstGeom prst="rect">
             <a:avLst/>
@@ -5228,24 +5208,24 @@
           <a:p>
             <a:pPr algn="l"/>
             <a:r>
-              <a:rPr sz="2000" b="1">
+              <a:rPr sz="2400" b="1">
+                <a:solidFill>
+                  <a:srgbClr val="FF0000"/>
+                </a:solidFill>
+                <a:latin typeface="メイリオ"/>
+                <a:ea typeface="メイリオ"/>
+              </a:rPr>
+              <a:t>〝伝えてよかった〟</a:t>
+            </a:r>
+            <a:r>
+              <a:rPr sz="2200" b="1">
                 <a:solidFill>
                   <a:srgbClr val="1A1A1A"/>
                 </a:solidFill>
                 <a:latin typeface="メイリオ"/>
                 <a:ea typeface="メイリオ"/>
               </a:rPr>
-              <a:t>児童が </a:t>
-            </a:r>
-            <a:r>
-              <a:rPr sz="2100" b="1">
-                <a:solidFill>
-                  <a:srgbClr val="FF0000"/>
-                </a:solidFill>
-                <a:latin typeface="メイリオ"/>
-                <a:ea typeface="メイリオ"/>
-              </a:rPr>
-              <a:t>〝伝えてよかった・聞けてよかった〟</a:t>
+              <a:t>と実感する場面を、</a:t>
             </a:r>
           </a:p>
         </p:txBody>
@@ -5258,8 +5238,8 @@
         </p:nvSpPr>
         <p:spPr>
           <a:xfrm>
-            <a:off x="1260000" y="4860000"/>
-            <a:ext cx="10285200" cy="468000"/>
+            <a:off x="1260000" y="4824000"/>
+            <a:ext cx="10285200" cy="503999"/>
           </a:xfrm>
           <a:prstGeom prst="rect">
             <a:avLst/>
@@ -5277,17 +5257,7 @@
           <a:p>
             <a:pPr algn="l"/>
             <a:r>
-              <a:rPr sz="2000" b="1">
-                <a:solidFill>
-                  <a:srgbClr val="1A1A1A"/>
-                </a:solidFill>
-                <a:latin typeface="メイリオ"/>
-                <a:ea typeface="メイリオ"/>
-              </a:rPr>
-              <a:t>と実感する場面を、</a:t>
-            </a:r>
-            <a:r>
-              <a:rPr sz="2200" b="1">
+              <a:rPr sz="2600" b="1">
                 <a:solidFill>
                   <a:srgbClr val="FF0000"/>
                 </a:solidFill>
@@ -5307,8 +5277,8 @@
         </p:nvSpPr>
         <p:spPr>
           <a:xfrm>
-            <a:off x="2880000" y="5832000"/>
-            <a:ext cx="6433200" cy="576000"/>
+            <a:off x="2880000" y="5760000"/>
+            <a:ext cx="6433200" cy="612000"/>
           </a:xfrm>
           <a:prstGeom prst="rect">
             <a:avLst/>
@@ -5351,8 +5321,8 @@
         </p:nvSpPr>
         <p:spPr>
           <a:xfrm>
-            <a:off x="2880000" y="5832000"/>
-            <a:ext cx="6433200" cy="576000"/>
+            <a:off x="2880000" y="5760000"/>
+            <a:ext cx="6433200" cy="612000"/>
           </a:xfrm>
           <a:prstGeom prst="rect">
             <a:avLst/>
@@ -5370,14 +5340,14 @@
           <a:p>
             <a:pPr algn="ctr"/>
             <a:r>
-              <a:rPr sz="1800" b="1">
+              <a:rPr sz="2200" b="1">
                 <a:solidFill>
                   <a:srgbClr val="FFFFFF"/>
                 </a:solidFill>
                 <a:latin typeface="メイリオ"/>
                 <a:ea typeface="メイリオ"/>
               </a:rPr>
-              <a:t>⏱  1分間ペアトーク → 30秒で2～3名から共有</a:t>
+              <a:t>⏱  1分ペアトーク → 30秒共有</a:t>
             </a:r>
           </a:p>
         </p:txBody>
@@ -5409,7 +5379,7 @@
           <a:p>
             <a:pPr algn="l"/>
             <a:r>
-              <a:rPr sz="900" b="0">
+              <a:rPr sz="1000" b="0">
                 <a:solidFill>
                   <a:srgbClr val="666666"/>
                 </a:solidFill>
@@ -5448,7 +5418,7 @@
           <a:p>
             <a:pPr algn="r"/>
             <a:r>
-              <a:rPr sz="900" b="0">
+              <a:rPr sz="1000" b="0">
                 <a:solidFill>
                   <a:srgbClr val="666666"/>
                 </a:solidFill>
@@ -5486,8 +5456,8 @@
         </p:nvSpPr>
         <p:spPr>
           <a:xfrm>
-            <a:off x="288000" y="144000"/>
-            <a:ext cx="8280000" cy="648000"/>
+            <a:off x="288000" y="108000"/>
+            <a:ext cx="8280000" cy="720000"/>
           </a:xfrm>
           <a:prstGeom prst="rect">
             <a:avLst/>
@@ -5505,7 +5475,7 @@
           <a:p>
             <a:pPr algn="l"/>
             <a:r>
-              <a:rPr sz="3000" b="1">
+              <a:rPr sz="3400" b="1">
                 <a:solidFill>
                   <a:srgbClr val="1A1A1A"/>
                 </a:solidFill>
@@ -5525,7 +5495,7 @@
         </p:nvSpPr>
         <p:spPr>
           <a:xfrm>
-            <a:off x="288000" y="827999"/>
+            <a:off x="288000" y="864000"/>
             <a:ext cx="11617200" cy="54000"/>
           </a:xfrm>
           <a:prstGeom prst="rect">
@@ -5570,7 +5540,7 @@
         <p:spPr>
           <a:xfrm>
             <a:off x="552600" y="1188000"/>
-            <a:ext cx="3600000" cy="2340000"/>
+            <a:ext cx="3600000" cy="2520000"/>
           </a:xfrm>
           <a:prstGeom prst="rect">
             <a:avLst/>
@@ -5616,7 +5586,7 @@
         <p:spPr>
           <a:xfrm>
             <a:off x="552600" y="1188000"/>
-            <a:ext cx="3600000" cy="540000"/>
+            <a:ext cx="3600000" cy="576000"/>
           </a:xfrm>
           <a:prstGeom prst="rect">
             <a:avLst/>
@@ -5659,8 +5629,8 @@
         </p:nvSpPr>
         <p:spPr>
           <a:xfrm>
-            <a:off x="660600" y="1242000"/>
-            <a:ext cx="432000" cy="432000"/>
+            <a:off x="660600" y="1260000"/>
+            <a:ext cx="468000" cy="468000"/>
           </a:xfrm>
           <a:prstGeom prst="ellipse">
             <a:avLst/>
@@ -5702,8 +5672,8 @@
         </p:nvSpPr>
         <p:spPr>
           <a:xfrm>
-            <a:off x="660600" y="1242000"/>
-            <a:ext cx="432000" cy="432000"/>
+            <a:off x="660600" y="1260000"/>
+            <a:ext cx="468000" cy="468000"/>
           </a:xfrm>
           <a:prstGeom prst="rect">
             <a:avLst/>
@@ -5721,7 +5691,7 @@
           <a:p>
             <a:pPr algn="ctr"/>
             <a:r>
-              <a:rPr sz="1800" b="1">
+              <a:rPr sz="2000" b="1">
                 <a:solidFill>
                   <a:srgbClr val="FFFFFF"/>
                 </a:solidFill>
@@ -5741,8 +5711,8 @@
         </p:nvSpPr>
         <p:spPr>
           <a:xfrm>
-            <a:off x="1164600" y="1188000"/>
-            <a:ext cx="2880000" cy="540000"/>
+            <a:off x="1200600" y="1188000"/>
+            <a:ext cx="2844000" cy="576000"/>
           </a:xfrm>
           <a:prstGeom prst="rect">
             <a:avLst/>
@@ -5760,7 +5730,7 @@
           <a:p>
             <a:pPr algn="l"/>
             <a:r>
-              <a:rPr sz="1700" b="1">
+              <a:rPr sz="1900" b="1">
                 <a:solidFill>
                   <a:srgbClr val="FFFFFF"/>
                 </a:solidFill>
@@ -5780,8 +5750,8 @@
         </p:nvSpPr>
         <p:spPr>
           <a:xfrm>
-            <a:off x="732600" y="1872000"/>
-            <a:ext cx="3240000" cy="1548000"/>
+            <a:off x="732600" y="1908000"/>
+            <a:ext cx="3240000" cy="1692001"/>
           </a:xfrm>
           <a:prstGeom prst="rect">
             <a:avLst/>
@@ -5803,17 +5773,17 @@
               </a:lnSpc>
             </a:pPr>
             <a:r>
-              <a:rPr sz="1400" b="0">
+              <a:rPr sz="1700" b="0">
                 <a:solidFill>
                   <a:srgbClr val="1A1A1A"/>
                 </a:solidFill>
                 <a:latin typeface="メイリオ"/>
                 <a:ea typeface="メイリオ"/>
               </a:rPr>
-              <a:t>児童が </a:t>
-            </a:r>
-            <a:r>
-              <a:rPr sz="1600" b="1">
+              <a:t>児童が</a:t>
+            </a:r>
+            <a:r>
+              <a:rPr sz="1900" b="1">
                 <a:solidFill>
                   <a:srgbClr val="FF0000"/>
                 </a:solidFill>
@@ -5830,7 +5800,7 @@
               </a:lnSpc>
             </a:pPr>
             <a:r>
-              <a:rPr sz="1400" b="0">
+              <a:rPr sz="1700" b="0">
                 <a:solidFill>
                   <a:srgbClr val="1A1A1A"/>
                 </a:solidFill>
@@ -5847,14 +5817,14 @@
               </a:lnSpc>
             </a:pPr>
             <a:r>
-              <a:rPr sz="1400" b="0">
+              <a:rPr sz="1700" b="0">
                 <a:solidFill>
                   <a:srgbClr val="1A1A1A"/>
                 </a:solidFill>
                 <a:latin typeface="メイリオ"/>
                 <a:ea typeface="メイリオ"/>
               </a:rPr>
-              <a:t>教師自身が体現する。</a:t>
+              <a:t>教師が体現する。</a:t>
             </a:r>
           </a:p>
         </p:txBody>
@@ -5868,7 +5838,7 @@
         <p:spPr>
           <a:xfrm>
             <a:off x="4296600" y="1188000"/>
-            <a:ext cx="3600000" cy="2340000"/>
+            <a:ext cx="3600000" cy="2520000"/>
           </a:xfrm>
           <a:prstGeom prst="rect">
             <a:avLst/>
@@ -5914,7 +5884,7 @@
         <p:spPr>
           <a:xfrm>
             <a:off x="4296600" y="1188000"/>
-            <a:ext cx="3600000" cy="540000"/>
+            <a:ext cx="3600000" cy="576000"/>
           </a:xfrm>
           <a:prstGeom prst="rect">
             <a:avLst/>
@@ -5957,8 +5927,8 @@
         </p:nvSpPr>
         <p:spPr>
           <a:xfrm>
-            <a:off x="4404600" y="1242000"/>
-            <a:ext cx="432000" cy="432000"/>
+            <a:off x="4404600" y="1260000"/>
+            <a:ext cx="468000" cy="468000"/>
           </a:xfrm>
           <a:prstGeom prst="ellipse">
             <a:avLst/>
@@ -6000,8 +5970,8 @@
         </p:nvSpPr>
         <p:spPr>
           <a:xfrm>
-            <a:off x="4404600" y="1242000"/>
-            <a:ext cx="432000" cy="432000"/>
+            <a:off x="4404600" y="1260000"/>
+            <a:ext cx="468000" cy="468000"/>
           </a:xfrm>
           <a:prstGeom prst="rect">
             <a:avLst/>
@@ -6019,7 +5989,7 @@
           <a:p>
             <a:pPr algn="ctr"/>
             <a:r>
-              <a:rPr sz="1800" b="1">
+              <a:rPr sz="2000" b="1">
                 <a:solidFill>
                   <a:srgbClr val="FFFFFF"/>
                 </a:solidFill>
@@ -6039,8 +6009,8 @@
         </p:nvSpPr>
         <p:spPr>
           <a:xfrm>
-            <a:off x="4908600" y="1188000"/>
-            <a:ext cx="2880000" cy="540000"/>
+            <a:off x="4944600" y="1188000"/>
+            <a:ext cx="2844000" cy="576000"/>
           </a:xfrm>
           <a:prstGeom prst="rect">
             <a:avLst/>
@@ -6058,7 +6028,7 @@
           <a:p>
             <a:pPr algn="l"/>
             <a:r>
-              <a:rPr sz="1700" b="1">
+              <a:rPr sz="1900" b="1">
                 <a:solidFill>
                   <a:srgbClr val="FFFFFF"/>
                 </a:solidFill>
@@ -6078,8 +6048,8 @@
         </p:nvSpPr>
         <p:spPr>
           <a:xfrm>
-            <a:off x="4476600" y="1872000"/>
-            <a:ext cx="3240000" cy="1548000"/>
+            <a:off x="4476600" y="1908000"/>
+            <a:ext cx="3240000" cy="1692001"/>
           </a:xfrm>
           <a:prstGeom prst="rect">
             <a:avLst/>
@@ -6101,14 +6071,14 @@
               </a:lnSpc>
             </a:pPr>
             <a:r>
-              <a:rPr sz="1600" b="1">
+              <a:rPr sz="1900" b="1">
                 <a:solidFill>
                   <a:srgbClr val="FF0000"/>
                 </a:solidFill>
                 <a:latin typeface="メイリオ"/>
                 <a:ea typeface="メイリオ"/>
               </a:rPr>
-              <a:t>「確かめ・2ndQ・感想」</a:t>
+              <a:t>「確かめ・2nd Q・</a:t>
             </a:r>
           </a:p>
           <a:p>
@@ -6118,7 +6088,17 @@
               </a:lnSpc>
             </a:pPr>
             <a:r>
-              <a:rPr sz="1400" b="0">
+              <a:rPr sz="1900" b="1">
+                <a:solidFill>
+                  <a:srgbClr val="FF0000"/>
+                </a:solidFill>
+                <a:latin typeface="メイリオ"/>
+                <a:ea typeface="メイリオ"/>
+              </a:rPr>
+              <a:t>感想」</a:t>
+            </a:r>
+            <a:r>
+              <a:rPr sz="1700" b="0">
                 <a:solidFill>
                   <a:srgbClr val="1A1A1A"/>
                 </a:solidFill>
@@ -6135,7 +6115,7 @@
               </a:lnSpc>
             </a:pPr>
             <a:r>
-              <a:rPr sz="1400" b="0">
+              <a:rPr sz="1700" b="0">
                 <a:solidFill>
                   <a:srgbClr val="1A1A1A"/>
                 </a:solidFill>
@@ -6156,7 +6136,7 @@
         <p:spPr>
           <a:xfrm>
             <a:off x="8040600" y="1188000"/>
-            <a:ext cx="3600000" cy="2340000"/>
+            <a:ext cx="3600000" cy="2520000"/>
           </a:xfrm>
           <a:prstGeom prst="rect">
             <a:avLst/>
@@ -6202,7 +6182,7 @@
         <p:spPr>
           <a:xfrm>
             <a:off x="8040600" y="1188000"/>
-            <a:ext cx="3600000" cy="540000"/>
+            <a:ext cx="3600000" cy="576000"/>
           </a:xfrm>
           <a:prstGeom prst="rect">
             <a:avLst/>
@@ -6245,8 +6225,8 @@
         </p:nvSpPr>
         <p:spPr>
           <a:xfrm>
-            <a:off x="8148600" y="1242000"/>
-            <a:ext cx="432000" cy="432000"/>
+            <a:off x="8148600" y="1260000"/>
+            <a:ext cx="468000" cy="468000"/>
           </a:xfrm>
           <a:prstGeom prst="ellipse">
             <a:avLst/>
@@ -6288,8 +6268,8 @@
         </p:nvSpPr>
         <p:spPr>
           <a:xfrm>
-            <a:off x="8148600" y="1242000"/>
-            <a:ext cx="432000" cy="432000"/>
+            <a:off x="8148600" y="1260000"/>
+            <a:ext cx="468000" cy="468000"/>
           </a:xfrm>
           <a:prstGeom prst="rect">
             <a:avLst/>
@@ -6307,7 +6287,7 @@
           <a:p>
             <a:pPr algn="ctr"/>
             <a:r>
-              <a:rPr sz="1800" b="1">
+              <a:rPr sz="2000" b="1">
                 <a:solidFill>
                   <a:srgbClr val="FFFFFF"/>
                 </a:solidFill>
@@ -6327,8 +6307,8 @@
         </p:nvSpPr>
         <p:spPr>
           <a:xfrm>
-            <a:off x="8652600" y="1188000"/>
-            <a:ext cx="2880000" cy="540000"/>
+            <a:off x="8688600" y="1188000"/>
+            <a:ext cx="2844000" cy="576000"/>
           </a:xfrm>
           <a:prstGeom prst="rect">
             <a:avLst/>
@@ -6346,7 +6326,7 @@
           <a:p>
             <a:pPr algn="l"/>
             <a:r>
-              <a:rPr sz="1700" b="1">
+              <a:rPr sz="1900" b="1">
                 <a:solidFill>
                   <a:srgbClr val="FFFFFF"/>
                 </a:solidFill>
@@ -6366,8 +6346,8 @@
         </p:nvSpPr>
         <p:spPr>
           <a:xfrm>
-            <a:off x="8220600" y="1872000"/>
-            <a:ext cx="3240000" cy="1548000"/>
+            <a:off x="8220600" y="1908000"/>
+            <a:ext cx="3240000" cy="1692001"/>
           </a:xfrm>
           <a:prstGeom prst="rect">
             <a:avLst/>
@@ -6389,7 +6369,7 @@
               </a:lnSpc>
             </a:pPr>
             <a:r>
-              <a:rPr sz="1600" b="1">
+              <a:rPr sz="1900" b="1">
                 <a:solidFill>
                   <a:srgbClr val="FF0000"/>
                 </a:solidFill>
@@ -6399,14 +6379,14 @@
               <a:t>話型・モデル提示</a:t>
             </a:r>
             <a:r>
-              <a:rPr sz="1400" b="0">
+              <a:rPr sz="1700" b="0">
                 <a:solidFill>
                   <a:srgbClr val="1A1A1A"/>
                 </a:solidFill>
                 <a:latin typeface="メイリオ"/>
                 <a:ea typeface="メイリオ"/>
               </a:rPr>
-              <a:t>の継続で、</a:t>
+              <a:t>の継続</a:t>
             </a:r>
           </a:p>
           <a:p>
@@ -6416,7 +6396,17 @@
               </a:lnSpc>
             </a:pPr>
             <a:r>
-              <a:rPr sz="1600" b="1">
+              <a:rPr sz="1700" b="0">
+                <a:solidFill>
+                  <a:srgbClr val="1A1A1A"/>
+                </a:solidFill>
+                <a:latin typeface="メイリオ"/>
+                <a:ea typeface="メイリオ"/>
+              </a:rPr>
+              <a:t>で、</a:t>
+            </a:r>
+            <a:r>
+              <a:rPr sz="1900" b="1">
                 <a:solidFill>
                   <a:srgbClr val="FF0000"/>
                 </a:solidFill>
@@ -6424,16 +6414,6 @@
                 <a:ea typeface="メイリオ"/>
               </a:rPr>
               <a:t>〝自信がない児童〟</a:t>
-            </a:r>
-            <a:r>
-              <a:rPr sz="1400" b="0">
-                <a:solidFill>
-                  <a:srgbClr val="1A1A1A"/>
-                </a:solidFill>
-                <a:latin typeface="メイリオ"/>
-                <a:ea typeface="メイリオ"/>
-              </a:rPr>
-              <a:t>にも</a:t>
             </a:r>
           </a:p>
           <a:p>
@@ -6443,14 +6423,14 @@
               </a:lnSpc>
             </a:pPr>
             <a:r>
-              <a:rPr sz="1400" b="0">
+              <a:rPr sz="1700" b="0">
                 <a:solidFill>
                   <a:srgbClr val="1A1A1A"/>
                 </a:solidFill>
                 <a:latin typeface="メイリオ"/>
                 <a:ea typeface="メイリオ"/>
               </a:rPr>
-              <a:t>届ける。</a:t>
+              <a:t>にも届ける。</a:t>
             </a:r>
           </a:p>
         </p:txBody>
@@ -6463,8 +6443,8 @@
         </p:nvSpPr>
         <p:spPr>
           <a:xfrm>
-            <a:off x="540000" y="3780000"/>
-            <a:ext cx="2880000" cy="468000"/>
+            <a:off x="540000" y="3924000"/>
+            <a:ext cx="3240000" cy="503999"/>
           </a:xfrm>
           <a:prstGeom prst="rect">
             <a:avLst/>
@@ -6507,8 +6487,8 @@
         </p:nvSpPr>
         <p:spPr>
           <a:xfrm>
-            <a:off x="540000" y="3780000"/>
-            <a:ext cx="2880000" cy="468000"/>
+            <a:off x="540000" y="3924000"/>
+            <a:ext cx="3240000" cy="503999"/>
           </a:xfrm>
           <a:prstGeom prst="rect">
             <a:avLst/>
@@ -6526,7 +6506,7 @@
           <a:p>
             <a:pPr algn="ctr"/>
             <a:r>
-              <a:rPr sz="1700" b="1">
+              <a:rPr sz="2000" b="1">
                 <a:solidFill>
                   <a:srgbClr val="FFFFFF"/>
                 </a:solidFill>
@@ -6546,8 +6526,8 @@
         </p:nvSpPr>
         <p:spPr>
           <a:xfrm>
-            <a:off x="540000" y="4248000"/>
-            <a:ext cx="11113200" cy="1980000"/>
+            <a:off x="540000" y="4428000"/>
+            <a:ext cx="11113200" cy="1872000"/>
           </a:xfrm>
           <a:prstGeom prst="rect">
             <a:avLst/>
@@ -6592,8 +6572,8 @@
         </p:nvSpPr>
         <p:spPr>
           <a:xfrm>
-            <a:off x="720000" y="4392000"/>
-            <a:ext cx="10753200" cy="432000"/>
+            <a:off x="720000" y="4536000"/>
+            <a:ext cx="10753200" cy="468000"/>
           </a:xfrm>
           <a:prstGeom prst="rect">
             <a:avLst/>
@@ -6611,38 +6591,77 @@
           <a:p>
             <a:pPr algn="ctr"/>
             <a:r>
-              <a:rPr sz="1900" b="1">
+              <a:rPr sz="2200" b="1">
                 <a:solidFill>
                   <a:srgbClr val="002060"/>
                 </a:solidFill>
                 <a:latin typeface="メイリオ"/>
                 <a:ea typeface="メイリオ"/>
               </a:rPr>
-              <a:t>「対話を通して、学びをつなげる児童」</a:t>
-            </a:r>
-            <a:r>
-              <a:rPr sz="1800" b="1">
+              <a:t>「学びをつなげる児童」 は、まず</a:t>
+            </a:r>
+          </a:p>
+        </p:txBody>
+      </p:sp>
+      <p:sp>
+        <p:nvSpPr>
+          <p:cNvPr id="26" name="TextBox 25"/>
+          <p:cNvSpPr txBox="1"/>
+          <p:nvPr/>
+        </p:nvSpPr>
+        <p:spPr>
+          <a:xfrm>
+            <a:off x="720000" y="5004000"/>
+            <a:ext cx="10753200" cy="503999"/>
+          </a:xfrm>
+          <a:prstGeom prst="rect">
+            <a:avLst/>
+          </a:prstGeom>
+          <a:noFill/>
+          <a:ln>
+            <a:noFill/>
+          </a:ln>
+        </p:spPr>
+        <p:txBody>
+          <a:bodyPr wrap="square" lIns="54000" rIns="54000" tIns="18000" bIns="18000" anchor="ctr">
+            <a:spAutoFit/>
+          </a:bodyPr>
+          <a:lstStyle/>
+          <a:p>
+            <a:pPr algn="ctr"/>
+            <a:r>
+              <a:rPr sz="2400" b="1">
+                <a:solidFill>
+                  <a:srgbClr val="FF0000"/>
+                </a:solidFill>
+                <a:latin typeface="メイリオ"/>
+                <a:ea typeface="メイリオ"/>
+              </a:rPr>
+              <a:t>教師自身が〝対話で学ぶ姿〟</a:t>
+            </a:r>
+            <a:r>
+              <a:rPr sz="2200" b="1">
                 <a:solidFill>
                   <a:srgbClr val="1A1A1A"/>
                 </a:solidFill>
                 <a:latin typeface="メイリオ"/>
                 <a:ea typeface="メイリオ"/>
               </a:rPr>
-              <a:t> は、</a:t>
-            </a:r>
-          </a:p>
-        </p:txBody>
-      </p:sp>
-      <p:sp>
-        <p:nvSpPr>
-          <p:cNvPr id="26" name="TextBox 25"/>
-          <p:cNvSpPr txBox="1"/>
-          <p:nvPr/>
-        </p:nvSpPr>
-        <p:spPr>
-          <a:xfrm>
-            <a:off x="720000" y="4860000"/>
-            <a:ext cx="10753200" cy="432000"/>
+              <a:t>から始まる。</a:t>
+            </a:r>
+          </a:p>
+        </p:txBody>
+      </p:sp>
+      <p:sp>
+        <p:nvSpPr>
+          <p:cNvPr id="27" name="TextBox 26"/>
+          <p:cNvSpPr txBox="1"/>
+          <p:nvPr/>
+        </p:nvSpPr>
+        <p:spPr>
+          <a:xfrm>
+            <a:off x="720000" y="5616000"/>
+            <a:ext cx="10753200" cy="468000"/>
           </a:xfrm>
           <a:prstGeom prst="rect">
             <a:avLst/>
@@ -6660,125 +6679,66 @@
           <a:p>
             <a:pPr algn="ctr"/>
             <a:r>
-              <a:rPr sz="1700" b="1">
+              <a:rPr sz="2000" b="1">
                 <a:solidFill>
                   <a:srgbClr val="1A1A1A"/>
                 </a:solidFill>
                 <a:latin typeface="メイリオ"/>
                 <a:ea typeface="メイリオ"/>
               </a:rPr>
-              <a:t>まず </a:t>
-            </a:r>
-            <a:r>
-              <a:rPr sz="1900" b="1">
+              <a:t>今日交わした言葉が、</a:t>
+            </a:r>
+          </a:p>
+        </p:txBody>
+      </p:sp>
+      <p:sp>
+        <p:nvSpPr>
+          <p:cNvPr id="28" name="TextBox 27"/>
+          <p:cNvSpPr txBox="1"/>
+          <p:nvPr/>
+        </p:nvSpPr>
+        <p:spPr>
+          <a:xfrm>
+            <a:off x="720000" y="6048000"/>
+            <a:ext cx="10753200" cy="468000"/>
+          </a:xfrm>
+          <a:prstGeom prst="rect">
+            <a:avLst/>
+          </a:prstGeom>
+          <a:noFill/>
+          <a:ln>
+            <a:noFill/>
+          </a:ln>
+        </p:spPr>
+        <p:txBody>
+          <a:bodyPr wrap="square" lIns="54000" rIns="54000" tIns="18000" bIns="18000" anchor="ctr">
+            <a:spAutoFit/>
+          </a:bodyPr>
+          <a:lstStyle/>
+          <a:p>
+            <a:pPr algn="ctr"/>
+            <a:r>
+              <a:rPr sz="2000" b="1">
+                <a:solidFill>
+                  <a:srgbClr val="1A1A1A"/>
+                </a:solidFill>
+                <a:latin typeface="メイリオ"/>
+                <a:ea typeface="メイリオ"/>
+              </a:rPr>
+              <a:t>明日 </a:t>
+            </a:r>
+            <a:r>
+              <a:rPr sz="2200" b="1">
                 <a:solidFill>
                   <a:srgbClr val="FF0000"/>
                 </a:solidFill>
                 <a:latin typeface="メイリオ"/>
                 <a:ea typeface="メイリオ"/>
               </a:rPr>
-              <a:t>教師自身が〝対話で学びをつなげる姿〟</a:t>
-            </a:r>
-            <a:r>
-              <a:rPr sz="1700" b="1">
-                <a:solidFill>
-                  <a:srgbClr val="1A1A1A"/>
-                </a:solidFill>
-                <a:latin typeface="メイリオ"/>
-                <a:ea typeface="メイリオ"/>
-              </a:rPr>
-              <a:t> から始まる。</a:t>
-            </a:r>
-          </a:p>
-        </p:txBody>
-      </p:sp>
-      <p:sp>
-        <p:nvSpPr>
-          <p:cNvPr id="27" name="TextBox 26"/>
-          <p:cNvSpPr txBox="1"/>
-          <p:nvPr/>
-        </p:nvSpPr>
-        <p:spPr>
-          <a:xfrm>
-            <a:off x="720000" y="5472000"/>
-            <a:ext cx="10753200" cy="396000"/>
-          </a:xfrm>
-          <a:prstGeom prst="rect">
-            <a:avLst/>
-          </a:prstGeom>
-          <a:noFill/>
-          <a:ln>
-            <a:noFill/>
-          </a:ln>
-        </p:spPr>
-        <p:txBody>
-          <a:bodyPr wrap="square" lIns="54000" rIns="54000" tIns="18000" bIns="18000" anchor="ctr">
-            <a:spAutoFit/>
-          </a:bodyPr>
-          <a:lstStyle/>
-          <a:p>
-            <a:pPr algn="ctr"/>
-            <a:r>
-              <a:rPr sz="1600" b="1">
-                <a:solidFill>
-                  <a:srgbClr val="1A1A1A"/>
-                </a:solidFill>
-                <a:latin typeface="メイリオ"/>
-                <a:ea typeface="メイリオ"/>
-              </a:rPr>
-              <a:t>今日皆さんが隣の先生と交わした言葉が、</a:t>
-            </a:r>
-          </a:p>
-        </p:txBody>
-      </p:sp>
-      <p:sp>
-        <p:nvSpPr>
-          <p:cNvPr id="28" name="TextBox 27"/>
-          <p:cNvSpPr txBox="1"/>
-          <p:nvPr/>
-        </p:nvSpPr>
-        <p:spPr>
-          <a:xfrm>
-            <a:off x="720000" y="5867999"/>
-            <a:ext cx="10753200" cy="396000"/>
-          </a:xfrm>
-          <a:prstGeom prst="rect">
-            <a:avLst/>
-          </a:prstGeom>
-          <a:noFill/>
-          <a:ln>
-            <a:noFill/>
-          </a:ln>
-        </p:spPr>
-        <p:txBody>
-          <a:bodyPr wrap="square" lIns="54000" rIns="54000" tIns="18000" bIns="18000" anchor="ctr">
-            <a:spAutoFit/>
-          </a:bodyPr>
-          <a:lstStyle/>
-          <a:p>
-            <a:pPr algn="ctr"/>
-            <a:r>
-              <a:rPr sz="1600" b="1">
-                <a:solidFill>
-                  <a:srgbClr val="1A1A1A"/>
-                </a:solidFill>
-                <a:latin typeface="メイリオ"/>
-                <a:ea typeface="メイリオ"/>
-              </a:rPr>
-              <a:t>明日の授業で </a:t>
-            </a:r>
-            <a:r>
-              <a:rPr sz="1800" b="1">
-                <a:solidFill>
-                  <a:srgbClr val="FF0000"/>
-                </a:solidFill>
-                <a:latin typeface="メイリオ"/>
-                <a:ea typeface="メイリオ"/>
-              </a:rPr>
-              <a:t>子どもたちに返っていきます</a:t>
-            </a:r>
-            <a:r>
-              <a:rPr sz="1600" b="1">
+              <a:t>子どもたちに返っていく</a:t>
+            </a:r>
+            <a:r>
+              <a:rPr sz="2000" b="1">
                 <a:solidFill>
                   <a:srgbClr val="1A1A1A"/>
                 </a:solidFill>
@@ -6817,7 +6777,7 @@
           <a:p>
             <a:pPr algn="l"/>
             <a:r>
-              <a:rPr sz="900" b="0">
+              <a:rPr sz="1000" b="0">
                 <a:solidFill>
                   <a:srgbClr val="666666"/>
                 </a:solidFill>
@@ -6856,7 +6816,7 @@
           <a:p>
             <a:pPr algn="r"/>
             <a:r>
-              <a:rPr sz="900" b="0">
+              <a:rPr sz="1000" b="0">
                 <a:solidFill>
                   <a:srgbClr val="666666"/>
                 </a:solidFill>
@@ -6894,8 +6854,8 @@
         </p:nvSpPr>
         <p:spPr>
           <a:xfrm>
-            <a:off x="288000" y="144000"/>
-            <a:ext cx="8280000" cy="648000"/>
+            <a:off x="288000" y="108000"/>
+            <a:ext cx="8280000" cy="720000"/>
           </a:xfrm>
           <a:prstGeom prst="rect">
             <a:avLst/>
@@ -6913,7 +6873,7 @@
           <a:p>
             <a:pPr algn="l"/>
             <a:r>
-              <a:rPr sz="3000" b="1">
+              <a:rPr sz="3400" b="1">
                 <a:solidFill>
                   <a:srgbClr val="1A1A1A"/>
                 </a:solidFill>
@@ -6933,7 +6893,7 @@
         </p:nvSpPr>
         <p:spPr>
           <a:xfrm>
-            <a:off x="288000" y="827999"/>
+            <a:off x="288000" y="864000"/>
             <a:ext cx="11617200" cy="54000"/>
           </a:xfrm>
           <a:prstGeom prst="rect">
@@ -6977,8 +6937,8 @@
         </p:nvSpPr>
         <p:spPr>
           <a:xfrm>
-            <a:off x="540000" y="1350000"/>
-            <a:ext cx="503999" cy="503999"/>
+            <a:off x="540000" y="1332000"/>
+            <a:ext cx="576000" cy="576000"/>
           </a:xfrm>
           <a:prstGeom prst="ellipse">
             <a:avLst/>
@@ -7020,8 +6980,8 @@
         </p:nvSpPr>
         <p:spPr>
           <a:xfrm>
-            <a:off x="540000" y="1350000"/>
-            <a:ext cx="503999" cy="503999"/>
+            <a:off x="540000" y="1332000"/>
+            <a:ext cx="576000" cy="576000"/>
           </a:xfrm>
           <a:prstGeom prst="rect">
             <a:avLst/>
@@ -7039,7 +6999,7 @@
           <a:p>
             <a:pPr algn="ctr"/>
             <a:r>
-              <a:rPr sz="1600" b="1">
+              <a:rPr sz="2000" b="1">
                 <a:solidFill>
                   <a:srgbClr val="FFFFFF"/>
                 </a:solidFill>
@@ -7059,8 +7019,8 @@
         </p:nvSpPr>
         <p:spPr>
           <a:xfrm>
-            <a:off x="1188000" y="1260000"/>
-            <a:ext cx="2160000" cy="756000"/>
+            <a:off x="1260000" y="1224000"/>
+            <a:ext cx="2160000" cy="792000"/>
           </a:xfrm>
           <a:prstGeom prst="rect">
             <a:avLst/>
@@ -7078,7 +7038,7 @@
           <a:p>
             <a:pPr algn="l"/>
             <a:r>
-              <a:rPr sz="1800" b="1">
+              <a:rPr sz="2200" b="1">
                 <a:solidFill>
                   <a:srgbClr val="002060"/>
                 </a:solidFill>
@@ -7098,8 +7058,8 @@
         </p:nvSpPr>
         <p:spPr>
           <a:xfrm>
-            <a:off x="3420000" y="1260000"/>
-            <a:ext cx="6120000" cy="756000"/>
+            <a:off x="3528000" y="1224000"/>
+            <a:ext cx="6120000" cy="792000"/>
           </a:xfrm>
           <a:prstGeom prst="rect">
             <a:avLst/>
@@ -7117,7 +7077,7 @@
           <a:p>
             <a:pPr algn="l"/>
             <a:r>
-              <a:rPr sz="2000" b="1">
+              <a:rPr sz="2400" b="1">
                 <a:solidFill>
                   <a:srgbClr val="1A1A1A"/>
                 </a:solidFill>
@@ -7137,8 +7097,8 @@
         </p:nvSpPr>
         <p:spPr>
           <a:xfrm>
-            <a:off x="10033200" y="1260000"/>
-            <a:ext cx="1620000" cy="756000"/>
+            <a:off x="10033200" y="1224000"/>
+            <a:ext cx="1620000" cy="792000"/>
           </a:xfrm>
           <a:prstGeom prst="rect">
             <a:avLst/>
@@ -7156,7 +7116,7 @@
           <a:p>
             <a:pPr algn="r"/>
             <a:r>
-              <a:rPr sz="1600" b="0">
+              <a:rPr sz="2000" b="0">
                 <a:solidFill>
                   <a:srgbClr val="666666"/>
                 </a:solidFill>
@@ -7176,7 +7136,7 @@
         </p:nvSpPr>
         <p:spPr>
           <a:xfrm>
-            <a:off x="1188000" y="1998000"/>
+            <a:off x="1260000" y="1998000"/>
             <a:ext cx="10573200" cy="10800"/>
           </a:xfrm>
           <a:prstGeom prst="rect">
@@ -7220,8 +7180,8 @@
         </p:nvSpPr>
         <p:spPr>
           <a:xfrm>
-            <a:off x="540000" y="2106000"/>
-            <a:ext cx="503999" cy="503999"/>
+            <a:off x="540000" y="2124000"/>
+            <a:ext cx="576000" cy="576000"/>
           </a:xfrm>
           <a:prstGeom prst="ellipse">
             <a:avLst/>
@@ -7263,8 +7223,8 @@
         </p:nvSpPr>
         <p:spPr>
           <a:xfrm>
-            <a:off x="540000" y="2106000"/>
-            <a:ext cx="503999" cy="503999"/>
+            <a:off x="540000" y="2124000"/>
+            <a:ext cx="576000" cy="576000"/>
           </a:xfrm>
           <a:prstGeom prst="rect">
             <a:avLst/>
@@ -7282,7 +7242,7 @@
           <a:p>
             <a:pPr algn="ctr"/>
             <a:r>
-              <a:rPr sz="1600" b="1">
+              <a:rPr sz="2000" b="1">
                 <a:solidFill>
                   <a:srgbClr val="FFFFFF"/>
                 </a:solidFill>
@@ -7302,8 +7262,8 @@
         </p:nvSpPr>
         <p:spPr>
           <a:xfrm>
-            <a:off x="1188000" y="2016000"/>
-            <a:ext cx="2160000" cy="756000"/>
+            <a:off x="1260000" y="2016000"/>
+            <a:ext cx="2160000" cy="792000"/>
           </a:xfrm>
           <a:prstGeom prst="rect">
             <a:avLst/>
@@ -7321,7 +7281,7 @@
           <a:p>
             <a:pPr algn="l"/>
             <a:r>
-              <a:rPr sz="1800" b="1">
+              <a:rPr sz="2200" b="1">
                 <a:solidFill>
                   <a:srgbClr val="002060"/>
                 </a:solidFill>
@@ -7341,8 +7301,8 @@
         </p:nvSpPr>
         <p:spPr>
           <a:xfrm>
-            <a:off x="3420000" y="2016000"/>
-            <a:ext cx="6120000" cy="756000"/>
+            <a:off x="3528000" y="2016000"/>
+            <a:ext cx="6120000" cy="792000"/>
           </a:xfrm>
           <a:prstGeom prst="rect">
             <a:avLst/>
@@ -7360,7 +7320,7 @@
           <a:p>
             <a:pPr algn="l"/>
             <a:r>
-              <a:rPr sz="2000" b="1">
+              <a:rPr sz="2400" b="1">
                 <a:solidFill>
                   <a:srgbClr val="1A1A1A"/>
                 </a:solidFill>
@@ -7381,7 +7341,7 @@
         <p:spPr>
           <a:xfrm>
             <a:off x="10033200" y="2016000"/>
-            <a:ext cx="1620000" cy="756000"/>
+            <a:ext cx="1620000" cy="792000"/>
           </a:xfrm>
           <a:prstGeom prst="rect">
             <a:avLst/>
@@ -7399,7 +7359,7 @@
           <a:p>
             <a:pPr algn="r"/>
             <a:r>
-              <a:rPr sz="1600" b="0">
+              <a:rPr sz="2000" b="0">
                 <a:solidFill>
                   <a:srgbClr val="666666"/>
                 </a:solidFill>
@@ -7419,7 +7379,7 @@
         </p:nvSpPr>
         <p:spPr>
           <a:xfrm>
-            <a:off x="1188000" y="2754000"/>
+            <a:off x="1260000" y="2790000"/>
             <a:ext cx="10573200" cy="10800"/>
           </a:xfrm>
           <a:prstGeom prst="rect">
@@ -7463,8 +7423,8 @@
         </p:nvSpPr>
         <p:spPr>
           <a:xfrm>
-            <a:off x="540000" y="2862000"/>
-            <a:ext cx="503999" cy="503999"/>
+            <a:off x="540000" y="2916000"/>
+            <a:ext cx="576000" cy="576000"/>
           </a:xfrm>
           <a:prstGeom prst="ellipse">
             <a:avLst/>
@@ -7506,8 +7466,8 @@
         </p:nvSpPr>
         <p:spPr>
           <a:xfrm>
-            <a:off x="540000" y="2862000"/>
-            <a:ext cx="503999" cy="503999"/>
+            <a:off x="540000" y="2916000"/>
+            <a:ext cx="576000" cy="576000"/>
           </a:xfrm>
           <a:prstGeom prst="rect">
             <a:avLst/>
@@ -7525,7 +7485,7 @@
           <a:p>
             <a:pPr algn="ctr"/>
             <a:r>
-              <a:rPr sz="1600" b="1">
+              <a:rPr sz="2000" b="1">
                 <a:solidFill>
                   <a:srgbClr val="FFFFFF"/>
                 </a:solidFill>
@@ -7545,8 +7505,8 @@
         </p:nvSpPr>
         <p:spPr>
           <a:xfrm>
-            <a:off x="1188000" y="2772000"/>
-            <a:ext cx="2160000" cy="756000"/>
+            <a:off x="1260000" y="2808000"/>
+            <a:ext cx="2160000" cy="792000"/>
           </a:xfrm>
           <a:prstGeom prst="rect">
             <a:avLst/>
@@ -7564,7 +7524,7 @@
           <a:p>
             <a:pPr algn="l"/>
             <a:r>
-              <a:rPr sz="1800" b="1">
+              <a:rPr sz="2200" b="1">
                 <a:solidFill>
                   <a:srgbClr val="002060"/>
                 </a:solidFill>
@@ -7584,8 +7544,8 @@
         </p:nvSpPr>
         <p:spPr>
           <a:xfrm>
-            <a:off x="3420000" y="2772000"/>
-            <a:ext cx="6120000" cy="756000"/>
+            <a:off x="3528000" y="2808000"/>
+            <a:ext cx="6120000" cy="792000"/>
           </a:xfrm>
           <a:prstGeom prst="rect">
             <a:avLst/>
@@ -7603,7 +7563,7 @@
           <a:p>
             <a:pPr algn="l"/>
             <a:r>
-              <a:rPr sz="2000" b="1">
+              <a:rPr sz="2400" b="1">
                 <a:solidFill>
                   <a:srgbClr val="1A1A1A"/>
                 </a:solidFill>
@@ -7623,8 +7583,8 @@
         </p:nvSpPr>
         <p:spPr>
           <a:xfrm>
-            <a:off x="10033200" y="2772000"/>
-            <a:ext cx="1620000" cy="756000"/>
+            <a:off x="10033200" y="2808000"/>
+            <a:ext cx="1620000" cy="792000"/>
           </a:xfrm>
           <a:prstGeom prst="rect">
             <a:avLst/>
@@ -7642,7 +7602,7 @@
           <a:p>
             <a:pPr algn="r"/>
             <a:r>
-              <a:rPr sz="1600" b="0">
+              <a:rPr sz="2000" b="0">
                 <a:solidFill>
                   <a:srgbClr val="666666"/>
                 </a:solidFill>
@@ -7662,7 +7622,7 @@
         </p:nvSpPr>
         <p:spPr>
           <a:xfrm>
-            <a:off x="1188000" y="3510000"/>
+            <a:off x="1260000" y="3582000"/>
             <a:ext cx="10573200" cy="10800"/>
           </a:xfrm>
           <a:prstGeom prst="rect">
@@ -7706,8 +7666,8 @@
         </p:nvSpPr>
         <p:spPr>
           <a:xfrm>
-            <a:off x="540000" y="3618000"/>
-            <a:ext cx="503999" cy="503999"/>
+            <a:off x="540000" y="3708000"/>
+            <a:ext cx="576000" cy="576000"/>
           </a:xfrm>
           <a:prstGeom prst="ellipse">
             <a:avLst/>
@@ -7749,8 +7709,8 @@
         </p:nvSpPr>
         <p:spPr>
           <a:xfrm>
-            <a:off x="540000" y="3618000"/>
-            <a:ext cx="503999" cy="503999"/>
+            <a:off x="540000" y="3708000"/>
+            <a:ext cx="576000" cy="576000"/>
           </a:xfrm>
           <a:prstGeom prst="rect">
             <a:avLst/>
@@ -7768,7 +7728,7 @@
           <a:p>
             <a:pPr algn="ctr"/>
             <a:r>
-              <a:rPr sz="1600" b="1">
+              <a:rPr sz="2000" b="1">
                 <a:solidFill>
                   <a:srgbClr val="FFFFFF"/>
                 </a:solidFill>
@@ -7788,8 +7748,8 @@
         </p:nvSpPr>
         <p:spPr>
           <a:xfrm>
-            <a:off x="1188000" y="3528000"/>
-            <a:ext cx="2160000" cy="756000"/>
+            <a:off x="1260000" y="3600000"/>
+            <a:ext cx="2160000" cy="792000"/>
           </a:xfrm>
           <a:prstGeom prst="rect">
             <a:avLst/>
@@ -7807,7 +7767,7 @@
           <a:p>
             <a:pPr algn="l"/>
             <a:r>
-              <a:rPr sz="1800" b="1">
+              <a:rPr sz="2200" b="1">
                 <a:solidFill>
                   <a:srgbClr val="002060"/>
                 </a:solidFill>
@@ -7827,8 +7787,8 @@
         </p:nvSpPr>
         <p:spPr>
           <a:xfrm>
-            <a:off x="3420000" y="3528000"/>
-            <a:ext cx="6120000" cy="756000"/>
+            <a:off x="3528000" y="3600000"/>
+            <a:ext cx="6120000" cy="792000"/>
           </a:xfrm>
           <a:prstGeom prst="rect">
             <a:avLst/>
@@ -7846,7 +7806,7 @@
           <a:p>
             <a:pPr algn="l"/>
             <a:r>
-              <a:rPr sz="2000" b="1">
+              <a:rPr sz="2400" b="1">
                 <a:solidFill>
                   <a:srgbClr val="1A1A1A"/>
                 </a:solidFill>
@@ -7866,8 +7826,8 @@
         </p:nvSpPr>
         <p:spPr>
           <a:xfrm>
-            <a:off x="10033200" y="3528000"/>
-            <a:ext cx="1620000" cy="756000"/>
+            <a:off x="10033200" y="3600000"/>
+            <a:ext cx="1620000" cy="792000"/>
           </a:xfrm>
           <a:prstGeom prst="rect">
             <a:avLst/>
@@ -7885,7 +7845,7 @@
           <a:p>
             <a:pPr algn="r"/>
             <a:r>
-              <a:rPr sz="1600" b="0">
+              <a:rPr sz="2000" b="0">
                 <a:solidFill>
                   <a:srgbClr val="666666"/>
                 </a:solidFill>
@@ -7905,7 +7865,7 @@
         </p:nvSpPr>
         <p:spPr>
           <a:xfrm>
-            <a:off x="1188000" y="4266000"/>
+            <a:off x="1260000" y="4374000"/>
             <a:ext cx="10573200" cy="10800"/>
           </a:xfrm>
           <a:prstGeom prst="rect">
@@ -7949,8 +7909,8 @@
         </p:nvSpPr>
         <p:spPr>
           <a:xfrm>
-            <a:off x="540000" y="4374000"/>
-            <a:ext cx="503999" cy="503999"/>
+            <a:off x="540000" y="4500000"/>
+            <a:ext cx="576000" cy="576000"/>
           </a:xfrm>
           <a:prstGeom prst="ellipse">
             <a:avLst/>
@@ -7992,8 +7952,8 @@
         </p:nvSpPr>
         <p:spPr>
           <a:xfrm>
-            <a:off x="540000" y="4374000"/>
-            <a:ext cx="503999" cy="503999"/>
+            <a:off x="540000" y="4500000"/>
+            <a:ext cx="576000" cy="576000"/>
           </a:xfrm>
           <a:prstGeom prst="rect">
             <a:avLst/>
@@ -8011,7 +7971,7 @@
           <a:p>
             <a:pPr algn="ctr"/>
             <a:r>
-              <a:rPr sz="1600" b="1">
+              <a:rPr sz="2000" b="1">
                 <a:solidFill>
                   <a:srgbClr val="FFFFFF"/>
                 </a:solidFill>
@@ -8031,8 +7991,8 @@
         </p:nvSpPr>
         <p:spPr>
           <a:xfrm>
-            <a:off x="1188000" y="4284000"/>
-            <a:ext cx="2160000" cy="756000"/>
+            <a:off x="1260000" y="4392000"/>
+            <a:ext cx="2160000" cy="792000"/>
           </a:xfrm>
           <a:prstGeom prst="rect">
             <a:avLst/>
@@ -8050,7 +8010,7 @@
           <a:p>
             <a:pPr algn="l"/>
             <a:r>
-              <a:rPr sz="1800" b="1">
+              <a:rPr sz="2200" b="1">
                 <a:solidFill>
                   <a:srgbClr val="002060"/>
                 </a:solidFill>
@@ -8070,8 +8030,8 @@
         </p:nvSpPr>
         <p:spPr>
           <a:xfrm>
-            <a:off x="3420000" y="4284000"/>
-            <a:ext cx="6120000" cy="756000"/>
+            <a:off x="3528000" y="4392000"/>
+            <a:ext cx="6120000" cy="792000"/>
           </a:xfrm>
           <a:prstGeom prst="rect">
             <a:avLst/>
@@ -8089,7 +8049,7 @@
           <a:p>
             <a:pPr algn="l"/>
             <a:r>
-              <a:rPr sz="2000" b="1">
+              <a:rPr sz="2400" b="1">
                 <a:solidFill>
                   <a:srgbClr val="1A1A1A"/>
                 </a:solidFill>
@@ -8109,8 +8069,8 @@
         </p:nvSpPr>
         <p:spPr>
           <a:xfrm>
-            <a:off x="10033200" y="4284000"/>
-            <a:ext cx="1620000" cy="756000"/>
+            <a:off x="10033200" y="4392000"/>
+            <a:ext cx="1620000" cy="792000"/>
           </a:xfrm>
           <a:prstGeom prst="rect">
             <a:avLst/>
@@ -8128,7 +8088,7 @@
           <a:p>
             <a:pPr algn="r"/>
             <a:r>
-              <a:rPr sz="1600" b="0">
+              <a:rPr sz="2000" b="0">
                 <a:solidFill>
                   <a:srgbClr val="666666"/>
                 </a:solidFill>
@@ -8148,7 +8108,7 @@
         </p:nvSpPr>
         <p:spPr>
           <a:xfrm>
-            <a:off x="1188000" y="5022000"/>
+            <a:off x="1260000" y="5166000"/>
             <a:ext cx="10573200" cy="10800"/>
           </a:xfrm>
           <a:prstGeom prst="rect">
@@ -8192,8 +8152,8 @@
         </p:nvSpPr>
         <p:spPr>
           <a:xfrm>
-            <a:off x="540000" y="5130000"/>
-            <a:ext cx="503999" cy="503999"/>
+            <a:off x="540000" y="5292000"/>
+            <a:ext cx="576000" cy="576000"/>
           </a:xfrm>
           <a:prstGeom prst="ellipse">
             <a:avLst/>
@@ -8235,8 +8195,8 @@
         </p:nvSpPr>
         <p:spPr>
           <a:xfrm>
-            <a:off x="540000" y="5130000"/>
-            <a:ext cx="503999" cy="503999"/>
+            <a:off x="540000" y="5292000"/>
+            <a:ext cx="576000" cy="576000"/>
           </a:xfrm>
           <a:prstGeom prst="rect">
             <a:avLst/>
@@ -8254,7 +8214,7 @@
           <a:p>
             <a:pPr algn="ctr"/>
             <a:r>
-              <a:rPr sz="1600" b="1">
+              <a:rPr sz="2000" b="1">
                 <a:solidFill>
                   <a:srgbClr val="FFFFFF"/>
                 </a:solidFill>
@@ -8274,8 +8234,8 @@
         </p:nvSpPr>
         <p:spPr>
           <a:xfrm>
-            <a:off x="1188000" y="5040000"/>
-            <a:ext cx="2160000" cy="756000"/>
+            <a:off x="1260000" y="5184000"/>
+            <a:ext cx="2160000" cy="792000"/>
           </a:xfrm>
           <a:prstGeom prst="rect">
             <a:avLst/>
@@ -8293,7 +8253,7 @@
           <a:p>
             <a:pPr algn="l"/>
             <a:r>
-              <a:rPr sz="1800" b="1">
+              <a:rPr sz="2200" b="1">
                 <a:solidFill>
                   <a:srgbClr val="002060"/>
                 </a:solidFill>
@@ -8313,8 +8273,8 @@
         </p:nvSpPr>
         <p:spPr>
           <a:xfrm>
-            <a:off x="3420000" y="5040000"/>
-            <a:ext cx="6120000" cy="756000"/>
+            <a:off x="3528000" y="5184000"/>
+            <a:ext cx="6120000" cy="792000"/>
           </a:xfrm>
           <a:prstGeom prst="rect">
             <a:avLst/>
@@ -8332,7 +8292,7 @@
           <a:p>
             <a:pPr algn="l"/>
             <a:r>
-              <a:rPr sz="2000" b="1">
+              <a:rPr sz="2400" b="1">
                 <a:solidFill>
                   <a:srgbClr val="1A1A1A"/>
                 </a:solidFill>
@@ -8352,8 +8312,8 @@
         </p:nvSpPr>
         <p:spPr>
           <a:xfrm>
-            <a:off x="10033200" y="5040000"/>
-            <a:ext cx="1620000" cy="756000"/>
+            <a:off x="10033200" y="5184000"/>
+            <a:ext cx="1620000" cy="792000"/>
           </a:xfrm>
           <a:prstGeom prst="rect">
             <a:avLst/>
@@ -8371,7 +8331,7 @@
           <a:p>
             <a:pPr algn="r"/>
             <a:r>
-              <a:rPr sz="1600" b="0">
+              <a:rPr sz="2000" b="0">
                 <a:solidFill>
                   <a:srgbClr val="666666"/>
                 </a:solidFill>
@@ -8410,7 +8370,7 @@
           <a:p>
             <a:pPr algn="l"/>
             <a:r>
-              <a:rPr sz="900" b="0">
+              <a:rPr sz="1000" b="0">
                 <a:solidFill>
                   <a:srgbClr val="666666"/>
                 </a:solidFill>
@@ -8449,7 +8409,7 @@
           <a:p>
             <a:pPr algn="r"/>
             <a:r>
-              <a:rPr sz="900" b="0">
+              <a:rPr sz="1000" b="0">
                 <a:solidFill>
                   <a:srgbClr val="666666"/>
                 </a:solidFill>
@@ -8487,8 +8447,8 @@
         </p:nvSpPr>
         <p:spPr>
           <a:xfrm>
-            <a:off x="288000" y="144000"/>
-            <a:ext cx="8280000" cy="648000"/>
+            <a:off x="288000" y="108000"/>
+            <a:ext cx="8280000" cy="720000"/>
           </a:xfrm>
           <a:prstGeom prst="rect">
             <a:avLst/>
@@ -8506,7 +8466,7 @@
           <a:p>
             <a:pPr algn="l"/>
             <a:r>
-              <a:rPr sz="3000" b="1">
+              <a:rPr sz="3400" b="1">
                 <a:solidFill>
                   <a:srgbClr val="1A1A1A"/>
                 </a:solidFill>
@@ -8526,7 +8486,7 @@
         </p:nvSpPr>
         <p:spPr>
           <a:xfrm>
-            <a:off x="288000" y="827999"/>
+            <a:off x="288000" y="864000"/>
             <a:ext cx="11617200" cy="54000"/>
           </a:xfrm>
           <a:prstGeom prst="rect">
@@ -8571,7 +8531,7 @@
         <p:spPr>
           <a:xfrm>
             <a:off x="540000" y="1260000"/>
-            <a:ext cx="11113200" cy="3240000"/>
+            <a:ext cx="11113200" cy="3420000"/>
           </a:xfrm>
           <a:prstGeom prst="roundRect">
             <a:avLst/>
@@ -8617,7 +8577,7 @@
         <p:spPr>
           <a:xfrm>
             <a:off x="900000" y="1440000"/>
-            <a:ext cx="10393200" cy="468000"/>
+            <a:ext cx="10393200" cy="540000"/>
           </a:xfrm>
           <a:prstGeom prst="rect">
             <a:avLst/>
@@ -8635,7 +8595,7 @@
           <a:p>
             <a:pPr algn="l"/>
             <a:r>
-              <a:rPr sz="2400" b="1">
+              <a:rPr sz="2800" b="1">
                 <a:solidFill>
                   <a:srgbClr val="002060"/>
                 </a:solidFill>
@@ -8655,8 +8615,8 @@
         </p:nvSpPr>
         <p:spPr>
           <a:xfrm>
-            <a:off x="900000" y="2088000"/>
-            <a:ext cx="10393200" cy="900000"/>
+            <a:off x="900000" y="2160000"/>
+            <a:ext cx="10393200" cy="1007999"/>
           </a:xfrm>
           <a:prstGeom prst="rect">
             <a:avLst/>
@@ -8678,7 +8638,7 @@
               </a:lnSpc>
             </a:pPr>
             <a:r>
-              <a:rPr sz="2400" b="1">
+              <a:rPr sz="2600" b="1">
                 <a:solidFill>
                   <a:srgbClr val="1A1A1A"/>
                 </a:solidFill>
@@ -8688,7 +8648,7 @@
               <a:t>「今日の授業で、思わず </a:t>
             </a:r>
             <a:r>
-              <a:rPr sz="2800" b="1">
+              <a:rPr sz="3200" b="1">
                 <a:solidFill>
                   <a:srgbClr val="FF0000"/>
                 </a:solidFill>
@@ -8698,7 +8658,7 @@
               <a:t>〝おっ〟</a:t>
             </a:r>
             <a:r>
-              <a:rPr sz="2400" b="1">
+              <a:rPr sz="2600" b="1">
                 <a:solidFill>
                   <a:srgbClr val="1A1A1A"/>
                 </a:solidFill>
@@ -8718,8 +8678,8 @@
         </p:nvSpPr>
         <p:spPr>
           <a:xfrm>
-            <a:off x="900000" y="3168000"/>
-            <a:ext cx="10393200" cy="900000"/>
+            <a:off x="900000" y="3348000"/>
+            <a:ext cx="10393200" cy="1007999"/>
           </a:xfrm>
           <a:prstGeom prst="rect">
             <a:avLst/>
@@ -8741,7 +8701,7 @@
               </a:lnSpc>
             </a:pPr>
             <a:r>
-              <a:rPr sz="3200" b="1">
+              <a:rPr sz="3600" b="1">
                 <a:solidFill>
                   <a:srgbClr val="FF0000"/>
                 </a:solidFill>
@@ -8751,7 +8711,7 @@
               <a:t>ジェスチャー一つ</a:t>
             </a:r>
             <a:r>
-              <a:rPr sz="2400" b="1">
+              <a:rPr sz="2600" b="1">
                 <a:solidFill>
                   <a:srgbClr val="1A1A1A"/>
                 </a:solidFill>
@@ -8771,8 +8731,8 @@
         </p:nvSpPr>
         <p:spPr>
           <a:xfrm>
-            <a:off x="3960000" y="4860000"/>
-            <a:ext cx="4273200" cy="648000"/>
+            <a:off x="3960000" y="4968000"/>
+            <a:ext cx="4273200" cy="720000"/>
           </a:xfrm>
           <a:prstGeom prst="rect">
             <a:avLst/>
@@ -8815,8 +8775,8 @@
         </p:nvSpPr>
         <p:spPr>
           <a:xfrm>
-            <a:off x="3960000" y="4860000"/>
-            <a:ext cx="4273200" cy="648000"/>
+            <a:off x="3960000" y="4968000"/>
+            <a:ext cx="4273200" cy="720000"/>
           </a:xfrm>
           <a:prstGeom prst="rect">
             <a:avLst/>
@@ -8834,46 +8794,46 @@
           <a:p>
             <a:pPr algn="ctr"/>
             <a:r>
+              <a:rPr sz="2600" b="1">
+                <a:solidFill>
+                  <a:srgbClr val="FFFFFF"/>
+                </a:solidFill>
+                <a:latin typeface="メイリオ"/>
+                <a:ea typeface="メイリオ"/>
+              </a:rPr>
+              <a:t>⏱   30 秒  ペアトーク</a:t>
+            </a:r>
+          </a:p>
+        </p:txBody>
+      </p:sp>
+      <p:sp>
+        <p:nvSpPr>
+          <p:cNvPr id="10" name="TextBox 9"/>
+          <p:cNvSpPr txBox="1"/>
+          <p:nvPr/>
+        </p:nvSpPr>
+        <p:spPr>
+          <a:xfrm>
+            <a:off x="540000" y="5868000"/>
+            <a:ext cx="11113200" cy="540000"/>
+          </a:xfrm>
+          <a:prstGeom prst="rect">
+            <a:avLst/>
+          </a:prstGeom>
+          <a:noFill/>
+          <a:ln>
+            <a:noFill/>
+          </a:ln>
+        </p:spPr>
+        <p:txBody>
+          <a:bodyPr wrap="square" lIns="54000" rIns="54000" tIns="18000" bIns="18000" anchor="ctr">
+            <a:spAutoFit/>
+          </a:bodyPr>
+          <a:lstStyle/>
+          <a:p>
+            <a:pPr algn="ctr"/>
+            <a:r>
               <a:rPr sz="2200" b="1">
-                <a:solidFill>
-                  <a:srgbClr val="FFFFFF"/>
-                </a:solidFill>
-                <a:latin typeface="メイリオ"/>
-                <a:ea typeface="メイリオ"/>
-              </a:rPr>
-              <a:t>⏱   30 秒  ペアトーク</a:t>
-            </a:r>
-          </a:p>
-        </p:txBody>
-      </p:sp>
-      <p:sp>
-        <p:nvSpPr>
-          <p:cNvPr id="10" name="TextBox 9"/>
-          <p:cNvSpPr txBox="1"/>
-          <p:nvPr/>
-        </p:nvSpPr>
-        <p:spPr>
-          <a:xfrm>
-            <a:off x="540000" y="5760000"/>
-            <a:ext cx="11113200" cy="540000"/>
-          </a:xfrm>
-          <a:prstGeom prst="rect">
-            <a:avLst/>
-          </a:prstGeom>
-          <a:noFill/>
-          <a:ln>
-            <a:noFill/>
-          </a:ln>
-        </p:spPr>
-        <p:txBody>
-          <a:bodyPr wrap="square" lIns="54000" rIns="54000" tIns="18000" bIns="18000" anchor="ctr">
-            <a:spAutoFit/>
-          </a:bodyPr>
-          <a:lstStyle/>
-          <a:p>
-            <a:pPr algn="ctr"/>
-            <a:r>
-              <a:rPr sz="2000" b="1">
                 <a:solidFill>
                   <a:srgbClr val="002060"/>
                 </a:solidFill>
@@ -8912,7 +8872,7 @@
           <a:p>
             <a:pPr algn="l"/>
             <a:r>
-              <a:rPr sz="900" b="0">
+              <a:rPr sz="1000" b="0">
                 <a:solidFill>
                   <a:srgbClr val="666666"/>
                 </a:solidFill>
@@ -8951,7 +8911,7 @@
           <a:p>
             <a:pPr algn="r"/>
             <a:r>
-              <a:rPr sz="900" b="0">
+              <a:rPr sz="1000" b="0">
                 <a:solidFill>
                   <a:srgbClr val="666666"/>
                 </a:solidFill>
@@ -8989,8 +8949,8 @@
         </p:nvSpPr>
         <p:spPr>
           <a:xfrm>
-            <a:off x="288000" y="144000"/>
-            <a:ext cx="8280000" cy="648000"/>
+            <a:off x="288000" y="108000"/>
+            <a:ext cx="8280000" cy="720000"/>
           </a:xfrm>
           <a:prstGeom prst="rect">
             <a:avLst/>
@@ -9008,7 +8968,7 @@
           <a:p>
             <a:pPr algn="l"/>
             <a:r>
-              <a:rPr sz="3000" b="1">
+              <a:rPr sz="3400" b="1">
                 <a:solidFill>
                   <a:srgbClr val="1A1A1A"/>
                 </a:solidFill>
@@ -9028,7 +8988,7 @@
         </p:nvSpPr>
         <p:spPr>
           <a:xfrm>
-            <a:off x="288000" y="827999"/>
+            <a:off x="288000" y="864000"/>
             <a:ext cx="11617200" cy="54000"/>
           </a:xfrm>
           <a:prstGeom prst="rect">
@@ -9073,7 +9033,7 @@
         <p:spPr>
           <a:xfrm>
             <a:off x="540000" y="1080000"/>
-            <a:ext cx="11113200" cy="503999"/>
+            <a:ext cx="11113200" cy="540000"/>
           </a:xfrm>
           <a:prstGeom prst="rect">
             <a:avLst/>
@@ -9117,7 +9077,7 @@
         <p:spPr>
           <a:xfrm>
             <a:off x="540000" y="1080000"/>
-            <a:ext cx="11113200" cy="503999"/>
+            <a:ext cx="11113200" cy="540000"/>
           </a:xfrm>
           <a:prstGeom prst="rect">
             <a:avLst/>
@@ -9135,14 +9095,14 @@
           <a:p>
             <a:pPr algn="ctr"/>
             <a:r>
-              <a:rPr sz="1800" b="1">
+              <a:rPr sz="2200" b="1">
                 <a:solidFill>
                   <a:srgbClr val="002060"/>
                 </a:solidFill>
                 <a:latin typeface="メイリオ"/>
                 <a:ea typeface="メイリオ"/>
               </a:rPr>
-              <a:t>第３学年 国語科  単元「もっと知りたい、友だちのこと」  （全６時間中の第３時）</a:t>
+              <a:t>第３学年 国語科  単元「もっと知りたい、友だちのこと」</a:t>
             </a:r>
           </a:p>
         </p:txBody>
@@ -9155,8 +9115,8 @@
         </p:nvSpPr>
         <p:spPr>
           <a:xfrm>
-            <a:off x="552600" y="1728000"/>
-            <a:ext cx="3600000" cy="4140000"/>
+            <a:off x="552600" y="1764000"/>
+            <a:ext cx="3600000" cy="4320000"/>
           </a:xfrm>
           <a:prstGeom prst="rect">
             <a:avLst/>
@@ -9201,8 +9161,8 @@
         </p:nvSpPr>
         <p:spPr>
           <a:xfrm>
-            <a:off x="552600" y="1728000"/>
-            <a:ext cx="3600000" cy="792000"/>
+            <a:off x="552600" y="1764000"/>
+            <a:ext cx="3600000" cy="900000"/>
           </a:xfrm>
           <a:prstGeom prst="rect">
             <a:avLst/>
@@ -9245,8 +9205,8 @@
         </p:nvSpPr>
         <p:spPr>
           <a:xfrm>
-            <a:off x="660600" y="1728000"/>
-            <a:ext cx="540000" cy="792000"/>
+            <a:off x="660600" y="1764000"/>
+            <a:ext cx="540000" cy="900000"/>
           </a:xfrm>
           <a:prstGeom prst="rect">
             <a:avLst/>
@@ -9264,7 +9224,7 @@
           <a:p>
             <a:pPr algn="ctr"/>
             <a:r>
-              <a:rPr sz="2800" b="1">
+              <a:rPr sz="3200" b="1">
                 <a:solidFill>
                   <a:srgbClr val="FFFFFF"/>
                 </a:solidFill>
@@ -9284,8 +9244,8 @@
         </p:nvSpPr>
         <p:spPr>
           <a:xfrm>
-            <a:off x="1236600" y="1728000"/>
-            <a:ext cx="2844000" cy="792000"/>
+            <a:off x="1236600" y="1764000"/>
+            <a:ext cx="2844000" cy="900000"/>
           </a:xfrm>
           <a:prstGeom prst="rect">
             <a:avLst/>
@@ -9303,7 +9263,7 @@
           <a:p>
             <a:pPr algn="l"/>
             <a:r>
-              <a:rPr sz="1600" b="1">
+              <a:rPr sz="1800" b="1">
                 <a:solidFill>
                   <a:srgbClr val="FFFFFF"/>
                 </a:solidFill>
@@ -9323,30 +9283,30 @@
         </p:nvSpPr>
         <p:spPr>
           <a:xfrm>
-            <a:off x="732600" y="2664000"/>
-            <a:ext cx="3240000" cy="3060000"/>
-          </a:xfrm>
-          <a:prstGeom prst="rect">
-            <a:avLst/>
-          </a:prstGeom>
-          <a:noFill/>
-          <a:ln>
-            <a:noFill/>
-          </a:ln>
-        </p:spPr>
-        <p:txBody>
-          <a:bodyPr wrap="square" lIns="54000" rIns="54000" tIns="18000" bIns="18000" anchor="t">
-            <a:spAutoFit/>
-          </a:bodyPr>
-          <a:lstStyle/>
-          <a:p>
-            <a:pPr algn="l">
+            <a:off x="732600" y="2771999"/>
+            <a:ext cx="3240000" cy="3168000"/>
+          </a:xfrm>
+          <a:prstGeom prst="rect">
+            <a:avLst/>
+          </a:prstGeom>
+          <a:noFill/>
+          <a:ln>
+            <a:noFill/>
+          </a:ln>
+        </p:spPr>
+        <p:txBody>
+          <a:bodyPr wrap="square" lIns="54000" rIns="54000" tIns="18000" bIns="18000" anchor="ctr">
+            <a:spAutoFit/>
+          </a:bodyPr>
+          <a:lstStyle/>
+          <a:p>
+            <a:pPr algn="ctr">
               <a:lnSpc>
                 <a:spcPct val="140000"/>
               </a:lnSpc>
             </a:pPr>
             <a:r>
-              <a:rPr sz="1700" b="1">
+              <a:rPr sz="2000" b="1">
                 <a:solidFill>
                   <a:srgbClr val="FF0000"/>
                 </a:solidFill>
@@ -9357,13 +9317,13 @@
             </a:r>
           </a:p>
           <a:p>
-            <a:pPr algn="l">
+            <a:pPr algn="ctr">
               <a:lnSpc>
                 <a:spcPct val="140000"/>
               </a:lnSpc>
             </a:pPr>
             <a:r>
-              <a:rPr sz="1700" b="0">
+              <a:rPr sz="2000" b="0">
                 <a:solidFill>
                   <a:srgbClr val="1A1A1A"/>
                 </a:solidFill>
@@ -9374,20 +9334,20 @@
             </a:r>
           </a:p>
           <a:p>
-            <a:pPr algn="l">
+            <a:pPr algn="ctr">
               <a:lnSpc>
                 <a:spcPct val="140000"/>
               </a:lnSpc>
             </a:pPr>
           </a:p>
           <a:p>
-            <a:pPr algn="l">
+            <a:pPr algn="ctr">
               <a:lnSpc>
                 <a:spcPct val="140000"/>
               </a:lnSpc>
             </a:pPr>
             <a:r>
-              <a:rPr sz="1700" b="0">
+              <a:rPr sz="2000" b="0">
                 <a:solidFill>
                   <a:srgbClr val="1A1A1A"/>
                 </a:solidFill>
@@ -9397,7 +9357,7 @@
               <a:t>児童が</a:t>
             </a:r>
             <a:r>
-              <a:rPr sz="1700" b="1">
+              <a:rPr sz="2000" b="1">
                 <a:solidFill>
                   <a:srgbClr val="FF0000"/>
                 </a:solidFill>
@@ -9408,13 +9368,13 @@
             </a:r>
           </a:p>
           <a:p>
-            <a:pPr algn="l">
+            <a:pPr algn="ctr">
               <a:lnSpc>
                 <a:spcPct val="140000"/>
               </a:lnSpc>
             </a:pPr>
             <a:r>
-              <a:rPr sz="1700" b="0">
+              <a:rPr sz="2000" b="0">
                 <a:solidFill>
                   <a:srgbClr val="1A1A1A"/>
                 </a:solidFill>
@@ -9434,8 +9394,8 @@
         </p:nvSpPr>
         <p:spPr>
           <a:xfrm>
-            <a:off x="4296600" y="1728000"/>
-            <a:ext cx="3600000" cy="4140000"/>
+            <a:off x="4296600" y="1764000"/>
+            <a:ext cx="3600000" cy="4320000"/>
           </a:xfrm>
           <a:prstGeom prst="rect">
             <a:avLst/>
@@ -9480,8 +9440,8 @@
         </p:nvSpPr>
         <p:spPr>
           <a:xfrm>
-            <a:off x="4296600" y="1728000"/>
-            <a:ext cx="3600000" cy="792000"/>
+            <a:off x="4296600" y="1764000"/>
+            <a:ext cx="3600000" cy="900000"/>
           </a:xfrm>
           <a:prstGeom prst="rect">
             <a:avLst/>
@@ -9524,8 +9484,8 @@
         </p:nvSpPr>
         <p:spPr>
           <a:xfrm>
-            <a:off x="4404600" y="1728000"/>
-            <a:ext cx="540000" cy="792000"/>
+            <a:off x="4404600" y="1764000"/>
+            <a:ext cx="540000" cy="900000"/>
           </a:xfrm>
           <a:prstGeom prst="rect">
             <a:avLst/>
@@ -9543,7 +9503,7 @@
           <a:p>
             <a:pPr algn="ctr"/>
             <a:r>
-              <a:rPr sz="2800" b="1">
+              <a:rPr sz="3200" b="1">
                 <a:solidFill>
                   <a:srgbClr val="FFFFFF"/>
                 </a:solidFill>
@@ -9563,8 +9523,8 @@
         </p:nvSpPr>
         <p:spPr>
           <a:xfrm>
-            <a:off x="4980600" y="1728000"/>
-            <a:ext cx="2844000" cy="792000"/>
+            <a:off x="4980600" y="1764000"/>
+            <a:ext cx="2844000" cy="900000"/>
           </a:xfrm>
           <a:prstGeom prst="rect">
             <a:avLst/>
@@ -9582,7 +9542,7 @@
           <a:p>
             <a:pPr algn="l"/>
             <a:r>
-              <a:rPr sz="1600" b="1">
+              <a:rPr sz="1800" b="1">
                 <a:solidFill>
                   <a:srgbClr val="FFFFFF"/>
                 </a:solidFill>
@@ -9602,30 +9562,30 @@
         </p:nvSpPr>
         <p:spPr>
           <a:xfrm>
-            <a:off x="4476600" y="2664000"/>
-            <a:ext cx="3240000" cy="3060000"/>
-          </a:xfrm>
-          <a:prstGeom prst="rect">
-            <a:avLst/>
-          </a:prstGeom>
-          <a:noFill/>
-          <a:ln>
-            <a:noFill/>
-          </a:ln>
-        </p:spPr>
-        <p:txBody>
-          <a:bodyPr wrap="square" lIns="54000" rIns="54000" tIns="18000" bIns="18000" anchor="t">
-            <a:spAutoFit/>
-          </a:bodyPr>
-          <a:lstStyle/>
-          <a:p>
-            <a:pPr algn="l">
+            <a:off x="4476600" y="2771999"/>
+            <a:ext cx="3240000" cy="3168000"/>
+          </a:xfrm>
+          <a:prstGeom prst="rect">
+            <a:avLst/>
+          </a:prstGeom>
+          <a:noFill/>
+          <a:ln>
+            <a:noFill/>
+          </a:ln>
+        </p:spPr>
+        <p:txBody>
+          <a:bodyPr wrap="square" lIns="54000" rIns="54000" tIns="18000" bIns="18000" anchor="ctr">
+            <a:spAutoFit/>
+          </a:bodyPr>
+          <a:lstStyle/>
+          <a:p>
+            <a:pPr algn="ctr">
               <a:lnSpc>
                 <a:spcPct val="140000"/>
               </a:lnSpc>
             </a:pPr>
             <a:r>
-              <a:rPr sz="1700" b="0">
+              <a:rPr sz="2000" b="0">
                 <a:solidFill>
                   <a:srgbClr val="1A1A1A"/>
                 </a:solidFill>
@@ -9636,74 +9596,71 @@
             </a:r>
           </a:p>
           <a:p>
-            <a:pPr algn="l">
+            <a:pPr algn="ctr">
               <a:lnSpc>
                 <a:spcPct val="140000"/>
               </a:lnSpc>
             </a:pPr>
-            <a:r>
-              <a:rPr sz="1700" b="1">
-                <a:solidFill>
-                  <a:srgbClr val="FF0000"/>
-                </a:solidFill>
-                <a:latin typeface="メイリオ"/>
-                <a:ea typeface="メイリオ"/>
-              </a:rPr>
-              <a:t>抽象論ではなく</a:t>
-            </a:r>
-            <a:r>
-              <a:rPr sz="1700" b="0">
-                <a:solidFill>
-                  <a:srgbClr val="1A1A1A"/>
-                </a:solidFill>
-                <a:latin typeface="メイリオ"/>
-                <a:ea typeface="メイリオ"/>
-              </a:rPr>
-              <a:t>、</a:t>
-            </a:r>
-          </a:p>
-          <a:p>
-            <a:pPr algn="l">
+          </a:p>
+          <a:p>
+            <a:pPr algn="ctr">
               <a:lnSpc>
                 <a:spcPct val="140000"/>
               </a:lnSpc>
             </a:pPr>
             <a:r>
-              <a:rPr sz="1700" b="1">
+              <a:rPr sz="2000" b="1">
                 <a:solidFill>
                   <a:srgbClr val="FF0000"/>
                 </a:solidFill>
                 <a:latin typeface="メイリオ"/>
                 <a:ea typeface="メイリオ"/>
               </a:rPr>
-              <a:t>具体的な場面の観察</a:t>
-            </a:r>
-            <a:r>
-              <a:rPr sz="1700" b="0">
+              <a:t>抽象論ではなく</a:t>
+            </a:r>
+            <a:r>
+              <a:rPr sz="2000" b="0">
                 <a:solidFill>
                   <a:srgbClr val="1A1A1A"/>
                 </a:solidFill>
                 <a:latin typeface="メイリオ"/>
                 <a:ea typeface="メイリオ"/>
               </a:rPr>
-              <a:t>から</a:t>
-            </a:r>
-          </a:p>
-          <a:p>
-            <a:pPr algn="l">
+              <a:t>、</a:t>
+            </a:r>
+          </a:p>
+          <a:p>
+            <a:pPr algn="ctr">
               <a:lnSpc>
                 <a:spcPct val="140000"/>
               </a:lnSpc>
             </a:pPr>
             <a:r>
-              <a:rPr sz="1700" b="0">
+              <a:rPr sz="2000" b="1">
+                <a:solidFill>
+                  <a:srgbClr val="FF0000"/>
+                </a:solidFill>
+                <a:latin typeface="メイリオ"/>
+                <a:ea typeface="メイリオ"/>
+              </a:rPr>
+              <a:t>具体的な場面の観察</a:t>
+            </a:r>
+          </a:p>
+          <a:p>
+            <a:pPr algn="ctr">
+              <a:lnSpc>
+                <a:spcPct val="140000"/>
+              </a:lnSpc>
+            </a:pPr>
+            <a:r>
+              <a:rPr sz="2000" b="0">
                 <a:solidFill>
                   <a:srgbClr val="1A1A1A"/>
                 </a:solidFill>
                 <a:latin typeface="メイリオ"/>
                 <a:ea typeface="メイリオ"/>
               </a:rPr>
-              <a:t>考えさせた。</a:t>
+              <a:t>から考えさせた。</a:t>
             </a:r>
           </a:p>
         </p:txBody>
@@ -9716,8 +9673,8 @@
         </p:nvSpPr>
         <p:spPr>
           <a:xfrm>
-            <a:off x="8040600" y="1728000"/>
-            <a:ext cx="3600000" cy="4140000"/>
+            <a:off x="8040600" y="1764000"/>
+            <a:ext cx="3600000" cy="4320000"/>
           </a:xfrm>
           <a:prstGeom prst="rect">
             <a:avLst/>
@@ -9762,8 +9719,8 @@
         </p:nvSpPr>
         <p:spPr>
           <a:xfrm>
-            <a:off x="8040600" y="1728000"/>
-            <a:ext cx="3600000" cy="792000"/>
+            <a:off x="8040600" y="1764000"/>
+            <a:ext cx="3600000" cy="900000"/>
           </a:xfrm>
           <a:prstGeom prst="rect">
             <a:avLst/>
@@ -9806,8 +9763,8 @@
         </p:nvSpPr>
         <p:spPr>
           <a:xfrm>
-            <a:off x="8148600" y="1728000"/>
-            <a:ext cx="540000" cy="792000"/>
+            <a:off x="8148600" y="1764000"/>
+            <a:ext cx="540000" cy="900000"/>
           </a:xfrm>
           <a:prstGeom prst="rect">
             <a:avLst/>
@@ -9825,7 +9782,7 @@
           <a:p>
             <a:pPr algn="ctr"/>
             <a:r>
-              <a:rPr sz="2800" b="1">
+              <a:rPr sz="3200" b="1">
                 <a:solidFill>
                   <a:srgbClr val="FFFFFF"/>
                 </a:solidFill>
@@ -9845,8 +9802,8 @@
         </p:nvSpPr>
         <p:spPr>
           <a:xfrm>
-            <a:off x="8724600" y="1728000"/>
-            <a:ext cx="2844000" cy="792000"/>
+            <a:off x="8724600" y="1764000"/>
+            <a:ext cx="2844000" cy="900000"/>
           </a:xfrm>
           <a:prstGeom prst="rect">
             <a:avLst/>
@@ -9864,7 +9821,7 @@
           <a:p>
             <a:pPr algn="l"/>
             <a:r>
-              <a:rPr sz="1600" b="1">
+              <a:rPr sz="1800" b="1">
                 <a:solidFill>
                   <a:srgbClr val="FFFFFF"/>
                 </a:solidFill>
@@ -9884,30 +9841,30 @@
         </p:nvSpPr>
         <p:spPr>
           <a:xfrm>
-            <a:off x="8220600" y="2664000"/>
-            <a:ext cx="3240000" cy="3060000"/>
-          </a:xfrm>
-          <a:prstGeom prst="rect">
-            <a:avLst/>
-          </a:prstGeom>
-          <a:noFill/>
-          <a:ln>
-            <a:noFill/>
-          </a:ln>
-        </p:spPr>
-        <p:txBody>
-          <a:bodyPr wrap="square" lIns="54000" rIns="54000" tIns="18000" bIns="18000" anchor="t">
-            <a:spAutoFit/>
-          </a:bodyPr>
-          <a:lstStyle/>
-          <a:p>
-            <a:pPr algn="l">
+            <a:off x="8220600" y="2771999"/>
+            <a:ext cx="3240000" cy="3168000"/>
+          </a:xfrm>
+          <a:prstGeom prst="rect">
+            <a:avLst/>
+          </a:prstGeom>
+          <a:noFill/>
+          <a:ln>
+            <a:noFill/>
+          </a:ln>
+        </p:spPr>
+        <p:txBody>
+          <a:bodyPr wrap="square" lIns="54000" rIns="54000" tIns="18000" bIns="18000" anchor="ctr">
+            <a:spAutoFit/>
+          </a:bodyPr>
+          <a:lstStyle/>
+          <a:p>
+            <a:pPr algn="ctr">
               <a:lnSpc>
                 <a:spcPct val="140000"/>
               </a:lnSpc>
             </a:pPr>
             <a:r>
-              <a:rPr sz="1700" b="0">
+              <a:rPr sz="2000" b="0">
                 <a:solidFill>
                   <a:srgbClr val="1A1A1A"/>
                 </a:solidFill>
@@ -9918,74 +9875,71 @@
             </a:r>
           </a:p>
           <a:p>
-            <a:pPr algn="l">
+            <a:pPr algn="ctr">
               <a:lnSpc>
                 <a:spcPct val="140000"/>
               </a:lnSpc>
             </a:pPr>
             <a:r>
-              <a:rPr sz="1700" b="1">
+              <a:rPr sz="2000" b="1">
                 <a:solidFill>
                   <a:srgbClr val="FF0000"/>
                 </a:solidFill>
                 <a:latin typeface="メイリオ"/>
                 <a:ea typeface="メイリオ"/>
               </a:rPr>
-              <a:t>セカンドクエスチョン</a:t>
-            </a:r>
-          </a:p>
-          <a:p>
-            <a:pPr algn="l">
+              <a:t>2nd Q／感想」</a:t>
+            </a:r>
+          </a:p>
+          <a:p>
+            <a:pPr algn="ctr">
               <a:lnSpc>
                 <a:spcPct val="140000"/>
               </a:lnSpc>
             </a:pPr>
-            <a:r>
-              <a:rPr sz="1700" b="0">
-                <a:solidFill>
-                  <a:srgbClr val="1A1A1A"/>
-                </a:solidFill>
-                <a:latin typeface="メイリオ"/>
-                <a:ea typeface="メイリオ"/>
-              </a:rPr>
-              <a:t>／感想」を</a:t>
-            </a:r>
-          </a:p>
-          <a:p>
-            <a:pPr algn="l">
+          </a:p>
+          <a:p>
+            <a:pPr algn="ctr">
               <a:lnSpc>
                 <a:spcPct val="140000"/>
               </a:lnSpc>
             </a:pPr>
             <a:r>
-              <a:rPr sz="1700" b="0">
+              <a:rPr sz="2000" b="0">
                 <a:solidFill>
                   <a:srgbClr val="1A1A1A"/>
                 </a:solidFill>
                 <a:latin typeface="メイリオ"/>
                 <a:ea typeface="メイリオ"/>
               </a:rPr>
-              <a:t>クラス共通の</a:t>
-            </a:r>
-            <a:r>
-              <a:rPr sz="1700" b="1">
-                <a:solidFill>
-                  <a:srgbClr val="FF0000"/>
-                </a:solidFill>
-                <a:latin typeface="メイリオ"/>
-                <a:ea typeface="メイリオ"/>
-              </a:rPr>
-              <a:t>〝対話の型〟</a:t>
-            </a:r>
-          </a:p>
-          <a:p>
-            <a:pPr algn="l">
+              <a:t>をクラス共通の</a:t>
+            </a:r>
+          </a:p>
+          <a:p>
+            <a:pPr algn="ctr">
               <a:lnSpc>
                 <a:spcPct val="140000"/>
               </a:lnSpc>
             </a:pPr>
             <a:r>
-              <a:rPr sz="1700" b="0">
+              <a:rPr sz="2000" b="1">
+                <a:solidFill>
+                  <a:srgbClr val="FF0000"/>
+                </a:solidFill>
+                <a:latin typeface="メイリオ"/>
+                <a:ea typeface="メイリオ"/>
+              </a:rPr>
+              <a:t>〝対話の型〟</a:t>
+            </a:r>
+          </a:p>
+          <a:p>
+            <a:pPr algn="ctr">
+              <a:lnSpc>
+                <a:spcPct val="140000"/>
+              </a:lnSpc>
+            </a:pPr>
+            <a:r>
+              <a:rPr sz="2000" b="0">
                 <a:solidFill>
                   <a:srgbClr val="1A1A1A"/>
                 </a:solidFill>
@@ -10024,7 +9978,7 @@
           <a:p>
             <a:pPr algn="l"/>
             <a:r>
-              <a:rPr sz="900" b="0">
+              <a:rPr sz="1000" b="0">
                 <a:solidFill>
                   <a:srgbClr val="666666"/>
                 </a:solidFill>
@@ -10063,7 +10017,7 @@
           <a:p>
             <a:pPr algn="r"/>
             <a:r>
-              <a:rPr sz="900" b="0">
+              <a:rPr sz="1000" b="0">
                 <a:solidFill>
                   <a:srgbClr val="666666"/>
                 </a:solidFill>
@@ -10101,8 +10055,8 @@
         </p:nvSpPr>
         <p:spPr>
           <a:xfrm>
-            <a:off x="288000" y="144000"/>
-            <a:ext cx="8280000" cy="648000"/>
+            <a:off x="288000" y="108000"/>
+            <a:ext cx="8280000" cy="720000"/>
           </a:xfrm>
           <a:prstGeom prst="rect">
             <a:avLst/>
@@ -10120,14 +10074,14 @@
           <a:p>
             <a:pPr algn="l"/>
             <a:r>
-              <a:rPr sz="3000" b="1">
+              <a:rPr sz="3400" b="1">
                 <a:solidFill>
                   <a:srgbClr val="1A1A1A"/>
                 </a:solidFill>
                 <a:latin typeface="メイリオ"/>
                 <a:ea typeface="メイリオ"/>
               </a:rPr>
-              <a:t>授業の様子  ①   導入～質問の種類を整理する場面</a:t>
+              <a:t>授業の様子  ①   導入～質問の整理の場面</a:t>
             </a:r>
           </a:p>
         </p:txBody>
@@ -10140,7 +10094,7 @@
         </p:nvSpPr>
         <p:spPr>
           <a:xfrm>
-            <a:off x="288000" y="827999"/>
+            <a:off x="288000" y="864000"/>
             <a:ext cx="11617200" cy="54000"/>
           </a:xfrm>
           <a:prstGeom prst="rect">
@@ -10185,7 +10139,7 @@
         <p:spPr>
           <a:xfrm>
             <a:off x="540000" y="1152000"/>
-            <a:ext cx="11113200" cy="3420000"/>
+            <a:ext cx="11113200" cy="3240000"/>
           </a:xfrm>
           <a:prstGeom prst="rect">
             <a:avLst/>
@@ -10231,7 +10185,7 @@
         <p:spPr>
           <a:xfrm>
             <a:off x="540000" y="1152000"/>
-            <a:ext cx="11113200" cy="3420000"/>
+            <a:ext cx="11113200" cy="3240000"/>
           </a:xfrm>
           <a:prstGeom prst="rect">
             <a:avLst/>
@@ -10249,7 +10203,7 @@
           <a:p>
             <a:pPr algn="ctr"/>
             <a:r>
-              <a:rPr sz="2200" b="0">
+              <a:rPr sz="2400" b="0">
                 <a:solidFill>
                   <a:srgbClr val="666666"/>
                 </a:solidFill>
@@ -10262,7 +10216,7 @@
           <a:p>
             <a:pPr algn="ctr"/>
             <a:r>
-              <a:rPr sz="2200" b="0">
+              <a:rPr sz="2400" b="0">
                 <a:solidFill>
                   <a:srgbClr val="666666"/>
                 </a:solidFill>
@@ -10275,14 +10229,14 @@
           <a:p>
             <a:pPr algn="ctr"/>
             <a:r>
-              <a:rPr sz="2200" b="0">
+              <a:rPr sz="2400" b="0">
                 <a:solidFill>
                   <a:srgbClr val="666666"/>
                 </a:solidFill>
                 <a:latin typeface="メイリオ"/>
                 <a:ea typeface="メイリオ"/>
               </a:rPr>
-              <a:t>教師の話を聞き、ワークシートに質問を記入している場面</a:t>
+              <a:t>教師の話を聞き、質問を考える場面</a:t>
             </a:r>
           </a:p>
         </p:txBody>
@@ -10295,8 +10249,8 @@
         </p:nvSpPr>
         <p:spPr>
           <a:xfrm>
-            <a:off x="540000" y="4752000"/>
-            <a:ext cx="5466600" cy="324000"/>
+            <a:off x="540000" y="4572000"/>
+            <a:ext cx="5466600" cy="360000"/>
           </a:xfrm>
           <a:prstGeom prst="rect">
             <a:avLst/>
@@ -10339,8 +10293,8 @@
         </p:nvSpPr>
         <p:spPr>
           <a:xfrm>
-            <a:off x="540000" y="4752000"/>
-            <a:ext cx="5466600" cy="324000"/>
+            <a:off x="540000" y="4572000"/>
+            <a:ext cx="5466600" cy="360000"/>
           </a:xfrm>
           <a:prstGeom prst="rect">
             <a:avLst/>
@@ -10358,7 +10312,7 @@
           <a:p>
             <a:pPr algn="ctr"/>
             <a:r>
-              <a:rPr sz="1500" b="1">
+              <a:rPr sz="1800" b="1">
                 <a:solidFill>
                   <a:srgbClr val="FFFFFF"/>
                 </a:solidFill>
@@ -10378,8 +10332,8 @@
         </p:nvSpPr>
         <p:spPr>
           <a:xfrm>
-            <a:off x="540000" y="5076000"/>
-            <a:ext cx="5466600" cy="1116000"/>
+            <a:off x="540000" y="4932000"/>
+            <a:ext cx="5466600" cy="1295999"/>
           </a:xfrm>
           <a:prstGeom prst="rect">
             <a:avLst/>
@@ -10424,8 +10378,8 @@
         </p:nvSpPr>
         <p:spPr>
           <a:xfrm>
-            <a:off x="648000" y="5148000"/>
-            <a:ext cx="5250600" cy="1008000"/>
+            <a:off x="648000" y="5004000"/>
+            <a:ext cx="5250600" cy="1152000"/>
           </a:xfrm>
           <a:prstGeom prst="rect">
             <a:avLst/>
@@ -10447,7 +10401,7 @@
               </a:lnSpc>
             </a:pPr>
             <a:r>
-              <a:rPr sz="1800" b="1">
+              <a:rPr sz="2200" b="1">
                 <a:solidFill>
                   <a:srgbClr val="FF0000"/>
                 </a:solidFill>
@@ -10457,7 +10411,7 @@
               <a:t>「いつ・どこで・だれが」</a:t>
             </a:r>
             <a:r>
-              <a:rPr sz="1700" b="0">
+              <a:rPr sz="2000" b="0">
                 <a:solidFill>
                   <a:srgbClr val="1A1A1A"/>
                 </a:solidFill>
@@ -10474,17 +10428,17 @@
               </a:lnSpc>
             </a:pPr>
             <a:r>
-              <a:rPr sz="1700" b="0">
+              <a:rPr sz="2000" b="0">
                 <a:solidFill>
                   <a:srgbClr val="1A1A1A"/>
                 </a:solidFill>
                 <a:latin typeface="メイリオ"/>
                 <a:ea typeface="メイリオ"/>
               </a:rPr>
-              <a:t>児童の質問を </a:t>
-            </a:r>
-            <a:r>
-              <a:rPr sz="1800" b="1">
+              <a:t>質問を </a:t>
+            </a:r>
+            <a:r>
+              <a:rPr sz="2200" b="1">
                 <a:solidFill>
                   <a:srgbClr val="FF0000"/>
                 </a:solidFill>
@@ -10494,7 +10448,7 @@
               <a:t>〝見える化〟</a:t>
             </a:r>
             <a:r>
-              <a:rPr sz="1700" b="0">
+              <a:rPr sz="2000" b="0">
                 <a:solidFill>
                   <a:srgbClr val="1A1A1A"/>
                 </a:solidFill>
@@ -10514,8 +10468,8 @@
         </p:nvSpPr>
         <p:spPr>
           <a:xfrm>
-            <a:off x="6186600" y="4752000"/>
-            <a:ext cx="5466600" cy="324000"/>
+            <a:off x="6186600" y="4572000"/>
+            <a:ext cx="5466600" cy="360000"/>
           </a:xfrm>
           <a:prstGeom prst="rect">
             <a:avLst/>
@@ -10558,8 +10512,8 @@
         </p:nvSpPr>
         <p:spPr>
           <a:xfrm>
-            <a:off x="6186600" y="4752000"/>
-            <a:ext cx="5466600" cy="324000"/>
+            <a:off x="6186600" y="4572000"/>
+            <a:ext cx="5466600" cy="360000"/>
           </a:xfrm>
           <a:prstGeom prst="rect">
             <a:avLst/>
@@ -10577,7 +10531,7 @@
           <a:p>
             <a:pPr algn="ctr"/>
             <a:r>
-              <a:rPr sz="1500" b="1">
+              <a:rPr sz="1800" b="1">
                 <a:solidFill>
                   <a:srgbClr val="FFFFFF"/>
                 </a:solidFill>
@@ -10597,8 +10551,8 @@
         </p:nvSpPr>
         <p:spPr>
           <a:xfrm>
-            <a:off x="6186600" y="5076000"/>
-            <a:ext cx="5466600" cy="1116000"/>
+            <a:off x="6186600" y="4932000"/>
+            <a:ext cx="5466600" cy="1295999"/>
           </a:xfrm>
           <a:prstGeom prst="rect">
             <a:avLst/>
@@ -10643,8 +10597,8 @@
         </p:nvSpPr>
         <p:spPr>
           <a:xfrm>
-            <a:off x="6294600" y="5148000"/>
-            <a:ext cx="5250600" cy="1008000"/>
+            <a:off x="6294600" y="5004000"/>
+            <a:ext cx="5250600" cy="1152000"/>
           </a:xfrm>
           <a:prstGeom prst="rect">
             <a:avLst/>
@@ -10666,17 +10620,17 @@
               </a:lnSpc>
             </a:pPr>
             <a:r>
-              <a:rPr sz="1700" b="0">
+              <a:rPr sz="2000" b="0">
                 <a:solidFill>
                   <a:srgbClr val="1A1A1A"/>
                 </a:solidFill>
                 <a:latin typeface="メイリオ"/>
                 <a:ea typeface="メイリオ"/>
               </a:rPr>
-              <a:t>自分が考えた質問をペアで </a:t>
-            </a:r>
-            <a:r>
-              <a:rPr sz="1800" b="1">
+              <a:t>ペアで </a:t>
+            </a:r>
+            <a:r>
+              <a:rPr sz="2200" b="1">
                 <a:solidFill>
                   <a:srgbClr val="FF0000"/>
                 </a:solidFill>
@@ -10686,7 +10640,7 @@
               <a:t>安心して交流</a:t>
             </a:r>
             <a:r>
-              <a:rPr sz="1700" b="0">
+              <a:rPr sz="2000" b="0">
                 <a:solidFill>
                   <a:srgbClr val="1A1A1A"/>
                 </a:solidFill>
@@ -10703,7 +10657,7 @@
               </a:lnSpc>
             </a:pPr>
             <a:r>
-              <a:rPr sz="1800" b="1">
+              <a:rPr sz="2200" b="1">
                 <a:solidFill>
                   <a:srgbClr val="FF0000"/>
                 </a:solidFill>
@@ -10713,7 +10667,7 @@
               <a:t>書く時間の確保</a:t>
             </a:r>
             <a:r>
-              <a:rPr sz="1700" b="0">
+              <a:rPr sz="2000" b="0">
                 <a:solidFill>
                   <a:srgbClr val="1A1A1A"/>
                 </a:solidFill>
@@ -10752,7 +10706,7 @@
           <a:p>
             <a:pPr algn="l"/>
             <a:r>
-              <a:rPr sz="900" b="0">
+              <a:rPr sz="1000" b="0">
                 <a:solidFill>
                   <a:srgbClr val="666666"/>
                 </a:solidFill>
@@ -10791,7 +10745,7 @@
           <a:p>
             <a:pPr algn="r"/>
             <a:r>
-              <a:rPr sz="900" b="0">
+              <a:rPr sz="1000" b="0">
                 <a:solidFill>
                   <a:srgbClr val="666666"/>
                 </a:solidFill>
@@ -10829,8 +10783,8 @@
         </p:nvSpPr>
         <p:spPr>
           <a:xfrm>
-            <a:off x="288000" y="144000"/>
-            <a:ext cx="8280000" cy="648000"/>
+            <a:off x="288000" y="108000"/>
+            <a:ext cx="8280000" cy="720000"/>
           </a:xfrm>
           <a:prstGeom prst="rect">
             <a:avLst/>
@@ -10848,7 +10802,7 @@
           <a:p>
             <a:pPr algn="l"/>
             <a:r>
-              <a:rPr sz="3000" b="1">
+              <a:rPr sz="3400" b="1">
                 <a:solidFill>
                   <a:srgbClr val="1A1A1A"/>
                 </a:solidFill>
@@ -10868,7 +10822,7 @@
         </p:nvSpPr>
         <p:spPr>
           <a:xfrm>
-            <a:off x="288000" y="827999"/>
+            <a:off x="288000" y="864000"/>
             <a:ext cx="11617200" cy="54000"/>
           </a:xfrm>
           <a:prstGeom prst="rect">
@@ -10913,7 +10867,7 @@
         <p:spPr>
           <a:xfrm>
             <a:off x="540000" y="1188000"/>
-            <a:ext cx="6120000" cy="2268000"/>
+            <a:ext cx="6120000" cy="2340000"/>
           </a:xfrm>
           <a:prstGeom prst="rect">
             <a:avLst/>
@@ -10959,7 +10913,7 @@
         <p:spPr>
           <a:xfrm>
             <a:off x="540000" y="1188000"/>
-            <a:ext cx="6120000" cy="2268000"/>
+            <a:ext cx="6120000" cy="2340000"/>
           </a:xfrm>
           <a:prstGeom prst="rect">
             <a:avLst/>
@@ -10977,14 +10931,14 @@
           <a:p>
             <a:pPr algn="ctr"/>
             <a:r>
-              <a:rPr sz="1600" b="0">
+              <a:rPr sz="1800" b="0">
                 <a:solidFill>
                   <a:srgbClr val="666666"/>
                 </a:solidFill>
                 <a:latin typeface="メイリオ"/>
                 <a:ea typeface="メイリオ"/>
               </a:rPr>
-              <a:t>📷  【写真①】 動画教材を視聴し、良い対話を分析する場面</a:t>
+              <a:t>📷  【写真①】 動画教材を視聴する場面</a:t>
             </a:r>
           </a:p>
         </p:txBody>
@@ -10997,8 +10951,8 @@
         </p:nvSpPr>
         <p:spPr>
           <a:xfrm>
-            <a:off x="540000" y="3671999"/>
-            <a:ext cx="6120000" cy="2268000"/>
+            <a:off x="540000" y="3708000"/>
+            <a:ext cx="6120000" cy="2340000"/>
           </a:xfrm>
           <a:prstGeom prst="rect">
             <a:avLst/>
@@ -11043,8 +10997,8 @@
         </p:nvSpPr>
         <p:spPr>
           <a:xfrm>
-            <a:off x="540000" y="3671999"/>
-            <a:ext cx="6120000" cy="2268000"/>
+            <a:off x="540000" y="3708000"/>
+            <a:ext cx="6120000" cy="2340000"/>
           </a:xfrm>
           <a:prstGeom prst="rect">
             <a:avLst/>
@@ -11062,14 +11016,14 @@
           <a:p>
             <a:pPr algn="ctr"/>
             <a:r>
-              <a:rPr sz="1600" b="0">
+              <a:rPr sz="1800" b="0">
                 <a:solidFill>
                   <a:srgbClr val="666666"/>
                 </a:solidFill>
                 <a:latin typeface="メイリオ"/>
                 <a:ea typeface="メイリオ"/>
               </a:rPr>
-              <a:t>📷  【写真②】 全体で意見を共有し、対話の質を整理する場面</a:t>
+              <a:t>📷  【写真②】 全体で対話の質を整理する場面</a:t>
             </a:r>
           </a:p>
         </p:txBody>
@@ -11083,7 +11037,7 @@
         <p:spPr>
           <a:xfrm>
             <a:off x="6840000" y="1188000"/>
-            <a:ext cx="4813200" cy="576000"/>
+            <a:ext cx="4813200" cy="648000"/>
           </a:xfrm>
           <a:prstGeom prst="rect">
             <a:avLst/>
@@ -11127,7 +11081,7 @@
         <p:spPr>
           <a:xfrm>
             <a:off x="6840000" y="1188000"/>
-            <a:ext cx="4813200" cy="576000"/>
+            <a:ext cx="4813200" cy="648000"/>
           </a:xfrm>
           <a:prstGeom prst="rect">
             <a:avLst/>
@@ -11145,7 +11099,7 @@
           <a:p>
             <a:pPr algn="ctr"/>
             <a:r>
-              <a:rPr sz="1700" b="1">
+              <a:rPr sz="2000" b="1">
                 <a:solidFill>
                   <a:srgbClr val="FFFFFF"/>
                 </a:solidFill>
@@ -11158,7 +11112,7 @@
           <a:p>
             <a:pPr algn="ctr"/>
             <a:r>
-              <a:rPr sz="1700" b="1">
+              <a:rPr sz="2000" b="1">
                 <a:solidFill>
                   <a:srgbClr val="FFFFFF"/>
                 </a:solidFill>
@@ -11178,8 +11132,8 @@
         </p:nvSpPr>
         <p:spPr>
           <a:xfrm>
-            <a:off x="6840000" y="1835999"/>
-            <a:ext cx="4813200" cy="1332000"/>
+            <a:off x="6840000" y="1908000"/>
+            <a:ext cx="4813200" cy="1404000"/>
           </a:xfrm>
           <a:prstGeom prst="rect">
             <a:avLst/>
@@ -11224,8 +11178,8 @@
         </p:nvSpPr>
         <p:spPr>
           <a:xfrm>
-            <a:off x="6894000" y="1835999"/>
-            <a:ext cx="432000" cy="1332000"/>
+            <a:off x="6894000" y="1908000"/>
+            <a:ext cx="468000" cy="1404000"/>
           </a:xfrm>
           <a:prstGeom prst="rect">
             <a:avLst/>
@@ -11243,7 +11197,7 @@
           <a:p>
             <a:pPr algn="ctr"/>
             <a:r>
-              <a:rPr sz="2200" b="1">
+              <a:rPr sz="2600" b="1">
                 <a:solidFill>
                   <a:srgbClr val="FF0000"/>
                 </a:solidFill>
@@ -11263,8 +11217,47 @@
         </p:nvSpPr>
         <p:spPr>
           <a:xfrm>
-            <a:off x="7343999" y="1925999"/>
-            <a:ext cx="4273200" cy="576000"/>
+            <a:off x="7380000" y="2016000"/>
+            <a:ext cx="4237200" cy="540000"/>
+          </a:xfrm>
+          <a:prstGeom prst="rect">
+            <a:avLst/>
+          </a:prstGeom>
+          <a:noFill/>
+          <a:ln>
+            <a:noFill/>
+          </a:ln>
+        </p:spPr>
+        <p:txBody>
+          <a:bodyPr wrap="square" lIns="54000" rIns="54000" tIns="18000" bIns="18000" anchor="ctr">
+            <a:spAutoFit/>
+          </a:bodyPr>
+          <a:lstStyle/>
+          <a:p>
+            <a:pPr algn="l"/>
+            <a:r>
+              <a:rPr sz="1700" b="1">
+                <a:solidFill>
+                  <a:srgbClr val="002060"/>
+                </a:solidFill>
+                <a:latin typeface="メイリオ"/>
+                <a:ea typeface="メイリオ"/>
+              </a:rPr>
+              <a:t>確かめる</a:t>
+            </a:r>
+          </a:p>
+        </p:txBody>
+      </p:sp>
+      <p:sp>
+        <p:nvSpPr>
+          <p:cNvPr id="13" name="TextBox 12"/>
+          <p:cNvSpPr txBox="1"/>
+          <p:nvPr/>
+        </p:nvSpPr>
+        <p:spPr>
+          <a:xfrm>
+            <a:off x="7380000" y="2592000"/>
+            <a:ext cx="4237200" cy="648000"/>
           </a:xfrm>
           <a:prstGeom prst="rect">
             <a:avLst/>
@@ -11282,66 +11275,27 @@
           <a:p>
             <a:pPr algn="l"/>
             <a:r>
-              <a:rPr sz="1400" b="1">
-                <a:solidFill>
-                  <a:srgbClr val="002060"/>
-                </a:solidFill>
-                <a:latin typeface="メイリオ"/>
-                <a:ea typeface="メイリオ"/>
-              </a:rPr>
-              <a:t>確かめる</a:t>
-            </a:r>
-          </a:p>
-        </p:txBody>
-      </p:sp>
-      <p:sp>
-        <p:nvSpPr>
-          <p:cNvPr id="13" name="TextBox 12"/>
-          <p:cNvSpPr txBox="1"/>
-          <p:nvPr/>
-        </p:nvSpPr>
-        <p:spPr>
-          <a:xfrm>
-            <a:off x="7343999" y="2519999"/>
-            <a:ext cx="4273200" cy="612000"/>
-          </a:xfrm>
-          <a:prstGeom prst="rect">
-            <a:avLst/>
-          </a:prstGeom>
-          <a:noFill/>
-          <a:ln>
-            <a:noFill/>
-          </a:ln>
-        </p:spPr>
-        <p:txBody>
-          <a:bodyPr wrap="square" lIns="54000" rIns="54000" tIns="18000" bIns="18000" anchor="t">
-            <a:spAutoFit/>
-          </a:bodyPr>
-          <a:lstStyle/>
+              <a:rPr sz="1300" b="0">
+                <a:solidFill>
+                  <a:srgbClr val="1A1A1A"/>
+                </a:solidFill>
+                <a:latin typeface="メイリオ"/>
+                <a:ea typeface="メイリオ"/>
+              </a:rPr>
+              <a:t>相手の話を</a:t>
+            </a:r>
+          </a:p>
           <a:p>
             <a:pPr algn="l"/>
             <a:r>
-              <a:rPr sz="1100" b="0">
+              <a:rPr sz="1300" b="0">
                 <a:solidFill>
                   <a:srgbClr val="1A1A1A"/>
                 </a:solidFill>
                 <a:latin typeface="メイリオ"/>
                 <a:ea typeface="メイリオ"/>
               </a:rPr>
-              <a:t>相手の話を聞き返し</a:t>
-            </a:r>
-          </a:p>
-          <a:p>
-            <a:pPr algn="l"/>
-            <a:r>
-              <a:rPr sz="1100" b="0">
-                <a:solidFill>
-                  <a:srgbClr val="1A1A1A"/>
-                </a:solidFill>
-                <a:latin typeface="メイリオ"/>
-                <a:ea typeface="メイリオ"/>
-              </a:rPr>
-              <a:t>理解を確認</a:t>
+              <a:t>聞き返し確認</a:t>
             </a:r>
           </a:p>
         </p:txBody>
@@ -11354,8 +11308,8 @@
         </p:nvSpPr>
         <p:spPr>
           <a:xfrm>
-            <a:off x="6840000" y="3221999"/>
-            <a:ext cx="4813200" cy="1332000"/>
+            <a:off x="6840000" y="3366000"/>
+            <a:ext cx="4813200" cy="1404000"/>
           </a:xfrm>
           <a:prstGeom prst="rect">
             <a:avLst/>
@@ -11400,8 +11354,8 @@
         </p:nvSpPr>
         <p:spPr>
           <a:xfrm>
-            <a:off x="6894000" y="3221999"/>
-            <a:ext cx="432000" cy="1332000"/>
+            <a:off x="6894000" y="3366000"/>
+            <a:ext cx="468000" cy="1404000"/>
           </a:xfrm>
           <a:prstGeom prst="rect">
             <a:avLst/>
@@ -11419,7 +11373,7 @@
           <a:p>
             <a:pPr algn="ctr"/>
             <a:r>
-              <a:rPr sz="2200" b="1">
+              <a:rPr sz="2600" b="1">
                 <a:solidFill>
                   <a:srgbClr val="FF0000"/>
                 </a:solidFill>
@@ -11439,8 +11393,47 @@
         </p:nvSpPr>
         <p:spPr>
           <a:xfrm>
-            <a:off x="7343999" y="3311999"/>
-            <a:ext cx="4273200" cy="576000"/>
+            <a:off x="7380000" y="3474000"/>
+            <a:ext cx="4237200" cy="540000"/>
+          </a:xfrm>
+          <a:prstGeom prst="rect">
+            <a:avLst/>
+          </a:prstGeom>
+          <a:noFill/>
+          <a:ln>
+            <a:noFill/>
+          </a:ln>
+        </p:spPr>
+        <p:txBody>
+          <a:bodyPr wrap="square" lIns="54000" rIns="54000" tIns="18000" bIns="18000" anchor="ctr">
+            <a:spAutoFit/>
+          </a:bodyPr>
+          <a:lstStyle/>
+          <a:p>
+            <a:pPr algn="l"/>
+            <a:r>
+              <a:rPr sz="1700" b="1">
+                <a:solidFill>
+                  <a:srgbClr val="002060"/>
+                </a:solidFill>
+                <a:latin typeface="メイリオ"/>
+                <a:ea typeface="メイリオ"/>
+              </a:rPr>
+              <a:t>2nd Q</a:t>
+            </a:r>
+          </a:p>
+        </p:txBody>
+      </p:sp>
+      <p:sp>
+        <p:nvSpPr>
+          <p:cNvPr id="17" name="TextBox 16"/>
+          <p:cNvSpPr txBox="1"/>
+          <p:nvPr/>
+        </p:nvSpPr>
+        <p:spPr>
+          <a:xfrm>
+            <a:off x="7380000" y="4050000"/>
+            <a:ext cx="4237200" cy="648000"/>
           </a:xfrm>
           <a:prstGeom prst="rect">
             <a:avLst/>
@@ -11458,79 +11451,27 @@
           <a:p>
             <a:pPr algn="l"/>
             <a:r>
-              <a:rPr sz="1400" b="1">
-                <a:solidFill>
-                  <a:srgbClr val="002060"/>
-                </a:solidFill>
-                <a:latin typeface="メイリオ"/>
-                <a:ea typeface="メイリオ"/>
-              </a:rPr>
-              <a:t>セカンド</a:t>
+              <a:rPr sz="1300" b="0">
+                <a:solidFill>
+                  <a:srgbClr val="1A1A1A"/>
+                </a:solidFill>
+                <a:latin typeface="メイリオ"/>
+                <a:ea typeface="メイリオ"/>
+              </a:rPr>
+              <a:t>答えから</a:t>
             </a:r>
           </a:p>
           <a:p>
             <a:pPr algn="l"/>
             <a:r>
-              <a:rPr sz="1400" b="1">
-                <a:solidFill>
-                  <a:srgbClr val="002060"/>
-                </a:solidFill>
-                <a:latin typeface="メイリオ"/>
-                <a:ea typeface="メイリオ"/>
-              </a:rPr>
-              <a:t>クエスチョン</a:t>
-            </a:r>
-          </a:p>
-        </p:txBody>
-      </p:sp>
-      <p:sp>
-        <p:nvSpPr>
-          <p:cNvPr id="17" name="TextBox 16"/>
-          <p:cNvSpPr txBox="1"/>
-          <p:nvPr/>
-        </p:nvSpPr>
-        <p:spPr>
-          <a:xfrm>
-            <a:off x="7343999" y="3905999"/>
-            <a:ext cx="4273200" cy="612000"/>
-          </a:xfrm>
-          <a:prstGeom prst="rect">
-            <a:avLst/>
-          </a:prstGeom>
-          <a:noFill/>
-          <a:ln>
-            <a:noFill/>
-          </a:ln>
-        </p:spPr>
-        <p:txBody>
-          <a:bodyPr wrap="square" lIns="54000" rIns="54000" tIns="18000" bIns="18000" anchor="t">
-            <a:spAutoFit/>
-          </a:bodyPr>
-          <a:lstStyle/>
-          <a:p>
-            <a:pPr algn="l"/>
-            <a:r>
-              <a:rPr sz="1100" b="0">
+              <a:rPr sz="1300" b="0">
                 <a:solidFill>
                   <a:srgbClr val="1A1A1A"/>
                 </a:solidFill>
                 <a:latin typeface="メイリオ"/>
                 <a:ea typeface="メイリオ"/>
               </a:rPr>
-              <a:t>答えからさらに</a:t>
-            </a:r>
-          </a:p>
-          <a:p>
-            <a:pPr algn="l"/>
-            <a:r>
-              <a:rPr sz="1100" b="0">
-                <a:solidFill>
-                  <a:srgbClr val="1A1A1A"/>
-                </a:solidFill>
-                <a:latin typeface="メイリオ"/>
-                <a:ea typeface="メイリオ"/>
-              </a:rPr>
-              <a:t>質問をつなげる</a:t>
+              <a:t>さらに質問</a:t>
             </a:r>
           </a:p>
         </p:txBody>
@@ -11543,8 +11484,8 @@
         </p:nvSpPr>
         <p:spPr>
           <a:xfrm>
-            <a:off x="6840000" y="4607999"/>
-            <a:ext cx="4813200" cy="1332000"/>
+            <a:off x="6840000" y="4824000"/>
+            <a:ext cx="4813200" cy="1404000"/>
           </a:xfrm>
           <a:prstGeom prst="rect">
             <a:avLst/>
@@ -11589,8 +11530,8 @@
         </p:nvSpPr>
         <p:spPr>
           <a:xfrm>
-            <a:off x="6894000" y="4607999"/>
-            <a:ext cx="432000" cy="1332000"/>
+            <a:off x="6894000" y="4824000"/>
+            <a:ext cx="468000" cy="1404000"/>
           </a:xfrm>
           <a:prstGeom prst="rect">
             <a:avLst/>
@@ -11608,7 +11549,7 @@
           <a:p>
             <a:pPr algn="ctr"/>
             <a:r>
-              <a:rPr sz="2200" b="1">
+              <a:rPr sz="2600" b="1">
                 <a:solidFill>
                   <a:srgbClr val="FF0000"/>
                 </a:solidFill>
@@ -11628,8 +11569,47 @@
         </p:nvSpPr>
         <p:spPr>
           <a:xfrm>
-            <a:off x="7343999" y="4697999"/>
-            <a:ext cx="4273200" cy="576000"/>
+            <a:off x="7380000" y="4932000"/>
+            <a:ext cx="4237200" cy="540000"/>
+          </a:xfrm>
+          <a:prstGeom prst="rect">
+            <a:avLst/>
+          </a:prstGeom>
+          <a:noFill/>
+          <a:ln>
+            <a:noFill/>
+          </a:ln>
+        </p:spPr>
+        <p:txBody>
+          <a:bodyPr wrap="square" lIns="54000" rIns="54000" tIns="18000" bIns="18000" anchor="ctr">
+            <a:spAutoFit/>
+          </a:bodyPr>
+          <a:lstStyle/>
+          <a:p>
+            <a:pPr algn="l"/>
+            <a:r>
+              <a:rPr sz="1700" b="1">
+                <a:solidFill>
+                  <a:srgbClr val="002060"/>
+                </a:solidFill>
+                <a:latin typeface="メイリオ"/>
+                <a:ea typeface="メイリオ"/>
+              </a:rPr>
+              <a:t>感想を伝える</a:t>
+            </a:r>
+          </a:p>
+        </p:txBody>
+      </p:sp>
+      <p:sp>
+        <p:nvSpPr>
+          <p:cNvPr id="21" name="TextBox 20"/>
+          <p:cNvSpPr txBox="1"/>
+          <p:nvPr/>
+        </p:nvSpPr>
+        <p:spPr>
+          <a:xfrm>
+            <a:off x="7380000" y="5508000"/>
+            <a:ext cx="4237200" cy="648000"/>
           </a:xfrm>
           <a:prstGeom prst="rect">
             <a:avLst/>
@@ -11647,59 +11627,20 @@
           <a:p>
             <a:pPr algn="l"/>
             <a:r>
-              <a:rPr sz="1400" b="1">
-                <a:solidFill>
-                  <a:srgbClr val="002060"/>
-                </a:solidFill>
-                <a:latin typeface="メイリオ"/>
-                <a:ea typeface="メイリオ"/>
-              </a:rPr>
-              <a:t>感想を伝える</a:t>
-            </a:r>
-          </a:p>
-        </p:txBody>
-      </p:sp>
-      <p:sp>
-        <p:nvSpPr>
-          <p:cNvPr id="21" name="TextBox 20"/>
-          <p:cNvSpPr txBox="1"/>
-          <p:nvPr/>
-        </p:nvSpPr>
-        <p:spPr>
-          <a:xfrm>
-            <a:off x="7343999" y="5291999"/>
-            <a:ext cx="4273200" cy="612000"/>
-          </a:xfrm>
-          <a:prstGeom prst="rect">
-            <a:avLst/>
-          </a:prstGeom>
-          <a:noFill/>
-          <a:ln>
-            <a:noFill/>
-          </a:ln>
-        </p:spPr>
-        <p:txBody>
-          <a:bodyPr wrap="square" lIns="54000" rIns="54000" tIns="18000" bIns="18000" anchor="t">
-            <a:spAutoFit/>
-          </a:bodyPr>
-          <a:lstStyle/>
+              <a:rPr sz="1300" b="0">
+                <a:solidFill>
+                  <a:srgbClr val="1A1A1A"/>
+                </a:solidFill>
+                <a:latin typeface="メイリオ"/>
+                <a:ea typeface="メイリオ"/>
+              </a:rPr>
+              <a:t>思いを</a:t>
+            </a:r>
+          </a:p>
           <a:p>
             <a:pPr algn="l"/>
             <a:r>
-              <a:rPr sz="1100" b="0">
-                <a:solidFill>
-                  <a:srgbClr val="1A1A1A"/>
-                </a:solidFill>
-                <a:latin typeface="メイリオ"/>
-                <a:ea typeface="メイリオ"/>
-              </a:rPr>
-              <a:t>受け取った思いを</a:t>
-            </a:r>
-          </a:p>
-          <a:p>
-            <a:pPr algn="l"/>
-            <a:r>
-              <a:rPr sz="1100" b="0">
+              <a:rPr sz="1300" b="0">
                 <a:solidFill>
                   <a:srgbClr val="1A1A1A"/>
                 </a:solidFill>
@@ -11738,7 +11679,7 @@
           <a:p>
             <a:pPr algn="l"/>
             <a:r>
-              <a:rPr sz="900" b="0">
+              <a:rPr sz="1000" b="0">
                 <a:solidFill>
                   <a:srgbClr val="666666"/>
                 </a:solidFill>
@@ -11777,7 +11718,7 @@
           <a:p>
             <a:pPr algn="r"/>
             <a:r>
-              <a:rPr sz="900" b="0">
+              <a:rPr sz="1000" b="0">
                 <a:solidFill>
                   <a:srgbClr val="666666"/>
                 </a:solidFill>
@@ -11815,8 +11756,8 @@
         </p:nvSpPr>
         <p:spPr>
           <a:xfrm>
-            <a:off x="288000" y="144000"/>
-            <a:ext cx="8280000" cy="648000"/>
+            <a:off x="288000" y="108000"/>
+            <a:ext cx="8280000" cy="720000"/>
           </a:xfrm>
           <a:prstGeom prst="rect">
             <a:avLst/>
@@ -11834,7 +11775,7 @@
           <a:p>
             <a:pPr algn="l"/>
             <a:r>
-              <a:rPr sz="3000" b="1">
+              <a:rPr sz="3400" b="1">
                 <a:solidFill>
                   <a:srgbClr val="1A1A1A"/>
                 </a:solidFill>
@@ -11854,7 +11795,7 @@
         </p:nvSpPr>
         <p:spPr>
           <a:xfrm>
-            <a:off x="288000" y="827999"/>
+            <a:off x="288000" y="864000"/>
             <a:ext cx="11617200" cy="54000"/>
           </a:xfrm>
           <a:prstGeom prst="rect">
@@ -11899,7 +11840,7 @@
         <p:spPr>
           <a:xfrm>
             <a:off x="540000" y="1152000"/>
-            <a:ext cx="1800000" cy="432000"/>
+            <a:ext cx="1980000" cy="468000"/>
           </a:xfrm>
           <a:prstGeom prst="rect">
             <a:avLst/>
@@ -11943,7 +11884,7 @@
         <p:spPr>
           <a:xfrm>
             <a:off x="540000" y="1152000"/>
-            <a:ext cx="1800000" cy="432000"/>
+            <a:ext cx="1980000" cy="468000"/>
           </a:xfrm>
           <a:prstGeom prst="rect">
             <a:avLst/>
@@ -11961,7 +11902,7 @@
           <a:p>
             <a:pPr algn="ctr"/>
             <a:r>
-              <a:rPr sz="1800" b="1">
+              <a:rPr sz="2000" b="1">
                 <a:solidFill>
                   <a:srgbClr val="FFFFFF"/>
                 </a:solidFill>
@@ -11981,8 +11922,8 @@
         </p:nvSpPr>
         <p:spPr>
           <a:xfrm>
-            <a:off x="2340000" y="1152000"/>
-            <a:ext cx="9313200" cy="432000"/>
+            <a:off x="2520000" y="1152000"/>
+            <a:ext cx="9133200" cy="468000"/>
           </a:xfrm>
           <a:prstGeom prst="rect">
             <a:avLst/>
@@ -12027,8 +11968,8 @@
         </p:nvSpPr>
         <p:spPr>
           <a:xfrm>
-            <a:off x="2340000" y="1152000"/>
-            <a:ext cx="9313200" cy="432000"/>
+            <a:off x="2520000" y="1152000"/>
+            <a:ext cx="9133200" cy="468000"/>
           </a:xfrm>
           <a:prstGeom prst="rect">
             <a:avLst/>
@@ -12046,7 +11987,7 @@
           <a:p>
             <a:pPr algn="ctr"/>
             <a:r>
-              <a:rPr sz="2200" b="1">
+              <a:rPr sz="2400" b="1">
                 <a:solidFill>
                   <a:srgbClr val="002060"/>
                 </a:solidFill>
@@ -12067,7 +12008,7 @@
         <p:spPr>
           <a:xfrm>
             <a:off x="540000" y="1692000"/>
-            <a:ext cx="1800000" cy="1007999"/>
+            <a:ext cx="1980000" cy="1080000"/>
           </a:xfrm>
           <a:prstGeom prst="rect">
             <a:avLst/>
@@ -12111,7 +12052,7 @@
         <p:spPr>
           <a:xfrm>
             <a:off x="540000" y="1692000"/>
-            <a:ext cx="1800000" cy="1007999"/>
+            <a:ext cx="1980000" cy="1080000"/>
           </a:xfrm>
           <a:prstGeom prst="rect">
             <a:avLst/>
@@ -12129,7 +12070,7 @@
           <a:p>
             <a:pPr algn="ctr"/>
             <a:r>
-              <a:rPr sz="1800" b="1">
+              <a:rPr sz="2000" b="1">
                 <a:solidFill>
                   <a:srgbClr val="FFFFFF"/>
                 </a:solidFill>
@@ -12149,8 +12090,8 @@
         </p:nvSpPr>
         <p:spPr>
           <a:xfrm>
-            <a:off x="2340000" y="1692000"/>
-            <a:ext cx="9313200" cy="1007999"/>
+            <a:off x="2520000" y="1692000"/>
+            <a:ext cx="9133200" cy="1080000"/>
           </a:xfrm>
           <a:prstGeom prst="rect">
             <a:avLst/>
@@ -12195,8 +12136,8 @@
         </p:nvSpPr>
         <p:spPr>
           <a:xfrm>
-            <a:off x="2448000" y="1764000"/>
-            <a:ext cx="9097200" cy="864000"/>
+            <a:off x="2628000" y="1764000"/>
+            <a:ext cx="8917200" cy="936000"/>
           </a:xfrm>
           <a:prstGeom prst="rect">
             <a:avLst/>
@@ -12218,7 +12159,7 @@
               </a:lnSpc>
             </a:pPr>
             <a:r>
-              <a:rPr sz="1500" b="0">
+              <a:rPr sz="1800" b="0">
                 <a:solidFill>
                   <a:srgbClr val="1A1A1A"/>
                 </a:solidFill>
@@ -12228,24 +12169,14 @@
               <a:t>手だてや話題を工夫し、</a:t>
             </a:r>
             <a:r>
-              <a:rPr sz="1600" b="1">
+              <a:rPr sz="2000" b="1">
                 <a:solidFill>
                   <a:srgbClr val="FF0000"/>
                 </a:solidFill>
                 <a:latin typeface="メイリオ"/>
                 <a:ea typeface="メイリオ"/>
               </a:rPr>
-              <a:t>視点を明確にした対話を継続的に実践</a:t>
-            </a:r>
-            <a:r>
-              <a:rPr sz="1500" b="0">
-                <a:solidFill>
-                  <a:srgbClr val="1A1A1A"/>
-                </a:solidFill>
-                <a:latin typeface="メイリオ"/>
-                <a:ea typeface="メイリオ"/>
-              </a:rPr>
-              <a:t>する</a:t>
+              <a:t>視点を明確にした対話を継続</a:t>
             </a:r>
           </a:p>
           <a:p>
@@ -12255,34 +12186,34 @@
               </a:lnSpc>
             </a:pPr>
             <a:r>
-              <a:rPr sz="1500" b="0">
+              <a:rPr sz="1800" b="0">
                 <a:solidFill>
                   <a:srgbClr val="1A1A1A"/>
                 </a:solidFill>
                 <a:latin typeface="メイリオ"/>
                 <a:ea typeface="メイリオ"/>
               </a:rPr>
-              <a:t>ことで、児童の</a:t>
-            </a:r>
-            <a:r>
-              <a:rPr sz="1600" b="1">
+              <a:t>することで、児童の</a:t>
+            </a:r>
+            <a:r>
+              <a:rPr sz="2000" b="1">
                 <a:solidFill>
                   <a:srgbClr val="FF0000"/>
                 </a:solidFill>
                 <a:latin typeface="メイリオ"/>
                 <a:ea typeface="メイリオ"/>
               </a:rPr>
-              <a:t>対話に広がりや深まりが見られる</a:t>
-            </a:r>
-            <a:r>
-              <a:rPr sz="1500" b="0">
+              <a:t>対話に広がりや深まり</a:t>
+            </a:r>
+            <a:r>
+              <a:rPr sz="1800" b="0">
                 <a:solidFill>
                   <a:srgbClr val="1A1A1A"/>
                 </a:solidFill>
                 <a:latin typeface="メイリオ"/>
                 <a:ea typeface="メイリオ"/>
               </a:rPr>
-              <a:t>だろう。</a:t>
+              <a:t>が見られる。</a:t>
             </a:r>
           </a:p>
         </p:txBody>
@@ -12295,7 +12226,7 @@
         </p:nvSpPr>
         <p:spPr>
           <a:xfrm>
-            <a:off x="540000" y="2844000"/>
+            <a:off x="540000" y="2880000"/>
             <a:ext cx="11113200" cy="324000"/>
           </a:xfrm>
           <a:prstGeom prst="rect">
@@ -12314,7 +12245,7 @@
           <a:p>
             <a:pPr algn="ctr"/>
             <a:r>
-              <a:rPr sz="1800" b="1">
+              <a:rPr sz="2000" b="1">
                 <a:solidFill>
                   <a:srgbClr val="FF0000"/>
                 </a:solidFill>
@@ -12335,7 +12266,7 @@
         <p:spPr>
           <a:xfrm>
             <a:off x="552600" y="3311999"/>
-            <a:ext cx="3600000" cy="468000"/>
+            <a:ext cx="3600000" cy="540000"/>
           </a:xfrm>
           <a:prstGeom prst="rect">
             <a:avLst/>
@@ -12379,7 +12310,7 @@
         <p:spPr>
           <a:xfrm>
             <a:off x="552600" y="3311999"/>
-            <a:ext cx="3600000" cy="468000"/>
+            <a:ext cx="3600000" cy="540000"/>
           </a:xfrm>
           <a:prstGeom prst="rect">
             <a:avLst/>
@@ -12397,7 +12328,7 @@
           <a:p>
             <a:pPr algn="ctr"/>
             <a:r>
-              <a:rPr sz="1800" b="1">
+              <a:rPr sz="2000" b="1">
                 <a:solidFill>
                   <a:srgbClr val="FFFFFF"/>
                 </a:solidFill>
@@ -12417,8 +12348,8 @@
         </p:nvSpPr>
         <p:spPr>
           <a:xfrm>
-            <a:off x="552600" y="3779999"/>
-            <a:ext cx="3600000" cy="2412000"/>
+            <a:off x="552600" y="3851999"/>
+            <a:ext cx="3600000" cy="2340000"/>
           </a:xfrm>
           <a:prstGeom prst="rect">
             <a:avLst/>
@@ -12463,7 +12394,7 @@
         </p:nvSpPr>
         <p:spPr>
           <a:xfrm>
-            <a:off x="660600" y="3887999"/>
+            <a:off x="660600" y="3923999"/>
             <a:ext cx="3384000" cy="2160000"/>
           </a:xfrm>
           <a:prstGeom prst="rect">
@@ -12486,7 +12417,7 @@
               </a:lnSpc>
             </a:pPr>
             <a:r>
-              <a:rPr sz="1800" b="1">
+              <a:rPr sz="2200" b="1">
                 <a:solidFill>
                   <a:srgbClr val="FF0000"/>
                 </a:solidFill>
@@ -12503,7 +12434,7 @@
               </a:lnSpc>
             </a:pPr>
             <a:r>
-              <a:rPr sz="1600" b="0">
+              <a:rPr sz="1900" b="0">
                 <a:solidFill>
                   <a:srgbClr val="1A1A1A"/>
                 </a:solidFill>
@@ -12520,7 +12451,7 @@
               </a:lnSpc>
             </a:pPr>
             <a:r>
-              <a:rPr sz="1600" b="0">
+              <a:rPr sz="1900" b="0">
                 <a:solidFill>
                   <a:srgbClr val="1A1A1A"/>
                 </a:solidFill>
@@ -12541,7 +12472,7 @@
         <p:spPr>
           <a:xfrm>
             <a:off x="4296600" y="3311999"/>
-            <a:ext cx="3600000" cy="468000"/>
+            <a:ext cx="3600000" cy="540000"/>
           </a:xfrm>
           <a:prstGeom prst="rect">
             <a:avLst/>
@@ -12585,7 +12516,7 @@
         <p:spPr>
           <a:xfrm>
             <a:off x="4296600" y="3311999"/>
-            <a:ext cx="3600000" cy="468000"/>
+            <a:ext cx="3600000" cy="540000"/>
           </a:xfrm>
           <a:prstGeom prst="rect">
             <a:avLst/>
@@ -12603,7 +12534,7 @@
           <a:p>
             <a:pPr algn="ctr"/>
             <a:r>
-              <a:rPr sz="1800" b="1">
+              <a:rPr sz="2000" b="1">
                 <a:solidFill>
                   <a:srgbClr val="FFFFFF"/>
                 </a:solidFill>
@@ -12623,8 +12554,8 @@
         </p:nvSpPr>
         <p:spPr>
           <a:xfrm>
-            <a:off x="4296600" y="3779999"/>
-            <a:ext cx="3600000" cy="2412000"/>
+            <a:off x="4296600" y="3851999"/>
+            <a:ext cx="3600000" cy="2340000"/>
           </a:xfrm>
           <a:prstGeom prst="rect">
             <a:avLst/>
@@ -12669,7 +12600,7 @@
         </p:nvSpPr>
         <p:spPr>
           <a:xfrm>
-            <a:off x="4404600" y="3887999"/>
+            <a:off x="4404600" y="3923999"/>
             <a:ext cx="3384000" cy="2160000"/>
           </a:xfrm>
           <a:prstGeom prst="rect">
@@ -12692,7 +12623,7 @@
               </a:lnSpc>
             </a:pPr>
             <a:r>
-              <a:rPr sz="1800" b="1">
+              <a:rPr sz="2200" b="1">
                 <a:solidFill>
                   <a:srgbClr val="FF0000"/>
                 </a:solidFill>
@@ -12709,7 +12640,7 @@
               </a:lnSpc>
             </a:pPr>
             <a:r>
-              <a:rPr sz="1600" b="0">
+              <a:rPr sz="1900" b="0">
                 <a:solidFill>
                   <a:srgbClr val="1A1A1A"/>
                 </a:solidFill>
@@ -12726,7 +12657,7 @@
               </a:lnSpc>
             </a:pPr>
             <a:r>
-              <a:rPr sz="1600" b="0">
+              <a:rPr sz="1900" b="0">
                 <a:solidFill>
                   <a:srgbClr val="1A1A1A"/>
                 </a:solidFill>
@@ -12747,7 +12678,7 @@
         <p:spPr>
           <a:xfrm>
             <a:off x="8040600" y="3311999"/>
-            <a:ext cx="3600000" cy="468000"/>
+            <a:ext cx="3600000" cy="540000"/>
           </a:xfrm>
           <a:prstGeom prst="rect">
             <a:avLst/>
@@ -12791,7 +12722,7 @@
         <p:spPr>
           <a:xfrm>
             <a:off x="8040600" y="3311999"/>
-            <a:ext cx="3600000" cy="468000"/>
+            <a:ext cx="3600000" cy="540000"/>
           </a:xfrm>
           <a:prstGeom prst="rect">
             <a:avLst/>
@@ -12809,7 +12740,7 @@
           <a:p>
             <a:pPr algn="ctr"/>
             <a:r>
-              <a:rPr sz="1800" b="1">
+              <a:rPr sz="2000" b="1">
                 <a:solidFill>
                   <a:srgbClr val="FFFFFF"/>
                 </a:solidFill>
@@ -12829,8 +12760,8 @@
         </p:nvSpPr>
         <p:spPr>
           <a:xfrm>
-            <a:off x="8040600" y="3779999"/>
-            <a:ext cx="3600000" cy="2412000"/>
+            <a:off x="8040600" y="3851999"/>
+            <a:ext cx="3600000" cy="2340000"/>
           </a:xfrm>
           <a:prstGeom prst="rect">
             <a:avLst/>
@@ -12875,7 +12806,7 @@
         </p:nvSpPr>
         <p:spPr>
           <a:xfrm>
-            <a:off x="8148600" y="3887999"/>
+            <a:off x="8148600" y="3923999"/>
             <a:ext cx="3384000" cy="2160000"/>
           </a:xfrm>
           <a:prstGeom prst="rect">
@@ -12898,7 +12829,7 @@
               </a:lnSpc>
             </a:pPr>
             <a:r>
-              <a:rPr sz="1700" b="1">
+              <a:rPr sz="2000" b="1">
                 <a:solidFill>
                   <a:srgbClr val="FF0000"/>
                 </a:solidFill>
@@ -12914,8 +12845,15 @@
                 <a:spcPct val="150000"/>
               </a:lnSpc>
             </a:pPr>
-            <a:r>
-              <a:rPr sz="1600" b="0">
+          </a:p>
+          <a:p>
+            <a:pPr algn="ctr">
+              <a:lnSpc>
+                <a:spcPct val="150000"/>
+              </a:lnSpc>
+            </a:pPr>
+            <a:r>
+              <a:rPr sz="1900" b="0">
                 <a:solidFill>
                   <a:srgbClr val="1A1A1A"/>
                 </a:solidFill>
@@ -12954,7 +12892,7 @@
           <a:p>
             <a:pPr algn="l"/>
             <a:r>
-              <a:rPr sz="900" b="0">
+              <a:rPr sz="1000" b="0">
                 <a:solidFill>
                   <a:srgbClr val="666666"/>
                 </a:solidFill>
@@ -12993,7 +12931,7 @@
           <a:p>
             <a:pPr algn="r"/>
             <a:r>
-              <a:rPr sz="900" b="0">
+              <a:rPr sz="1000" b="0">
                 <a:solidFill>
                   <a:srgbClr val="666666"/>
                 </a:solidFill>
@@ -13031,8 +12969,8 @@
         </p:nvSpPr>
         <p:spPr>
           <a:xfrm>
-            <a:off x="288000" y="144000"/>
-            <a:ext cx="8280000" cy="648000"/>
+            <a:off x="288000" y="108000"/>
+            <a:ext cx="8280000" cy="720000"/>
           </a:xfrm>
           <a:prstGeom prst="rect">
             <a:avLst/>
@@ -13050,7 +12988,7 @@
           <a:p>
             <a:pPr algn="l"/>
             <a:r>
-              <a:rPr sz="3000" b="1">
+              <a:rPr sz="3400" b="1">
                 <a:solidFill>
                   <a:srgbClr val="1A1A1A"/>
                 </a:solidFill>
@@ -13070,7 +13008,7 @@
         </p:nvSpPr>
         <p:spPr>
           <a:xfrm>
-            <a:off x="288000" y="827999"/>
+            <a:off x="288000" y="864000"/>
             <a:ext cx="11617200" cy="54000"/>
           </a:xfrm>
           <a:prstGeom prst="rect">
@@ -13115,7 +13053,7 @@
         <p:spPr>
           <a:xfrm>
             <a:off x="7513200" y="216000"/>
-            <a:ext cx="4320000" cy="503999"/>
+            <a:ext cx="4320000" cy="612000"/>
           </a:xfrm>
           <a:prstGeom prst="rect">
             <a:avLst/>
@@ -13133,14 +13071,14 @@
           <a:p>
             <a:pPr algn="r"/>
             <a:r>
-              <a:rPr sz="1100" b="1">
+              <a:rPr sz="1300" b="1">
                 <a:solidFill>
                   <a:srgbClr val="666666"/>
                 </a:solidFill>
                 <a:latin typeface="メイリオ"/>
                 <a:ea typeface="メイリオ"/>
               </a:rPr>
-              <a:t>「小学校学習指導要領（平成29年告示）解説  国語編」</a:t>
+              <a:t>「小学校学習指導要領（H29告示）解説 国語編」</a:t>
             </a:r>
           </a:p>
         </p:txBody>
@@ -13154,7 +13092,7 @@
         <p:spPr>
           <a:xfrm>
             <a:off x="540000" y="1152000"/>
-            <a:ext cx="11113200" cy="468000"/>
+            <a:ext cx="11113200" cy="503999"/>
           </a:xfrm>
           <a:prstGeom prst="rect">
             <a:avLst/>
@@ -13198,7 +13136,7 @@
         <p:spPr>
           <a:xfrm>
             <a:off x="540000" y="1152000"/>
-            <a:ext cx="11113200" cy="468000"/>
+            <a:ext cx="11113200" cy="503999"/>
           </a:xfrm>
           <a:prstGeom prst="rect">
             <a:avLst/>
@@ -13216,14 +13154,14 @@
           <a:p>
             <a:pPr algn="ctr"/>
             <a:r>
-              <a:rPr sz="1900" b="1">
+              <a:rPr sz="2200" b="1">
                 <a:solidFill>
                   <a:srgbClr val="FFFFFF"/>
                 </a:solidFill>
                 <a:latin typeface="メイリオ"/>
                 <a:ea typeface="メイリオ"/>
               </a:rPr>
-              <a:t>第３学年及び第４学年「話すこと・聞くこと」  指導事項 エ</a:t>
+              <a:t>第３・４学年「話すこと・聞くこと」  指導事項 エ</a:t>
             </a:r>
           </a:p>
         </p:txBody>
@@ -13236,7 +13174,7 @@
         </p:nvSpPr>
         <p:spPr>
           <a:xfrm>
-            <a:off x="540000" y="1728000"/>
+            <a:off x="540000" y="1764000"/>
             <a:ext cx="11113200" cy="2160000"/>
           </a:xfrm>
           <a:prstGeom prst="rect">
@@ -13282,8 +13220,8 @@
         </p:nvSpPr>
         <p:spPr>
           <a:xfrm>
-            <a:off x="720000" y="1836000"/>
-            <a:ext cx="10753200" cy="576000"/>
+            <a:off x="720000" y="1872000"/>
+            <a:ext cx="10753200" cy="612000"/>
           </a:xfrm>
           <a:prstGeom prst="rect">
             <a:avLst/>
@@ -13301,27 +13239,27 @@
           <a:p>
             <a:pPr algn="l"/>
             <a:r>
-              <a:rPr sz="1800" b="1">
+              <a:rPr sz="2000" b="1">
                 <a:solidFill>
                   <a:srgbClr val="1A1A1A"/>
                 </a:solidFill>
                 <a:latin typeface="メイリオ"/>
                 <a:ea typeface="メイリオ"/>
               </a:rPr>
-              <a:t>「必要なことを記録したり </a:t>
-            </a:r>
-            <a:r>
-              <a:rPr sz="2200" b="1">
+              <a:t>「必要なことを </a:t>
+            </a:r>
+            <a:r>
+              <a:rPr sz="2600" b="1">
                 <a:solidFill>
                   <a:srgbClr val="FF0000"/>
                 </a:solidFill>
                 <a:latin typeface="メイリオ"/>
                 <a:ea typeface="メイリオ"/>
               </a:rPr>
-              <a:t>質問したりしながら聞き</a:t>
-            </a:r>
-            <a:r>
-              <a:rPr sz="1800" b="1">
+              <a:t>質問しながら聞き</a:t>
+            </a:r>
+            <a:r>
+              <a:rPr sz="2000" b="1">
                 <a:solidFill>
                   <a:srgbClr val="1A1A1A"/>
                 </a:solidFill>
@@ -13341,8 +13279,8 @@
         </p:nvSpPr>
         <p:spPr>
           <a:xfrm>
-            <a:off x="720000" y="2448000"/>
-            <a:ext cx="10753200" cy="576000"/>
+            <a:off x="720000" y="2520000"/>
+            <a:ext cx="10753200" cy="612000"/>
           </a:xfrm>
           <a:prstGeom prst="rect">
             <a:avLst/>
@@ -13360,17 +13298,17 @@
           <a:p>
             <a:pPr algn="l"/>
             <a:r>
-              <a:rPr sz="1800" b="1">
+              <a:rPr sz="2000" b="1">
                 <a:solidFill>
                   <a:srgbClr val="1A1A1A"/>
                 </a:solidFill>
                 <a:latin typeface="メイリオ"/>
                 <a:ea typeface="メイリオ"/>
               </a:rPr>
-              <a:t>  話し手が伝えたいことや自分が聞きたいことの </a:t>
-            </a:r>
-            <a:r>
-              <a:rPr sz="2200" b="1">
+              <a:t>  話し手が伝えたいことの </a:t>
+            </a:r>
+            <a:r>
+              <a:rPr sz="2600" b="1">
                 <a:solidFill>
                   <a:srgbClr val="FF0000"/>
                 </a:solidFill>
@@ -13380,7 +13318,7 @@
               <a:t>中心を捉え</a:t>
             </a:r>
             <a:r>
-              <a:rPr sz="1800" b="1">
+              <a:rPr sz="2000" b="1">
                 <a:solidFill>
                   <a:srgbClr val="1A1A1A"/>
                 </a:solidFill>
@@ -13400,8 +13338,8 @@
         </p:nvSpPr>
         <p:spPr>
           <a:xfrm>
-            <a:off x="720000" y="3096000"/>
-            <a:ext cx="10753200" cy="576000"/>
+            <a:off x="720000" y="3168000"/>
+            <a:ext cx="10753200" cy="612000"/>
           </a:xfrm>
           <a:prstGeom prst="rect">
             <a:avLst/>
@@ -13419,7 +13357,7 @@
           <a:p>
             <a:pPr algn="l"/>
             <a:r>
-              <a:rPr sz="1800" b="1">
+              <a:rPr sz="2000" b="1">
                 <a:solidFill>
                   <a:srgbClr val="1A1A1A"/>
                 </a:solidFill>
@@ -13429,7 +13367,7 @@
               <a:t>   </a:t>
             </a:r>
             <a:r>
-              <a:rPr sz="2200" b="1">
+              <a:rPr sz="2600" b="1">
                 <a:solidFill>
                   <a:srgbClr val="FF0000"/>
                 </a:solidFill>
@@ -13439,7 +13377,7 @@
               <a:t>自分の考えをもつ</a:t>
             </a:r>
             <a:r>
-              <a:rPr sz="1800" b="1">
+              <a:rPr sz="2000" b="1">
                 <a:solidFill>
                   <a:srgbClr val="1A1A1A"/>
                 </a:solidFill>
@@ -13459,8 +13397,8 @@
         </p:nvSpPr>
         <p:spPr>
           <a:xfrm>
-            <a:off x="540000" y="4031999"/>
-            <a:ext cx="2880000" cy="432000"/>
+            <a:off x="540000" y="4104000"/>
+            <a:ext cx="3240000" cy="503999"/>
           </a:xfrm>
           <a:prstGeom prst="rect">
             <a:avLst/>
@@ -13503,8 +13441,8 @@
         </p:nvSpPr>
         <p:spPr>
           <a:xfrm>
-            <a:off x="540000" y="4031999"/>
-            <a:ext cx="2880000" cy="432000"/>
+            <a:off x="540000" y="4104000"/>
+            <a:ext cx="3240000" cy="503999"/>
           </a:xfrm>
           <a:prstGeom prst="rect">
             <a:avLst/>
@@ -13522,7 +13460,7 @@
           <a:p>
             <a:pPr algn="ctr"/>
             <a:r>
-              <a:rPr sz="1600" b="1">
+              <a:rPr sz="1800" b="1">
                 <a:solidFill>
                   <a:srgbClr val="FFFFFF"/>
                 </a:solidFill>
@@ -13542,8 +13480,8 @@
         </p:nvSpPr>
         <p:spPr>
           <a:xfrm>
-            <a:off x="540000" y="4464000"/>
-            <a:ext cx="11113200" cy="1800000"/>
+            <a:off x="540000" y="4608000"/>
+            <a:ext cx="11113200" cy="1728000"/>
           </a:xfrm>
           <a:prstGeom prst="rect">
             <a:avLst/>
@@ -13588,8 +13526,8 @@
         </p:nvSpPr>
         <p:spPr>
           <a:xfrm>
-            <a:off x="720000" y="4536000"/>
-            <a:ext cx="10753200" cy="432000"/>
+            <a:off x="720000" y="4680000"/>
+            <a:ext cx="10753200" cy="503999"/>
           </a:xfrm>
           <a:prstGeom prst="rect">
             <a:avLst/>
@@ -13607,7 +13545,7 @@
           <a:p>
             <a:pPr algn="l"/>
             <a:r>
-              <a:rPr sz="1800" b="0">
+              <a:rPr sz="2000" b="0">
                 <a:solidFill>
                   <a:srgbClr val="1A1A1A"/>
                 </a:solidFill>
@@ -13617,7 +13555,7 @@
               <a:t>・</a:t>
             </a:r>
             <a:r>
-              <a:rPr sz="1900" b="1">
+              <a:rPr sz="2200" b="1">
                 <a:solidFill>
                   <a:srgbClr val="FF0000"/>
                 </a:solidFill>
@@ -13637,8 +13575,8 @@
         </p:nvSpPr>
         <p:spPr>
           <a:xfrm>
-            <a:off x="720000" y="4968000"/>
-            <a:ext cx="10753200" cy="432000"/>
+            <a:off x="720000" y="5183999"/>
+            <a:ext cx="10753200" cy="503999"/>
           </a:xfrm>
           <a:prstGeom prst="rect">
             <a:avLst/>
@@ -13656,17 +13594,17 @@
           <a:p>
             <a:pPr algn="l"/>
             <a:r>
-              <a:rPr sz="1700" b="0">
+              <a:rPr sz="1900" b="0">
                 <a:solidFill>
                   <a:srgbClr val="1A1A1A"/>
                 </a:solidFill>
                 <a:latin typeface="メイリオ"/>
                 <a:ea typeface="メイリオ"/>
               </a:rPr>
-              <a:t>       = 解説で示された </a:t>
-            </a:r>
-            <a:r>
-              <a:rPr sz="1900" b="1">
+              <a:t>      =  </a:t>
+            </a:r>
+            <a:r>
+              <a:rPr sz="2200" b="1">
                 <a:solidFill>
                   <a:srgbClr val="FF0000"/>
                 </a:solidFill>
@@ -13676,7 +13614,7 @@
               <a:t>〝聞く力の中核〟</a:t>
             </a:r>
             <a:r>
-              <a:rPr sz="1700" b="0">
+              <a:rPr sz="1900" b="0">
                 <a:solidFill>
                   <a:srgbClr val="1A1A1A"/>
                 </a:solidFill>
@@ -13696,8 +13634,8 @@
         </p:nvSpPr>
         <p:spPr>
           <a:xfrm>
-            <a:off x="720000" y="5436000"/>
-            <a:ext cx="10753200" cy="432000"/>
+            <a:off x="720000" y="5724000"/>
+            <a:ext cx="10753200" cy="503999"/>
           </a:xfrm>
           <a:prstGeom prst="rect">
             <a:avLst/>
@@ -13715,7 +13653,7 @@
           <a:p>
             <a:pPr algn="l"/>
             <a:r>
-              <a:rPr sz="1800" b="0">
+              <a:rPr sz="2000" b="0">
                 <a:solidFill>
                   <a:srgbClr val="1A1A1A"/>
                 </a:solidFill>
@@ -13725,27 +13663,17 @@
               <a:t>・</a:t>
             </a:r>
             <a:r>
-              <a:rPr sz="1900" b="1">
-                <a:solidFill>
-                  <a:srgbClr val="FF0000"/>
-                </a:solidFill>
-                <a:latin typeface="メイリオ"/>
-                <a:ea typeface="メイリオ"/>
-              </a:rPr>
-              <a:t>「中心を捉え、自分の考えをもつ」</a:t>
-            </a:r>
-            <a:r>
-              <a:rPr sz="1700" b="0">
+              <a:rPr sz="1900" b="0">
                 <a:solidFill>
                   <a:srgbClr val="1A1A1A"/>
                 </a:solidFill>
                 <a:latin typeface="メイリオ"/>
                 <a:ea typeface="メイリオ"/>
               </a:rPr>
-              <a:t>   →   </a:t>
-            </a:r>
-            <a:r>
-              <a:rPr sz="1900" b="1">
+              <a:t>「考えをもつ」 →  </a:t>
+            </a:r>
+            <a:r>
+              <a:rPr sz="2200" b="1">
                 <a:solidFill>
                   <a:srgbClr val="002060"/>
                 </a:solidFill>
@@ -13784,7 +13712,7 @@
           <a:p>
             <a:pPr algn="l"/>
             <a:r>
-              <a:rPr sz="900" b="0">
+              <a:rPr sz="1000" b="0">
                 <a:solidFill>
                   <a:srgbClr val="666666"/>
                 </a:solidFill>
@@ -13823,7 +13751,7 @@
           <a:p>
             <a:pPr algn="r"/>
             <a:r>
-              <a:rPr sz="900" b="0">
+              <a:rPr sz="1000" b="0">
                 <a:solidFill>
                   <a:srgbClr val="666666"/>
                 </a:solidFill>
@@ -13861,8 +13789,8 @@
         </p:nvSpPr>
         <p:spPr>
           <a:xfrm>
-            <a:off x="288000" y="144000"/>
-            <a:ext cx="8280000" cy="648000"/>
+            <a:off x="288000" y="108000"/>
+            <a:ext cx="8280000" cy="720000"/>
           </a:xfrm>
           <a:prstGeom prst="rect">
             <a:avLst/>
@@ -13880,14 +13808,14 @@
           <a:p>
             <a:pPr algn="l"/>
             <a:r>
-              <a:rPr sz="3000" b="1">
+              <a:rPr sz="3400" b="1">
                 <a:solidFill>
                   <a:srgbClr val="1A1A1A"/>
                 </a:solidFill>
                 <a:latin typeface="メイリオ"/>
                 <a:ea typeface="メイリオ"/>
               </a:rPr>
-              <a:t>③-2  根拠資料②  対話的な学びの重要性</a:t>
+              <a:t>③-2  根拠資料②  対話的な学び</a:t>
             </a:r>
           </a:p>
         </p:txBody>
@@ -13900,7 +13828,7 @@
         </p:nvSpPr>
         <p:spPr>
           <a:xfrm>
-            <a:off x="288000" y="827999"/>
+            <a:off x="288000" y="864000"/>
             <a:ext cx="11617200" cy="54000"/>
           </a:xfrm>
           <a:prstGeom prst="rect">
@@ -13945,7 +13873,7 @@
         <p:spPr>
           <a:xfrm>
             <a:off x="7513200" y="216000"/>
-            <a:ext cx="4320000" cy="503999"/>
+            <a:ext cx="4320000" cy="612000"/>
           </a:xfrm>
           <a:prstGeom prst="rect">
             <a:avLst/>
@@ -13963,14 +13891,14 @@
           <a:p>
             <a:pPr algn="r"/>
             <a:r>
-              <a:rPr sz="1100" b="1">
+              <a:rPr sz="1300" b="1">
                 <a:solidFill>
                   <a:srgbClr val="666666"/>
                 </a:solidFill>
                 <a:latin typeface="メイリオ"/>
                 <a:ea typeface="メイリオ"/>
               </a:rPr>
-              <a:t>中央教育審議会答申「令和の日本型学校教育」（令和3年1月）</a:t>
+              <a:t>中教審答申「令和の日本型学校教育」(R3.1)</a:t>
             </a:r>
           </a:p>
         </p:txBody>
@@ -13984,7 +13912,7 @@
         <p:spPr>
           <a:xfrm>
             <a:off x="540000" y="1152000"/>
-            <a:ext cx="11113200" cy="468000"/>
+            <a:ext cx="11113200" cy="503999"/>
           </a:xfrm>
           <a:prstGeom prst="rect">
             <a:avLst/>
@@ -14028,7 +13956,7 @@
         <p:spPr>
           <a:xfrm>
             <a:off x="540000" y="1152000"/>
-            <a:ext cx="11113200" cy="468000"/>
+            <a:ext cx="11113200" cy="503999"/>
           </a:xfrm>
           <a:prstGeom prst="rect">
             <a:avLst/>
@@ -14046,7 +13974,7 @@
           <a:p>
             <a:pPr algn="ctr"/>
             <a:r>
-              <a:rPr sz="1900" b="1">
+              <a:rPr sz="2200" b="1">
                 <a:solidFill>
                   <a:srgbClr val="FFFFFF"/>
                 </a:solidFill>
@@ -14066,8 +13994,8 @@
         </p:nvSpPr>
         <p:spPr>
           <a:xfrm>
-            <a:off x="540000" y="1620000"/>
-            <a:ext cx="11113200" cy="972000"/>
+            <a:off x="540000" y="1655999"/>
+            <a:ext cx="11113200" cy="1152000"/>
           </a:xfrm>
           <a:prstGeom prst="rect">
             <a:avLst/>
@@ -14112,8 +14040,8 @@
         </p:nvSpPr>
         <p:spPr>
           <a:xfrm>
-            <a:off x="720000" y="1692000"/>
-            <a:ext cx="10753200" cy="432000"/>
+            <a:off x="720000" y="1764000"/>
+            <a:ext cx="10753200" cy="503999"/>
           </a:xfrm>
           <a:prstGeom prst="rect">
             <a:avLst/>
@@ -14131,7 +14059,7 @@
           <a:p>
             <a:pPr algn="ctr"/>
             <a:r>
-              <a:rPr sz="1900" b="1">
+              <a:rPr sz="2200" b="1">
                 <a:solidFill>
                   <a:srgbClr val="1A1A1A"/>
                 </a:solidFill>
@@ -14141,7 +14069,7 @@
               <a:t>「</a:t>
             </a:r>
             <a:r>
-              <a:rPr sz="2100" b="1">
+              <a:rPr sz="2400" b="1">
                 <a:solidFill>
                   <a:srgbClr val="FF0000"/>
                 </a:solidFill>
@@ -14151,7 +14079,7 @@
               <a:t>個別最適な学び</a:t>
             </a:r>
             <a:r>
-              <a:rPr sz="1900" b="1">
+              <a:rPr sz="2200" b="1">
                 <a:solidFill>
                   <a:srgbClr val="1A1A1A"/>
                 </a:solidFill>
@@ -14161,7 +14089,7 @@
               <a:t>」と「</a:t>
             </a:r>
             <a:r>
-              <a:rPr sz="2100" b="1">
+              <a:rPr sz="2400" b="1">
                 <a:solidFill>
                   <a:srgbClr val="FF0000"/>
                 </a:solidFill>
@@ -14171,48 +14099,97 @@
               <a:t>協働的な学び</a:t>
             </a:r>
             <a:r>
-              <a:rPr sz="1900" b="1">
+              <a:rPr sz="2200" b="1">
                 <a:solidFill>
                   <a:srgbClr val="1A1A1A"/>
                 </a:solidFill>
                 <a:latin typeface="メイリオ"/>
                 <a:ea typeface="メイリオ"/>
               </a:rPr>
-              <a:t>」を </a:t>
-            </a:r>
-            <a:r>
-              <a:rPr sz="2100" b="1">
+              <a:t>」を</a:t>
+            </a:r>
+          </a:p>
+        </p:txBody>
+      </p:sp>
+      <p:sp>
+        <p:nvSpPr>
+          <p:cNvPr id="9" name="TextBox 8"/>
+          <p:cNvSpPr txBox="1"/>
+          <p:nvPr/>
+        </p:nvSpPr>
+        <p:spPr>
+          <a:xfrm>
+            <a:off x="720000" y="2268000"/>
+            <a:ext cx="10753200" cy="503999"/>
+          </a:xfrm>
+          <a:prstGeom prst="rect">
+            <a:avLst/>
+          </a:prstGeom>
+          <a:noFill/>
+          <a:ln>
+            <a:noFill/>
+          </a:ln>
+        </p:spPr>
+        <p:txBody>
+          <a:bodyPr wrap="square" lIns="54000" rIns="54000" tIns="18000" bIns="18000" anchor="ctr">
+            <a:spAutoFit/>
+          </a:bodyPr>
+          <a:lstStyle/>
+          <a:p>
+            <a:pPr algn="ctr"/>
+            <a:r>
+              <a:rPr sz="2400" b="1">
                 <a:solidFill>
                   <a:srgbClr val="002060"/>
                 </a:solidFill>
                 <a:latin typeface="メイリオ"/>
                 <a:ea typeface="メイリオ"/>
               </a:rPr>
-              <a:t>一体的に充実</a:t>
-            </a:r>
-            <a:r>
-              <a:rPr sz="1900" b="1">
+              <a:t>一体的に充実 </a:t>
+            </a:r>
+            <a:r>
+              <a:rPr sz="2200" b="1">
                 <a:solidFill>
                   <a:srgbClr val="1A1A1A"/>
                 </a:solidFill>
                 <a:latin typeface="メイリオ"/>
                 <a:ea typeface="メイリオ"/>
               </a:rPr>
-              <a:t> させ、</a:t>
-            </a:r>
-          </a:p>
-        </p:txBody>
-      </p:sp>
-      <p:sp>
-        <p:nvSpPr>
-          <p:cNvPr id="9" name="TextBox 8"/>
-          <p:cNvSpPr txBox="1"/>
-          <p:nvPr/>
-        </p:nvSpPr>
-        <p:spPr>
-          <a:xfrm>
-            <a:off x="720000" y="2124000"/>
-            <a:ext cx="10753200" cy="432000"/>
+              <a:t>させ、</a:t>
+            </a:r>
+            <a:r>
+              <a:rPr sz="2400" b="1">
+                <a:solidFill>
+                  <a:srgbClr val="FF0000"/>
+                </a:solidFill>
+                <a:latin typeface="メイリオ"/>
+                <a:ea typeface="メイリオ"/>
+              </a:rPr>
+              <a:t>主体的・対話的で深い学び</a:t>
+            </a:r>
+            <a:r>
+              <a:rPr sz="2200" b="1">
+                <a:solidFill>
+                  <a:srgbClr val="1A1A1A"/>
+                </a:solidFill>
+                <a:latin typeface="メイリオ"/>
+                <a:ea typeface="メイリオ"/>
+              </a:rPr>
+              <a:t>の実現を目指す。」</a:t>
+            </a:r>
+          </a:p>
+        </p:txBody>
+      </p:sp>
+      <p:sp>
+        <p:nvSpPr>
+          <p:cNvPr id="10" name="TextBox 9"/>
+          <p:cNvSpPr txBox="1"/>
+          <p:nvPr/>
+        </p:nvSpPr>
+        <p:spPr>
+          <a:xfrm>
+            <a:off x="540000" y="2951999"/>
+            <a:ext cx="11113200" cy="324000"/>
           </a:xfrm>
           <a:prstGeom prst="rect">
             <a:avLst/>
@@ -14230,66 +14207,7 @@
           <a:p>
             <a:pPr algn="ctr"/>
             <a:r>
-              <a:rPr sz="1900" b="1">
-                <a:solidFill>
-                  <a:srgbClr val="1A1A1A"/>
-                </a:solidFill>
-                <a:latin typeface="メイリオ"/>
-                <a:ea typeface="メイリオ"/>
-              </a:rPr>
-              <a:t>  </a:t>
-            </a:r>
-            <a:r>
-              <a:rPr sz="2100" b="1">
-                <a:solidFill>
-                  <a:srgbClr val="FF0000"/>
-                </a:solidFill>
-                <a:latin typeface="メイリオ"/>
-                <a:ea typeface="メイリオ"/>
-              </a:rPr>
-              <a:t>主体的・対話的で深い学び</a:t>
-            </a:r>
-            <a:r>
-              <a:rPr sz="1900" b="1">
-                <a:solidFill>
-                  <a:srgbClr val="1A1A1A"/>
-                </a:solidFill>
-                <a:latin typeface="メイリオ"/>
-                <a:ea typeface="メイリオ"/>
-              </a:rPr>
-              <a:t> の実現を目指す。」</a:t>
-            </a:r>
-          </a:p>
-        </p:txBody>
-      </p:sp>
-      <p:sp>
-        <p:nvSpPr>
-          <p:cNvPr id="10" name="TextBox 9"/>
-          <p:cNvSpPr txBox="1"/>
-          <p:nvPr/>
-        </p:nvSpPr>
-        <p:spPr>
-          <a:xfrm>
-            <a:off x="540000" y="2700000"/>
-            <a:ext cx="11113200" cy="324000"/>
-          </a:xfrm>
-          <a:prstGeom prst="rect">
-            <a:avLst/>
-          </a:prstGeom>
-          <a:noFill/>
-          <a:ln>
-            <a:noFill/>
-          </a:ln>
-        </p:spPr>
-        <p:txBody>
-          <a:bodyPr wrap="square" lIns="54000" rIns="54000" tIns="18000" bIns="18000" anchor="ctr">
-            <a:spAutoFit/>
-          </a:bodyPr>
-          <a:lstStyle/>
-          <a:p>
-            <a:pPr algn="ctr"/>
-            <a:r>
-              <a:rPr sz="1800" b="1">
+              <a:rPr sz="2000" b="1">
                 <a:solidFill>
                   <a:srgbClr val="FF0000"/>
                 </a:solidFill>
@@ -14309,8 +14227,8 @@
         </p:nvSpPr>
         <p:spPr>
           <a:xfrm>
-            <a:off x="822600" y="3131999"/>
-            <a:ext cx="2340000" cy="540000"/>
+            <a:off x="732600" y="3384000"/>
+            <a:ext cx="2412000" cy="576000"/>
           </a:xfrm>
           <a:prstGeom prst="rect">
             <a:avLst/>
@@ -14353,8 +14271,8 @@
         </p:nvSpPr>
         <p:spPr>
           <a:xfrm>
-            <a:off x="822600" y="3131999"/>
-            <a:ext cx="2340000" cy="540000"/>
+            <a:off x="732600" y="3384000"/>
+            <a:ext cx="2412000" cy="576000"/>
           </a:xfrm>
           <a:prstGeom prst="rect">
             <a:avLst/>
@@ -14372,7 +14290,7 @@
           <a:p>
             <a:pPr algn="ctr"/>
             <a:r>
-              <a:rPr sz="2200" b="1">
+              <a:rPr sz="2400" b="1">
                 <a:solidFill>
                   <a:srgbClr val="FFFFFF"/>
                 </a:solidFill>
@@ -14392,8 +14310,8 @@
         </p:nvSpPr>
         <p:spPr>
           <a:xfrm>
-            <a:off x="822600" y="3671999"/>
-            <a:ext cx="2340000" cy="1620000"/>
+            <a:off x="732600" y="3960000"/>
+            <a:ext cx="2412000" cy="1584000"/>
           </a:xfrm>
           <a:prstGeom prst="rect">
             <a:avLst/>
@@ -14438,8 +14356,8 @@
         </p:nvSpPr>
         <p:spPr>
           <a:xfrm>
-            <a:off x="822600" y="3743999"/>
-            <a:ext cx="2340000" cy="1476000"/>
+            <a:off x="732600" y="4032000"/>
+            <a:ext cx="2412000" cy="1440000"/>
           </a:xfrm>
           <a:prstGeom prst="rect">
             <a:avLst/>
@@ -14457,27 +14375,27 @@
           <a:p>
             <a:pPr algn="ctr"/>
             <a:r>
-              <a:rPr sz="1500" b="1">
+              <a:rPr sz="1800" b="1">
                 <a:solidFill>
                   <a:srgbClr val="1A1A1A"/>
                 </a:solidFill>
                 <a:latin typeface="メイリオ"/>
                 <a:ea typeface="メイリオ"/>
               </a:rPr>
-              <a:t>自分の質問を</a:t>
-            </a:r>
-          </a:p>
-          <a:p>
-            <a:pPr algn="ctr"/>
-            <a:r>
-              <a:rPr sz="1500" b="1">
+              <a:t>ワークシート</a:t>
+            </a:r>
+          </a:p>
+          <a:p>
+            <a:pPr algn="ctr"/>
+            <a:r>
+              <a:rPr sz="1800" b="1">
                 <a:solidFill>
                   <a:srgbClr val="1A1A1A"/>
                 </a:solidFill>
                 <a:latin typeface="メイリオ"/>
                 <a:ea typeface="メイリオ"/>
               </a:rPr>
-              <a:t>ワークシートに</a:t>
+              <a:t>に記入</a:t>
             </a:r>
           </a:p>
         </p:txBody>
@@ -14490,7 +14408,7 @@
         </p:nvSpPr>
         <p:spPr>
           <a:xfrm>
-            <a:off x="3198600" y="4031999"/>
+            <a:off x="3162600" y="4284000"/>
             <a:ext cx="324000" cy="360000"/>
           </a:xfrm>
           <a:prstGeom prst="rightArrow">
@@ -14533,8 +14451,8 @@
         </p:nvSpPr>
         <p:spPr>
           <a:xfrm>
-            <a:off x="3558600" y="3131999"/>
-            <a:ext cx="2340000" cy="540000"/>
+            <a:off x="3504600" y="3384000"/>
+            <a:ext cx="2412000" cy="576000"/>
           </a:xfrm>
           <a:prstGeom prst="rect">
             <a:avLst/>
@@ -14577,8 +14495,8 @@
         </p:nvSpPr>
         <p:spPr>
           <a:xfrm>
-            <a:off x="3558600" y="3131999"/>
-            <a:ext cx="2340000" cy="540000"/>
+            <a:off x="3504600" y="3384000"/>
+            <a:ext cx="2412000" cy="576000"/>
           </a:xfrm>
           <a:prstGeom prst="rect">
             <a:avLst/>
@@ -14596,7 +14514,7 @@
           <a:p>
             <a:pPr algn="ctr"/>
             <a:r>
-              <a:rPr sz="2200" b="1">
+              <a:rPr sz="2400" b="1">
                 <a:solidFill>
                   <a:srgbClr val="FFFFFF"/>
                 </a:solidFill>
@@ -14616,8 +14534,8 @@
         </p:nvSpPr>
         <p:spPr>
           <a:xfrm>
-            <a:off x="3558600" y="3671999"/>
-            <a:ext cx="2340000" cy="1620000"/>
+            <a:off x="3504600" y="3960000"/>
+            <a:ext cx="2412000" cy="1584000"/>
           </a:xfrm>
           <a:prstGeom prst="rect">
             <a:avLst/>
@@ -14662,8 +14580,8 @@
         </p:nvSpPr>
         <p:spPr>
           <a:xfrm>
-            <a:off x="3558600" y="3743999"/>
-            <a:ext cx="2340000" cy="1476000"/>
+            <a:off x="3504600" y="4032000"/>
+            <a:ext cx="2412000" cy="1440000"/>
           </a:xfrm>
           <a:prstGeom prst="rect">
             <a:avLst/>
@@ -14681,7 +14599,7 @@
           <a:p>
             <a:pPr algn="ctr"/>
             <a:r>
-              <a:rPr sz="1500" b="1">
+              <a:rPr sz="1800" b="1">
                 <a:solidFill>
                   <a:srgbClr val="1A1A1A"/>
                 </a:solidFill>
@@ -14694,14 +14612,14 @@
           <a:p>
             <a:pPr algn="ctr"/>
             <a:r>
-              <a:rPr sz="1500" b="1">
+              <a:rPr sz="1800" b="1">
                 <a:solidFill>
                   <a:srgbClr val="1A1A1A"/>
                 </a:solidFill>
                 <a:latin typeface="メイリオ"/>
                 <a:ea typeface="メイリオ"/>
               </a:rPr>
-              <a:t>質問を交流</a:t>
+              <a:t>交流</a:t>
             </a:r>
           </a:p>
         </p:txBody>
@@ -14714,7 +14632,7 @@
         </p:nvSpPr>
         <p:spPr>
           <a:xfrm>
-            <a:off x="5934600" y="4031999"/>
+            <a:off x="5934600" y="4284000"/>
             <a:ext cx="324000" cy="360000"/>
           </a:xfrm>
           <a:prstGeom prst="rightArrow">
@@ -14757,8 +14675,8 @@
         </p:nvSpPr>
         <p:spPr>
           <a:xfrm>
-            <a:off x="6294600" y="3131999"/>
-            <a:ext cx="2340000" cy="540000"/>
+            <a:off x="6276600" y="3384000"/>
+            <a:ext cx="2412000" cy="576000"/>
           </a:xfrm>
           <a:prstGeom prst="rect">
             <a:avLst/>
@@ -14801,8 +14719,8 @@
         </p:nvSpPr>
         <p:spPr>
           <a:xfrm>
-            <a:off x="6294600" y="3131999"/>
-            <a:ext cx="2340000" cy="540000"/>
+            <a:off x="6276600" y="3384000"/>
+            <a:ext cx="2412000" cy="576000"/>
           </a:xfrm>
           <a:prstGeom prst="rect">
             <a:avLst/>
@@ -14820,7 +14738,7 @@
           <a:p>
             <a:pPr algn="ctr"/>
             <a:r>
-              <a:rPr sz="2200" b="1">
+              <a:rPr sz="2400" b="1">
                 <a:solidFill>
                   <a:srgbClr val="FFFFFF"/>
                 </a:solidFill>
@@ -14840,8 +14758,8 @@
         </p:nvSpPr>
         <p:spPr>
           <a:xfrm>
-            <a:off x="6294600" y="3671999"/>
-            <a:ext cx="2340000" cy="1620000"/>
+            <a:off x="6276600" y="3960000"/>
+            <a:ext cx="2412000" cy="1584000"/>
           </a:xfrm>
           <a:prstGeom prst="rect">
             <a:avLst/>
@@ -14886,8 +14804,8 @@
         </p:nvSpPr>
         <p:spPr>
           <a:xfrm>
-            <a:off x="6294600" y="3743999"/>
-            <a:ext cx="2340000" cy="1476000"/>
+            <a:off x="6276600" y="4032000"/>
+            <a:ext cx="2412000" cy="1440000"/>
           </a:xfrm>
           <a:prstGeom prst="rect">
             <a:avLst/>
@@ -14905,20 +14823,20 @@
           <a:p>
             <a:pPr algn="ctr"/>
             <a:r>
-              <a:rPr sz="1500" b="1">
+              <a:rPr sz="1800" b="1">
                 <a:solidFill>
                   <a:srgbClr val="1A1A1A"/>
                 </a:solidFill>
                 <a:latin typeface="メイリオ"/>
                 <a:ea typeface="メイリオ"/>
               </a:rPr>
-              <a:t>動画を見て</a:t>
-            </a:r>
-          </a:p>
-          <a:p>
-            <a:pPr algn="ctr"/>
-            <a:r>
-              <a:rPr sz="1500" b="1">
+              <a:t>動画から</a:t>
+            </a:r>
+          </a:p>
+          <a:p>
+            <a:pPr algn="ctr"/>
+            <a:r>
+              <a:rPr sz="1800" b="1">
                 <a:solidFill>
                   <a:srgbClr val="1A1A1A"/>
                 </a:solidFill>
@@ -14938,7 +14856,7 @@
         </p:nvSpPr>
         <p:spPr>
           <a:xfrm>
-            <a:off x="8670600" y="4031999"/>
+            <a:off x="8706600" y="4284000"/>
             <a:ext cx="324000" cy="360000"/>
           </a:xfrm>
           <a:prstGeom prst="rightArrow">
@@ -14981,8 +14899,8 @@
         </p:nvSpPr>
         <p:spPr>
           <a:xfrm>
-            <a:off x="9030600" y="3131999"/>
-            <a:ext cx="2340000" cy="540000"/>
+            <a:off x="9048600" y="3384000"/>
+            <a:ext cx="2412000" cy="576000"/>
           </a:xfrm>
           <a:prstGeom prst="rect">
             <a:avLst/>
@@ -15025,8 +14943,8 @@
         </p:nvSpPr>
         <p:spPr>
           <a:xfrm>
-            <a:off x="9030600" y="3131999"/>
-            <a:ext cx="2340000" cy="540000"/>
+            <a:off x="9048600" y="3384000"/>
+            <a:ext cx="2412000" cy="576000"/>
           </a:xfrm>
           <a:prstGeom prst="rect">
             <a:avLst/>
@@ -15044,7 +14962,7 @@
           <a:p>
             <a:pPr algn="ctr"/>
             <a:r>
-              <a:rPr sz="2200" b="1">
+              <a:rPr sz="2400" b="1">
                 <a:solidFill>
                   <a:srgbClr val="FFFFFF"/>
                 </a:solidFill>
@@ -15064,8 +14982,8 @@
         </p:nvSpPr>
         <p:spPr>
           <a:xfrm>
-            <a:off x="9030600" y="3671999"/>
-            <a:ext cx="2340000" cy="1620000"/>
+            <a:off x="9048600" y="3960000"/>
+            <a:ext cx="2412000" cy="1584000"/>
           </a:xfrm>
           <a:prstGeom prst="rect">
             <a:avLst/>
@@ -15110,8 +15028,8 @@
         </p:nvSpPr>
         <p:spPr>
           <a:xfrm>
-            <a:off x="9030600" y="3743999"/>
-            <a:ext cx="2340000" cy="1476000"/>
+            <a:off x="9048600" y="4032000"/>
+            <a:ext cx="2412000" cy="1440000"/>
           </a:xfrm>
           <a:prstGeom prst="rect">
             <a:avLst/>
@@ -15129,7 +15047,7 @@
           <a:p>
             <a:pPr algn="ctr"/>
             <a:r>
-              <a:rPr sz="1500" b="1">
+              <a:rPr sz="1800" b="1">
                 <a:solidFill>
                   <a:srgbClr val="1A1A1A"/>
                 </a:solidFill>
@@ -15142,7 +15060,7 @@
           <a:p>
             <a:pPr algn="ctr"/>
             <a:r>
-              <a:rPr sz="1500" b="1">
+              <a:rPr sz="1800" b="1">
                 <a:solidFill>
                   <a:srgbClr val="1A1A1A"/>
                 </a:solidFill>
@@ -15162,7 +15080,7 @@
         </p:nvSpPr>
         <p:spPr>
           <a:xfrm>
-            <a:off x="540000" y="5580000"/>
+            <a:off x="540000" y="5760000"/>
             <a:ext cx="11113200" cy="468000"/>
           </a:xfrm>
           <a:prstGeom prst="rect">
@@ -15181,44 +15099,44 @@
           <a:p>
             <a:pPr algn="ctr"/>
             <a:r>
+              <a:rPr sz="2200" b="1">
+                <a:solidFill>
+                  <a:srgbClr val="FF0000"/>
+                </a:solidFill>
+                <a:latin typeface="メイリオ"/>
+                <a:ea typeface="メイリオ"/>
+              </a:rPr>
+              <a:t>個別 ⇄ 協働 </a:t>
+            </a:r>
+            <a:r>
               <a:rPr sz="2000" b="1">
                 <a:solidFill>
+                  <a:srgbClr val="1A1A1A"/>
+                </a:solidFill>
+                <a:latin typeface="メイリオ"/>
+                <a:ea typeface="メイリオ"/>
+              </a:rPr>
+              <a:t>の往還が、</a:t>
+            </a:r>
+            <a:r>
+              <a:rPr sz="2200" b="1">
+                <a:solidFill>
                   <a:srgbClr val="FF0000"/>
                 </a:solidFill>
                 <a:latin typeface="メイリオ"/>
                 <a:ea typeface="メイリオ"/>
               </a:rPr>
-              <a:t>個別 ⇄ 協働</a:t>
-            </a:r>
-            <a:r>
-              <a:rPr sz="1800" b="1">
+              <a:t>〝学びをつなげる〟</a:t>
+            </a:r>
+            <a:r>
+              <a:rPr sz="2000" b="1">
                 <a:solidFill>
                   <a:srgbClr val="1A1A1A"/>
                 </a:solidFill>
                 <a:latin typeface="メイリオ"/>
                 <a:ea typeface="メイリオ"/>
               </a:rPr>
-              <a:t> の往還が、児童の </a:t>
-            </a:r>
-            <a:r>
-              <a:rPr sz="2000" b="1">
-                <a:solidFill>
-                  <a:srgbClr val="FF0000"/>
-                </a:solidFill>
-                <a:latin typeface="メイリオ"/>
-                <a:ea typeface="メイリオ"/>
-              </a:rPr>
-              <a:t>〝学びをつなげる〟</a:t>
-            </a:r>
-            <a:r>
-              <a:rPr sz="1800" b="1">
-                <a:solidFill>
-                  <a:srgbClr val="1A1A1A"/>
-                </a:solidFill>
-                <a:latin typeface="メイリオ"/>
-                <a:ea typeface="メイリオ"/>
-              </a:rPr>
-              <a:t> 土台になる</a:t>
+              <a:t> 土台に。</a:t>
             </a:r>
           </a:p>
         </p:txBody>
@@ -15250,7 +15168,7 @@
           <a:p>
             <a:pPr algn="l"/>
             <a:r>
-              <a:rPr sz="900" b="0">
+              <a:rPr sz="1000" b="0">
                 <a:solidFill>
                   <a:srgbClr val="666666"/>
                 </a:solidFill>
@@ -15289,7 +15207,7 @@
           <a:p>
             <a:pPr algn="r"/>
             <a:r>
-              <a:rPr sz="900" b="0">
+              <a:rPr sz="1000" b="0">
                 <a:solidFill>
                   <a:srgbClr val="666666"/>
                 </a:solidFill>
